--- a/S1-CL1-Cloud-Design-Build/delivery/topic_07/Topic_07_Slides.pptx
+++ b/S1-CL1-Cloud-Design-Build/delivery/topic_07/Topic_07_Slides.pptx
@@ -6519,123 +6519,33 @@
           </a:p>
         </p:txBody>
       </p:sp>
-      <p:sp>
-        <p:nvSpPr>
-          <p:cNvPr id="5" name="Rounded Rectangle 4"/>
-          <p:cNvSpPr/>
-          <p:nvPr/>
-        </p:nvSpPr>
-        <p:spPr>
-          <a:xfrm>
-            <a:off x="6400800" y="1783080"/>
-            <a:ext cx="5120640" cy="4023360"/>
-          </a:xfrm>
-          <a:prstGeom prst="roundRect">
-            <a:avLst/>
-          </a:prstGeom>
-          <a:solidFill>
-            <a:srgbClr val="FBF6E6"/>
-          </a:solidFill>
-          <a:ln w="12700">
-            <a:solidFill>
-              <a:srgbClr val="205F61"/>
-            </a:solidFill>
-            <a:prstDash val="dash"/>
-          </a:ln>
-          <a:effectLst/>
-        </p:spPr>
-        <p:style>
-          <a:lnRef idx="1">
-            <a:schemeClr val="accent1"/>
-          </a:lnRef>
-          <a:fillRef idx="3">
-            <a:schemeClr val="accent1"/>
-          </a:fillRef>
-          <a:effectRef idx="2">
-            <a:schemeClr val="accent1"/>
-          </a:effectRef>
-          <a:fontRef idx="minor">
-            <a:schemeClr val="lt1"/>
-          </a:fontRef>
-        </p:style>
-        <p:txBody>
-          <a:bodyPr rtlCol="0" anchor="ctr"/>
-          <a:lstStyle/>
-          <a:p>
-            <a:pPr algn="ctr"/>
-          </a:p>
-        </p:txBody>
-      </p:sp>
-      <p:sp>
-        <p:nvSpPr>
-          <p:cNvPr id="6" name="TextBox 5"/>
-          <p:cNvSpPr txBox="1"/>
-          <p:nvPr/>
-        </p:nvSpPr>
-        <p:spPr>
-          <a:xfrm>
-            <a:off x="6400800" y="1783080"/>
-            <a:ext cx="5120640" cy="4023360"/>
-          </a:xfrm>
-          <a:prstGeom prst="rect">
-            <a:avLst/>
-          </a:prstGeom>
-          <a:noFill/>
-        </p:spPr>
-        <p:txBody>
-          <a:bodyPr wrap="square" anchor="ctr" lIns="0" rIns="0" tIns="0" bIns="0">
-            <a:spAutoFit/>
-          </a:bodyPr>
-          <a:lstStyle/>
-          <a:p>
-            <a:pPr algn="ctr"/>
-            <a:r>
-              <a:rPr sz="3000" b="0" i="0">
-                <a:solidFill>
-                  <a:srgbClr val="205F61"/>
-                </a:solidFill>
-                <a:latin typeface="Roboto"/>
-              </a:rPr>
-              <a:t>🖼</a:t>
-            </a:r>
-          </a:p>
-          <a:p>
-            <a:pPr algn="ctr">
-              <a:spcBef>
-                <a:spcPts val="400"/>
-              </a:spcBef>
-            </a:pPr>
-            <a:r>
-              <a:rPr sz="1200" b="1" i="0">
-                <a:solidFill>
-                  <a:srgbClr val="205F61"/>
-                </a:solidFill>
-                <a:latin typeface="Roboto"/>
-              </a:rPr>
-              <a:t>IMAGE</a:t>
-            </a:r>
-          </a:p>
-          <a:p>
-            <a:pPr algn="ctr">
-              <a:spcBef>
-                <a:spcPts val="200"/>
-              </a:spcBef>
-            </a:pPr>
-            <a:r>
-              <a:rPr sz="1200" b="0" i="1">
-                <a:solidFill>
-                  <a:srgbClr val="484848"/>
-                </a:solidFill>
-                <a:latin typeface="Roboto Light"/>
-              </a:rPr>
-              <a:t>AWS — Route 53 DNS resolution flow (ACF M05 S50)</a:t>
-            </a:r>
-          </a:p>
-        </p:txBody>
-      </p:sp>
-      <p:sp>
-        <p:nvSpPr>
-          <p:cNvPr id="7" name="Rectangle 6"/>
+      <p:pic>
+        <p:nvPicPr>
+          <p:cNvPr id="5" name="Picture 4" descr="07-route53-dns-flow.png"/>
+          <p:cNvPicPr>
+            <a:picLocks noChangeAspect="1"/>
+          </p:cNvPicPr>
+          <p:nvPr/>
+        </p:nvPicPr>
+        <p:blipFill>
+          <a:blip r:embed="rId2"/>
+          <a:stretch>
+            <a:fillRect/>
+          </a:stretch>
+        </p:blipFill>
+        <p:spPr>
+          <a:xfrm>
+            <a:off x="6400800" y="3138729"/>
+            <a:ext cx="5120640" cy="1312061"/>
+          </a:xfrm>
+          <a:prstGeom prst="rect">
+            <a:avLst/>
+          </a:prstGeom>
+        </p:spPr>
+      </p:pic>
+      <p:sp>
+        <p:nvSpPr>
+          <p:cNvPr id="6" name="Rectangle 5"/>
           <p:cNvSpPr/>
           <p:nvPr/>
         </p:nvSpPr>
@@ -6679,7 +6589,7 @@
       </p:sp>
       <p:sp>
         <p:nvSpPr>
-          <p:cNvPr id="8" name="TextBox 7"/>
+          <p:cNvPr id="7" name="TextBox 6"/>
           <p:cNvSpPr txBox="1"/>
           <p:nvPr/>
         </p:nvSpPr>
@@ -6722,7 +6632,7 @@
       </p:sp>
       <p:sp>
         <p:nvSpPr>
-          <p:cNvPr id="9" name="TextBox 8"/>
+          <p:cNvPr id="8" name="TextBox 7"/>
           <p:cNvSpPr txBox="1"/>
           <p:nvPr/>
         </p:nvSpPr>
@@ -11151,123 +11061,33 @@
           </a:p>
         </p:txBody>
       </p:sp>
-      <p:sp>
-        <p:nvSpPr>
-          <p:cNvPr id="5" name="Rounded Rectangle 4"/>
-          <p:cNvSpPr/>
-          <p:nvPr/>
-        </p:nvSpPr>
-        <p:spPr>
-          <a:xfrm>
-            <a:off x="6400800" y="1783080"/>
-            <a:ext cx="5120640" cy="4023360"/>
-          </a:xfrm>
-          <a:prstGeom prst="roundRect">
-            <a:avLst/>
-          </a:prstGeom>
-          <a:solidFill>
-            <a:srgbClr val="FBF6E6"/>
-          </a:solidFill>
-          <a:ln w="12700">
-            <a:solidFill>
-              <a:srgbClr val="92268F"/>
-            </a:solidFill>
-            <a:prstDash val="dash"/>
-          </a:ln>
-          <a:effectLst/>
-        </p:spPr>
-        <p:style>
-          <a:lnRef idx="1">
-            <a:schemeClr val="accent1"/>
-          </a:lnRef>
-          <a:fillRef idx="3">
-            <a:schemeClr val="accent1"/>
-          </a:fillRef>
-          <a:effectRef idx="2">
-            <a:schemeClr val="accent1"/>
-          </a:effectRef>
-          <a:fontRef idx="minor">
-            <a:schemeClr val="lt1"/>
-          </a:fontRef>
-        </p:style>
-        <p:txBody>
-          <a:bodyPr rtlCol="0" anchor="ctr"/>
-          <a:lstStyle/>
-          <a:p>
-            <a:pPr algn="ctr"/>
-          </a:p>
-        </p:txBody>
-      </p:sp>
-      <p:sp>
-        <p:nvSpPr>
-          <p:cNvPr id="6" name="TextBox 5"/>
-          <p:cNvSpPr txBox="1"/>
-          <p:nvPr/>
-        </p:nvSpPr>
-        <p:spPr>
-          <a:xfrm>
-            <a:off x="6400800" y="1783080"/>
-            <a:ext cx="5120640" cy="4023360"/>
-          </a:xfrm>
-          <a:prstGeom prst="rect">
-            <a:avLst/>
-          </a:prstGeom>
-          <a:noFill/>
-        </p:spPr>
-        <p:txBody>
-          <a:bodyPr wrap="square" anchor="ctr" lIns="0" rIns="0" tIns="0" bIns="0">
-            <a:spAutoFit/>
-          </a:bodyPr>
-          <a:lstStyle/>
-          <a:p>
-            <a:pPr algn="ctr"/>
-            <a:r>
-              <a:rPr sz="3000" b="0" i="0">
-                <a:solidFill>
-                  <a:srgbClr val="92268F"/>
-                </a:solidFill>
-                <a:latin typeface="Roboto"/>
-              </a:rPr>
-              <a:t>🖼</a:t>
-            </a:r>
-          </a:p>
-          <a:p>
-            <a:pPr algn="ctr">
-              <a:spcBef>
-                <a:spcPts val="400"/>
-              </a:spcBef>
-            </a:pPr>
-            <a:r>
-              <a:rPr sz="1200" b="1" i="0">
-                <a:solidFill>
-                  <a:srgbClr val="92268F"/>
-                </a:solidFill>
-                <a:latin typeface="Roboto"/>
-              </a:rPr>
-              <a:t>IMAGE</a:t>
-            </a:r>
-          </a:p>
-          <a:p>
-            <a:pPr algn="ctr">
-              <a:spcBef>
-                <a:spcPts val="200"/>
-              </a:spcBef>
-            </a:pPr>
-            <a:r>
-              <a:rPr sz="1200" b="0" i="1">
-                <a:solidFill>
-                  <a:srgbClr val="484848"/>
-                </a:solidFill>
-                <a:latin typeface="Roboto Light"/>
-              </a:rPr>
-              <a:t>AWS — IP address / CIDR (ACF M05 S6 / S8)</a:t>
-            </a:r>
-          </a:p>
-        </p:txBody>
-      </p:sp>
-      <p:sp>
-        <p:nvSpPr>
-          <p:cNvPr id="7" name="Rectangle 6"/>
+      <p:pic>
+        <p:nvPicPr>
+          <p:cNvPr id="5" name="Picture 4" descr="07-ip-cidr.png"/>
+          <p:cNvPicPr>
+            <a:picLocks noChangeAspect="1"/>
+          </p:cNvPicPr>
+          <p:nvPr/>
+        </p:nvPicPr>
+        <p:blipFill>
+          <a:blip r:embed="rId2"/>
+          <a:stretch>
+            <a:fillRect/>
+          </a:stretch>
+        </p:blipFill>
+        <p:spPr>
+          <a:xfrm>
+            <a:off x="6400800" y="2862619"/>
+            <a:ext cx="5120640" cy="1864282"/>
+          </a:xfrm>
+          <a:prstGeom prst="rect">
+            <a:avLst/>
+          </a:prstGeom>
+        </p:spPr>
+      </p:pic>
+      <p:sp>
+        <p:nvSpPr>
+          <p:cNvPr id="6" name="Rectangle 5"/>
           <p:cNvSpPr/>
           <p:nvPr/>
         </p:nvSpPr>
@@ -11311,7 +11131,7 @@
       </p:sp>
       <p:sp>
         <p:nvSpPr>
-          <p:cNvPr id="8" name="TextBox 7"/>
+          <p:cNvPr id="7" name="TextBox 6"/>
           <p:cNvSpPr txBox="1"/>
           <p:nvPr/>
         </p:nvSpPr>
@@ -11354,7 +11174,7 @@
       </p:sp>
       <p:sp>
         <p:nvSpPr>
-          <p:cNvPr id="9" name="TextBox 8"/>
+          <p:cNvPr id="8" name="TextBox 7"/>
           <p:cNvSpPr txBox="1"/>
           <p:nvPr/>
         </p:nvSpPr>
@@ -12012,123 +11832,33 @@
           </a:p>
         </p:txBody>
       </p:sp>
-      <p:sp>
-        <p:nvSpPr>
-          <p:cNvPr id="5" name="Rounded Rectangle 4"/>
-          <p:cNvSpPr/>
-          <p:nvPr/>
-        </p:nvSpPr>
-        <p:spPr>
-          <a:xfrm>
-            <a:off x="6400800" y="1783080"/>
-            <a:ext cx="5120640" cy="4023360"/>
-          </a:xfrm>
-          <a:prstGeom prst="roundRect">
-            <a:avLst/>
-          </a:prstGeom>
-          <a:solidFill>
-            <a:srgbClr val="FBF6E6"/>
-          </a:solidFill>
-          <a:ln w="12700">
-            <a:solidFill>
-              <a:srgbClr val="92268F"/>
-            </a:solidFill>
-            <a:prstDash val="dash"/>
-          </a:ln>
-          <a:effectLst/>
-        </p:spPr>
-        <p:style>
-          <a:lnRef idx="1">
-            <a:schemeClr val="accent1"/>
-          </a:lnRef>
-          <a:fillRef idx="3">
-            <a:schemeClr val="accent1"/>
-          </a:fillRef>
-          <a:effectRef idx="2">
-            <a:schemeClr val="accent1"/>
-          </a:effectRef>
-          <a:fontRef idx="minor">
-            <a:schemeClr val="lt1"/>
-          </a:fontRef>
-        </p:style>
-        <p:txBody>
-          <a:bodyPr rtlCol="0" anchor="ctr"/>
-          <a:lstStyle/>
-          <a:p>
-            <a:pPr algn="ctr"/>
-          </a:p>
-        </p:txBody>
-      </p:sp>
-      <p:sp>
-        <p:nvSpPr>
-          <p:cNvPr id="6" name="TextBox 5"/>
-          <p:cNvSpPr txBox="1"/>
-          <p:nvPr/>
-        </p:nvSpPr>
-        <p:spPr>
-          <a:xfrm>
-            <a:off x="6400800" y="1783080"/>
-            <a:ext cx="5120640" cy="4023360"/>
-          </a:xfrm>
-          <a:prstGeom prst="rect">
-            <a:avLst/>
-          </a:prstGeom>
-          <a:noFill/>
-        </p:spPr>
-        <p:txBody>
-          <a:bodyPr wrap="square" anchor="ctr" lIns="0" rIns="0" tIns="0" bIns="0">
-            <a:spAutoFit/>
-          </a:bodyPr>
-          <a:lstStyle/>
-          <a:p>
-            <a:pPr algn="ctr"/>
-            <a:r>
-              <a:rPr sz="3000" b="0" i="0">
-                <a:solidFill>
-                  <a:srgbClr val="92268F"/>
-                </a:solidFill>
-                <a:latin typeface="Roboto"/>
-              </a:rPr>
-              <a:t>🖼</a:t>
-            </a:r>
-          </a:p>
-          <a:p>
-            <a:pPr algn="ctr">
-              <a:spcBef>
-                <a:spcPts val="400"/>
-              </a:spcBef>
-            </a:pPr>
-            <a:r>
-              <a:rPr sz="1200" b="1" i="0">
-                <a:solidFill>
-                  <a:srgbClr val="92268F"/>
-                </a:solidFill>
-                <a:latin typeface="Roboto"/>
-              </a:rPr>
-              <a:t>IMAGE</a:t>
-            </a:r>
-          </a:p>
-          <a:p>
-            <a:pPr algn="ctr">
-              <a:spcBef>
-                <a:spcPts val="200"/>
-              </a:spcBef>
-            </a:pPr>
-            <a:r>
-              <a:rPr sz="1200" b="0" i="1">
-                <a:solidFill>
-                  <a:srgbClr val="484848"/>
-                </a:solidFill>
-                <a:latin typeface="Roboto Light"/>
-              </a:rPr>
-              <a:t>AWS — VPC anatomy: subnets · IGW · NAT · route tables (ACA M07 S16)</a:t>
-            </a:r>
-          </a:p>
-        </p:txBody>
-      </p:sp>
-      <p:sp>
-        <p:nvSpPr>
-          <p:cNvPr id="7" name="Rectangle 6"/>
+      <p:pic>
+        <p:nvPicPr>
+          <p:cNvPr id="5" name="Picture 4" descr="vpc-anatomy.png"/>
+          <p:cNvPicPr>
+            <a:picLocks noChangeAspect="1"/>
+          </p:cNvPicPr>
+          <p:nvPr/>
+        </p:nvPicPr>
+        <p:blipFill>
+          <a:blip r:embed="rId2"/>
+          <a:stretch>
+            <a:fillRect/>
+          </a:stretch>
+        </p:blipFill>
+        <p:spPr>
+          <a:xfrm>
+            <a:off x="6400800" y="2057400"/>
+            <a:ext cx="5120640" cy="3474720"/>
+          </a:xfrm>
+          <a:prstGeom prst="rect">
+            <a:avLst/>
+          </a:prstGeom>
+        </p:spPr>
+      </p:pic>
+      <p:sp>
+        <p:nvSpPr>
+          <p:cNvPr id="6" name="Rectangle 5"/>
           <p:cNvSpPr/>
           <p:nvPr/>
         </p:nvSpPr>
@@ -12172,7 +11902,7 @@
       </p:sp>
       <p:sp>
         <p:nvSpPr>
-          <p:cNvPr id="8" name="TextBox 7"/>
+          <p:cNvPr id="7" name="TextBox 6"/>
           <p:cNvSpPr txBox="1"/>
           <p:nvPr/>
         </p:nvSpPr>
@@ -12215,7 +11945,7 @@
       </p:sp>
       <p:sp>
         <p:nvSpPr>
-          <p:cNvPr id="9" name="TextBox 8"/>
+          <p:cNvPr id="8" name="TextBox 7"/>
           <p:cNvSpPr txBox="1"/>
           <p:nvPr/>
         </p:nvSpPr>

--- a/S1-CL1-Cloud-Design-Build/delivery/topic_07/Topic_07_Slides.pptx
+++ b/S1-CL1-Cloud-Design-Build/delivery/topic_07/Topic_07_Slides.pptx
@@ -3701,7 +3701,7 @@
           <a:noFill/>
         </p:spPr>
         <p:txBody>
-          <a:bodyPr wrap="square" anchor="t" lIns="0" rIns="0" tIns="0" bIns="0">
+          <a:bodyPr wrap="square" anchor="ctr" lIns="0" rIns="0" tIns="0" bIns="0">
             <a:spAutoFit/>
           </a:bodyPr>
           <a:lstStyle/>
@@ -3718,7 +3718,7 @@
               </a:spcAft>
             </a:pPr>
             <a:r>
-              <a:rPr sz="1800" b="1" i="0">
+              <a:rPr sz="2400" b="1" i="0">
                 <a:solidFill>
                   <a:srgbClr val="EDAB0C"/>
                 </a:solidFill>
@@ -3727,7 +3727,7 @@
               <a:t>■  </a:t>
             </a:r>
             <a:r>
-              <a:rPr sz="1800" b="0" i="0">
+              <a:rPr sz="2400" b="0" i="0">
                 <a:solidFill>
                   <a:srgbClr val="2A2929"/>
                 </a:solidFill>
@@ -3749,7 +3749,7 @@
               </a:spcAft>
             </a:pPr>
             <a:r>
-              <a:rPr sz="1800" b="1" i="0">
+              <a:rPr sz="2400" b="1" i="0">
                 <a:solidFill>
                   <a:srgbClr val="27B5CE"/>
                 </a:solidFill>
@@ -3758,7 +3758,7 @@
               <a:t>■  </a:t>
             </a:r>
             <a:r>
-              <a:rPr sz="1800" b="1" i="0">
+              <a:rPr sz="2400" b="1" i="0">
                 <a:solidFill>
                   <a:srgbClr val="27B5CE"/>
                 </a:solidFill>
@@ -3780,7 +3780,7 @@
               </a:spcAft>
             </a:pPr>
             <a:r>
-              <a:rPr sz="1800" b="1" i="0">
+              <a:rPr sz="2400" b="1" i="0">
                 <a:solidFill>
                   <a:srgbClr val="EDAB0C"/>
                 </a:solidFill>
@@ -3789,7 +3789,7 @@
               <a:t>■  </a:t>
             </a:r>
             <a:r>
-              <a:rPr sz="1800" b="0" i="0">
+              <a:rPr sz="2400" b="0" i="0">
                 <a:solidFill>
                   <a:srgbClr val="2A2929"/>
                 </a:solidFill>
@@ -3811,7 +3811,7 @@
               </a:spcAft>
             </a:pPr>
             <a:r>
-              <a:rPr sz="1800" b="1" i="0">
+              <a:rPr sz="2400" b="1" i="0">
                 <a:solidFill>
                   <a:srgbClr val="EDAB0C"/>
                 </a:solidFill>
@@ -3820,7 +3820,7 @@
               <a:t>■  </a:t>
             </a:r>
             <a:r>
-              <a:rPr sz="1800" b="0" i="0">
+              <a:rPr sz="2400" b="0" i="0">
                 <a:solidFill>
                   <a:srgbClr val="2A2929"/>
                 </a:solidFill>
@@ -4090,7 +4090,7 @@
           <a:noFill/>
         </p:spPr>
         <p:txBody>
-          <a:bodyPr wrap="square" anchor="t" lIns="0" rIns="0" tIns="0" bIns="0">
+          <a:bodyPr wrap="square" anchor="ctr" lIns="0" rIns="0" tIns="0" bIns="0">
             <a:spAutoFit/>
           </a:bodyPr>
           <a:lstStyle/>
@@ -4107,7 +4107,7 @@
               </a:spcAft>
             </a:pPr>
             <a:r>
-              <a:rPr sz="1800" b="1" i="0">
+              <a:rPr sz="2400" b="1" i="0">
                 <a:solidFill>
                   <a:srgbClr val="EDAB0C"/>
                 </a:solidFill>
@@ -4116,7 +4116,7 @@
               <a:t>■  </a:t>
             </a:r>
             <a:r>
-              <a:rPr sz="1800" b="0" i="0">
+              <a:rPr sz="2400" b="0" i="0">
                 <a:solidFill>
                   <a:srgbClr val="2A2929"/>
                 </a:solidFill>
@@ -4138,7 +4138,7 @@
               </a:spcAft>
             </a:pPr>
             <a:r>
-              <a:rPr sz="1800" b="1" i="0">
+              <a:rPr sz="2400" b="1" i="0">
                 <a:solidFill>
                   <a:srgbClr val="EDAB0C"/>
                 </a:solidFill>
@@ -4147,7 +4147,7 @@
               <a:t>■  </a:t>
             </a:r>
             <a:r>
-              <a:rPr sz="1800" b="0" i="0">
+              <a:rPr sz="2400" b="0" i="0">
                 <a:solidFill>
                   <a:srgbClr val="2A2929"/>
                 </a:solidFill>
@@ -4169,7 +4169,7 @@
               </a:spcAft>
             </a:pPr>
             <a:r>
-              <a:rPr sz="1800" b="1" i="0">
+              <a:rPr sz="2400" b="1" i="0">
                 <a:solidFill>
                   <a:srgbClr val="EDAB0C"/>
                 </a:solidFill>
@@ -4178,7 +4178,7 @@
               <a:t>■  </a:t>
             </a:r>
             <a:r>
-              <a:rPr sz="1800" b="0" i="0">
+              <a:rPr sz="2400" b="0" i="0">
                 <a:solidFill>
                   <a:srgbClr val="2A2929"/>
                 </a:solidFill>
@@ -4200,7 +4200,7 @@
               </a:spcAft>
             </a:pPr>
             <a:r>
-              <a:rPr sz="1800" b="1" i="0">
+              <a:rPr sz="2400" b="1" i="0">
                 <a:solidFill>
                   <a:srgbClr val="27B5CE"/>
                 </a:solidFill>
@@ -4209,7 +4209,7 @@
               <a:t>■  </a:t>
             </a:r>
             <a:r>
-              <a:rPr sz="1800" b="1" i="0">
+              <a:rPr sz="2400" b="1" i="0">
                 <a:solidFill>
                   <a:srgbClr val="27B5CE"/>
                 </a:solidFill>
@@ -6802,7 +6802,7 @@
           <a:noFill/>
         </p:spPr>
         <p:txBody>
-          <a:bodyPr wrap="square" anchor="t" lIns="0" rIns="0" tIns="0" bIns="0">
+          <a:bodyPr wrap="square" anchor="ctr" lIns="0" rIns="0" tIns="0" bIns="0">
             <a:spAutoFit/>
           </a:bodyPr>
           <a:lstStyle/>
@@ -6819,7 +6819,7 @@
               </a:spcAft>
             </a:pPr>
             <a:r>
-              <a:rPr sz="1800" b="1" i="0">
+              <a:rPr sz="2400" b="1" i="0">
                 <a:solidFill>
                   <a:srgbClr val="EDAB0C"/>
                 </a:solidFill>
@@ -6828,7 +6828,7 @@
               <a:t>■  </a:t>
             </a:r>
             <a:r>
-              <a:rPr sz="1800" b="0" i="0">
+              <a:rPr sz="2400" b="0" i="0">
                 <a:solidFill>
                   <a:srgbClr val="2A2929"/>
                 </a:solidFill>
@@ -6850,7 +6850,7 @@
               </a:spcAft>
             </a:pPr>
             <a:r>
-              <a:rPr sz="1800" b="1" i="0">
+              <a:rPr sz="2400" b="1" i="0">
                 <a:solidFill>
                   <a:srgbClr val="EDAB0C"/>
                 </a:solidFill>
@@ -6859,7 +6859,7 @@
               <a:t>■  </a:t>
             </a:r>
             <a:r>
-              <a:rPr sz="1800" b="0" i="0">
+              <a:rPr sz="2400" b="0" i="0">
                 <a:solidFill>
                   <a:srgbClr val="2A2929"/>
                 </a:solidFill>
@@ -6881,7 +6881,7 @@
               </a:spcAft>
             </a:pPr>
             <a:r>
-              <a:rPr sz="1800" b="1" i="0">
+              <a:rPr sz="2400" b="1" i="0">
                 <a:solidFill>
                   <a:srgbClr val="205F61"/>
                 </a:solidFill>
@@ -6890,7 +6890,7 @@
               <a:t>■  </a:t>
             </a:r>
             <a:r>
-              <a:rPr sz="1800" b="1" i="0">
+              <a:rPr sz="2400" b="1" i="0">
                 <a:solidFill>
                   <a:srgbClr val="205F61"/>
                 </a:solidFill>
@@ -7160,7 +7160,7 @@
           <a:noFill/>
         </p:spPr>
         <p:txBody>
-          <a:bodyPr wrap="square" anchor="t" lIns="0" rIns="0" tIns="0" bIns="0">
+          <a:bodyPr wrap="square" anchor="ctr" lIns="0" rIns="0" tIns="0" bIns="0">
             <a:spAutoFit/>
           </a:bodyPr>
           <a:lstStyle/>
@@ -7177,7 +7177,7 @@
               </a:spcAft>
             </a:pPr>
             <a:r>
-              <a:rPr sz="1800" b="1" i="0">
+              <a:rPr sz="2400" b="1" i="0">
                 <a:solidFill>
                   <a:srgbClr val="EDAB0C"/>
                 </a:solidFill>
@@ -7186,7 +7186,7 @@
               <a:t>■  </a:t>
             </a:r>
             <a:r>
-              <a:rPr sz="1800" b="0" i="0">
+              <a:rPr sz="2400" b="0" i="0">
                 <a:solidFill>
                   <a:srgbClr val="2A2929"/>
                 </a:solidFill>
@@ -7208,7 +7208,7 @@
               </a:spcAft>
             </a:pPr>
             <a:r>
-              <a:rPr sz="1800" b="1" i="0">
+              <a:rPr sz="2400" b="1" i="0">
                 <a:solidFill>
                   <a:srgbClr val="EDAB0C"/>
                 </a:solidFill>
@@ -7217,7 +7217,7 @@
               <a:t>■  </a:t>
             </a:r>
             <a:r>
-              <a:rPr sz="1800" b="0" i="0">
+              <a:rPr sz="2400" b="0" i="0">
                 <a:solidFill>
                   <a:srgbClr val="2A2929"/>
                 </a:solidFill>
@@ -7239,7 +7239,7 @@
               </a:spcAft>
             </a:pPr>
             <a:r>
-              <a:rPr sz="1800" b="1" i="0">
+              <a:rPr sz="2400" b="1" i="0">
                 <a:solidFill>
                   <a:srgbClr val="205F61"/>
                 </a:solidFill>
@@ -7248,7 +7248,7 @@
               <a:t>■  </a:t>
             </a:r>
             <a:r>
-              <a:rPr sz="1800" b="1" i="0">
+              <a:rPr sz="2400" b="1" i="0">
                 <a:solidFill>
                   <a:srgbClr val="205F61"/>
                 </a:solidFill>
@@ -7270,7 +7270,7 @@
               </a:spcAft>
             </a:pPr>
             <a:r>
-              <a:rPr sz="1800" b="1" i="0">
+              <a:rPr sz="2400" b="1" i="0">
                 <a:solidFill>
                   <a:srgbClr val="EDAB0C"/>
                 </a:solidFill>
@@ -7279,7 +7279,7 @@
               <a:t>■  </a:t>
             </a:r>
             <a:r>
-              <a:rPr sz="1800" b="0" i="0">
+              <a:rPr sz="2400" b="0" i="0">
                 <a:solidFill>
                   <a:srgbClr val="2A2929"/>
                 </a:solidFill>
@@ -7549,7 +7549,7 @@
           <a:noFill/>
         </p:spPr>
         <p:txBody>
-          <a:bodyPr wrap="square" anchor="t" lIns="0" rIns="0" tIns="0" bIns="0">
+          <a:bodyPr wrap="square" anchor="ctr" lIns="0" rIns="0" tIns="0" bIns="0">
             <a:spAutoFit/>
           </a:bodyPr>
           <a:lstStyle/>
@@ -7566,7 +7566,7 @@
               </a:spcAft>
             </a:pPr>
             <a:r>
-              <a:rPr sz="1800" b="1" i="0">
+              <a:rPr sz="2400" b="1" i="0">
                 <a:solidFill>
                   <a:srgbClr val="EDAB0C"/>
                 </a:solidFill>
@@ -7575,7 +7575,7 @@
               <a:t>■  </a:t>
             </a:r>
             <a:r>
-              <a:rPr sz="1800" b="0" i="0">
+              <a:rPr sz="2400" b="0" i="0">
                 <a:solidFill>
                   <a:srgbClr val="2A2929"/>
                 </a:solidFill>
@@ -7597,7 +7597,7 @@
               </a:spcAft>
             </a:pPr>
             <a:r>
-              <a:rPr sz="1800" b="1" i="0">
+              <a:rPr sz="2400" b="1" i="0">
                 <a:solidFill>
                   <a:srgbClr val="92268F"/>
                 </a:solidFill>
@@ -7606,7 +7606,7 @@
               <a:t>■  </a:t>
             </a:r>
             <a:r>
-              <a:rPr sz="1800" b="1" i="0">
+              <a:rPr sz="2400" b="1" i="0">
                 <a:solidFill>
                   <a:srgbClr val="92268F"/>
                 </a:solidFill>
@@ -7628,7 +7628,7 @@
               </a:spcAft>
             </a:pPr>
             <a:r>
-              <a:rPr sz="1800" b="1" i="0">
+              <a:rPr sz="2400" b="1" i="0">
                 <a:solidFill>
                   <a:srgbClr val="EDAB0C"/>
                 </a:solidFill>
@@ -7637,7 +7637,7 @@
               <a:t>■  </a:t>
             </a:r>
             <a:r>
-              <a:rPr sz="1800" b="0" i="0">
+              <a:rPr sz="2400" b="0" i="0">
                 <a:solidFill>
                   <a:srgbClr val="2A2929"/>
                 </a:solidFill>
@@ -7659,7 +7659,7 @@
               </a:spcAft>
             </a:pPr>
             <a:r>
-              <a:rPr sz="1800" b="1" i="0">
+              <a:rPr sz="2400" b="1" i="0">
                 <a:solidFill>
                   <a:srgbClr val="EDAB0C"/>
                 </a:solidFill>
@@ -7668,7 +7668,7 @@
               <a:t>■  </a:t>
             </a:r>
             <a:r>
-              <a:rPr sz="1800" b="0" i="0">
+              <a:rPr sz="2400" b="0" i="0">
                 <a:solidFill>
                   <a:srgbClr val="2A2929"/>
                 </a:solidFill>
@@ -7690,7 +7690,7 @@
               </a:spcAft>
             </a:pPr>
             <a:r>
-              <a:rPr sz="1800" b="1" i="0">
+              <a:rPr sz="2400" b="1" i="0">
                 <a:solidFill>
                   <a:srgbClr val="EDAB0C"/>
                 </a:solidFill>
@@ -7699,7 +7699,7 @@
               <a:t>■  </a:t>
             </a:r>
             <a:r>
-              <a:rPr sz="1800" b="0" i="0">
+              <a:rPr sz="2400" b="0" i="0">
                 <a:solidFill>
                   <a:srgbClr val="2A2929"/>
                 </a:solidFill>
@@ -11344,7 +11344,7 @@
           <a:noFill/>
         </p:spPr>
         <p:txBody>
-          <a:bodyPr wrap="square" anchor="t" lIns="0" rIns="0" tIns="0" bIns="0">
+          <a:bodyPr wrap="square" anchor="ctr" lIns="0" rIns="0" tIns="0" bIns="0">
             <a:spAutoFit/>
           </a:bodyPr>
           <a:lstStyle/>
@@ -11361,7 +11361,7 @@
               </a:spcAft>
             </a:pPr>
             <a:r>
-              <a:rPr sz="1800" b="1" i="0">
+              <a:rPr sz="2400" b="1" i="0">
                 <a:solidFill>
                   <a:srgbClr val="EDAB0C"/>
                 </a:solidFill>
@@ -11370,7 +11370,7 @@
               <a:t>■  </a:t>
             </a:r>
             <a:r>
-              <a:rPr sz="1800" b="0" i="0">
+              <a:rPr sz="2400" b="0" i="0">
                 <a:solidFill>
                   <a:srgbClr val="2A2929"/>
                 </a:solidFill>
@@ -11392,7 +11392,7 @@
               </a:spcAft>
             </a:pPr>
             <a:r>
-              <a:rPr sz="1800" b="1" i="0">
+              <a:rPr sz="2400" b="1" i="0">
                 <a:solidFill>
                   <a:srgbClr val="EDAB0C"/>
                 </a:solidFill>
@@ -11401,7 +11401,7 @@
               <a:t>■  </a:t>
             </a:r>
             <a:r>
-              <a:rPr sz="1800" b="0" i="0">
+              <a:rPr sz="2400" b="0" i="0">
                 <a:solidFill>
                   <a:srgbClr val="2A2929"/>
                 </a:solidFill>
@@ -11423,7 +11423,7 @@
               </a:spcAft>
             </a:pPr>
             <a:r>
-              <a:rPr sz="1800" b="1" i="0">
+              <a:rPr sz="2400" b="1" i="0">
                 <a:solidFill>
                   <a:srgbClr val="92268F"/>
                 </a:solidFill>
@@ -11432,7 +11432,7 @@
               <a:t>■  </a:t>
             </a:r>
             <a:r>
-              <a:rPr sz="1800" b="1" i="0">
+              <a:rPr sz="2400" b="1" i="0">
                 <a:solidFill>
                   <a:srgbClr val="92268F"/>
                 </a:solidFill>
@@ -12621,7 +12621,7 @@
           <a:noFill/>
         </p:spPr>
         <p:txBody>
-          <a:bodyPr wrap="square" anchor="t" lIns="0" rIns="0" tIns="0" bIns="0">
+          <a:bodyPr wrap="square" anchor="ctr" lIns="0" rIns="0" tIns="0" bIns="0">
             <a:spAutoFit/>
           </a:bodyPr>
           <a:lstStyle/>
@@ -12638,7 +12638,7 @@
               </a:spcAft>
             </a:pPr>
             <a:r>
-              <a:rPr sz="1800" b="1" i="0">
+              <a:rPr sz="2400" b="1" i="0">
                 <a:solidFill>
                   <a:srgbClr val="92268F"/>
                 </a:solidFill>
@@ -12647,7 +12647,7 @@
               <a:t>■  </a:t>
             </a:r>
             <a:r>
-              <a:rPr sz="1800" b="1" i="0">
+              <a:rPr sz="2400" b="1" i="0">
                 <a:solidFill>
                   <a:srgbClr val="92268F"/>
                 </a:solidFill>
@@ -12669,7 +12669,7 @@
               </a:spcAft>
             </a:pPr>
             <a:r>
-              <a:rPr sz="1800" b="1" i="0">
+              <a:rPr sz="2400" b="1" i="0">
                 <a:solidFill>
                   <a:srgbClr val="EDAB0C"/>
                 </a:solidFill>
@@ -12678,7 +12678,7 @@
               <a:t>■  </a:t>
             </a:r>
             <a:r>
-              <a:rPr sz="1800" b="0" i="0">
+              <a:rPr sz="2400" b="0" i="0">
                 <a:solidFill>
                   <a:srgbClr val="2A2929"/>
                 </a:solidFill>
@@ -12700,7 +12700,7 @@
               </a:spcAft>
             </a:pPr>
             <a:r>
-              <a:rPr sz="1800" b="1" i="0">
+              <a:rPr sz="2400" b="1" i="0">
                 <a:solidFill>
                   <a:srgbClr val="EDAB0C"/>
                 </a:solidFill>
@@ -12709,7 +12709,7 @@
               <a:t>■  </a:t>
             </a:r>
             <a:r>
-              <a:rPr sz="1800" b="0" i="0">
+              <a:rPr sz="2400" b="0" i="0">
                 <a:solidFill>
                   <a:srgbClr val="2A2929"/>
                 </a:solidFill>
@@ -12731,7 +12731,7 @@
               </a:spcAft>
             </a:pPr>
             <a:r>
-              <a:rPr sz="1800" b="1" i="0">
+              <a:rPr sz="2400" b="1" i="0">
                 <a:solidFill>
                   <a:srgbClr val="EDAB0C"/>
                 </a:solidFill>
@@ -12740,7 +12740,7 @@
               <a:t>■  </a:t>
             </a:r>
             <a:r>
-              <a:rPr sz="1800" b="0" i="0">
+              <a:rPr sz="2400" b="0" i="0">
                 <a:solidFill>
                   <a:srgbClr val="2A2929"/>
                 </a:solidFill>
@@ -12762,7 +12762,7 @@
               </a:spcAft>
             </a:pPr>
             <a:r>
-              <a:rPr sz="1800" b="1" i="0">
+              <a:rPr sz="2400" b="1" i="0">
                 <a:solidFill>
                   <a:srgbClr val="EDAB0C"/>
                 </a:solidFill>
@@ -12771,7 +12771,7 @@
               <a:t>■  </a:t>
             </a:r>
             <a:r>
-              <a:rPr sz="1800" b="0" i="0">
+              <a:rPr sz="2400" b="0" i="0">
                 <a:solidFill>
                   <a:srgbClr val="2A2929"/>
                 </a:solidFill>

--- a/S1-CL1-Cloud-Design-Build/delivery/topic_07/Topic_07_Slides.pptx
+++ b/S1-CL1-Cloud-Design-Build/delivery/topic_07/Topic_07_Slides.pptx
@@ -7,28 +7,28 @@
   <p:sldIdLst>
     <p:sldId id="256" r:id="rId7"/>
     <p:sldId id="257" r:id="rId8"/>
-    <p:sldId id="258" r:id="rId9"/>
-    <p:sldId id="259" r:id="rId10"/>
-    <p:sldId id="260" r:id="rId11"/>
-    <p:sldId id="261" r:id="rId12"/>
-    <p:sldId id="262" r:id="rId13"/>
-    <p:sldId id="263" r:id="rId14"/>
-    <p:sldId id="264" r:id="rId15"/>
-    <p:sldId id="265" r:id="rId16"/>
-    <p:sldId id="266" r:id="rId17"/>
-    <p:sldId id="267" r:id="rId18"/>
-    <p:sldId id="268" r:id="rId19"/>
-    <p:sldId id="269" r:id="rId20"/>
-    <p:sldId id="270" r:id="rId21"/>
-    <p:sldId id="271" r:id="rId22"/>
-    <p:sldId id="272" r:id="rId23"/>
-    <p:sldId id="273" r:id="rId24"/>
-    <p:sldId id="274" r:id="rId25"/>
-    <p:sldId id="275" r:id="rId26"/>
-    <p:sldId id="276" r:id="rId27"/>
-    <p:sldId id="277" r:id="rId28"/>
-    <p:sldId id="278" r:id="rId29"/>
-    <p:sldId id="279" r:id="rId30"/>
+    <p:sldId id="258" r:id="rId10"/>
+    <p:sldId id="259" r:id="rId11"/>
+    <p:sldId id="260" r:id="rId12"/>
+    <p:sldId id="261" r:id="rId13"/>
+    <p:sldId id="262" r:id="rId14"/>
+    <p:sldId id="263" r:id="rId15"/>
+    <p:sldId id="264" r:id="rId16"/>
+    <p:sldId id="265" r:id="rId17"/>
+    <p:sldId id="266" r:id="rId18"/>
+    <p:sldId id="267" r:id="rId19"/>
+    <p:sldId id="268" r:id="rId20"/>
+    <p:sldId id="269" r:id="rId21"/>
+    <p:sldId id="270" r:id="rId22"/>
+    <p:sldId id="271" r:id="rId23"/>
+    <p:sldId id="272" r:id="rId24"/>
+    <p:sldId id="273" r:id="rId25"/>
+    <p:sldId id="274" r:id="rId26"/>
+    <p:sldId id="275" r:id="rId27"/>
+    <p:sldId id="276" r:id="rId28"/>
+    <p:sldId id="277" r:id="rId29"/>
+    <p:sldId id="278" r:id="rId30"/>
+    <p:sldId id="279" r:id="rId31"/>
   </p:sldIdLst>
   <p:sldSz cx="12191695" cy="6858000" type="screen4x3"/>
   <p:notesSz cx="6858000" cy="9144000"/>
@@ -128,6 +128,2462 @@
     </a:lvl9pPr>
   </p:defaultTextStyle>
 </p:presentation>
+</file>
+
+<file path=ppt/notesMasters/notesMaster1.xml><?xml version="1.0" encoding="utf-8"?>
+<p:notesMaster xmlns:a="http://schemas.openxmlformats.org/drawingml/2006/main" xmlns:p="http://schemas.openxmlformats.org/presentationml/2006/main" xmlns:r="http://schemas.openxmlformats.org/officeDocument/2006/relationships">
+  <p:cSld>
+    <p:bg>
+      <p:bgRef idx="1001">
+        <a:schemeClr val="bg1"/>
+      </p:bgRef>
+    </p:bg>
+    <p:spTree>
+      <p:nvGrpSpPr>
+        <p:cNvPr id="1" name=""/>
+        <p:cNvGrpSpPr/>
+        <p:nvPr/>
+      </p:nvGrpSpPr>
+      <p:grpSpPr>
+        <a:xfrm>
+          <a:off x="0" y="0"/>
+          <a:ext cx="0" cy="0"/>
+          <a:chOff x="0" y="0"/>
+          <a:chExt cx="0" cy="0"/>
+        </a:xfrm>
+      </p:grpSpPr>
+      <p:sp>
+        <p:nvSpPr>
+          <p:cNvPr id="2" name="Header Placeholder 1"/>
+          <p:cNvSpPr>
+            <a:spLocks noGrp="1"/>
+          </p:cNvSpPr>
+          <p:nvPr>
+            <p:ph type="hdr" sz="quarter"/>
+          </p:nvPr>
+        </p:nvSpPr>
+        <p:spPr>
+          <a:xfrm>
+            <a:off x="0" y="0"/>
+            <a:ext cx="2971800" cy="457200"/>
+          </a:xfrm>
+          <a:prstGeom prst="rect">
+            <a:avLst/>
+          </a:prstGeom>
+        </p:spPr>
+        <p:txBody>
+          <a:bodyPr vert="horz" lIns="91440" tIns="45720" rIns="91440" bIns="45720" rtlCol="0"/>
+          <a:lstStyle>
+            <a:lvl1pPr algn="l">
+              <a:defRPr sz="1200"/>
+            </a:lvl1pPr>
+          </a:lstStyle>
+          <a:p>
+            <a:endParaRPr lang="en-US"/>
+          </a:p>
+        </p:txBody>
+      </p:sp>
+      <p:sp>
+        <p:nvSpPr>
+          <p:cNvPr id="3" name="Date Placeholder 2"/>
+          <p:cNvSpPr>
+            <a:spLocks noGrp="1"/>
+          </p:cNvSpPr>
+          <p:nvPr>
+            <p:ph type="dt" idx="1"/>
+          </p:nvPr>
+        </p:nvSpPr>
+        <p:spPr>
+          <a:xfrm>
+            <a:off x="3884613" y="0"/>
+            <a:ext cx="2971800" cy="457200"/>
+          </a:xfrm>
+          <a:prstGeom prst="rect">
+            <a:avLst/>
+          </a:prstGeom>
+        </p:spPr>
+        <p:txBody>
+          <a:bodyPr vert="horz" lIns="91440" tIns="45720" rIns="91440" bIns="45720" rtlCol="0"/>
+          <a:lstStyle>
+            <a:lvl1pPr algn="r">
+              <a:defRPr sz="1200"/>
+            </a:lvl1pPr>
+          </a:lstStyle>
+          <a:p>
+            <a:fld id="{0F89C1C7-3DCD-1040-A9CF-14679D8B5DDD}" type="datetimeFigureOut">
+              <a:rPr lang="en-US" smtClean="0"/>
+              <a:t>10/17/16</a:t>
+            </a:fld>
+            <a:endParaRPr lang="en-US"/>
+          </a:p>
+        </p:txBody>
+      </p:sp>
+      <p:sp>
+        <p:nvSpPr>
+          <p:cNvPr id="4" name="Slide Image Placeholder 3"/>
+          <p:cNvSpPr>
+            <a:spLocks noGrp="1" noRot="1" noChangeAspect="1"/>
+          </p:cNvSpPr>
+          <p:nvPr>
+            <p:ph type="sldImg" idx="2"/>
+          </p:nvPr>
+        </p:nvSpPr>
+        <p:spPr>
+          <a:xfrm>
+            <a:off x="1143000" y="685800"/>
+            <a:ext cx="4572000" cy="3429000"/>
+          </a:xfrm>
+          <a:prstGeom prst="rect">
+            <a:avLst/>
+          </a:prstGeom>
+          <a:noFill/>
+          <a:ln w="12700">
+            <a:solidFill>
+              <a:prstClr val="black"/>
+            </a:solidFill>
+          </a:ln>
+        </p:spPr>
+        <p:txBody>
+          <a:bodyPr vert="horz" lIns="91440" tIns="45720" rIns="91440" bIns="45720" rtlCol="0" anchor="ctr"/>
+          <a:lstStyle/>
+          <a:p>
+            <a:endParaRPr lang="en-US"/>
+          </a:p>
+        </p:txBody>
+      </p:sp>
+      <p:sp>
+        <p:nvSpPr>
+          <p:cNvPr id="5" name="Notes Placeholder 4"/>
+          <p:cNvSpPr>
+            <a:spLocks noGrp="1"/>
+          </p:cNvSpPr>
+          <p:nvPr>
+            <p:ph type="body" sz="quarter" idx="3"/>
+          </p:nvPr>
+        </p:nvSpPr>
+        <p:spPr>
+          <a:xfrm>
+            <a:off x="685800" y="4343400"/>
+            <a:ext cx="5486400" cy="4114800"/>
+          </a:xfrm>
+          <a:prstGeom prst="rect">
+            <a:avLst/>
+          </a:prstGeom>
+        </p:spPr>
+        <p:txBody>
+          <a:bodyPr vert="horz" lIns="91440" tIns="45720" rIns="91440" bIns="45720" rtlCol="0"/>
+          <a:lstStyle/>
+          <a:p>
+            <a:pPr lvl="0"/>
+            <a:r>
+              <a:rPr lang="en-US" smtClean="0"/>
+              <a:t>Click to edit Master text styles</a:t>
+            </a:r>
+          </a:p>
+          <a:p>
+            <a:pPr lvl="1"/>
+            <a:r>
+              <a:rPr lang="en-US" smtClean="0"/>
+              <a:t>Second level</a:t>
+            </a:r>
+          </a:p>
+          <a:p>
+            <a:pPr lvl="2"/>
+            <a:r>
+              <a:rPr lang="en-US" smtClean="0"/>
+              <a:t>Third level</a:t>
+            </a:r>
+          </a:p>
+          <a:p>
+            <a:pPr lvl="3"/>
+            <a:r>
+              <a:rPr lang="en-US" smtClean="0"/>
+              <a:t>Fourth level</a:t>
+            </a:r>
+          </a:p>
+          <a:p>
+            <a:pPr lvl="4"/>
+            <a:r>
+              <a:rPr lang="en-US" smtClean="0"/>
+              <a:t>Fifth level</a:t>
+            </a:r>
+            <a:endParaRPr lang="en-US"/>
+          </a:p>
+        </p:txBody>
+      </p:sp>
+      <p:sp>
+        <p:nvSpPr>
+          <p:cNvPr id="6" name="Footer Placeholder 5"/>
+          <p:cNvSpPr>
+            <a:spLocks noGrp="1"/>
+          </p:cNvSpPr>
+          <p:nvPr>
+            <p:ph type="ftr" sz="quarter" idx="4"/>
+          </p:nvPr>
+        </p:nvSpPr>
+        <p:spPr>
+          <a:xfrm>
+            <a:off x="0" y="8685213"/>
+            <a:ext cx="2971800" cy="457200"/>
+          </a:xfrm>
+          <a:prstGeom prst="rect">
+            <a:avLst/>
+          </a:prstGeom>
+        </p:spPr>
+        <p:txBody>
+          <a:bodyPr vert="horz" lIns="91440" tIns="45720" rIns="91440" bIns="45720" rtlCol="0" anchor="b"/>
+          <a:lstStyle>
+            <a:lvl1pPr algn="l">
+              <a:defRPr sz="1200"/>
+            </a:lvl1pPr>
+          </a:lstStyle>
+          <a:p>
+            <a:endParaRPr lang="en-US"/>
+          </a:p>
+        </p:txBody>
+      </p:sp>
+      <p:sp>
+        <p:nvSpPr>
+          <p:cNvPr id="7" name="Slide Number Placeholder 6"/>
+          <p:cNvSpPr>
+            <a:spLocks noGrp="1"/>
+          </p:cNvSpPr>
+          <p:nvPr>
+            <p:ph type="sldNum" sz="quarter" idx="5"/>
+          </p:nvPr>
+        </p:nvSpPr>
+        <p:spPr>
+          <a:xfrm>
+            <a:off x="3884613" y="8685213"/>
+            <a:ext cx="2971800" cy="457200"/>
+          </a:xfrm>
+          <a:prstGeom prst="rect">
+            <a:avLst/>
+          </a:prstGeom>
+        </p:spPr>
+        <p:txBody>
+          <a:bodyPr vert="horz" lIns="91440" tIns="45720" rIns="91440" bIns="45720" rtlCol="0" anchor="b"/>
+          <a:lstStyle>
+            <a:lvl1pPr algn="r">
+              <a:defRPr sz="1200"/>
+            </a:lvl1pPr>
+          </a:lstStyle>
+          <a:p>
+            <a:fld id="{BB5E49A5-4136-284D-997B-48E1D791AD67}" type="slidenum">
+              <a:rPr lang="en-US" smtClean="0"/>
+              <a:t>‹#›</a:t>
+            </a:fld>
+            <a:endParaRPr lang="en-US"/>
+          </a:p>
+        </p:txBody>
+      </p:sp>
+    </p:spTree>
+    <p:extLst>
+      <p:ext uri="{BB962C8B-B14F-4D97-AF65-F5344CB8AC3E}">
+        <p14:creationId xmlns:p14="http://schemas.microsoft.com/office/powerpoint/2010/main" val="2623252185"/>
+      </p:ext>
+    </p:extLst>
+  </p:cSld>
+  <p:clrMap bg1="lt1" tx1="dk1" bg2="lt2" tx2="dk2" accent1="accent1" accent2="accent2" accent3="accent3" accent4="accent4" accent5="accent5" accent6="accent6" hlink="hlink" folHlink="folHlink"/>
+  <p:notesStyle>
+    <a:lvl1pPr marL="0" algn="l" defTabSz="457200" rtl="0" eaLnBrk="1" latinLnBrk="0" hangingPunct="1">
+      <a:defRPr sz="1200" kern="1200">
+        <a:solidFill>
+          <a:schemeClr val="tx1"/>
+        </a:solidFill>
+        <a:latin typeface="+mn-lt"/>
+        <a:ea typeface="+mn-ea"/>
+        <a:cs typeface="+mn-cs"/>
+      </a:defRPr>
+    </a:lvl1pPr>
+    <a:lvl2pPr marL="457200" algn="l" defTabSz="457200" rtl="0" eaLnBrk="1" latinLnBrk="0" hangingPunct="1">
+      <a:defRPr sz="1200" kern="1200">
+        <a:solidFill>
+          <a:schemeClr val="tx1"/>
+        </a:solidFill>
+        <a:latin typeface="+mn-lt"/>
+        <a:ea typeface="+mn-ea"/>
+        <a:cs typeface="+mn-cs"/>
+      </a:defRPr>
+    </a:lvl2pPr>
+    <a:lvl3pPr marL="914400" algn="l" defTabSz="457200" rtl="0" eaLnBrk="1" latinLnBrk="0" hangingPunct="1">
+      <a:defRPr sz="1200" kern="1200">
+        <a:solidFill>
+          <a:schemeClr val="tx1"/>
+        </a:solidFill>
+        <a:latin typeface="+mn-lt"/>
+        <a:ea typeface="+mn-ea"/>
+        <a:cs typeface="+mn-cs"/>
+      </a:defRPr>
+    </a:lvl3pPr>
+    <a:lvl4pPr marL="1371600" algn="l" defTabSz="457200" rtl="0" eaLnBrk="1" latinLnBrk="0" hangingPunct="1">
+      <a:defRPr sz="1200" kern="1200">
+        <a:solidFill>
+          <a:schemeClr val="tx1"/>
+        </a:solidFill>
+        <a:latin typeface="+mn-lt"/>
+        <a:ea typeface="+mn-ea"/>
+        <a:cs typeface="+mn-cs"/>
+      </a:defRPr>
+    </a:lvl4pPr>
+    <a:lvl5pPr marL="1828800" algn="l" defTabSz="457200" rtl="0" eaLnBrk="1" latinLnBrk="0" hangingPunct="1">
+      <a:defRPr sz="1200" kern="1200">
+        <a:solidFill>
+          <a:schemeClr val="tx1"/>
+        </a:solidFill>
+        <a:latin typeface="+mn-lt"/>
+        <a:ea typeface="+mn-ea"/>
+        <a:cs typeface="+mn-cs"/>
+      </a:defRPr>
+    </a:lvl5pPr>
+    <a:lvl6pPr marL="2286000" algn="l" defTabSz="457200" rtl="0" eaLnBrk="1" latinLnBrk="0" hangingPunct="1">
+      <a:defRPr sz="1200" kern="1200">
+        <a:solidFill>
+          <a:schemeClr val="tx1"/>
+        </a:solidFill>
+        <a:latin typeface="+mn-lt"/>
+        <a:ea typeface="+mn-ea"/>
+        <a:cs typeface="+mn-cs"/>
+      </a:defRPr>
+    </a:lvl6pPr>
+    <a:lvl7pPr marL="2743200" algn="l" defTabSz="457200" rtl="0" eaLnBrk="1" latinLnBrk="0" hangingPunct="1">
+      <a:defRPr sz="1200" kern="1200">
+        <a:solidFill>
+          <a:schemeClr val="tx1"/>
+        </a:solidFill>
+        <a:latin typeface="+mn-lt"/>
+        <a:ea typeface="+mn-ea"/>
+        <a:cs typeface="+mn-cs"/>
+      </a:defRPr>
+    </a:lvl7pPr>
+    <a:lvl8pPr marL="3200400" algn="l" defTabSz="457200" rtl="0" eaLnBrk="1" latinLnBrk="0" hangingPunct="1">
+      <a:defRPr sz="1200" kern="1200">
+        <a:solidFill>
+          <a:schemeClr val="tx1"/>
+        </a:solidFill>
+        <a:latin typeface="+mn-lt"/>
+        <a:ea typeface="+mn-ea"/>
+        <a:cs typeface="+mn-cs"/>
+      </a:defRPr>
+    </a:lvl8pPr>
+    <a:lvl9pPr marL="3657600" algn="l" defTabSz="457200" rtl="0" eaLnBrk="1" latinLnBrk="0" hangingPunct="1">
+      <a:defRPr sz="1200" kern="1200">
+        <a:solidFill>
+          <a:schemeClr val="tx1"/>
+        </a:solidFill>
+        <a:latin typeface="+mn-lt"/>
+        <a:ea typeface="+mn-ea"/>
+        <a:cs typeface="+mn-cs"/>
+      </a:defRPr>
+    </a:lvl9pPr>
+  </p:notesStyle>
+</p:notesMaster>
+</file>
+
+<file path=ppt/notesSlides/notesSlide1.xml><?xml version="1.0" encoding="utf-8"?>
+<p:notes xmlns:a="http://schemas.openxmlformats.org/drawingml/2006/main" xmlns:p="http://schemas.openxmlformats.org/presentationml/2006/main" xmlns:r="http://schemas.openxmlformats.org/officeDocument/2006/relationships">
+  <p:cSld>
+    <p:spTree>
+      <p:nvGrpSpPr>
+        <p:cNvPr id="1" name=""/>
+        <p:cNvGrpSpPr/>
+        <p:nvPr/>
+      </p:nvGrpSpPr>
+      <p:grpSpPr>
+        <a:xfrm>
+          <a:off x="0" y="0"/>
+          <a:ext cx="0" cy="0"/>
+          <a:chOff x="0" y="0"/>
+          <a:chExt cx="0" cy="0"/>
+        </a:xfrm>
+      </p:grpSpPr>
+      <p:sp>
+        <p:nvSpPr>
+          <p:cNvPr id="2" name="Slide Image Placeholder 1"/>
+          <p:cNvSpPr>
+            <a:spLocks noGrp="1"/>
+          </p:cNvSpPr>
+          <p:nvPr>
+            <p:ph type="sldImg" idx="2"/>
+          </p:nvPr>
+        </p:nvSpPr>
+        <p:spPr/>
+      </p:sp>
+      <p:sp>
+        <p:nvSpPr>
+          <p:cNvPr id="3" name="Notes Placeholder 2"/>
+          <p:cNvSpPr>
+            <a:spLocks noGrp="1"/>
+          </p:cNvSpPr>
+          <p:nvPr>
+            <p:ph type="body" idx="3" sz="quarter"/>
+          </p:nvPr>
+        </p:nvSpPr>
+        <p:spPr/>
+        <p:txBody>
+          <a:bodyPr/>
+          <a:lstStyle/>
+          <a:p>
+            <a:r>
+              <a:t>Frame this as the bridge from Topic 6 — set the shape of the day, don't teach yet.</a:t>
+            </a:r>
+          </a:p>
+          <a:p>
+            <a:r>
+              <a:t>• Callback: Topic 6 laid the foundation (account, identity, the shared-responsibility line).</a:t>
+            </a:r>
+          </a:p>
+          <a:p>
+            <a:r>
+              <a:t>  Today you build the network the workload will sit inside — Topic 8 fills it.</a:t>
+            </a:r>
+          </a:p>
+          <a:p>
+            <a:r>
+              <a:t>• Read the three parts off the slide: virtual network (VPC + subnets), traffic control</a:t>
+            </a:r>
+          </a:p>
+          <a:p>
+            <a:r>
+              <a:t>  (security groups), name resolution (DNS). Everything today maps to one of those three.</a:t>
+            </a:r>
+          </a:p>
+          <a:p>
+            <a:r>
+              <a:t>• Hammer the two disciplines that continue from Topic 6 (bolded lines): still building to a</a:t>
+            </a:r>
+          </a:p>
+          <a:p>
+            <a:r>
+              <a:t>  SUPPLIED design (they're the builder, not the designer), still capturing evidence as they go.</a:t>
+            </a:r>
+          </a:p>
+          <a:p>
+            <a:r>
+              <a:t>• Set the rhythm for every AWS task today: watch the demo, then do it yourself.</a:t>
+            </a:r>
+          </a:p>
+          <a:p>
+            <a:r>
+              <a:t>Misconception to pre-empt: "we're designing the network." No — the topology is given; their job</a:t>
+            </a:r>
+          </a:p>
+          <a:p>
+            <a:r>
+              <a:t>is to build it faithfully and evidence it, exactly as in AT2.</a:t>
+            </a:r>
+          </a:p>
+          <a:p>
+            <a:r>
+              <a:t>Question to pose: "Topic 6 gave the workload an identity — what's still missing before an app can</a:t>
+            </a:r>
+          </a:p>
+          <a:p>
+            <a:r>
+              <a:t>run?" (a network for it to live in, and rules for who reaches it).</a:t>
+            </a:r>
+          </a:p>
+          <a:p>
+            <a:r>
+              <a:t>UoC/AT2 tie: this Topic develops the network portion of AT2 criterion A2 (§4.2 of the Deployment</a:t>
+            </a:r>
+          </a:p>
+          <a:p>
+            <a:r>
+              <a:t>Report); it's the network tier the Topic 8 workload moves into.</a:t>
+            </a:r>
+          </a:p>
+        </p:txBody>
+      </p:sp>
+      <p:sp>
+        <p:nvSpPr>
+          <p:cNvPr id="4" name="Slide Number Placeholder 3"/>
+          <p:cNvSpPr>
+            <a:spLocks noGrp="1"/>
+          </p:cNvSpPr>
+          <p:nvPr>
+            <p:ph type="sldNum" idx="5" sz="quarter"/>
+          </p:nvPr>
+        </p:nvSpPr>
+        <p:spPr/>
+      </p:sp>
+    </p:spTree>
+  </p:cSld>
+  <p:clrMapOvr>
+    <a:masterClrMapping/>
+  </p:clrMapOvr>
+</p:notes>
+</file>
+
+<file path=ppt/notesSlides/notesSlide10.xml><?xml version="1.0" encoding="utf-8"?>
+<p:notes xmlns:a="http://schemas.openxmlformats.org/drawingml/2006/main" xmlns:p="http://schemas.openxmlformats.org/presentationml/2006/main" xmlns:r="http://schemas.openxmlformats.org/officeDocument/2006/relationships">
+  <p:cSld>
+    <p:spTree>
+      <p:nvGrpSpPr>
+        <p:cNvPr id="1" name=""/>
+        <p:cNvGrpSpPr/>
+        <p:nvPr/>
+      </p:nvGrpSpPr>
+      <p:grpSpPr>
+        <a:xfrm>
+          <a:off x="0" y="0"/>
+          <a:ext cx="0" cy="0"/>
+          <a:chOff x="0" y="0"/>
+          <a:chExt cx="0" cy="0"/>
+        </a:xfrm>
+      </p:grpSpPr>
+      <p:sp>
+        <p:nvSpPr>
+          <p:cNvPr id="2" name="Slide Image Placeholder 1"/>
+          <p:cNvSpPr>
+            <a:spLocks noGrp="1"/>
+          </p:cNvSpPr>
+          <p:nvPr>
+            <p:ph type="sldImg" idx="2"/>
+          </p:nvPr>
+        </p:nvSpPr>
+        <p:spPr/>
+      </p:sp>
+      <p:sp>
+        <p:nvSpPr>
+          <p:cNvPr id="3" name="Notes Placeholder 2"/>
+          <p:cNvSpPr>
+            <a:spLocks noGrp="1"/>
+          </p:cNvSpPr>
+          <p:nvPr>
+            <p:ph type="body" idx="3" sz="quarter"/>
+          </p:nvPr>
+        </p:nvSpPr>
+        <p:spPr/>
+        <p:txBody>
+          <a:bodyPr/>
+          <a:lstStyle/>
+          <a:p>
+            <a:r>
+              <a:t>Facilitation — the main C1+C2 hands-on build in the lab, straight after the demo. This is the AT2</a:t>
+            </a:r>
+          </a:p>
+          <a:p>
+            <a:r>
+              <a:t>network build rehearsed on the practice system.</a:t>
+            </a:r>
+          </a:p>
+          <a:p>
+            <a:r>
+              <a:t>Tell students, in these words: "Open the AWS Academy lab and the supplied Accounting design. Build</a:t>
+            </a:r>
+          </a:p>
+          <a:p>
+            <a:r>
+              <a:t>the network tier exactly as the design specifies, and capture named evidence as you go."</a:t>
+            </a:r>
+          </a:p>
+          <a:p>
+            <a:r>
+              <a:t>The task, step by step (put on the board / read out):</a:t>
+            </a:r>
+          </a:p>
+          <a:p>
+            <a:r>
+              <a:t>1. Create the VPC 10.0.0.0/16.</a:t>
+            </a:r>
+          </a:p>
+          <a:p>
+            <a:r>
+              <a:t>2. Create the three subnets: public-egress, private-app, private-data (first AZ).</a:t>
+            </a:r>
+          </a:p>
+          <a:p>
+            <a:r>
+              <a:t>3. Create the Internet Gateway + NAT gateway + per-tier route tables — egress-only (no inbound path).</a:t>
+            </a:r>
+          </a:p>
+          <a:p>
+            <a:r>
+              <a:t>4. Build the security-group chain: sg-alb → sg-app → sg-db (source = the upstream SG, not an IP).</a:t>
+            </a:r>
+          </a:p>
+          <a:p>
+            <a:r>
+              <a:t>Must produce (the AT2 evidence): named screenshots of the VPC, subnets, route tables, and SG rules —</a:t>
+            </a:r>
+          </a:p>
+          <a:p>
+            <a:r>
+              <a:t>Region visible in each.</a:t>
+            </a:r>
+          </a:p>
+          <a:p>
+            <a:r>
+              <a:t>Timing: ~25 min. Set Region to us-east-1 first — [scenario: ap-southeast-2 (Sydney) | deploy:</a:t>
+            </a:r>
+          </a:p>
+          <a:p>
+            <a:r>
+              <a:t>us-east-1] — visible in all evidence. Where they get stuck: forgetting the NAT route on the private</a:t>
+            </a:r>
+          </a:p>
+          <a:p>
+            <a:r>
+              <a:t>table (private subnet can't reach out), and writing IP sources instead of SG-as-source — circulate for both.</a:t>
+            </a:r>
+          </a:p>
+          <a:p>
+            <a:r>
+              <a:t>Share-back: ask one student to show their sg-db inbound rule; confirm it allows FROM sg-app only.</a:t>
+            </a:r>
+          </a:p>
+          <a:p>
+            <a:r>
+              <a:t>No-leakage note: this practice uses the Accounting design; the assessed build uses a different system</a:t>
+            </a:r>
+          </a:p>
+          <a:p>
+            <a:r>
+              <a:t>(public-facing ALB) — comparable, not identical.</a:t>
+            </a:r>
+          </a:p>
+        </p:txBody>
+      </p:sp>
+      <p:sp>
+        <p:nvSpPr>
+          <p:cNvPr id="4" name="Slide Number Placeholder 3"/>
+          <p:cNvSpPr>
+            <a:spLocks noGrp="1"/>
+          </p:cNvSpPr>
+          <p:nvPr>
+            <p:ph type="sldNum" idx="5" sz="quarter"/>
+          </p:nvPr>
+        </p:nvSpPr>
+        <p:spPr/>
+      </p:sp>
+    </p:spTree>
+  </p:cSld>
+  <p:clrMapOvr>
+    <a:masterClrMapping/>
+  </p:clrMapOvr>
+</p:notes>
+</file>
+
+<file path=ppt/notesSlides/notesSlide11.xml><?xml version="1.0" encoding="utf-8"?>
+<p:notes xmlns:a="http://schemas.openxmlformats.org/drawingml/2006/main" xmlns:p="http://schemas.openxmlformats.org/presentationml/2006/main" xmlns:r="http://schemas.openxmlformats.org/officeDocument/2006/relationships">
+  <p:cSld>
+    <p:spTree>
+      <p:nvGrpSpPr>
+        <p:cNvPr id="1" name=""/>
+        <p:cNvGrpSpPr/>
+        <p:nvPr/>
+      </p:nvGrpSpPr>
+      <p:grpSpPr>
+        <a:xfrm>
+          <a:off x="0" y="0"/>
+          <a:ext cx="0" cy="0"/>
+          <a:chOff x="0" y="0"/>
+          <a:chExt cx="0" cy="0"/>
+        </a:xfrm>
+      </p:grpSpPr>
+      <p:sp>
+        <p:nvSpPr>
+          <p:cNvPr id="2" name="Slide Image Placeholder 1"/>
+          <p:cNvSpPr>
+            <a:spLocks noGrp="1"/>
+          </p:cNvSpPr>
+          <p:nvPr>
+            <p:ph type="sldImg" idx="2"/>
+          </p:nvPr>
+        </p:nvSpPr>
+        <p:spPr/>
+      </p:sp>
+      <p:sp>
+        <p:nvSpPr>
+          <p:cNvPr id="3" name="Notes Placeholder 2"/>
+          <p:cNvSpPr>
+            <a:spLocks noGrp="1"/>
+          </p:cNvSpPr>
+          <p:nvPr>
+            <p:ph type="body" idx="3" sz="quarter"/>
+          </p:nvPr>
+        </p:nvSpPr>
+        <p:spPr/>
+        <p:txBody>
+          <a:bodyPr/>
+          <a:lstStyle/>
+          <a:p>
+            <a:r>
+              <a:t>Primer + teach for C3 — how DNS resolves a name, then AWS Route 53. Use the DNS-flow image; don't</a:t>
+            </a:r>
+          </a:p>
+          <a:p>
+            <a:r>
+              <a:t>assume they know what DNS does.</a:t>
+            </a:r>
+          </a:p>
+          <a:p>
+            <a:r>
+              <a:t>• DNS translates a NAME (ledgerline.yat.internal) into the IP address machines actually use.</a:t>
+            </a:r>
+          </a:p>
+          <a:p>
+            <a:r>
+              <a:t>• A resolver walks the DNS hierarchy and returns the address — we use NAMES not IPs because addresses</a:t>
+            </a:r>
+          </a:p>
+          <a:p>
+            <a:r>
+              <a:t>  change; the name is stable, what it points to can move.</a:t>
+            </a:r>
+          </a:p>
+          <a:p>
+            <a:r>
+              <a:t>• The bolded line: Amazon Route 53 is AWS's highly available DNS service.</a:t>
+            </a:r>
+          </a:p>
+          <a:p>
+            <a:r>
+              <a:t>• The distinction that matters for this design: PUBLIC hosted zone = internet-facing names; PRIVATE</a:t>
+            </a:r>
+          </a:p>
+          <a:p>
+            <a:r>
+              <a:t>  hosted zone = names that resolve ONLY inside your VPC. Ledgerline uses a private zone (staff-only).</a:t>
+            </a:r>
+          </a:p>
+          <a:p>
+            <a:r>
+              <a:t>Misconception to pre-empt: "DNS is the internet / a website." No — it's the phone book that turns</a:t>
+            </a:r>
+          </a:p>
+          <a:p>
+            <a:r>
+              <a:t>names into addresses; nothing about content.</a:t>
+            </a:r>
+          </a:p>
+          <a:p>
+            <a:r>
+              <a:t>Question to pose: "If Ledgerline's server is rebuilt and gets a new IP, why don't staff bookmarks</a:t>
+            </a:r>
+          </a:p>
+          <a:p>
+            <a:r>
+              <a:t>break?" (they use the NAME; DNS re-points it — that's the whole value).</a:t>
+            </a:r>
+          </a:p>
+          <a:p>
+            <a:r>
+              <a:t>UoC/AT2 tie: ICTCLD401 KE 10 (purpose of DNS) → AT2 §4 (the design's internal name via Route 53).</a:t>
+            </a:r>
+          </a:p>
+        </p:txBody>
+      </p:sp>
+      <p:sp>
+        <p:nvSpPr>
+          <p:cNvPr id="4" name="Slide Number Placeholder 3"/>
+          <p:cNvSpPr>
+            <a:spLocks noGrp="1"/>
+          </p:cNvSpPr>
+          <p:nvPr>
+            <p:ph type="sldNum" idx="5" sz="quarter"/>
+          </p:nvPr>
+        </p:nvSpPr>
+        <p:spPr/>
+      </p:sp>
+    </p:spTree>
+  </p:cSld>
+  <p:clrMapOvr>
+    <a:masterClrMapping/>
+  </p:clrMapOvr>
+</p:notes>
+</file>
+
+<file path=ppt/notesSlides/notesSlide12.xml><?xml version="1.0" encoding="utf-8"?>
+<p:notes xmlns:a="http://schemas.openxmlformats.org/drawingml/2006/main" xmlns:p="http://schemas.openxmlformats.org/presentationml/2006/main" xmlns:r="http://schemas.openxmlformats.org/officeDocument/2006/relationships">
+  <p:cSld>
+    <p:spTree>
+      <p:nvGrpSpPr>
+        <p:cNvPr id="1" name=""/>
+        <p:cNvGrpSpPr/>
+        <p:nvPr/>
+      </p:nvGrpSpPr>
+      <p:grpSpPr>
+        <a:xfrm>
+          <a:off x="0" y="0"/>
+          <a:ext cx="0" cy="0"/>
+          <a:chOff x="0" y="0"/>
+          <a:chExt cx="0" cy="0"/>
+        </a:xfrm>
+      </p:grpSpPr>
+      <p:sp>
+        <p:nvSpPr>
+          <p:cNvPr id="2" name="Slide Image Placeholder 1"/>
+          <p:cNvSpPr>
+            <a:spLocks noGrp="1"/>
+          </p:cNvSpPr>
+          <p:nvPr>
+            <p:ph type="sldImg" idx="2"/>
+          </p:nvPr>
+        </p:nvSpPr>
+        <p:spPr/>
+      </p:sp>
+      <p:sp>
+        <p:nvSpPr>
+          <p:cNvPr id="3" name="Notes Placeholder 2"/>
+          <p:cNvSpPr>
+            <a:spLocks noGrp="1"/>
+          </p:cNvSpPr>
+          <p:nvPr>
+            <p:ph type="body" idx="3" sz="quarter"/>
+          </p:nvPr>
+        </p:nvSpPr>
+        <p:spPr/>
+        <p:txBody>
+          <a:bodyPr/>
+          <a:lstStyle/>
+          <a:p>
+            <a:r>
+              <a:t>Apply DNS to the supplied design — the specific internal name + certificate students configure.</a:t>
+            </a:r>
+          </a:p>
+          <a:p>
+            <a:r>
+              <a:t>Short, but it carries an implementer decision they must own.</a:t>
+            </a:r>
+          </a:p>
+          <a:p>
+            <a:r>
+              <a:t>• Ledgerline gets an INTERNAL hostname in a PRIVATE hosted zone — staff-only, over the VPN; there is</a:t>
+            </a:r>
+          </a:p>
+          <a:p>
+            <a:r>
+              <a:t>  NO public internet name. Consistent with the egress-only, VPN-reached design.</a:t>
+            </a:r>
+          </a:p>
+          <a:p>
+            <a:r>
+              <a:t>• An ACM TLS certificate secures HTTPS to that name — connect the cert to the name, not to an IP.</a:t>
+            </a:r>
+          </a:p>
+          <a:p>
+            <a:r>
+              <a:t>• The bolded line: the exact hostname + certificate domain is implementer decision C8 — they CONFIRM</a:t>
+            </a:r>
+          </a:p>
+          <a:p>
+            <a:r>
+              <a:t>  it with YAT ICT, they don't guess it. Model treating an open design decision as a question to ask,</a:t>
+            </a:r>
+          </a:p>
+          <a:p>
+            <a:r>
+              <a:t>  not an assumption to make.</a:t>
+            </a:r>
+          </a:p>
+          <a:p>
+            <a:r>
+              <a:t>Misconception to pre-empt: "internal name means no certificate needed." No — HTTPS/TLS still applies</a:t>
+            </a:r>
+          </a:p>
+          <a:p>
+            <a:r>
+              <a:t>inside the VPN; internal ≠ unencrypted.</a:t>
+            </a:r>
+          </a:p>
+          <a:p>
+            <a:r>
+              <a:t>Question to pose: "Why a private hosted zone here rather than a public one like a normal website?"</a:t>
+            </a:r>
+          </a:p>
+          <a:p>
+            <a:r>
+              <a:t>(the service is staff-only over the VPN; no reason to publish the name to the internet).</a:t>
+            </a:r>
+          </a:p>
+          <a:p>
+            <a:r>
+              <a:t>UoC/AT2 tie: KE 10 → AT2 §4 (DNS / name resolution). C8 is the kind of design decision AT2 expects</a:t>
+            </a:r>
+          </a:p>
+          <a:p>
+            <a:r>
+              <a:t>them to surface and confirm.</a:t>
+            </a:r>
+          </a:p>
+        </p:txBody>
+      </p:sp>
+      <p:sp>
+        <p:nvSpPr>
+          <p:cNvPr id="4" name="Slide Number Placeholder 3"/>
+          <p:cNvSpPr>
+            <a:spLocks noGrp="1"/>
+          </p:cNvSpPr>
+          <p:nvPr>
+            <p:ph type="sldNum" idx="5" sz="quarter"/>
+          </p:nvPr>
+        </p:nvSpPr>
+        <p:spPr/>
+      </p:sp>
+    </p:spTree>
+  </p:cSld>
+  <p:clrMapOvr>
+    <a:masterClrMapping/>
+  </p:clrMapOvr>
+</p:notes>
+</file>
+
+<file path=ppt/notesSlides/notesSlide13.xml><?xml version="1.0" encoding="utf-8"?>
+<p:notes xmlns:a="http://schemas.openxmlformats.org/drawingml/2006/main" xmlns:p="http://schemas.openxmlformats.org/presentationml/2006/main" xmlns:r="http://schemas.openxmlformats.org/officeDocument/2006/relationships">
+  <p:cSld>
+    <p:spTree>
+      <p:nvGrpSpPr>
+        <p:cNvPr id="1" name=""/>
+        <p:cNvGrpSpPr/>
+        <p:nvPr/>
+      </p:nvGrpSpPr>
+      <p:grpSpPr>
+        <a:xfrm>
+          <a:off x="0" y="0"/>
+          <a:ext cx="0" cy="0"/>
+          <a:chOff x="0" y="0"/>
+          <a:chExt cx="0" cy="0"/>
+        </a:xfrm>
+      </p:grpSpPr>
+      <p:sp>
+        <p:nvSpPr>
+          <p:cNvPr id="2" name="Slide Image Placeholder 1"/>
+          <p:cNvSpPr>
+            <a:spLocks noGrp="1"/>
+          </p:cNvSpPr>
+          <p:nvPr>
+            <p:ph type="sldImg" idx="2"/>
+          </p:nvPr>
+        </p:nvSpPr>
+        <p:spPr/>
+      </p:sp>
+      <p:sp>
+        <p:nvSpPr>
+          <p:cNvPr id="3" name="Notes Placeholder 2"/>
+          <p:cNvSpPr>
+            <a:spLocks noGrp="1"/>
+          </p:cNvSpPr>
+          <p:nvPr>
+            <p:ph type="body" idx="3" sz="quarter"/>
+          </p:nvPr>
+        </p:nvSpPr>
+        <p:spPr/>
+        <p:txBody>
+          <a:bodyPr/>
+          <a:lstStyle/>
+          <a:p>
+            <a:r>
+              <a:t>Teach the test-and-fix discipline — introduced here (PC 2.6), completed in Topic 8/9 once compute</a:t>
+            </a:r>
+          </a:p>
+          <a:p>
+            <a:r>
+              <a:t>exists. This is the "evidence it works", not just "it's built" mindset.</a:t>
+            </a:r>
+          </a:p>
+          <a:p>
+            <a:r>
+              <a:t>• After building, CONFIRM reachability: external access IN (reach the service over the VPN) and access</a:t>
+            </a:r>
+          </a:p>
+          <a:p>
+            <a:r>
+              <a:t>  BETWEEN tiers (app → db). Building isn't done until it's tested.</a:t>
+            </a:r>
+          </a:p>
+          <a:p>
+            <a:r>
+              <a:t>• Reachability Analyzer traces the path and NAMES the blocking component when something can't connect</a:t>
+            </a:r>
+          </a:p>
+          <a:p>
+            <a:r>
+              <a:t>  — it turns "it doesn't work" into "this rule is blocking it".</a:t>
+            </a:r>
+          </a:p>
+          <a:p>
+            <a:r>
+              <a:t>• The bolded line — VPC flow logs show ACCEPT / REJECT; a REJECT is usually a missing SG rule or a</a:t>
+            </a:r>
+          </a:p>
+          <a:p>
+            <a:r>
+              <a:t>  missing route. Teach the reflex: read the log, find the block, fix, retest, capture.</a:t>
+            </a:r>
+          </a:p>
+          <a:p>
+            <a:r>
+              <a:t>• Be honest about scope: full app → db testing completes in Topic 8 once compute exists — here they</a:t>
+            </a:r>
+          </a:p>
+          <a:p>
+            <a:r>
+              <a:t>  test what exists so far.</a:t>
+            </a:r>
+          </a:p>
+          <a:p>
+            <a:r>
+              <a:t>Misconception to pre-empt: "no error means it's correct." Absence of an error isn't proof — you have</a:t>
+            </a:r>
+          </a:p>
+          <a:p>
+            <a:r>
+              <a:t>to actively test the paths the design requires and evidence the result.</a:t>
+            </a:r>
+          </a:p>
+          <a:p>
+            <a:r>
+              <a:t>Question to pose: "Staff can't reach Ledgerline over the VPN — what two things do you check first?"</a:t>
+            </a:r>
+          </a:p>
+          <a:p>
+            <a:r>
+              <a:t>(the SG inbound rule and the route table / flow-log REJECT).</a:t>
+            </a:r>
+          </a:p>
+          <a:p>
+            <a:r>
+              <a:t>UoC/AT2 tie: ICTCLD401 PC 2.6 (test access + fix errors, introduced) + PE 3 → AT2 A2/A10.</a:t>
+            </a:r>
+          </a:p>
+        </p:txBody>
+      </p:sp>
+      <p:sp>
+        <p:nvSpPr>
+          <p:cNvPr id="4" name="Slide Number Placeholder 3"/>
+          <p:cNvSpPr>
+            <a:spLocks noGrp="1"/>
+          </p:cNvSpPr>
+          <p:nvPr>
+            <p:ph type="sldNum" idx="5" sz="quarter"/>
+          </p:nvPr>
+        </p:nvSpPr>
+        <p:spPr/>
+      </p:sp>
+    </p:spTree>
+  </p:cSld>
+  <p:clrMapOvr>
+    <a:masterClrMapping/>
+  </p:clrMapOvr>
+</p:notes>
+</file>
+
+<file path=ppt/notesSlides/notesSlide14.xml><?xml version="1.0" encoding="utf-8"?>
+<p:notes xmlns:a="http://schemas.openxmlformats.org/drawingml/2006/main" xmlns:p="http://schemas.openxmlformats.org/presentationml/2006/main" xmlns:r="http://schemas.openxmlformats.org/officeDocument/2006/relationships">
+  <p:cSld>
+    <p:spTree>
+      <p:nvGrpSpPr>
+        <p:cNvPr id="1" name=""/>
+        <p:cNvGrpSpPr/>
+        <p:nvPr/>
+      </p:nvGrpSpPr>
+      <p:grpSpPr>
+        <a:xfrm>
+          <a:off x="0" y="0"/>
+          <a:ext cx="0" cy="0"/>
+          <a:chOff x="0" y="0"/>
+          <a:chExt cx="0" cy="0"/>
+        </a:xfrm>
+      </p:grpSpPr>
+      <p:sp>
+        <p:nvSpPr>
+          <p:cNvPr id="2" name="Slide Image Placeholder 1"/>
+          <p:cNvSpPr>
+            <a:spLocks noGrp="1"/>
+          </p:cNvSpPr>
+          <p:nvPr>
+            <p:ph type="sldImg" idx="2"/>
+          </p:nvPr>
+        </p:nvSpPr>
+        <p:spPr/>
+      </p:sp>
+      <p:sp>
+        <p:nvSpPr>
+          <p:cNvPr id="3" name="Notes Placeholder 2"/>
+          <p:cNvSpPr>
+            <a:spLocks noGrp="1"/>
+          </p:cNvSpPr>
+          <p:nvPr>
+            <p:ph type="body" idx="3" sz="quarter"/>
+          </p:nvPr>
+        </p:nvSpPr>
+        <p:spPr/>
+        <p:txBody>
+          <a:bodyPr/>
+          <a:lstStyle/>
+          <a:p>
+            <a:r>
+              <a:t>DEMONSTRATE step for C3 — this is a LIVE instructor demo, not a recorded one. teach → DEMONSTRATE →</a:t>
+            </a:r>
+          </a:p>
+          <a:p>
+            <a:r>
+              <a:t>practice.</a:t>
+            </a:r>
+          </a:p>
+          <a:p/>
+          <a:p>
+            <a:r>
+              <a:t>WHERE TO FIND THE RECORDED DEMO: none fits — the recorded Route 53 demos in the catalogue (ACA M10</a:t>
+            </a:r>
+          </a:p>
+          <a:p>
+            <a:r>
+              <a:t>S52 Failover, S51 Simple Routing) are PUBLIC-routing demos and don't fit a PRIVATE hosted zone, so</a:t>
+            </a:r>
+          </a:p>
+          <a:p>
+            <a:r>
+              <a:t>do this one LIVE in the console. (Per the demos catalogue, Topic 7's Route 53 need has no recorded</a:t>
+            </a:r>
+          </a:p>
+          <a:p>
+            <a:r>
+              <a:t>private-zone demo — live is the intended fallback.)</a:t>
+            </a:r>
+          </a:p>
+          <a:p/>
+          <a:p>
+            <a:r>
+              <a:t>WHAT TO DEMONSTRATE (live, narrated):</a:t>
+            </a:r>
+          </a:p>
+          <a:p>
+            <a:r>
+              <a:t>1. In Route 53, create / confirm the PRIVATE hosted zone for the internal domain.</a:t>
+            </a:r>
+          </a:p>
+          <a:p>
+            <a:r>
+              <a:t>2. Add the record for the Ledgerline name (and note the ACM certificate).</a:t>
+            </a:r>
+          </a:p>
+          <a:p>
+            <a:r>
+              <a:t>3. From a test point, resolve the name and check reachability.</a:t>
+            </a:r>
+          </a:p>
+          <a:p>
+            <a:r>
+              <a:t>4. If it's blocked, read the flow logs / Reachability Analyzer and fix the SG or route — then retest.</a:t>
+            </a:r>
+          </a:p>
+          <a:p/>
+          <a:p>
+            <a:r>
+              <a:t>WHAT TO EMPHASISE:</a:t>
+            </a:r>
+          </a:p>
+          <a:p>
+            <a:r>
+              <a:t>• PRIVATE zone — show it's associated with the VPC; the name resolves only inside, not on the internet.</a:t>
+            </a:r>
+          </a:p>
+          <a:p>
+            <a:r>
+              <a:t>• Resolve the NAME, not the IP — prove DNS is doing its job.</a:t>
+            </a:r>
+          </a:p>
+          <a:p>
+            <a:r>
+              <a:t>• Model the fix loop live: deliberately hit (or narrate) a REJECT, read it, fix the SG/route, retest —</a:t>
+            </a:r>
+          </a:p>
+          <a:p>
+            <a:r>
+              <a:t>  this is exactly the PC 2.6 discipline they're assessed on.</a:t>
+            </a:r>
+          </a:p>
+          <a:p>
+            <a:r>
+              <a:t>• Narrate evidence capture — the DNS config and the test result both go in the log, Region visible.</a:t>
+            </a:r>
+          </a:p>
+          <a:p>
+            <a:r>
+              <a:t>PREP: lab open with the Topic-7 network already built (or a prepared account), Solution Design C8</a:t>
+            </a:r>
+          </a:p>
+          <a:p>
+            <a:r>
+              <a:t>handy for the hostname, Reachability Analyzer/flow logs ready to show. ~10 min live.</a:t>
+            </a:r>
+          </a:p>
+        </p:txBody>
+      </p:sp>
+      <p:sp>
+        <p:nvSpPr>
+          <p:cNvPr id="4" name="Slide Number Placeholder 3"/>
+          <p:cNvSpPr>
+            <a:spLocks noGrp="1"/>
+          </p:cNvSpPr>
+          <p:nvPr>
+            <p:ph type="sldNum" idx="5" sz="quarter"/>
+          </p:nvPr>
+        </p:nvSpPr>
+        <p:spPr/>
+      </p:sp>
+    </p:spTree>
+  </p:cSld>
+  <p:clrMapOvr>
+    <a:masterClrMapping/>
+  </p:clrMapOvr>
+</p:notes>
+</file>
+
+<file path=ppt/notesSlides/notesSlide15.xml><?xml version="1.0" encoding="utf-8"?>
+<p:notes xmlns:a="http://schemas.openxmlformats.org/drawingml/2006/main" xmlns:p="http://schemas.openxmlformats.org/presentationml/2006/main" xmlns:r="http://schemas.openxmlformats.org/officeDocument/2006/relationships">
+  <p:cSld>
+    <p:spTree>
+      <p:nvGrpSpPr>
+        <p:cNvPr id="1" name=""/>
+        <p:cNvGrpSpPr/>
+        <p:nvPr/>
+      </p:nvGrpSpPr>
+      <p:grpSpPr>
+        <a:xfrm>
+          <a:off x="0" y="0"/>
+          <a:ext cx="0" cy="0"/>
+          <a:chOff x="0" y="0"/>
+          <a:chExt cx="0" cy="0"/>
+        </a:xfrm>
+      </p:grpSpPr>
+      <p:sp>
+        <p:nvSpPr>
+          <p:cNvPr id="2" name="Slide Image Placeholder 1"/>
+          <p:cNvSpPr>
+            <a:spLocks noGrp="1"/>
+          </p:cNvSpPr>
+          <p:nvPr>
+            <p:ph type="sldImg" idx="2"/>
+          </p:nvPr>
+        </p:nvSpPr>
+        <p:spPr/>
+      </p:sp>
+      <p:sp>
+        <p:nvSpPr>
+          <p:cNvPr id="3" name="Notes Placeholder 2"/>
+          <p:cNvSpPr>
+            <a:spLocks noGrp="1"/>
+          </p:cNvSpPr>
+          <p:nvPr>
+            <p:ph type="body" idx="3" sz="quarter"/>
+          </p:nvPr>
+        </p:nvSpPr>
+        <p:spPr/>
+        <p:txBody>
+          <a:bodyPr/>
+          <a:lstStyle/>
+          <a:p>
+            <a:r>
+              <a:t>Facilitation — the closing C3 hands-on: finish the network tier with DNS, then test what exists.</a:t>
+            </a:r>
+          </a:p>
+          <a:p>
+            <a:r>
+              <a:t>Straight after the live demo.</a:t>
+            </a:r>
+          </a:p>
+          <a:p>
+            <a:r>
+              <a:t>Tell students, in these words: "In the lab, finish the network tier — create the internal DNS name,</a:t>
+            </a:r>
+          </a:p>
+          <a:p>
+            <a:r>
+              <a:t>then test the paths you can test so far and fix anything that's blocked. Capture evidence throughout."</a:t>
+            </a:r>
+          </a:p>
+          <a:p>
+            <a:r>
+              <a:t>The task, step by step (put on the board / read out):</a:t>
+            </a:r>
+          </a:p>
+          <a:p>
+            <a:r>
+              <a:t>1. Create the PRIVATE hosted zone + the record for the internal hostname (note the ACM cert; confirm</a:t>
+            </a:r>
+          </a:p>
+          <a:p>
+            <a:r>
+              <a:t>   the exact name is the C8 decision).</a:t>
+            </a:r>
+          </a:p>
+          <a:p>
+            <a:r>
+              <a:t>2. Run reachability tests for what exists so far (the network paths; full app → db waits for Topic 8).</a:t>
+            </a:r>
+          </a:p>
+          <a:p>
+            <a:r>
+              <a:t>3. If a test is blocked, read the flow logs / Reachability Analyzer, fix the SG or route, and retest.</a:t>
+            </a:r>
+          </a:p>
+          <a:p>
+            <a:r>
+              <a:t>Must produce (the AT2 evidence): the DNS config screenshot AND a test result — plus a note of any fix</a:t>
+            </a:r>
+          </a:p>
+          <a:p>
+            <a:r>
+              <a:t>made (what was blocked, what you changed).</a:t>
+            </a:r>
+          </a:p>
+          <a:p>
+            <a:r>
+              <a:t>Timing: ~15 min. Where they get stuck: expecting to test app → db when there's no compute yet — scope</a:t>
+            </a:r>
+          </a:p>
+          <a:p>
+            <a:r>
+              <a:t>them to the paths that exist; and forgetting to associate the private zone with the VPC (name won't</a:t>
+            </a:r>
+          </a:p>
+          <a:p>
+            <a:r>
+              <a:t>resolve).</a:t>
+            </a:r>
+          </a:p>
+          <a:p>
+            <a:r>
+              <a:t>Share-back: ask a student who hit a REJECT to narrate their fix loop — the fix, not just the pass, is</a:t>
+            </a:r>
+          </a:p>
+          <a:p>
+            <a:r>
+              <a:t>the assessable skill.</a:t>
+            </a:r>
+          </a:p>
+          <a:p>
+            <a:r>
+              <a:t>No-leakage note: practice on the Accounting design (internal name); AT2 assesses the same skill on the</a:t>
+            </a:r>
+          </a:p>
+          <a:p>
+            <a:r>
+              <a:t>LMS — comparable, not identical.</a:t>
+            </a:r>
+          </a:p>
+        </p:txBody>
+      </p:sp>
+      <p:sp>
+        <p:nvSpPr>
+          <p:cNvPr id="4" name="Slide Number Placeholder 3"/>
+          <p:cNvSpPr>
+            <a:spLocks noGrp="1"/>
+          </p:cNvSpPr>
+          <p:nvPr>
+            <p:ph type="sldNum" idx="5" sz="quarter"/>
+          </p:nvPr>
+        </p:nvSpPr>
+        <p:spPr/>
+      </p:sp>
+    </p:spTree>
+  </p:cSld>
+  <p:clrMapOvr>
+    <a:masterClrMapping/>
+  </p:clrMapOvr>
+</p:notes>
+</file>
+
+<file path=ppt/notesSlides/notesSlide2.xml><?xml version="1.0" encoding="utf-8"?>
+<p:notes xmlns:a="http://schemas.openxmlformats.org/drawingml/2006/main" xmlns:p="http://schemas.openxmlformats.org/presentationml/2006/main" xmlns:r="http://schemas.openxmlformats.org/officeDocument/2006/relationships">
+  <p:cSld>
+    <p:spTree>
+      <p:nvGrpSpPr>
+        <p:cNvPr id="1" name=""/>
+        <p:cNvGrpSpPr/>
+        <p:nvPr/>
+      </p:nvGrpSpPr>
+      <p:grpSpPr>
+        <a:xfrm>
+          <a:off x="0" y="0"/>
+          <a:ext cx="0" cy="0"/>
+          <a:chOff x="0" y="0"/>
+          <a:chExt cx="0" cy="0"/>
+        </a:xfrm>
+      </p:grpSpPr>
+      <p:sp>
+        <p:nvSpPr>
+          <p:cNvPr id="2" name="Slide Image Placeholder 1"/>
+          <p:cNvSpPr>
+            <a:spLocks noGrp="1"/>
+          </p:cNvSpPr>
+          <p:nvPr>
+            <p:ph type="sldImg" idx="2"/>
+          </p:nvPr>
+        </p:nvSpPr>
+        <p:spPr/>
+      </p:sp>
+      <p:sp>
+        <p:nvSpPr>
+          <p:cNvPr id="3" name="Notes Placeholder 2"/>
+          <p:cNvSpPr>
+            <a:spLocks noGrp="1"/>
+          </p:cNvSpPr>
+          <p:nvPr>
+            <p:ph type="body" idx="3" sz="quarter"/>
+          </p:nvPr>
+        </p:nvSpPr>
+        <p:spPr/>
+        <p:txBody>
+          <a:bodyPr/>
+          <a:lstStyle/>
+          <a:p>
+            <a:r>
+              <a:t>Primer — vendor-neutral fundamentals BEFORE any AWS. Don't assume a networking baseline; some</a:t>
+            </a:r>
+          </a:p>
+          <a:p>
+            <a:r>
+              <a:t>students meet IP/CIDR for the first time here. Use the IP/CIDR image.</a:t>
+            </a:r>
+          </a:p>
+          <a:p>
+            <a:r>
+              <a:t>• Network = machines connected to share resources; it can be split into smaller pieces (subnets).</a:t>
+            </a:r>
+          </a:p>
+          <a:p>
+            <a:r>
+              <a:t>• IP address = a unique numeric label for a machine (e.g. 10.0.0.17) — like a street address.</a:t>
+            </a:r>
+          </a:p>
+          <a:p>
+            <a:r>
+              <a:t>• CIDR (the bolded line, the hard bit): 10.0.0.0/16 describes a RANGE; the /number says how many</a:t>
+            </a:r>
+          </a:p>
+          <a:p>
+            <a:r>
+              <a:t>  bits are fixed. Small /number = big range; big /number = small range. Give the /16-vs-/28 feel</a:t>
+            </a:r>
+          </a:p>
+          <a:p>
+            <a:r>
+              <a:t>  rather than the binary maths — that's enough for building to a supplied design.</a:t>
+            </a:r>
+          </a:p>
+          <a:p>
+            <a:r>
+              <a:t>• Routers/gateways move traffic between networks — sets up the VPC gateways two slides on.</a:t>
+            </a:r>
+          </a:p>
+          <a:p>
+            <a:r>
+              <a:t>Misconception to pre-empt: "the /16 is 16 addresses." No — the slash counts FIXED bits, not</a:t>
+            </a:r>
+          </a:p>
+          <a:p>
+            <a:r>
+              <a:t>addresses; /16 is a large block, /28 a tiny one.</a:t>
+            </a:r>
+          </a:p>
+          <a:p>
+            <a:r>
+              <a:t>Question to pose: "Which is the bigger network — a /16 or a /24?" (/16 — fewer fixed bits, more room).</a:t>
+            </a:r>
+          </a:p>
+          <a:p>
+            <a:r>
+              <a:t>UoC/AT2 tie: ICTCLD401 KE 5 (virtual networks) — the vocabulary the VPC build rests on.</a:t>
+            </a:r>
+          </a:p>
+          <a:p>
+            <a:r>
+              <a:t>[Primer slide — reuses ACF M05 S5–S9; keep it brisk, it's foundation for the AWS slides.]</a:t>
+            </a:r>
+          </a:p>
+        </p:txBody>
+      </p:sp>
+      <p:sp>
+        <p:nvSpPr>
+          <p:cNvPr id="4" name="Slide Number Placeholder 3"/>
+          <p:cNvSpPr>
+            <a:spLocks noGrp="1"/>
+          </p:cNvSpPr>
+          <p:nvPr>
+            <p:ph type="sldNum" idx="5" sz="quarter"/>
+          </p:nvPr>
+        </p:nvSpPr>
+        <p:spPr/>
+      </p:sp>
+    </p:spTree>
+  </p:cSld>
+  <p:clrMapOvr>
+    <a:masterClrMapping/>
+  </p:clrMapOvr>
+</p:notes>
+</file>
+
+<file path=ppt/notesSlides/notesSlide3.xml><?xml version="1.0" encoding="utf-8"?>
+<p:notes xmlns:a="http://schemas.openxmlformats.org/drawingml/2006/main" xmlns:p="http://schemas.openxmlformats.org/presentationml/2006/main" xmlns:r="http://schemas.openxmlformats.org/officeDocument/2006/relationships">
+  <p:cSld>
+    <p:spTree>
+      <p:nvGrpSpPr>
+        <p:cNvPr id="1" name=""/>
+        <p:cNvGrpSpPr/>
+        <p:nvPr/>
+      </p:nvGrpSpPr>
+      <p:grpSpPr>
+        <a:xfrm>
+          <a:off x="0" y="0"/>
+          <a:ext cx="0" cy="0"/>
+          <a:chOff x="0" y="0"/>
+          <a:chExt cx="0" cy="0"/>
+        </a:xfrm>
+      </p:grpSpPr>
+      <p:sp>
+        <p:nvSpPr>
+          <p:cNvPr id="2" name="Slide Image Placeholder 1"/>
+          <p:cNvSpPr>
+            <a:spLocks noGrp="1"/>
+          </p:cNvSpPr>
+          <p:nvPr>
+            <p:ph type="sldImg" idx="2"/>
+          </p:nvPr>
+        </p:nvSpPr>
+        <p:spPr/>
+      </p:sp>
+      <p:sp>
+        <p:nvSpPr>
+          <p:cNvPr id="3" name="Notes Placeholder 2"/>
+          <p:cNvSpPr>
+            <a:spLocks noGrp="1"/>
+          </p:cNvSpPr>
+          <p:nvPr>
+            <p:ph type="body" idx="3" sz="quarter"/>
+          </p:nvPr>
+        </p:nvSpPr>
+        <p:spPr/>
+        <p:txBody>
+          <a:bodyPr/>
+          <a:lstStyle/>
+          <a:p>
+            <a:r>
+              <a:t>The AWS-context teach after the primer — this is the core C1 concept. Teach it deliberately.</a:t>
+            </a:r>
+          </a:p>
+          <a:p>
+            <a:r>
+              <a:t>• A VPC is a logically isolated slice of AWS that YOU define — your own private virtual network.</a:t>
+            </a:r>
+          </a:p>
+          <a:p>
+            <a:r>
+              <a:t>• It belongs to ONE Region and can span the AZs in it; you size it with a CIDR block (largest /16,</a:t>
+            </a:r>
+          </a:p>
+          <a:p>
+            <a:r>
+              <a:t>  smallest /28). Stress: you can't change the CIDR later — sizing is a decision, not a default.</a:t>
+            </a:r>
+          </a:p>
+          <a:p>
+            <a:r>
+              <a:t>• The bolded line: you divide the VPC into subnets, each in one AZ, classified public or private.</a:t>
+            </a:r>
+          </a:p>
+          <a:p>
+            <a:r>
+              <a:t>  "Public/private" is about whether there's a path to the internet, not about secrecy — flag it now</a:t>
+            </a:r>
+          </a:p>
+          <a:p>
+            <a:r>
+              <a:t>  because it drives the next activity.</a:t>
+            </a:r>
+          </a:p>
+          <a:p>
+            <a:r>
+              <a:t>Misconception to pre-empt: "a VPC lives in an AZ." No — a VPC is Region-scoped and spans AZs; a</a:t>
+            </a:r>
+          </a:p>
+          <a:p>
+            <a:r>
+              <a:t>SUBNET lives in one AZ. This is the Topic 1 Region/AZ hierarchy made concrete.</a:t>
+            </a:r>
+          </a:p>
+          <a:p>
+            <a:r>
+              <a:t>Question to pose: "Our design's VPC is 10.0.0.0/16 — why give it that much room when Ledgerline is</a:t>
+            </a:r>
+          </a:p>
+          <a:p>
+            <a:r>
+              <a:t>small?" (headroom to add subnets/tiers later without rebuilding).</a:t>
+            </a:r>
+          </a:p>
+          <a:p>
+            <a:r>
+              <a:t>UoC/AT2 tie: ICTCLD401 PC 2.2 (create a virtual multi-tier network) + KE 5 → AT2 §4.2. This is the</a:t>
+            </a:r>
+          </a:p>
+          <a:p>
+            <a:r>
+              <a:t>VPC students build to the supplied design.</a:t>
+            </a:r>
+          </a:p>
+        </p:txBody>
+      </p:sp>
+      <p:sp>
+        <p:nvSpPr>
+          <p:cNvPr id="4" name="Slide Number Placeholder 3"/>
+          <p:cNvSpPr>
+            <a:spLocks noGrp="1"/>
+          </p:cNvSpPr>
+          <p:nvPr>
+            <p:ph type="sldNum" idx="5" sz="quarter"/>
+          </p:nvPr>
+        </p:nvSpPr>
+        <p:spPr/>
+      </p:sp>
+    </p:spTree>
+  </p:cSld>
+  <p:clrMapOvr>
+    <a:masterClrMapping/>
+  </p:clrMapOvr>
+</p:notes>
+</file>
+
+<file path=ppt/notesSlides/notesSlide4.xml><?xml version="1.0" encoding="utf-8"?>
+<p:notes xmlns:a="http://schemas.openxmlformats.org/drawingml/2006/main" xmlns:p="http://schemas.openxmlformats.org/presentationml/2006/main" xmlns:r="http://schemas.openxmlformats.org/officeDocument/2006/relationships">
+  <p:cSld>
+    <p:spTree>
+      <p:nvGrpSpPr>
+        <p:cNvPr id="1" name=""/>
+        <p:cNvGrpSpPr/>
+        <p:nvPr/>
+      </p:nvGrpSpPr>
+      <p:grpSpPr>
+        <a:xfrm>
+          <a:off x="0" y="0"/>
+          <a:ext cx="0" cy="0"/>
+          <a:chOff x="0" y="0"/>
+          <a:chExt cx="0" cy="0"/>
+        </a:xfrm>
+      </p:grpSpPr>
+      <p:sp>
+        <p:nvSpPr>
+          <p:cNvPr id="2" name="Slide Image Placeholder 1"/>
+          <p:cNvSpPr>
+            <a:spLocks noGrp="1"/>
+          </p:cNvSpPr>
+          <p:nvPr>
+            <p:ph type="sldImg" idx="2"/>
+          </p:nvPr>
+        </p:nvSpPr>
+        <p:spPr/>
+      </p:sp>
+      <p:sp>
+        <p:nvSpPr>
+          <p:cNvPr id="3" name="Notes Placeholder 2"/>
+          <p:cNvSpPr>
+            <a:spLocks noGrp="1"/>
+          </p:cNvSpPr>
+          <p:nvPr>
+            <p:ph type="body" idx="3" sz="quarter"/>
+          </p:nvPr>
+        </p:nvSpPr>
+        <p:spPr/>
+        <p:txBody>
+          <a:bodyPr/>
+          <a:lstStyle/>
+          <a:p>
+            <a:r>
+              <a:t>Teach how traffic actually reaches (or doesn't reach) a subnet — the mechanism behind public vs</a:t>
+            </a:r>
+          </a:p>
+          <a:p>
+            <a:r>
+              <a:t>private. Use the VPC-anatomy diagram; walk it, don't read.</a:t>
+            </a:r>
+          </a:p>
+          <a:p>
+            <a:r>
+              <a:t>• Route table = rules that direct a subnet's traffic; every table has a built-in LOCAL route so</a:t>
+            </a:r>
+          </a:p>
+          <a:p>
+            <a:r>
+              <a:t>  anything inside the VPC can talk without extra config.</a:t>
+            </a:r>
+          </a:p>
+          <a:p>
+            <a:r>
+              <a:t>• Public subnet = a 0.0.0.0/0 route to an Internet Gateway → direct internet path.</a:t>
+            </a:r>
+          </a:p>
+          <a:p>
+            <a:r>
+              <a:t>• Private subnet = no such route → no direct internet path. "Public/private is decided by the ROUTE</a:t>
+            </a:r>
+          </a:p>
+          <a:p>
+            <a:r>
+              <a:t>  TABLE" is the sentence to land.</a:t>
+            </a:r>
+          </a:p>
+          <a:p>
+            <a:r>
+              <a:t>• The bolded line — NAT gateway: lets private resources reach OUT (e.g. patching) WITHOUT being</a:t>
+            </a:r>
+          </a:p>
+          <a:p>
+            <a:r>
+              <a:t>  reachable from the internet. Outbound-only. This is exactly the design's egress-only model.</a:t>
+            </a:r>
+          </a:p>
+          <a:p>
+            <a:r>
+              <a:t>Misconception to pre-empt: "a NAT gateway lets the internet into the private subnet." No — it's</a:t>
+            </a:r>
+          </a:p>
+          <a:p>
+            <a:r>
+              <a:t>one-way OUT; nothing inbound. Students routinely invert this.</a:t>
+            </a:r>
+          </a:p>
+          <a:p>
+            <a:r>
+              <a:t>Question to pose: "The database subnet must never be reachable from the internet but still needs OS</a:t>
+            </a:r>
+          </a:p>
+          <a:p>
+            <a:r>
+              <a:t>patches — how?" (private subnet, no IGW route, patches via the NAT gateway).</a:t>
+            </a:r>
+          </a:p>
+          <a:p>
+            <a:r>
+              <a:t>UoC/AT2 tie: ICTCLD401 PC 2.2 / KE 5 (traffic routing) → AT2 §4.2 (subnets + routing).</a:t>
+            </a:r>
+          </a:p>
+        </p:txBody>
+      </p:sp>
+      <p:sp>
+        <p:nvSpPr>
+          <p:cNvPr id="4" name="Slide Number Placeholder 3"/>
+          <p:cNvSpPr>
+            <a:spLocks noGrp="1"/>
+          </p:cNvSpPr>
+          <p:nvPr>
+            <p:ph type="sldNum" idx="5" sz="quarter"/>
+          </p:nvPr>
+        </p:nvSpPr>
+        <p:spPr/>
+      </p:sp>
+    </p:spTree>
+  </p:cSld>
+  <p:clrMapOvr>
+    <a:masterClrMapping/>
+  </p:clrMapOvr>
+</p:notes>
+</file>
+
+<file path=ppt/notesSlides/notesSlide5.xml><?xml version="1.0" encoding="utf-8"?>
+<p:notes xmlns:a="http://schemas.openxmlformats.org/drawingml/2006/main" xmlns:p="http://schemas.openxmlformats.org/presentationml/2006/main" xmlns:r="http://schemas.openxmlformats.org/officeDocument/2006/relationships">
+  <p:cSld>
+    <p:spTree>
+      <p:nvGrpSpPr>
+        <p:cNvPr id="1" name=""/>
+        <p:cNvGrpSpPr/>
+        <p:nvPr/>
+      </p:nvGrpSpPr>
+      <p:grpSpPr>
+        <a:xfrm>
+          <a:off x="0" y="0"/>
+          <a:ext cx="0" cy="0"/>
+          <a:chOff x="0" y="0"/>
+          <a:chExt cx="0" cy="0"/>
+        </a:xfrm>
+      </p:grpSpPr>
+      <p:sp>
+        <p:nvSpPr>
+          <p:cNvPr id="2" name="Slide Image Placeholder 1"/>
+          <p:cNvSpPr>
+            <a:spLocks noGrp="1"/>
+          </p:cNvSpPr>
+          <p:nvPr>
+            <p:ph type="sldImg" idx="2"/>
+          </p:nvPr>
+        </p:nvSpPr>
+        <p:spPr/>
+      </p:sp>
+      <p:sp>
+        <p:nvSpPr>
+          <p:cNvPr id="3" name="Notes Placeholder 2"/>
+          <p:cNvSpPr>
+            <a:spLocks noGrp="1"/>
+          </p:cNvSpPr>
+          <p:nvPr>
+            <p:ph type="body" idx="3" sz="quarter"/>
+          </p:nvPr>
+        </p:nvSpPr>
+        <p:spPr/>
+        <p:txBody>
+          <a:bodyPr/>
+          <a:lstStyle/>
+          <a:p>
+            <a:r>
+              <a:t>Facilitation — a quick sorting task that forces the public/private decision they'll make for real</a:t>
+            </a:r>
+          </a:p>
+          <a:p>
+            <a:r>
+              <a:t>in the lab. Whole-room or pairs, fast.</a:t>
+            </a:r>
+          </a:p>
+          <a:p>
+            <a:r>
+              <a:t>Tell students: "For each resource, decide the subnet it belongs in — public or private — and be</a:t>
+            </a:r>
+          </a:p>
+          <a:p>
+            <a:r>
+              <a:t>ready to say WHY in one line."</a:t>
+            </a:r>
+          </a:p>
+          <a:p>
+            <a:r>
+              <a:t>The four (put up): the database · a batch-processing job · the web/app server · a NAT gateway.</a:t>
+            </a:r>
+          </a:p>
+          <a:p>
+            <a:r>
+              <a:t>Expected landing: database → private; batch job → private; web/app server → private (behind a load</a:t>
+            </a:r>
+          </a:p>
+          <a:p>
+            <a:r>
+              <a:t>balancer); NAT gateway → public. The rule of thumb (bolded): anything that shouldn't be reachable</a:t>
+            </a:r>
+          </a:p>
+          <a:p>
+            <a:r>
+              <a:t>from the internet goes private; only internet-facing entry points and the NAT gateway go public.</a:t>
+            </a:r>
+          </a:p>
+          <a:p>
+            <a:r>
+              <a:t>Must produce: four placements, each with a one-line reason tied to "is it reachable from the net?"</a:t>
+            </a:r>
+          </a:p>
+          <a:p>
+            <a:r>
+              <a:t>Timing: ~10 min then share. Where they get stuck: they put the web/app server in a public subnet</a:t>
+            </a:r>
+          </a:p>
+          <a:p>
+            <a:r>
+              <a:t>because "users reach it" — push them to AWS's pattern (app tier private, behind a public ALB); the</a:t>
+            </a:r>
+          </a:p>
+          <a:p>
+            <a:r>
+              <a:t>LOAD BALANCER is the public entry point, not the server.</a:t>
+            </a:r>
+          </a:p>
+          <a:p>
+            <a:r>
+              <a:t>Share-back prompt: "Who put the app server public — what changes if it sits behind an ALB instead?"</a:t>
+            </a:r>
+          </a:p>
+          <a:p>
+            <a:r>
+              <a:t>No-leakage note: reasoning practice on the Accounting design; AT2 assesses the same call on the LMS.</a:t>
+            </a:r>
+          </a:p>
+        </p:txBody>
+      </p:sp>
+      <p:sp>
+        <p:nvSpPr>
+          <p:cNvPr id="4" name="Slide Number Placeholder 3"/>
+          <p:cNvSpPr>
+            <a:spLocks noGrp="1"/>
+          </p:cNvSpPr>
+          <p:nvPr>
+            <p:ph type="sldNum" idx="5" sz="quarter"/>
+          </p:nvPr>
+        </p:nvSpPr>
+        <p:spPr/>
+      </p:sp>
+    </p:spTree>
+  </p:cSld>
+  <p:clrMapOvr>
+    <a:masterClrMapping/>
+  </p:clrMapOvr>
+</p:notes>
+</file>
+
+<file path=ppt/notesSlides/notesSlide6.xml><?xml version="1.0" encoding="utf-8"?>
+<p:notes xmlns:a="http://schemas.openxmlformats.org/drawingml/2006/main" xmlns:p="http://schemas.openxmlformats.org/presentationml/2006/main" xmlns:r="http://schemas.openxmlformats.org/officeDocument/2006/relationships">
+  <p:cSld>
+    <p:spTree>
+      <p:nvGrpSpPr>
+        <p:cNvPr id="1" name=""/>
+        <p:cNvGrpSpPr/>
+        <p:nvPr/>
+      </p:nvGrpSpPr>
+      <p:grpSpPr>
+        <a:xfrm>
+          <a:off x="0" y="0"/>
+          <a:ext cx="0" cy="0"/>
+          <a:chOff x="0" y="0"/>
+          <a:chExt cx="0" cy="0"/>
+        </a:xfrm>
+      </p:grpSpPr>
+      <p:sp>
+        <p:nvSpPr>
+          <p:cNvPr id="2" name="Slide Image Placeholder 1"/>
+          <p:cNvSpPr>
+            <a:spLocks noGrp="1"/>
+          </p:cNvSpPr>
+          <p:nvPr>
+            <p:ph type="sldImg" idx="2"/>
+          </p:nvPr>
+        </p:nvSpPr>
+        <p:spPr/>
+      </p:sp>
+      <p:sp>
+        <p:nvSpPr>
+          <p:cNvPr id="3" name="Notes Placeholder 2"/>
+          <p:cNvSpPr>
+            <a:spLocks noGrp="1"/>
+          </p:cNvSpPr>
+          <p:nvPr>
+            <p:ph type="body" idx="3" sz="quarter"/>
+          </p:nvPr>
+        </p:nvSpPr>
+        <p:spPr/>
+        <p:txBody>
+          <a:bodyPr/>
+          <a:lstStyle/>
+          <a:p>
+            <a:r>
+              <a:t>Pivot from concept to the actual thing they build — the supplied design's network topology. Get</a:t>
+            </a:r>
+          </a:p>
+          <a:p>
+            <a:r>
+              <a:t>them into the Solution Design on the intranet; this is the spec they build to.</a:t>
+            </a:r>
+          </a:p>
+          <a:p>
+            <a:r>
+              <a:t>• The bolded line: open the Solution Design (§4.4) and study its network topology — you build to</a:t>
+            </a:r>
+          </a:p>
+          <a:p>
+            <a:r>
+              <a:t>  THAT, you don't invent it. Model reading a supplied design before touching the console.</a:t>
+            </a:r>
+          </a:p>
+          <a:p>
+            <a:r>
+              <a:t>• Walk the specifics: VPC 10.0.0.0/16 (room to expand), DNS resolution + flow logs on; subnets in</a:t>
+            </a:r>
+          </a:p>
+          <a:p>
+            <a:r>
+              <a:t>  the first AZ — public-egress-a (NAT only), private-app-a (app + internal ALB), private-data-a</a:t>
+            </a:r>
+          </a:p>
+          <a:p>
+            <a:r>
+              <a:t>  (database).</a:t>
+            </a:r>
+          </a:p>
+          <a:p>
+            <a:r>
+              <a:t>• Egress-only: the Internet Gateway is for outbound patching via NAT; NO inbound path from the</a:t>
+            </a:r>
+          </a:p>
+          <a:p>
+            <a:r>
+              <a:t>  internet. Staff reach the service over the campus Site-to-Site VPN; route tables set per tier.</a:t>
+            </a:r>
+          </a:p>
+          <a:p>
+            <a:r>
+              <a:t>Misconception to pre-empt: "public-egress means the public can get in." No — it's the subnet that</a:t>
+            </a:r>
+          </a:p>
+          <a:p>
+            <a:r>
+              <a:t>holds the NAT for OUTbound only; the name describes egress, not inbound access.</a:t>
+            </a:r>
+          </a:p>
+          <a:p>
+            <a:r>
+              <a:t>Question to pose: "Where does a member of YAT staff actually connect from, if there's no inbound</a:t>
+            </a:r>
+          </a:p>
+          <a:p>
+            <a:r>
+              <a:t>internet path?" (over the campus Site-to-Site VPN — a given in the design, not built here).</a:t>
+            </a:r>
+          </a:p>
+          <a:p>
+            <a:r>
+              <a:t>UoC/AT2 tie: PC 2.2 → AT2 §4.2; this is the concrete topology their build + evidence must match.</a:t>
+            </a:r>
+          </a:p>
+        </p:txBody>
+      </p:sp>
+      <p:sp>
+        <p:nvSpPr>
+          <p:cNvPr id="4" name="Slide Number Placeholder 3"/>
+          <p:cNvSpPr>
+            <a:spLocks noGrp="1"/>
+          </p:cNvSpPr>
+          <p:nvPr>
+            <p:ph type="sldNum" idx="5" sz="quarter"/>
+          </p:nvPr>
+        </p:nvSpPr>
+        <p:spPr/>
+      </p:sp>
+    </p:spTree>
+  </p:cSld>
+  <p:clrMapOvr>
+    <a:masterClrMapping/>
+  </p:clrMapOvr>
+</p:notes>
+</file>
+
+<file path=ppt/notesSlides/notesSlide7.xml><?xml version="1.0" encoding="utf-8"?>
+<p:notes xmlns:a="http://schemas.openxmlformats.org/drawingml/2006/main" xmlns:p="http://schemas.openxmlformats.org/presentationml/2006/main" xmlns:r="http://schemas.openxmlformats.org/officeDocument/2006/relationships">
+  <p:cSld>
+    <p:spTree>
+      <p:nvGrpSpPr>
+        <p:cNvPr id="1" name=""/>
+        <p:cNvGrpSpPr/>
+        <p:nvPr/>
+      </p:nvGrpSpPr>
+      <p:grpSpPr>
+        <a:xfrm>
+          <a:off x="0" y="0"/>
+          <a:ext cx="0" cy="0"/>
+          <a:chOff x="0" y="0"/>
+          <a:chExt cx="0" cy="0"/>
+        </a:xfrm>
+      </p:grpSpPr>
+      <p:sp>
+        <p:nvSpPr>
+          <p:cNvPr id="2" name="Slide Image Placeholder 1"/>
+          <p:cNvSpPr>
+            <a:spLocks noGrp="1"/>
+          </p:cNvSpPr>
+          <p:nvPr>
+            <p:ph type="sldImg" idx="2"/>
+          </p:nvPr>
+        </p:nvSpPr>
+        <p:spPr/>
+      </p:sp>
+      <p:sp>
+        <p:nvSpPr>
+          <p:cNvPr id="3" name="Notes Placeholder 2"/>
+          <p:cNvSpPr>
+            <a:spLocks noGrp="1"/>
+          </p:cNvSpPr>
+          <p:nvPr>
+            <p:ph type="body" idx="3" sz="quarter"/>
+          </p:nvPr>
+        </p:nvSpPr>
+        <p:spPr/>
+        <p:txBody>
+          <a:bodyPr/>
+          <a:lstStyle/>
+          <a:p>
+            <a:r>
+              <a:t>Primer for C2 — what a firewall / stateful packet filter IS, before AWS security groups. Bespoke</a:t>
+            </a:r>
+          </a:p>
+          <a:p>
+            <a:r>
+              <a:t>primer (ACA M07 S23 analogy); some students have never met the concept.</a:t>
+            </a:r>
+          </a:p>
+          <a:p>
+            <a:r>
+              <a:t>• A firewall filters traffic by rule — it decides what's allowed through.</a:t>
+            </a:r>
+          </a:p>
+          <a:p>
+            <a:r>
+              <a:t>• The bolded analogy: a security group is like an apartment door — it lets in only the right key,</a:t>
+            </a:r>
+          </a:p>
+          <a:p>
+            <a:r>
+              <a:t>  protecting ONE resource (not the whole building). Contrast with a building's front gate (that's</a:t>
+            </a:r>
+          </a:p>
+          <a:p>
+            <a:r>
+              <a:t>  more like a network ACL — out of scope here, don't go there).</a:t>
+            </a:r>
+          </a:p>
+          <a:p>
+            <a:r>
+              <a:t>• Traffic is identified by address + PORT: 443 = HTTPS, 1433 = SQL Server, 3389 = RDP. Give them</a:t>
+            </a:r>
+          </a:p>
+          <a:p>
+            <a:r>
+              <a:t>  these three because the design's rules use exactly them.</a:t>
+            </a:r>
+          </a:p>
+          <a:p>
+            <a:r>
+              <a:t>• Least privilege: open only the ports the job needs, only to who needs them — the whole ethic of</a:t>
+            </a:r>
+          </a:p>
+          <a:p>
+            <a:r>
+              <a:t>  the next two slides.</a:t>
+            </a:r>
+          </a:p>
+          <a:p>
+            <a:r>
+              <a:t>Misconception to pre-empt: "a firewall blocks bad traffic." More precisely, it DENIES everything by</a:t>
+            </a:r>
+          </a:p>
+          <a:p>
+            <a:r>
+              <a:t>default and you ALLOW what's needed — it's a whitelist, not a bad-traffic detector.</a:t>
+            </a:r>
+          </a:p>
+          <a:p>
+            <a:r>
+              <a:t>Question to pose: "The database speaks SQL Server on 1433 — who should be allowed to reach that</a:t>
+            </a:r>
+          </a:p>
+          <a:p>
+            <a:r>
+              <a:t>port?" (only the app tier — nobody else; sets up the chain).</a:t>
+            </a:r>
+          </a:p>
+          <a:p>
+            <a:r>
+              <a:t>UoC/AT2 tie: ICTCLD401 KE 9 (limiting network traffic within virtual networks) → AT2 §4.2.</a:t>
+            </a:r>
+          </a:p>
+        </p:txBody>
+      </p:sp>
+      <p:sp>
+        <p:nvSpPr>
+          <p:cNvPr id="4" name="Slide Number Placeholder 3"/>
+          <p:cNvSpPr>
+            <a:spLocks noGrp="1"/>
+          </p:cNvSpPr>
+          <p:nvPr>
+            <p:ph type="sldNum" idx="5" sz="quarter"/>
+          </p:nvPr>
+        </p:nvSpPr>
+        <p:spPr/>
+      </p:sp>
+    </p:spTree>
+  </p:cSld>
+  <p:clrMapOvr>
+    <a:masterClrMapping/>
+  </p:clrMapOvr>
+</p:notes>
+</file>
+
+<file path=ppt/notesSlides/notesSlide8.xml><?xml version="1.0" encoding="utf-8"?>
+<p:notes xmlns:a="http://schemas.openxmlformats.org/drawingml/2006/main" xmlns:p="http://schemas.openxmlformats.org/presentationml/2006/main" xmlns:r="http://schemas.openxmlformats.org/officeDocument/2006/relationships">
+  <p:cSld>
+    <p:spTree>
+      <p:nvGrpSpPr>
+        <p:cNvPr id="1" name=""/>
+        <p:cNvGrpSpPr/>
+        <p:nvPr/>
+      </p:nvGrpSpPr>
+      <p:grpSpPr>
+        <a:xfrm>
+          <a:off x="0" y="0"/>
+          <a:ext cx="0" cy="0"/>
+          <a:chOff x="0" y="0"/>
+          <a:chExt cx="0" cy="0"/>
+        </a:xfrm>
+      </p:grpSpPr>
+      <p:sp>
+        <p:nvSpPr>
+          <p:cNvPr id="2" name="Slide Image Placeholder 1"/>
+          <p:cNvSpPr>
+            <a:spLocks noGrp="1"/>
+          </p:cNvSpPr>
+          <p:nvPr>
+            <p:ph type="sldImg" idx="2"/>
+          </p:nvPr>
+        </p:nvSpPr>
+        <p:spPr/>
+      </p:sp>
+      <p:sp>
+        <p:nvSpPr>
+          <p:cNvPr id="3" name="Notes Placeholder 2"/>
+          <p:cNvSpPr>
+            <a:spLocks noGrp="1"/>
+          </p:cNvSpPr>
+          <p:nvPr>
+            <p:ph type="body" idx="3" sz="quarter"/>
+          </p:nvPr>
+        </p:nvSpPr>
+        <p:spPr/>
+        <p:txBody>
+          <a:bodyPr/>
+          <a:lstStyle/>
+          <a:p>
+            <a:r>
+              <a:t>The AWS-context teach for C2 — the properties that make security groups behave the way they do.</a:t>
+            </a:r>
+          </a:p>
+          <a:p>
+            <a:r>
+              <a:t>Teach the three behaviours precisely; students lose marks on these in AT2.</a:t>
+            </a:r>
+          </a:p>
+          <a:p>
+            <a:r>
+              <a:t>• A security group is a virtual firewall attached to a resource (an instance or interface) — per</a:t>
+            </a:r>
+          </a:p>
+          <a:p>
+            <a:r>
+              <a:t>  resource, not per subnet.</a:t>
+            </a:r>
+          </a:p>
+          <a:p>
+            <a:r>
+              <a:t>• STATEFUL: allow traffic in and the return traffic is automatically allowed out — you don't write</a:t>
+            </a:r>
+          </a:p>
+          <a:p>
+            <a:r>
+              <a:t>  a matching outbound rule. This is the one they forget.</a:t>
+            </a:r>
+          </a:p>
+          <a:p>
+            <a:r>
+              <a:t>• ALLOW-rules only, no deny; a brand-new SG blocks ALL inbound until you add rules (deny-by-default).</a:t>
+            </a:r>
+          </a:p>
+          <a:p>
+            <a:r>
+              <a:t>• The bolded line — the big idea for this design: you can name ANOTHER security group as the source.</a:t>
+            </a:r>
+          </a:p>
+          <a:p>
+            <a:r>
+              <a:t>  That's how tiers chain (allow 443 only FROM the load balancer's SG), instead of hard-coding IPs.</a:t>
+            </a:r>
+          </a:p>
+          <a:p>
+            <a:r>
+              <a:t>Misconception to pre-empt: "you must open the return port too." No — stateful means the reply is</a:t>
+            </a:r>
+          </a:p>
+          <a:p>
+            <a:r>
+              <a:t>automatic. Also "source must be an IP range" — no, it can be another SG.</a:t>
+            </a:r>
+          </a:p>
+          <a:p>
+            <a:r>
+              <a:t>Question to pose: "If the app server's IP changes, does a rule that allows FROM sg-app break?" (No —</a:t>
+            </a:r>
+          </a:p>
+          <a:p>
+            <a:r>
+              <a:t>SG-as-source follows the membership, not the address; that's why we chain by SG).</a:t>
+            </a:r>
+          </a:p>
+          <a:p>
+            <a:r>
+              <a:t>UoC/AT2 tie: KE 9 → AT2 §4.2 (the sg-alb → sg-app → sg-db chain). The table next shows the design's SGs.</a:t>
+            </a:r>
+          </a:p>
+        </p:txBody>
+      </p:sp>
+      <p:sp>
+        <p:nvSpPr>
+          <p:cNvPr id="4" name="Slide Number Placeholder 3"/>
+          <p:cNvSpPr>
+            <a:spLocks noGrp="1"/>
+          </p:cNvSpPr>
+          <p:nvPr>
+            <p:ph type="sldNum" idx="5" sz="quarter"/>
+          </p:nvPr>
+        </p:nvSpPr>
+        <p:spPr/>
+      </p:sp>
+    </p:spTree>
+  </p:cSld>
+  <p:clrMapOvr>
+    <a:masterClrMapping/>
+  </p:clrMapOvr>
+</p:notes>
+</file>
+
+<file path=ppt/notesSlides/notesSlide9.xml><?xml version="1.0" encoding="utf-8"?>
+<p:notes xmlns:a="http://schemas.openxmlformats.org/drawingml/2006/main" xmlns:p="http://schemas.openxmlformats.org/presentationml/2006/main" xmlns:r="http://schemas.openxmlformats.org/officeDocument/2006/relationships">
+  <p:cSld>
+    <p:spTree>
+      <p:nvGrpSpPr>
+        <p:cNvPr id="1" name=""/>
+        <p:cNvGrpSpPr/>
+        <p:nvPr/>
+      </p:nvGrpSpPr>
+      <p:grpSpPr>
+        <a:xfrm>
+          <a:off x="0" y="0"/>
+          <a:ext cx="0" cy="0"/>
+          <a:chOff x="0" y="0"/>
+          <a:chExt cx="0" cy="0"/>
+        </a:xfrm>
+      </p:grpSpPr>
+      <p:sp>
+        <p:nvSpPr>
+          <p:cNvPr id="2" name="Slide Image Placeholder 1"/>
+          <p:cNvSpPr>
+            <a:spLocks noGrp="1"/>
+          </p:cNvSpPr>
+          <p:nvPr>
+            <p:ph type="sldImg" idx="2"/>
+          </p:nvPr>
+        </p:nvSpPr>
+        <p:spPr/>
+      </p:sp>
+      <p:sp>
+        <p:nvSpPr>
+          <p:cNvPr id="3" name="Notes Placeholder 2"/>
+          <p:cNvSpPr>
+            <a:spLocks noGrp="1"/>
+          </p:cNvSpPr>
+          <p:nvPr>
+            <p:ph type="body" idx="3" sz="quarter"/>
+          </p:nvPr>
+        </p:nvSpPr>
+        <p:spPr/>
+        <p:txBody>
+          <a:bodyPr/>
+          <a:lstStyle/>
+          <a:p>
+            <a:r>
+              <a:t>DEMONSTRATE step for C1+C2 — this is a RECORDED AWS demo; screen it, then have them build (activity</a:t>
+            </a:r>
+          </a:p>
+          <a:p>
+            <a:r>
+              <a:t>next). teach → DEMONSTRATE → practice.</a:t>
+            </a:r>
+          </a:p>
+          <a:p/>
+          <a:p>
+            <a:r>
+              <a:t>WHERE TO FIND THE RECORDED DEMO: AWS Academy Cloud Architecting → Module 07 (Creating a Networking</a:t>
+            </a:r>
+          </a:p>
+          <a:p>
+            <a:r>
+              <a:t>Environment) → slide 30, "Demo: Creating an Amazon VPC in the Console" (VPC + security groups +</a:t>
+            </a:r>
+          </a:p>
+          <a:p>
+            <a:r>
+              <a:t>Elastic IP), inside the ACA M07 instructor deck (original-materials/AWS-Instructor Presentations/…).</a:t>
+            </a:r>
+          </a:p>
+          <a:p>
+            <a:r>
+              <a:t>Instructor-facing — screen it in class, DON'T distribute to students. Preview it and cue it to this slide.</a:t>
+            </a:r>
+          </a:p>
+          <a:p/>
+          <a:p>
+            <a:r>
+              <a:t>WHAT TO DEMONSTRATE (follow the recorded demo, then relate each step to OUR design):</a:t>
+            </a:r>
+          </a:p>
+          <a:p>
+            <a:r>
+              <a:t>1. Create a public and a private subnet, each with its own route table.</a:t>
+            </a:r>
+          </a:p>
+          <a:p>
+            <a:r>
+              <a:t>2. Create an Internet Gateway, attach it to the VPC, configure the internet route.</a:t>
+            </a:r>
+          </a:p>
+          <a:p>
+            <a:r>
+              <a:t>3. Create a NAT gateway, assign an Elastic IP, add the private-subnet route.</a:t>
+            </a:r>
+          </a:p>
+          <a:p>
+            <a:r>
+              <a:t>4. Create a web-server security group and a database security group.</a:t>
+            </a:r>
+          </a:p>
+          <a:p/>
+          <a:p>
+            <a:r>
+              <a:t>WHAT TO EMPHASISE:</a:t>
+            </a:r>
+          </a:p>
+          <a:p>
+            <a:r>
+              <a:t>• Public vs private is decided by the ROUTE TABLE (IGW route or not) — point at it as it's built.</a:t>
+            </a:r>
+          </a:p>
+          <a:p>
+            <a:r>
+              <a:t>• NAT gateway is OUTBOUND only — say it as you add the Elastic IP; ties back to the egress-only design.</a:t>
+            </a:r>
+          </a:p>
+          <a:p>
+            <a:r>
+              <a:t>• SG-as-source when you build the DB SG — allow from the web SG, not an IP; the payoff of the SG teach.</a:t>
+            </a:r>
+          </a:p>
+          <a:p>
+            <a:r>
+              <a:t>• Narrate evidence capture — Region visible in every shot; students must screenshot for AT2, model it.</a:t>
+            </a:r>
+          </a:p>
+          <a:p>
+            <a:r>
+              <a:t>Note: the demo builds a generic VPC; OUR design is 10.0.0.0/16 with three named subnets — flag the deltas.</a:t>
+            </a:r>
+          </a:p>
+          <a:p>
+            <a:r>
+              <a:t>PREP: clean lab open, Solution Design §4.4 handy (names/CIDRs), demo queued. ~10–12 min to screen + narrate.</a:t>
+            </a:r>
+          </a:p>
+        </p:txBody>
+      </p:sp>
+      <p:sp>
+        <p:nvSpPr>
+          <p:cNvPr id="4" name="Slide Number Placeholder 3"/>
+          <p:cNvSpPr>
+            <a:spLocks noGrp="1"/>
+          </p:cNvSpPr>
+          <p:nvPr>
+            <p:ph type="sldNum" idx="5" sz="quarter"/>
+          </p:nvPr>
+        </p:nvSpPr>
+        <p:spPr/>
+      </p:sp>
+    </p:spTree>
+  </p:cSld>
+  <p:clrMapOvr>
+    <a:masterClrMapping/>
+  </p:clrMapOvr>
+</p:notes>
 </file>
 
 <file path=ppt/slideLayouts/slideLayout1.xml><?xml version="1.0" encoding="utf-8"?>
@@ -13988,4 +16444,324 @@
   </a:objectDefaults>
   <a:extraClrSchemeLst/>
 </a:theme>
+</file>
+
+<file path=ppt/theme/theme2.xml><?xml version="1.0" encoding="utf-8"?>
+<a:theme xmlns:a="http://schemas.openxmlformats.org/drawingml/2006/main" name="Office Theme">
+  <a:themeElements>
+    <a:clrScheme name="Office">
+      <a:dk1>
+        <a:sysClr val="windowText" lastClr="000000"/>
+      </a:dk1>
+      <a:lt1>
+        <a:sysClr val="window" lastClr="FFFFFF"/>
+      </a:lt1>
+      <a:dk2>
+        <a:srgbClr val="1F497D"/>
+      </a:dk2>
+      <a:lt2>
+        <a:srgbClr val="EEECE1"/>
+      </a:lt2>
+      <a:accent1>
+        <a:srgbClr val="4F81BD"/>
+      </a:accent1>
+      <a:accent2>
+        <a:srgbClr val="C0504D"/>
+      </a:accent2>
+      <a:accent3>
+        <a:srgbClr val="9BBB59"/>
+      </a:accent3>
+      <a:accent4>
+        <a:srgbClr val="8064A2"/>
+      </a:accent4>
+      <a:accent5>
+        <a:srgbClr val="4BACC6"/>
+      </a:accent5>
+      <a:accent6>
+        <a:srgbClr val="F79646"/>
+      </a:accent6>
+      <a:hlink>
+        <a:srgbClr val="0000FF"/>
+      </a:hlink>
+      <a:folHlink>
+        <a:srgbClr val="800080"/>
+      </a:folHlink>
+    </a:clrScheme>
+    <a:fontScheme name="Office">
+      <a:majorFont>
+        <a:latin typeface="Calibri"/>
+        <a:ea typeface=""/>
+        <a:cs typeface=""/>
+        <a:font script="Jpan" typeface="ＭＳ Ｐゴシック"/>
+        <a:font script="Hang" typeface="맑은 고딕"/>
+        <a:font script="Hans" typeface="宋体"/>
+        <a:font script="Hant" typeface="新細明體"/>
+        <a:font script="Arab" typeface="Times New Roman"/>
+        <a:font script="Hebr" typeface="Times New Roman"/>
+        <a:font script="Thai" typeface="Angsana New"/>
+        <a:font script="Ethi" typeface="Nyala"/>
+        <a:font script="Beng" typeface="Vrinda"/>
+        <a:font script="Gujr" typeface="Shruti"/>
+        <a:font script="Khmr" typeface="MoolBoran"/>
+        <a:font script="Knda" typeface="Tunga"/>
+        <a:font script="Guru" typeface="Raavi"/>
+        <a:font script="Cans" typeface="Euphemia"/>
+        <a:font script="Cher" typeface="Plantagenet Cherokee"/>
+        <a:font script="Yiii" typeface="Microsoft Yi Baiti"/>
+        <a:font script="Tibt" typeface="Microsoft Himalaya"/>
+        <a:font script="Thaa" typeface="MV Boli"/>
+        <a:font script="Deva" typeface="Mangal"/>
+        <a:font script="Telu" typeface="Gautami"/>
+        <a:font script="Taml" typeface="Latha"/>
+        <a:font script="Syrc" typeface="Estrangelo Edessa"/>
+        <a:font script="Orya" typeface="Kalinga"/>
+        <a:font script="Mlym" typeface="Kartika"/>
+        <a:font script="Laoo" typeface="DokChampa"/>
+        <a:font script="Sinh" typeface="Iskoola Pota"/>
+        <a:font script="Mong" typeface="Mongolian Baiti"/>
+        <a:font script="Viet" typeface="Times New Roman"/>
+        <a:font script="Uigh" typeface="Microsoft Uighur"/>
+        <a:font script="Geor" typeface="Sylfaen"/>
+      </a:majorFont>
+      <a:minorFont>
+        <a:latin typeface="Calibri"/>
+        <a:ea typeface=""/>
+        <a:cs typeface=""/>
+        <a:font script="Jpan" typeface="ＭＳ Ｐゴシック"/>
+        <a:font script="Hang" typeface="맑은 고딕"/>
+        <a:font script="Hans" typeface="宋体"/>
+        <a:font script="Hant" typeface="新細明體"/>
+        <a:font script="Arab" typeface="Arial"/>
+        <a:font script="Hebr" typeface="Arial"/>
+        <a:font script="Thai" typeface="Cordia New"/>
+        <a:font script="Ethi" typeface="Nyala"/>
+        <a:font script="Beng" typeface="Vrinda"/>
+        <a:font script="Gujr" typeface="Shruti"/>
+        <a:font script="Khmr" typeface="DaunPenh"/>
+        <a:font script="Knda" typeface="Tunga"/>
+        <a:font script="Guru" typeface="Raavi"/>
+        <a:font script="Cans" typeface="Euphemia"/>
+        <a:font script="Cher" typeface="Plantagenet Cherokee"/>
+        <a:font script="Yiii" typeface="Microsoft Yi Baiti"/>
+        <a:font script="Tibt" typeface="Microsoft Himalaya"/>
+        <a:font script="Thaa" typeface="MV Boli"/>
+        <a:font script="Deva" typeface="Mangal"/>
+        <a:font script="Telu" typeface="Gautami"/>
+        <a:font script="Taml" typeface="Latha"/>
+        <a:font script="Syrc" typeface="Estrangelo Edessa"/>
+        <a:font script="Orya" typeface="Kalinga"/>
+        <a:font script="Mlym" typeface="Kartika"/>
+        <a:font script="Laoo" typeface="DokChampa"/>
+        <a:font script="Sinh" typeface="Iskoola Pota"/>
+        <a:font script="Mong" typeface="Mongolian Baiti"/>
+        <a:font script="Viet" typeface="Arial"/>
+        <a:font script="Uigh" typeface="Microsoft Uighur"/>
+        <a:font script="Geor" typeface="Sylfaen"/>
+      </a:minorFont>
+    </a:fontScheme>
+    <a:fmtScheme name="Office">
+      <a:fillStyleLst>
+        <a:solidFill>
+          <a:schemeClr val="phClr"/>
+        </a:solidFill>
+        <a:gradFill rotWithShape="1">
+          <a:gsLst>
+            <a:gs pos="0">
+              <a:schemeClr val="phClr">
+                <a:tint val="50000"/>
+                <a:satMod val="300000"/>
+              </a:schemeClr>
+            </a:gs>
+            <a:gs pos="35000">
+              <a:schemeClr val="phClr">
+                <a:tint val="37000"/>
+                <a:satMod val="300000"/>
+              </a:schemeClr>
+            </a:gs>
+            <a:gs pos="100000">
+              <a:schemeClr val="phClr">
+                <a:tint val="15000"/>
+                <a:satMod val="350000"/>
+              </a:schemeClr>
+            </a:gs>
+          </a:gsLst>
+          <a:lin ang="16200000" scaled="1"/>
+        </a:gradFill>
+        <a:gradFill rotWithShape="1">
+          <a:gsLst>
+            <a:gs pos="0">
+              <a:schemeClr val="phClr">
+                <a:tint val="100000"/>
+                <a:shade val="100000"/>
+                <a:satMod val="130000"/>
+              </a:schemeClr>
+            </a:gs>
+            <a:gs pos="100000">
+              <a:schemeClr val="phClr">
+                <a:tint val="50000"/>
+                <a:shade val="100000"/>
+                <a:satMod val="350000"/>
+              </a:schemeClr>
+            </a:gs>
+          </a:gsLst>
+          <a:lin ang="16200000" scaled="0"/>
+        </a:gradFill>
+      </a:fillStyleLst>
+      <a:lnStyleLst>
+        <a:ln w="9525" cap="flat" cmpd="sng" algn="ctr">
+          <a:solidFill>
+            <a:schemeClr val="phClr">
+              <a:shade val="95000"/>
+              <a:satMod val="105000"/>
+            </a:schemeClr>
+          </a:solidFill>
+          <a:prstDash val="solid"/>
+        </a:ln>
+        <a:ln w="25400" cap="flat" cmpd="sng" algn="ctr">
+          <a:solidFill>
+            <a:schemeClr val="phClr"/>
+          </a:solidFill>
+          <a:prstDash val="solid"/>
+        </a:ln>
+        <a:ln w="38100" cap="flat" cmpd="sng" algn="ctr">
+          <a:solidFill>
+            <a:schemeClr val="phClr"/>
+          </a:solidFill>
+          <a:prstDash val="solid"/>
+        </a:ln>
+      </a:lnStyleLst>
+      <a:effectStyleLst>
+        <a:effectStyle>
+          <a:effectLst>
+            <a:outerShdw blurRad="40000" dist="20000" dir="5400000" rotWithShape="0">
+              <a:srgbClr val="000000">
+                <a:alpha val="38000"/>
+              </a:srgbClr>
+            </a:outerShdw>
+          </a:effectLst>
+        </a:effectStyle>
+        <a:effectStyle>
+          <a:effectLst>
+            <a:outerShdw blurRad="40000" dist="23000" dir="5400000" rotWithShape="0">
+              <a:srgbClr val="000000">
+                <a:alpha val="35000"/>
+              </a:srgbClr>
+            </a:outerShdw>
+          </a:effectLst>
+        </a:effectStyle>
+        <a:effectStyle>
+          <a:effectLst>
+            <a:outerShdw blurRad="40000" dist="23000" dir="5400000" rotWithShape="0">
+              <a:srgbClr val="000000">
+                <a:alpha val="35000"/>
+              </a:srgbClr>
+            </a:outerShdw>
+          </a:effectLst>
+          <a:scene3d>
+            <a:camera prst="orthographicFront">
+              <a:rot lat="0" lon="0" rev="0"/>
+            </a:camera>
+            <a:lightRig rig="threePt" dir="t">
+              <a:rot lat="0" lon="0" rev="1200000"/>
+            </a:lightRig>
+          </a:scene3d>
+          <a:sp3d>
+            <a:bevelT w="63500" h="25400"/>
+          </a:sp3d>
+        </a:effectStyle>
+      </a:effectStyleLst>
+      <a:bgFillStyleLst>
+        <a:solidFill>
+          <a:schemeClr val="phClr"/>
+        </a:solidFill>
+        <a:gradFill rotWithShape="1">
+          <a:gsLst>
+            <a:gs pos="0">
+              <a:schemeClr val="phClr">
+                <a:tint val="40000"/>
+                <a:satMod val="350000"/>
+              </a:schemeClr>
+            </a:gs>
+            <a:gs pos="40000">
+              <a:schemeClr val="phClr">
+                <a:tint val="45000"/>
+                <a:shade val="99000"/>
+                <a:satMod val="350000"/>
+              </a:schemeClr>
+            </a:gs>
+            <a:gs pos="100000">
+              <a:schemeClr val="phClr">
+                <a:shade val="20000"/>
+                <a:satMod val="255000"/>
+              </a:schemeClr>
+            </a:gs>
+          </a:gsLst>
+          <a:path path="circle">
+            <a:fillToRect l="50000" t="-80000" r="50000" b="180000"/>
+          </a:path>
+        </a:gradFill>
+        <a:gradFill rotWithShape="1">
+          <a:gsLst>
+            <a:gs pos="0">
+              <a:schemeClr val="phClr">
+                <a:tint val="80000"/>
+                <a:satMod val="300000"/>
+              </a:schemeClr>
+            </a:gs>
+            <a:gs pos="100000">
+              <a:schemeClr val="phClr">
+                <a:shade val="30000"/>
+                <a:satMod val="200000"/>
+              </a:schemeClr>
+            </a:gs>
+          </a:gsLst>
+          <a:path path="circle">
+            <a:fillToRect l="50000" t="50000" r="50000" b="50000"/>
+          </a:path>
+        </a:gradFill>
+      </a:bgFillStyleLst>
+    </a:fmtScheme>
+  </a:themeElements>
+  <a:objectDefaults>
+    <a:spDef>
+      <a:spPr/>
+      <a:bodyPr/>
+      <a:lstStyle/>
+      <a:style>
+        <a:lnRef idx="1">
+          <a:schemeClr val="accent1"/>
+        </a:lnRef>
+        <a:fillRef idx="3">
+          <a:schemeClr val="accent1"/>
+        </a:fillRef>
+        <a:effectRef idx="2">
+          <a:schemeClr val="accent1"/>
+        </a:effectRef>
+        <a:fontRef idx="minor">
+          <a:schemeClr val="lt1"/>
+        </a:fontRef>
+      </a:style>
+    </a:spDef>
+    <a:lnDef>
+      <a:spPr/>
+      <a:bodyPr/>
+      <a:lstStyle/>
+      <a:style>
+        <a:lnRef idx="2">
+          <a:schemeClr val="accent1"/>
+        </a:lnRef>
+        <a:fillRef idx="0">
+          <a:schemeClr val="accent1"/>
+        </a:fillRef>
+        <a:effectRef idx="1">
+          <a:schemeClr val="accent1"/>
+        </a:effectRef>
+        <a:fontRef idx="minor">
+          <a:schemeClr val="tx1"/>
+        </a:fontRef>
+      </a:style>
+    </a:lnDef>
+  </a:objectDefaults>
+  <a:extraClrSchemeLst/>
+</a:theme>
 </file>
--- a/S1-CL1-Cloud-Design-Build/delivery/topic_07/Topic_07_Slides.pptx
+++ b/S1-CL1-Cloud-Design-Build/delivery/topic_07/Topic_07_Slides.pptx
@@ -535,7 +535,7 @@
           </a:p>
           <a:p>
             <a:r>
-              <a:t>  Today you build the network the workload will sit inside — Topic 8 fills it.</a:t>
+              <a:t>Today you build the network the workload will sit inside — Topic 8 fills it.</a:t>
             </a:r>
           </a:p>
           <a:p>
@@ -545,7 +545,7 @@
           </a:p>
           <a:p>
             <a:r>
-              <a:t>  (security groups), name resolution (DNS). Everything today maps to one of those three.</a:t>
+              <a:t>(security groups), name resolution (DNS). Everything today maps to one of those three.</a:t>
             </a:r>
           </a:p>
           <a:p>
@@ -555,7 +555,7 @@
           </a:p>
           <a:p>
             <a:r>
-              <a:t>  SUPPLIED design (they're the builder, not the designer), still capturing evidence as they go.</a:t>
+              <a:t>SUPPLIED design (they're the builder, not the designer), still capturing evidence as they go.</a:t>
             </a:r>
           </a:p>
           <a:p>
@@ -830,7 +830,7 @@
           </a:p>
           <a:p>
             <a:r>
-              <a:t>  change; the name is stable, what it points to can move.</a:t>
+              <a:t>change; the name is stable, what it points to can move.</a:t>
             </a:r>
           </a:p>
           <a:p>
@@ -845,7 +845,7 @@
           </a:p>
           <a:p>
             <a:r>
-              <a:t>  hosted zone = names that resolve ONLY inside your VPC. Ledgerline uses a private zone (staff-only).</a:t>
+              <a:t>hosted zone = names that resolve ONLY inside your VPC. Ledgerline uses a private zone (staff-only).</a:t>
             </a:r>
           </a:p>
           <a:p>
@@ -955,7 +955,7 @@
           </a:p>
           <a:p>
             <a:r>
-              <a:t>  NO public internet name. Consistent with the egress-only, VPN-reached design.</a:t>
+              <a:t>NO public internet name. Consistent with the egress-only, VPN-reached design.</a:t>
             </a:r>
           </a:p>
           <a:p>
@@ -970,12 +970,12 @@
           </a:p>
           <a:p>
             <a:r>
-              <a:t>  it with YAT ICT, they don't guess it. Model treating an open design decision as a question to ask,</a:t>
-            </a:r>
-          </a:p>
-          <a:p>
-            <a:r>
-              <a:t>  not an assumption to make.</a:t>
+              <a:t>it with YAT ICT, they don't guess it. Model treating an open design decision as a question to ask,</a:t>
+            </a:r>
+          </a:p>
+          <a:p>
+            <a:r>
+              <a:t>not an assumption to make.</a:t>
             </a:r>
           </a:p>
           <a:p>
@@ -1090,7 +1090,7 @@
           </a:p>
           <a:p>
             <a:r>
-              <a:t>  BETWEEN tiers (app → db). Building isn't done until it's tested.</a:t>
+              <a:t>BETWEEN tiers (app → db). Building isn't done until it's tested.</a:t>
             </a:r>
           </a:p>
           <a:p>
@@ -1100,7 +1100,7 @@
           </a:p>
           <a:p>
             <a:r>
-              <a:t>  — it turns "it doesn't work" into "this rule is blocking it".</a:t>
+              <a:t>— it turns "it doesn't work" into "this rule is blocking it".</a:t>
             </a:r>
           </a:p>
           <a:p>
@@ -1110,7 +1110,7 @@
           </a:p>
           <a:p>
             <a:r>
-              <a:t>  missing route. Teach the reflex: read the log, find the block, fix, retest, capture.</a:t>
+              <a:t>missing route. Teach the reflex: read the log, find the block, fix, retest, capture.</a:t>
             </a:r>
           </a:p>
           <a:p>
@@ -1120,7 +1120,7 @@
           </a:p>
           <a:p>
             <a:r>
-              <a:t>  test what exists so far.</a:t>
+              <a:t>test what exists so far.</a:t>
             </a:r>
           </a:p>
           <a:p>
@@ -1293,7 +1293,7 @@
           </a:p>
           <a:p>
             <a:r>
-              <a:t>  this is exactly the PC 2.6 discipline they're assessed on.</a:t>
+              <a:t>this is exactly the PC 2.6 discipline they're assessed on.</a:t>
             </a:r>
           </a:p>
           <a:p>
@@ -1408,7 +1408,7 @@
           </a:p>
           <a:p>
             <a:r>
-              <a:t>   the exact name is the C8 decision).</a:t>
+              <a:t>the exact name is the C8 decision).</a:t>
             </a:r>
           </a:p>
           <a:p>
@@ -1558,12 +1558,12 @@
           </a:p>
           <a:p>
             <a:r>
-              <a:t>  bits are fixed. Small /number = big range; big /number = small range. Give the /16-vs-/28 feel</a:t>
-            </a:r>
-          </a:p>
-          <a:p>
-            <a:r>
-              <a:t>  rather than the binary maths — that's enough for building to a supplied design.</a:t>
+              <a:t>bits are fixed. Small /number = big range; big /number = small range. Give the /16-vs-/28 feel</a:t>
+            </a:r>
+          </a:p>
+          <a:p>
+            <a:r>
+              <a:t>rather than the binary maths — that's enough for building to a supplied design.</a:t>
             </a:r>
           </a:p>
           <a:p>
@@ -1678,7 +1678,7 @@
           </a:p>
           <a:p>
             <a:r>
-              <a:t>  smallest /28). Stress: you can't change the CIDR later — sizing is a decision, not a default.</a:t>
+              <a:t>smallest /28). Stress: you can't change the CIDR later — sizing is a decision, not a default.</a:t>
             </a:r>
           </a:p>
           <a:p>
@@ -1688,12 +1688,12 @@
           </a:p>
           <a:p>
             <a:r>
-              <a:t>  "Public/private" is about whether there's a path to the internet, not about secrecy — flag it now</a:t>
-            </a:r>
-          </a:p>
-          <a:p>
-            <a:r>
-              <a:t>  because it drives the next activity.</a:t>
+              <a:t>"Public/private" is about whether there's a path to the internet, not about secrecy — flag it now</a:t>
+            </a:r>
+          </a:p>
+          <a:p>
+            <a:r>
+              <a:t>because it drives the next activity.</a:t>
             </a:r>
           </a:p>
           <a:p>
@@ -1808,7 +1808,7 @@
           </a:p>
           <a:p>
             <a:r>
-              <a:t>  anything inside the VPC can talk without extra config.</a:t>
+              <a:t>anything inside the VPC can talk without extra config.</a:t>
             </a:r>
           </a:p>
           <a:p>
@@ -1823,7 +1823,7 @@
           </a:p>
           <a:p>
             <a:r>
-              <a:t>  TABLE" is the sentence to land.</a:t>
+              <a:t>TABLE" is the sentence to land.</a:t>
             </a:r>
           </a:p>
           <a:p>
@@ -1833,7 +1833,7 @@
           </a:p>
           <a:p>
             <a:r>
-              <a:t>  reachable from the internet. Outbound-only. This is exactly the design's egress-only model.</a:t>
+              <a:t>reachable from the internet. Outbound-only. This is exactly the design's egress-only model.</a:t>
             </a:r>
           </a:p>
           <a:p>
@@ -2078,7 +2078,7 @@
           </a:p>
           <a:p>
             <a:r>
-              <a:t>  THAT, you don't invent it. Model reading a supplied design before touching the console.</a:t>
+              <a:t>THAT, you don't invent it. Model reading a supplied design before touching the console.</a:t>
             </a:r>
           </a:p>
           <a:p>
@@ -2088,12 +2088,12 @@
           </a:p>
           <a:p>
             <a:r>
-              <a:t>  the first AZ — public-egress-a (NAT only), private-app-a (app + internal ALB), private-data-a</a:t>
-            </a:r>
-          </a:p>
-          <a:p>
-            <a:r>
-              <a:t>  (database).</a:t>
+              <a:t>the first AZ — public-egress-a (NAT only), private-app-a (app + internal ALB), private-data-a</a:t>
+            </a:r>
+          </a:p>
+          <a:p>
+            <a:r>
+              <a:t>(database).</a:t>
             </a:r>
           </a:p>
           <a:p>
@@ -2103,7 +2103,7 @@
           </a:p>
           <a:p>
             <a:r>
-              <a:t>  internet. Staff reach the service over the campus Site-to-Site VPN; route tables set per tier.</a:t>
+              <a:t>internet. Staff reach the service over the campus Site-to-Site VPN; route tables set per tier.</a:t>
             </a:r>
           </a:p>
           <a:p>
@@ -2218,12 +2218,12 @@
           </a:p>
           <a:p>
             <a:r>
-              <a:t>  protecting ONE resource (not the whole building). Contrast with a building's front gate (that's</a:t>
-            </a:r>
-          </a:p>
-          <a:p>
-            <a:r>
-              <a:t>  more like a network ACL — out of scope here, don't go there).</a:t>
+              <a:t>protecting ONE resource (not the whole building). Contrast with a building's front gate (that's</a:t>
+            </a:r>
+          </a:p>
+          <a:p>
+            <a:r>
+              <a:t>more like a network ACL — out of scope here, don't go there).</a:t>
             </a:r>
           </a:p>
           <a:p>
@@ -2233,7 +2233,7 @@
           </a:p>
           <a:p>
             <a:r>
-              <a:t>  these three because the design's rules use exactly them.</a:t>
+              <a:t>these three because the design's rules use exactly them.</a:t>
             </a:r>
           </a:p>
           <a:p>
@@ -2243,7 +2243,7 @@
           </a:p>
           <a:p>
             <a:r>
-              <a:t>  the next two slides.</a:t>
+              <a:t>the next two slides.</a:t>
             </a:r>
           </a:p>
           <a:p>
@@ -2353,7 +2353,7 @@
           </a:p>
           <a:p>
             <a:r>
-              <a:t>  resource, not per subnet.</a:t>
+              <a:t>resource, not per subnet.</a:t>
             </a:r>
           </a:p>
           <a:p>
@@ -2363,7 +2363,7 @@
           </a:p>
           <a:p>
             <a:r>
-              <a:t>  a matching outbound rule. This is the one they forget.</a:t>
+              <a:t>a matching outbound rule. This is the one they forget.</a:t>
             </a:r>
           </a:p>
           <a:p>
@@ -2378,7 +2378,7 @@
           </a:p>
           <a:p>
             <a:r>
-              <a:t>  That's how tiers chain (allow 443 only FROM the load balancer's SG), instead of hard-coding IPs.</a:t>
+              <a:t>That's how tiers chain (allow 443 only FROM the load balancer's SG), instead of hard-coding IPs.</a:t>
             </a:r>
           </a:p>
           <a:p>
@@ -6207,16 +6207,16 @@
             <a:r>
               <a:rPr sz="2400" b="1" i="0">
                 <a:solidFill>
-                  <a:srgbClr val="27B5CE"/>
+                  <a:srgbClr val="EDAB0C"/>
                 </a:solidFill>
                 <a:latin typeface="Roboto"/>
               </a:rPr>
               <a:t>■  </a:t>
             </a:r>
             <a:r>
-              <a:rPr sz="2400" b="1" i="0">
-                <a:solidFill>
-                  <a:srgbClr val="27B5CE"/>
+              <a:rPr sz="2400" b="0" i="0">
+                <a:solidFill>
+                  <a:srgbClr val="2A2929"/>
                 </a:solidFill>
                 <a:latin typeface="Roboto"/>
               </a:rPr>
@@ -6658,16 +6658,16 @@
             <a:r>
               <a:rPr sz="2400" b="1" i="0">
                 <a:solidFill>
-                  <a:srgbClr val="27B5CE"/>
+                  <a:srgbClr val="EDAB0C"/>
                 </a:solidFill>
                 <a:latin typeface="Roboto"/>
               </a:rPr>
               <a:t>■  </a:t>
             </a:r>
             <a:r>
-              <a:rPr sz="2400" b="1" i="0">
-                <a:solidFill>
-                  <a:srgbClr val="27B5CE"/>
+              <a:rPr sz="2400" b="0" i="0">
+                <a:solidFill>
+                  <a:srgbClr val="2A2929"/>
                 </a:solidFill>
                 <a:latin typeface="Roboto"/>
               </a:rPr>
@@ -6937,9 +6937,9 @@
                 <a:tableStyleId>{5C22544A-7EE6-4342-B048-85BDC9FD1C3A}</a:tableStyleId>
               </a:tblPr>
               <a:tblGrid>
-                <a:gridCol w="2194560"/>
-                <a:gridCol w="4480560"/>
-                <a:gridCol w="4206240"/>
+                <a:gridCol w="3627120"/>
+                <a:gridCol w="3627120"/>
+                <a:gridCol w="3627120"/>
               </a:tblGrid>
               <a:tr h="457200">
                 <a:tc>
@@ -8079,7 +8079,7 @@
               <a:t>■  </a:t>
             </a:r>
             <a:r>
-              <a:rPr sz="1700" b="1" i="0">
+              <a:rPr sz="1700" b="0" i="0">
                 <a:solidFill>
                   <a:srgbClr val="2A2929"/>
                 </a:solidFill>
@@ -8196,16 +8196,16 @@
             <a:r>
               <a:rPr sz="1700" b="1" i="0">
                 <a:solidFill>
-                  <a:srgbClr val="27B5CE"/>
+                  <a:srgbClr val="EDAB0C"/>
                 </a:solidFill>
                 <a:latin typeface="Roboto"/>
               </a:rPr>
               <a:t>■  </a:t>
             </a:r>
             <a:r>
-              <a:rPr sz="1700" b="1" i="0">
-                <a:solidFill>
-                  <a:srgbClr val="27B5CE"/>
+              <a:rPr sz="1700" b="0" i="0">
+                <a:solidFill>
+                  <a:srgbClr val="2A2929"/>
                 </a:solidFill>
                 <a:latin typeface="Roboto"/>
               </a:rPr>
@@ -8926,16 +8926,16 @@
             <a:r>
               <a:rPr sz="1700" b="1" i="0">
                 <a:solidFill>
-                  <a:srgbClr val="205F61"/>
+                  <a:srgbClr val="EDAB0C"/>
                 </a:solidFill>
                 <a:latin typeface="Roboto"/>
               </a:rPr>
               <a:t>■  </a:t>
             </a:r>
             <a:r>
-              <a:rPr sz="1700" b="1" i="0">
-                <a:solidFill>
-                  <a:srgbClr val="205F61"/>
+              <a:rPr sz="1700" b="0" i="0">
+                <a:solidFill>
+                  <a:srgbClr val="2A2929"/>
                 </a:solidFill>
                 <a:latin typeface="Roboto"/>
               </a:rPr>
@@ -9339,16 +9339,16 @@
             <a:r>
               <a:rPr sz="2400" b="1" i="0">
                 <a:solidFill>
-                  <a:srgbClr val="205F61"/>
+                  <a:srgbClr val="EDAB0C"/>
                 </a:solidFill>
                 <a:latin typeface="Roboto"/>
               </a:rPr>
               <a:t>■  </a:t>
             </a:r>
             <a:r>
-              <a:rPr sz="2400" b="1" i="0">
-                <a:solidFill>
-                  <a:srgbClr val="205F61"/>
+              <a:rPr sz="2400" b="0" i="0">
+                <a:solidFill>
+                  <a:srgbClr val="2A2929"/>
                 </a:solidFill>
                 <a:latin typeface="Roboto"/>
               </a:rPr>
@@ -9697,16 +9697,16 @@
             <a:r>
               <a:rPr sz="2400" b="1" i="0">
                 <a:solidFill>
-                  <a:srgbClr val="205F61"/>
+                  <a:srgbClr val="EDAB0C"/>
                 </a:solidFill>
                 <a:latin typeface="Roboto"/>
               </a:rPr>
               <a:t>■  </a:t>
             </a:r>
             <a:r>
-              <a:rPr sz="2400" b="1" i="0">
-                <a:solidFill>
-                  <a:srgbClr val="205F61"/>
+              <a:rPr sz="2400" b="0" i="0">
+                <a:solidFill>
+                  <a:srgbClr val="2A2929"/>
                 </a:solidFill>
                 <a:latin typeface="Roboto"/>
               </a:rPr>
@@ -10055,16 +10055,16 @@
             <a:r>
               <a:rPr sz="2400" b="1" i="0">
                 <a:solidFill>
-                  <a:srgbClr val="92268F"/>
+                  <a:srgbClr val="EDAB0C"/>
                 </a:solidFill>
                 <a:latin typeface="Roboto"/>
               </a:rPr>
               <a:t>■  </a:t>
             </a:r>
             <a:r>
-              <a:rPr sz="2400" b="1" i="0">
-                <a:solidFill>
-                  <a:srgbClr val="92268F"/>
+              <a:rPr sz="2400" b="0" i="0">
+                <a:solidFill>
+                  <a:srgbClr val="2A2929"/>
                 </a:solidFill>
                 <a:latin typeface="Roboto"/>
               </a:rPr>
@@ -10994,7 +10994,7 @@
               <a:t>■  </a:t>
             </a:r>
             <a:r>
-              <a:rPr sz="1700" b="1" i="0">
+              <a:rPr sz="1700" b="0" i="0">
                 <a:solidFill>
                   <a:srgbClr val="2A2929"/>
                 </a:solidFill>
@@ -11080,16 +11080,16 @@
             <a:r>
               <a:rPr sz="1700" b="1" i="0">
                 <a:solidFill>
-                  <a:srgbClr val="205F61"/>
+                  <a:srgbClr val="EDAB0C"/>
                 </a:solidFill>
                 <a:latin typeface="Roboto"/>
               </a:rPr>
               <a:t>■  </a:t>
             </a:r>
             <a:r>
-              <a:rPr sz="1700" b="1" i="0">
-                <a:solidFill>
-                  <a:srgbClr val="205F61"/>
+              <a:rPr sz="1700" b="0" i="0">
+                <a:solidFill>
+                  <a:srgbClr val="2A2929"/>
                 </a:solidFill>
                 <a:latin typeface="Roboto"/>
               </a:rPr>
@@ -11996,7 +11996,7 @@
             <a:r>
               <a:rPr sz="1800" b="1" i="0">
                 <a:solidFill>
-                  <a:srgbClr val="EDAB0C"/>
+                  <a:srgbClr val="205F61"/>
                 </a:solidFill>
                 <a:latin typeface="Roboto"/>
               </a:rPr>
@@ -12020,7 +12020,7 @@
             <a:avLst/>
           </a:prstGeom>
           <a:solidFill>
-            <a:srgbClr val="EDAB0C"/>
+            <a:srgbClr val="205F61"/>
           </a:solidFill>
           <a:ln>
             <a:noFill/>
@@ -12110,7 +12110,7 @@
             <a:avLst/>
           </a:prstGeom>
           <a:solidFill>
-            <a:srgbClr val="EDAB0C"/>
+            <a:srgbClr val="205F61"/>
           </a:solidFill>
           <a:ln>
             <a:noFill/>
@@ -12239,7 +12239,7 @@
             <a:avLst/>
           </a:prstGeom>
           <a:solidFill>
-            <a:srgbClr val="EDAB0C"/>
+            <a:srgbClr val="205F61"/>
           </a:solidFill>
           <a:ln>
             <a:noFill/>
@@ -12368,7 +12368,7 @@
             <a:avLst/>
           </a:prstGeom>
           <a:solidFill>
-            <a:srgbClr val="EDAB0C"/>
+            <a:srgbClr val="205F61"/>
           </a:solidFill>
           <a:ln>
             <a:noFill/>
@@ -12497,7 +12497,7 @@
             <a:avLst/>
           </a:prstGeom>
           <a:solidFill>
-            <a:srgbClr val="EDAB0C"/>
+            <a:srgbClr val="205F61"/>
           </a:solidFill>
           <a:ln>
             <a:noFill/>
@@ -12626,7 +12626,7 @@
             <a:avLst/>
           </a:prstGeom>
           <a:solidFill>
-            <a:srgbClr val="EDAB0C"/>
+            <a:srgbClr val="205F61"/>
           </a:solidFill>
           <a:ln>
             <a:noFill/>
@@ -12709,7 +12709,7 @@
             <a:avLst/>
           </a:prstGeom>
           <a:solidFill>
-            <a:srgbClr val="EDAB0C"/>
+            <a:srgbClr val="205F61"/>
           </a:solidFill>
           <a:ln>
             <a:noFill/>
@@ -13468,16 +13468,16 @@
             <a:r>
               <a:rPr sz="1700" b="1" i="0">
                 <a:solidFill>
-                  <a:srgbClr val="92268F"/>
+                  <a:srgbClr val="EDAB0C"/>
                 </a:solidFill>
                 <a:latin typeface="Roboto"/>
               </a:rPr>
               <a:t>■  </a:t>
             </a:r>
             <a:r>
-              <a:rPr sz="1700" b="1" i="0">
-                <a:solidFill>
-                  <a:srgbClr val="92268F"/>
+              <a:rPr sz="1700" b="0" i="0">
+                <a:solidFill>
+                  <a:srgbClr val="2A2929"/>
                 </a:solidFill>
                 <a:latin typeface="Roboto"/>
               </a:rPr>
@@ -13881,16 +13881,16 @@
             <a:r>
               <a:rPr sz="2400" b="1" i="0">
                 <a:solidFill>
-                  <a:srgbClr val="92268F"/>
+                  <a:srgbClr val="EDAB0C"/>
                 </a:solidFill>
                 <a:latin typeface="Roboto"/>
               </a:rPr>
               <a:t>■  </a:t>
             </a:r>
             <a:r>
-              <a:rPr sz="2400" b="1" i="0">
-                <a:solidFill>
-                  <a:srgbClr val="92268F"/>
+              <a:rPr sz="2400" b="0" i="0">
+                <a:solidFill>
+                  <a:srgbClr val="2A2929"/>
                 </a:solidFill>
                 <a:latin typeface="Roboto"/>
               </a:rPr>
@@ -14270,16 +14270,16 @@
             <a:r>
               <a:rPr sz="1700" b="1" i="0">
                 <a:solidFill>
-                  <a:srgbClr val="92268F"/>
+                  <a:srgbClr val="EDAB0C"/>
                 </a:solidFill>
                 <a:latin typeface="Roboto"/>
               </a:rPr>
               <a:t>■  </a:t>
             </a:r>
             <a:r>
-              <a:rPr sz="1700" b="1" i="0">
-                <a:solidFill>
-                  <a:srgbClr val="92268F"/>
+              <a:rPr sz="1700" b="0" i="0">
+                <a:solidFill>
+                  <a:srgbClr val="2A2929"/>
                 </a:solidFill>
                 <a:latin typeface="Roboto"/>
               </a:rPr>
@@ -14634,7 +14634,7 @@
               <a:t>■  </a:t>
             </a:r>
             <a:r>
-              <a:rPr sz="1700" b="1" i="0">
+              <a:rPr sz="1700" b="0" i="0">
                 <a:solidFill>
                   <a:srgbClr val="2A2929"/>
                 </a:solidFill>
@@ -14689,16 +14689,16 @@
             <a:r>
               <a:rPr sz="1700" b="1" i="0">
                 <a:solidFill>
-                  <a:srgbClr val="92268F"/>
+                  <a:srgbClr val="EDAB0C"/>
                 </a:solidFill>
                 <a:latin typeface="Roboto"/>
               </a:rPr>
               <a:t>■  </a:t>
             </a:r>
             <a:r>
-              <a:rPr sz="1700" b="1" i="0">
-                <a:solidFill>
-                  <a:srgbClr val="92268F"/>
+              <a:rPr sz="1700" b="0" i="0">
+                <a:solidFill>
+                  <a:srgbClr val="2A2929"/>
                 </a:solidFill>
                 <a:latin typeface="Roboto"/>
               </a:rPr>
@@ -15096,16 +15096,16 @@
             <a:r>
               <a:rPr sz="2400" b="1" i="0">
                 <a:solidFill>
-                  <a:srgbClr val="92268F"/>
+                  <a:srgbClr val="EDAB0C"/>
                 </a:solidFill>
                 <a:latin typeface="Roboto"/>
               </a:rPr>
               <a:t>■  </a:t>
             </a:r>
             <a:r>
-              <a:rPr sz="2400" b="1" i="0">
-                <a:solidFill>
-                  <a:srgbClr val="92268F"/>
+              <a:rPr sz="2400" b="0" i="0">
+                <a:solidFill>
+                  <a:srgbClr val="2A2929"/>
                 </a:solidFill>
                 <a:latin typeface="Roboto"/>
               </a:rPr>

--- a/S1-CL1-Cloud-Design-Build/delivery/topic_07/Topic_07_Slides.pptx
+++ b/S1-CL1-Cloud-Design-Build/delivery/topic_07/Topic_07_Slides.pptx
@@ -7,12 +7,12 @@
   <p:sldIdLst>
     <p:sldId id="256" r:id="rId7"/>
     <p:sldId id="257" r:id="rId8"/>
-    <p:sldId id="258" r:id="rId10"/>
-    <p:sldId id="259" r:id="rId11"/>
-    <p:sldId id="260" r:id="rId12"/>
-    <p:sldId id="261" r:id="rId13"/>
-    <p:sldId id="262" r:id="rId14"/>
-    <p:sldId id="263" r:id="rId15"/>
+    <p:sldId id="258" r:id="rId9"/>
+    <p:sldId id="259" r:id="rId10"/>
+    <p:sldId id="260" r:id="rId11"/>
+    <p:sldId id="261" r:id="rId12"/>
+    <p:sldId id="262" r:id="rId13"/>
+    <p:sldId id="263" r:id="rId14"/>
     <p:sldId id="264" r:id="rId16"/>
     <p:sldId id="265" r:id="rId17"/>
     <p:sldId id="266" r:id="rId18"/>
@@ -27,8 +27,6 @@
     <p:sldId id="275" r:id="rId27"/>
     <p:sldId id="276" r:id="rId28"/>
     <p:sldId id="277" r:id="rId29"/>
-    <p:sldId id="278" r:id="rId30"/>
-    <p:sldId id="279" r:id="rId31"/>
   </p:sldIdLst>
   <p:sldSz cx="12191695" cy="6858000" type="screen4x3"/>
   <p:notesSz cx="6858000" cy="9144000"/>
@@ -525,945 +523,17 @@
           <a:lstStyle/>
           <a:p>
             <a:r>
-              <a:t>Frame this as the bridge from Topic 6 — set the shape of the day, don't teach yet.</a:t>
-            </a:r>
-          </a:p>
-          <a:p>
-            <a:r>
-              <a:t>• Callback: Topic 6 laid the foundation (account, identity, the shared-responsibility line).</a:t>
-            </a:r>
-          </a:p>
-          <a:p>
-            <a:r>
-              <a:t>Today you build the network the workload will sit inside — Topic 8 fills it.</a:t>
-            </a:r>
-          </a:p>
-          <a:p>
-            <a:r>
-              <a:t>• Read the three parts off the slide: virtual network (VPC + subnets), traffic control</a:t>
-            </a:r>
-          </a:p>
-          <a:p>
-            <a:r>
-              <a:t>(security groups), name resolution (DNS). Everything today maps to one of those three.</a:t>
-            </a:r>
-          </a:p>
-          <a:p>
-            <a:r>
-              <a:t>• Hammer the two disciplines that continue from Topic 6 (bolded lines): still building to a</a:t>
-            </a:r>
-          </a:p>
-          <a:p>
-            <a:r>
-              <a:t>SUPPLIED design (they're the builder, not the designer), still capturing evidence as they go.</a:t>
-            </a:r>
-          </a:p>
-          <a:p>
-            <a:r>
-              <a:t>• Set the rhythm for every AWS task today: watch the demo, then do it yourself.</a:t>
-            </a:r>
-          </a:p>
-          <a:p>
-            <a:r>
-              <a:t>Misconception to pre-empt: "we're designing the network." No — the topology is given; their job</a:t>
-            </a:r>
-          </a:p>
-          <a:p>
-            <a:r>
-              <a:t>is to build it faithfully and evidence it, exactly as in AT2.</a:t>
-            </a:r>
-          </a:p>
-          <a:p>
-            <a:r>
-              <a:t>Question to pose: "Topic 6 gave the workload an identity — what's still missing before an app can</a:t>
-            </a:r>
-          </a:p>
-          <a:p>
-            <a:r>
-              <a:t>run?" (a network for it to live in, and rules for who reaches it).</a:t>
-            </a:r>
-          </a:p>
-          <a:p>
-            <a:r>
-              <a:t>UoC/AT2 tie: this Topic develops the network portion of AT2 criterion A2 (§4.2 of the Deployment</a:t>
-            </a:r>
-          </a:p>
-          <a:p>
-            <a:r>
-              <a:t>Report); it's the network tier the Topic 8 workload moves into.</a:t>
-            </a:r>
-          </a:p>
-        </p:txBody>
-      </p:sp>
-      <p:sp>
-        <p:nvSpPr>
-          <p:cNvPr id="4" name="Slide Number Placeholder 3"/>
-          <p:cNvSpPr>
-            <a:spLocks noGrp="1"/>
-          </p:cNvSpPr>
-          <p:nvPr>
-            <p:ph type="sldNum" idx="5" sz="quarter"/>
-          </p:nvPr>
-        </p:nvSpPr>
-        <p:spPr/>
-      </p:sp>
-    </p:spTree>
-  </p:cSld>
-  <p:clrMapOvr>
-    <a:masterClrMapping/>
-  </p:clrMapOvr>
-</p:notes>
-</file>
-
-<file path=ppt/notesSlides/notesSlide10.xml><?xml version="1.0" encoding="utf-8"?>
-<p:notes xmlns:a="http://schemas.openxmlformats.org/drawingml/2006/main" xmlns:p="http://schemas.openxmlformats.org/presentationml/2006/main" xmlns:r="http://schemas.openxmlformats.org/officeDocument/2006/relationships">
-  <p:cSld>
-    <p:spTree>
-      <p:nvGrpSpPr>
-        <p:cNvPr id="1" name=""/>
-        <p:cNvGrpSpPr/>
-        <p:nvPr/>
-      </p:nvGrpSpPr>
-      <p:grpSpPr>
-        <a:xfrm>
-          <a:off x="0" y="0"/>
-          <a:ext cx="0" cy="0"/>
-          <a:chOff x="0" y="0"/>
-          <a:chExt cx="0" cy="0"/>
-        </a:xfrm>
-      </p:grpSpPr>
-      <p:sp>
-        <p:nvSpPr>
-          <p:cNvPr id="2" name="Slide Image Placeholder 1"/>
-          <p:cNvSpPr>
-            <a:spLocks noGrp="1"/>
-          </p:cNvSpPr>
-          <p:nvPr>
-            <p:ph type="sldImg" idx="2"/>
-          </p:nvPr>
-        </p:nvSpPr>
-        <p:spPr/>
-      </p:sp>
-      <p:sp>
-        <p:nvSpPr>
-          <p:cNvPr id="3" name="Notes Placeholder 2"/>
-          <p:cNvSpPr>
-            <a:spLocks noGrp="1"/>
-          </p:cNvSpPr>
-          <p:nvPr>
-            <p:ph type="body" idx="3" sz="quarter"/>
-          </p:nvPr>
-        </p:nvSpPr>
-        <p:spPr/>
-        <p:txBody>
-          <a:bodyPr/>
-          <a:lstStyle/>
-          <a:p>
-            <a:r>
-              <a:t>Facilitation — the main C1+C2 hands-on build in the lab, straight after the demo. This is the AT2</a:t>
-            </a:r>
-          </a:p>
-          <a:p>
-            <a:r>
-              <a:t>network build rehearsed on the practice system.</a:t>
-            </a:r>
-          </a:p>
-          <a:p>
-            <a:r>
-              <a:t>Tell students, in these words: "Open the AWS Academy lab and the supplied Accounting design. Build</a:t>
-            </a:r>
-          </a:p>
-          <a:p>
-            <a:r>
-              <a:t>the network tier exactly as the design specifies, and capture named evidence as you go."</a:t>
-            </a:r>
-          </a:p>
-          <a:p>
-            <a:r>
-              <a:t>The task, step by step (put on the board / read out):</a:t>
-            </a:r>
-          </a:p>
-          <a:p>
-            <a:r>
-              <a:t>1. Create the VPC 10.0.0.0/16.</a:t>
-            </a:r>
-          </a:p>
-          <a:p>
-            <a:r>
-              <a:t>2. Create the three subnets: public-egress, private-app, private-data (first AZ).</a:t>
-            </a:r>
-          </a:p>
-          <a:p>
-            <a:r>
-              <a:t>3. Create the Internet Gateway + NAT gateway + per-tier route tables — egress-only (no inbound path).</a:t>
-            </a:r>
-          </a:p>
-          <a:p>
-            <a:r>
-              <a:t>4. Build the security-group chain: sg-alb → sg-app → sg-db (source = the upstream SG, not an IP).</a:t>
-            </a:r>
-          </a:p>
-          <a:p>
-            <a:r>
-              <a:t>Must produce (the AT2 evidence): named screenshots of the VPC, subnets, route tables, and SG rules —</a:t>
-            </a:r>
-          </a:p>
-          <a:p>
-            <a:r>
-              <a:t>Region visible in each.</a:t>
-            </a:r>
-          </a:p>
-          <a:p>
-            <a:r>
-              <a:t>Timing: ~25 min. Set Region to us-east-1 first — [scenario: ap-southeast-2 (Sydney) | deploy:</a:t>
-            </a:r>
-          </a:p>
-          <a:p>
-            <a:r>
-              <a:t>us-east-1] — visible in all evidence. Where they get stuck: forgetting the NAT route on the private</a:t>
-            </a:r>
-          </a:p>
-          <a:p>
-            <a:r>
-              <a:t>table (private subnet can't reach out), and writing IP sources instead of SG-as-source — circulate for both.</a:t>
-            </a:r>
-          </a:p>
-          <a:p>
-            <a:r>
-              <a:t>Share-back: ask one student to show their sg-db inbound rule; confirm it allows FROM sg-app only.</a:t>
-            </a:r>
-          </a:p>
-          <a:p>
-            <a:r>
-              <a:t>No-leakage note: this practice uses the Accounting design; the assessed build uses a different system</a:t>
-            </a:r>
-          </a:p>
-          <a:p>
-            <a:r>
-              <a:t>(public-facing ALB) — comparable, not identical.</a:t>
-            </a:r>
-          </a:p>
-        </p:txBody>
-      </p:sp>
-      <p:sp>
-        <p:nvSpPr>
-          <p:cNvPr id="4" name="Slide Number Placeholder 3"/>
-          <p:cNvSpPr>
-            <a:spLocks noGrp="1"/>
-          </p:cNvSpPr>
-          <p:nvPr>
-            <p:ph type="sldNum" idx="5" sz="quarter"/>
-          </p:nvPr>
-        </p:nvSpPr>
-        <p:spPr/>
-      </p:sp>
-    </p:spTree>
-  </p:cSld>
-  <p:clrMapOvr>
-    <a:masterClrMapping/>
-  </p:clrMapOvr>
-</p:notes>
-</file>
-
-<file path=ppt/notesSlides/notesSlide11.xml><?xml version="1.0" encoding="utf-8"?>
-<p:notes xmlns:a="http://schemas.openxmlformats.org/drawingml/2006/main" xmlns:p="http://schemas.openxmlformats.org/presentationml/2006/main" xmlns:r="http://schemas.openxmlformats.org/officeDocument/2006/relationships">
-  <p:cSld>
-    <p:spTree>
-      <p:nvGrpSpPr>
-        <p:cNvPr id="1" name=""/>
-        <p:cNvGrpSpPr/>
-        <p:nvPr/>
-      </p:nvGrpSpPr>
-      <p:grpSpPr>
-        <a:xfrm>
-          <a:off x="0" y="0"/>
-          <a:ext cx="0" cy="0"/>
-          <a:chOff x="0" y="0"/>
-          <a:chExt cx="0" cy="0"/>
-        </a:xfrm>
-      </p:grpSpPr>
-      <p:sp>
-        <p:nvSpPr>
-          <p:cNvPr id="2" name="Slide Image Placeholder 1"/>
-          <p:cNvSpPr>
-            <a:spLocks noGrp="1"/>
-          </p:cNvSpPr>
-          <p:nvPr>
-            <p:ph type="sldImg" idx="2"/>
-          </p:nvPr>
-        </p:nvSpPr>
-        <p:spPr/>
-      </p:sp>
-      <p:sp>
-        <p:nvSpPr>
-          <p:cNvPr id="3" name="Notes Placeholder 2"/>
-          <p:cNvSpPr>
-            <a:spLocks noGrp="1"/>
-          </p:cNvSpPr>
-          <p:nvPr>
-            <p:ph type="body" idx="3" sz="quarter"/>
-          </p:nvPr>
-        </p:nvSpPr>
-        <p:spPr/>
-        <p:txBody>
-          <a:bodyPr/>
-          <a:lstStyle/>
-          <a:p>
-            <a:r>
-              <a:t>Primer + teach for C3 — how DNS resolves a name, then AWS Route 53. Use the DNS-flow image; don't</a:t>
-            </a:r>
-          </a:p>
-          <a:p>
-            <a:r>
-              <a:t>assume they know what DNS does.</a:t>
-            </a:r>
-          </a:p>
-          <a:p>
-            <a:r>
-              <a:t>• DNS translates a NAME (ledgerline.yat.internal) into the IP address machines actually use.</a:t>
-            </a:r>
-          </a:p>
-          <a:p>
-            <a:r>
-              <a:t>• A resolver walks the DNS hierarchy and returns the address — we use NAMES not IPs because addresses</a:t>
-            </a:r>
-          </a:p>
-          <a:p>
-            <a:r>
-              <a:t>change; the name is stable, what it points to can move.</a:t>
-            </a:r>
-          </a:p>
-          <a:p>
-            <a:r>
-              <a:t>• The bolded line: Amazon Route 53 is AWS's highly available DNS service.</a:t>
-            </a:r>
-          </a:p>
-          <a:p>
-            <a:r>
-              <a:t>• The distinction that matters for this design: PUBLIC hosted zone = internet-facing names; PRIVATE</a:t>
-            </a:r>
-          </a:p>
-          <a:p>
-            <a:r>
-              <a:t>hosted zone = names that resolve ONLY inside your VPC. Ledgerline uses a private zone (staff-only).</a:t>
-            </a:r>
-          </a:p>
-          <a:p>
-            <a:r>
-              <a:t>Misconception to pre-empt: "DNS is the internet / a website." No — it's the phone book that turns</a:t>
-            </a:r>
-          </a:p>
-          <a:p>
-            <a:r>
-              <a:t>names into addresses; nothing about content.</a:t>
-            </a:r>
-          </a:p>
-          <a:p>
-            <a:r>
-              <a:t>Question to pose: "If Ledgerline's server is rebuilt and gets a new IP, why don't staff bookmarks</a:t>
-            </a:r>
-          </a:p>
-          <a:p>
-            <a:r>
-              <a:t>break?" (they use the NAME; DNS re-points it — that's the whole value).</a:t>
-            </a:r>
-          </a:p>
-          <a:p>
-            <a:r>
-              <a:t>UoC/AT2 tie: ICTCLD401 KE 10 (purpose of DNS) → AT2 §4 (the design's internal name via Route 53).</a:t>
-            </a:r>
-          </a:p>
-        </p:txBody>
-      </p:sp>
-      <p:sp>
-        <p:nvSpPr>
-          <p:cNvPr id="4" name="Slide Number Placeholder 3"/>
-          <p:cNvSpPr>
-            <a:spLocks noGrp="1"/>
-          </p:cNvSpPr>
-          <p:nvPr>
-            <p:ph type="sldNum" idx="5" sz="quarter"/>
-          </p:nvPr>
-        </p:nvSpPr>
-        <p:spPr/>
-      </p:sp>
-    </p:spTree>
-  </p:cSld>
-  <p:clrMapOvr>
-    <a:masterClrMapping/>
-  </p:clrMapOvr>
-</p:notes>
-</file>
-
-<file path=ppt/notesSlides/notesSlide12.xml><?xml version="1.0" encoding="utf-8"?>
-<p:notes xmlns:a="http://schemas.openxmlformats.org/drawingml/2006/main" xmlns:p="http://schemas.openxmlformats.org/presentationml/2006/main" xmlns:r="http://schemas.openxmlformats.org/officeDocument/2006/relationships">
-  <p:cSld>
-    <p:spTree>
-      <p:nvGrpSpPr>
-        <p:cNvPr id="1" name=""/>
-        <p:cNvGrpSpPr/>
-        <p:nvPr/>
-      </p:nvGrpSpPr>
-      <p:grpSpPr>
-        <a:xfrm>
-          <a:off x="0" y="0"/>
-          <a:ext cx="0" cy="0"/>
-          <a:chOff x="0" y="0"/>
-          <a:chExt cx="0" cy="0"/>
-        </a:xfrm>
-      </p:grpSpPr>
-      <p:sp>
-        <p:nvSpPr>
-          <p:cNvPr id="2" name="Slide Image Placeholder 1"/>
-          <p:cNvSpPr>
-            <a:spLocks noGrp="1"/>
-          </p:cNvSpPr>
-          <p:nvPr>
-            <p:ph type="sldImg" idx="2"/>
-          </p:nvPr>
-        </p:nvSpPr>
-        <p:spPr/>
-      </p:sp>
-      <p:sp>
-        <p:nvSpPr>
-          <p:cNvPr id="3" name="Notes Placeholder 2"/>
-          <p:cNvSpPr>
-            <a:spLocks noGrp="1"/>
-          </p:cNvSpPr>
-          <p:nvPr>
-            <p:ph type="body" idx="3" sz="quarter"/>
-          </p:nvPr>
-        </p:nvSpPr>
-        <p:spPr/>
-        <p:txBody>
-          <a:bodyPr/>
-          <a:lstStyle/>
-          <a:p>
-            <a:r>
-              <a:t>Apply DNS to the supplied design — the specific internal name + certificate students configure.</a:t>
-            </a:r>
-          </a:p>
-          <a:p>
-            <a:r>
-              <a:t>Short, but it carries an implementer decision they must own.</a:t>
-            </a:r>
-          </a:p>
-          <a:p>
-            <a:r>
-              <a:t>• Ledgerline gets an INTERNAL hostname in a PRIVATE hosted zone — staff-only, over the VPN; there is</a:t>
-            </a:r>
-          </a:p>
-          <a:p>
-            <a:r>
-              <a:t>NO public internet name. Consistent with the egress-only, VPN-reached design.</a:t>
-            </a:r>
-          </a:p>
-          <a:p>
-            <a:r>
-              <a:t>• An ACM TLS certificate secures HTTPS to that name — connect the cert to the name, not to an IP.</a:t>
-            </a:r>
-          </a:p>
-          <a:p>
-            <a:r>
-              <a:t>• The bolded line: the exact hostname + certificate domain is implementer decision C8 — they CONFIRM</a:t>
-            </a:r>
-          </a:p>
-          <a:p>
-            <a:r>
-              <a:t>it with YAT ICT, they don't guess it. Model treating an open design decision as a question to ask,</a:t>
-            </a:r>
-          </a:p>
-          <a:p>
-            <a:r>
-              <a:t>not an assumption to make.</a:t>
-            </a:r>
-          </a:p>
-          <a:p>
-            <a:r>
-              <a:t>Misconception to pre-empt: "internal name means no certificate needed." No — HTTPS/TLS still applies</a:t>
-            </a:r>
-          </a:p>
-          <a:p>
-            <a:r>
-              <a:t>inside the VPN; internal ≠ unencrypted.</a:t>
-            </a:r>
-          </a:p>
-          <a:p>
-            <a:r>
-              <a:t>Question to pose: "Why a private hosted zone here rather than a public one like a normal website?"</a:t>
-            </a:r>
-          </a:p>
-          <a:p>
-            <a:r>
-              <a:t>(the service is staff-only over the VPN; no reason to publish the name to the internet).</a:t>
-            </a:r>
-          </a:p>
-          <a:p>
-            <a:r>
-              <a:t>UoC/AT2 tie: KE 10 → AT2 §4 (DNS / name resolution). C8 is the kind of design decision AT2 expects</a:t>
-            </a:r>
-          </a:p>
-          <a:p>
-            <a:r>
-              <a:t>them to surface and confirm.</a:t>
-            </a:r>
-          </a:p>
-        </p:txBody>
-      </p:sp>
-      <p:sp>
-        <p:nvSpPr>
-          <p:cNvPr id="4" name="Slide Number Placeholder 3"/>
-          <p:cNvSpPr>
-            <a:spLocks noGrp="1"/>
-          </p:cNvSpPr>
-          <p:nvPr>
-            <p:ph type="sldNum" idx="5" sz="quarter"/>
-          </p:nvPr>
-        </p:nvSpPr>
-        <p:spPr/>
-      </p:sp>
-    </p:spTree>
-  </p:cSld>
-  <p:clrMapOvr>
-    <a:masterClrMapping/>
-  </p:clrMapOvr>
-</p:notes>
-</file>
-
-<file path=ppt/notesSlides/notesSlide13.xml><?xml version="1.0" encoding="utf-8"?>
-<p:notes xmlns:a="http://schemas.openxmlformats.org/drawingml/2006/main" xmlns:p="http://schemas.openxmlformats.org/presentationml/2006/main" xmlns:r="http://schemas.openxmlformats.org/officeDocument/2006/relationships">
-  <p:cSld>
-    <p:spTree>
-      <p:nvGrpSpPr>
-        <p:cNvPr id="1" name=""/>
-        <p:cNvGrpSpPr/>
-        <p:nvPr/>
-      </p:nvGrpSpPr>
-      <p:grpSpPr>
-        <a:xfrm>
-          <a:off x="0" y="0"/>
-          <a:ext cx="0" cy="0"/>
-          <a:chOff x="0" y="0"/>
-          <a:chExt cx="0" cy="0"/>
-        </a:xfrm>
-      </p:grpSpPr>
-      <p:sp>
-        <p:nvSpPr>
-          <p:cNvPr id="2" name="Slide Image Placeholder 1"/>
-          <p:cNvSpPr>
-            <a:spLocks noGrp="1"/>
-          </p:cNvSpPr>
-          <p:nvPr>
-            <p:ph type="sldImg" idx="2"/>
-          </p:nvPr>
-        </p:nvSpPr>
-        <p:spPr/>
-      </p:sp>
-      <p:sp>
-        <p:nvSpPr>
-          <p:cNvPr id="3" name="Notes Placeholder 2"/>
-          <p:cNvSpPr>
-            <a:spLocks noGrp="1"/>
-          </p:cNvSpPr>
-          <p:nvPr>
-            <p:ph type="body" idx="3" sz="quarter"/>
-          </p:nvPr>
-        </p:nvSpPr>
-        <p:spPr/>
-        <p:txBody>
-          <a:bodyPr/>
-          <a:lstStyle/>
-          <a:p>
-            <a:r>
-              <a:t>Teach the test-and-fix discipline — introduced here (PC 2.6), completed in Topic 8/9 once compute</a:t>
-            </a:r>
-          </a:p>
-          <a:p>
-            <a:r>
-              <a:t>exists. This is the "evidence it works", not just "it's built" mindset.</a:t>
-            </a:r>
-          </a:p>
-          <a:p>
-            <a:r>
-              <a:t>• After building, CONFIRM reachability: external access IN (reach the service over the VPN) and access</a:t>
-            </a:r>
-          </a:p>
-          <a:p>
-            <a:r>
-              <a:t>BETWEEN tiers (app → db). Building isn't done until it's tested.</a:t>
-            </a:r>
-          </a:p>
-          <a:p>
-            <a:r>
-              <a:t>• Reachability Analyzer traces the path and NAMES the blocking component when something can't connect</a:t>
-            </a:r>
-          </a:p>
-          <a:p>
-            <a:r>
-              <a:t>— it turns "it doesn't work" into "this rule is blocking it".</a:t>
-            </a:r>
-          </a:p>
-          <a:p>
-            <a:r>
-              <a:t>• The bolded line — VPC flow logs show ACCEPT / REJECT; a REJECT is usually a missing SG rule or a</a:t>
-            </a:r>
-          </a:p>
-          <a:p>
-            <a:r>
-              <a:t>missing route. Teach the reflex: read the log, find the block, fix, retest, capture.</a:t>
-            </a:r>
-          </a:p>
-          <a:p>
-            <a:r>
-              <a:t>• Be honest about scope: full app → db testing completes in Topic 8 once compute exists — here they</a:t>
-            </a:r>
-          </a:p>
-          <a:p>
-            <a:r>
-              <a:t>test what exists so far.</a:t>
-            </a:r>
-          </a:p>
-          <a:p>
-            <a:r>
-              <a:t>Misconception to pre-empt: "no error means it's correct." Absence of an error isn't proof — you have</a:t>
-            </a:r>
-          </a:p>
-          <a:p>
-            <a:r>
-              <a:t>to actively test the paths the design requires and evidence the result.</a:t>
-            </a:r>
-          </a:p>
-          <a:p>
-            <a:r>
-              <a:t>Question to pose: "Staff can't reach Ledgerline over the VPN — what two things do you check first?"</a:t>
-            </a:r>
-          </a:p>
-          <a:p>
-            <a:r>
-              <a:t>(the SG inbound rule and the route table / flow-log REJECT).</a:t>
-            </a:r>
-          </a:p>
-          <a:p>
-            <a:r>
-              <a:t>UoC/AT2 tie: ICTCLD401 PC 2.6 (test access + fix errors, introduced) + PE 3 → AT2 A2/A10.</a:t>
-            </a:r>
-          </a:p>
-        </p:txBody>
-      </p:sp>
-      <p:sp>
-        <p:nvSpPr>
-          <p:cNvPr id="4" name="Slide Number Placeholder 3"/>
-          <p:cNvSpPr>
-            <a:spLocks noGrp="1"/>
-          </p:cNvSpPr>
-          <p:nvPr>
-            <p:ph type="sldNum" idx="5" sz="quarter"/>
-          </p:nvPr>
-        </p:nvSpPr>
-        <p:spPr/>
-      </p:sp>
-    </p:spTree>
-  </p:cSld>
-  <p:clrMapOvr>
-    <a:masterClrMapping/>
-  </p:clrMapOvr>
-</p:notes>
-</file>
-
-<file path=ppt/notesSlides/notesSlide14.xml><?xml version="1.0" encoding="utf-8"?>
-<p:notes xmlns:a="http://schemas.openxmlformats.org/drawingml/2006/main" xmlns:p="http://schemas.openxmlformats.org/presentationml/2006/main" xmlns:r="http://schemas.openxmlformats.org/officeDocument/2006/relationships">
-  <p:cSld>
-    <p:spTree>
-      <p:nvGrpSpPr>
-        <p:cNvPr id="1" name=""/>
-        <p:cNvGrpSpPr/>
-        <p:nvPr/>
-      </p:nvGrpSpPr>
-      <p:grpSpPr>
-        <a:xfrm>
-          <a:off x="0" y="0"/>
-          <a:ext cx="0" cy="0"/>
-          <a:chOff x="0" y="0"/>
-          <a:chExt cx="0" cy="0"/>
-        </a:xfrm>
-      </p:grpSpPr>
-      <p:sp>
-        <p:nvSpPr>
-          <p:cNvPr id="2" name="Slide Image Placeholder 1"/>
-          <p:cNvSpPr>
-            <a:spLocks noGrp="1"/>
-          </p:cNvSpPr>
-          <p:nvPr>
-            <p:ph type="sldImg" idx="2"/>
-          </p:nvPr>
-        </p:nvSpPr>
-        <p:spPr/>
-      </p:sp>
-      <p:sp>
-        <p:nvSpPr>
-          <p:cNvPr id="3" name="Notes Placeholder 2"/>
-          <p:cNvSpPr>
-            <a:spLocks noGrp="1"/>
-          </p:cNvSpPr>
-          <p:nvPr>
-            <p:ph type="body" idx="3" sz="quarter"/>
-          </p:nvPr>
-        </p:nvSpPr>
-        <p:spPr/>
-        <p:txBody>
-          <a:bodyPr/>
-          <a:lstStyle/>
-          <a:p>
-            <a:r>
-              <a:t>DEMONSTRATE step for C3 — this is a LIVE instructor demo, not a recorded one. teach → DEMONSTRATE →</a:t>
-            </a:r>
-          </a:p>
-          <a:p>
-            <a:r>
-              <a:t>practice.</a:t>
-            </a:r>
-          </a:p>
-          <a:p/>
-          <a:p>
-            <a:r>
-              <a:t>WHERE TO FIND THE RECORDED DEMO: none fits — the recorded Route 53 demos in the catalogue (ACA M10</a:t>
-            </a:r>
-          </a:p>
-          <a:p>
-            <a:r>
-              <a:t>S52 Failover, S51 Simple Routing) are PUBLIC-routing demos and don't fit a PRIVATE hosted zone, so</a:t>
-            </a:r>
-          </a:p>
-          <a:p>
-            <a:r>
-              <a:t>do this one LIVE in the console. (Per the demos catalogue, Topic 7's Route 53 need has no recorded</a:t>
-            </a:r>
-          </a:p>
-          <a:p>
-            <a:r>
-              <a:t>private-zone demo — live is the intended fallback.)</a:t>
-            </a:r>
-          </a:p>
-          <a:p/>
-          <a:p>
-            <a:r>
-              <a:t>WHAT TO DEMONSTRATE (live, narrated):</a:t>
-            </a:r>
-          </a:p>
-          <a:p>
-            <a:r>
-              <a:t>1. In Route 53, create / confirm the PRIVATE hosted zone for the internal domain.</a:t>
-            </a:r>
-          </a:p>
-          <a:p>
-            <a:r>
-              <a:t>2. Add the record for the Ledgerline name (and note the ACM certificate).</a:t>
-            </a:r>
-          </a:p>
-          <a:p>
-            <a:r>
-              <a:t>3. From a test point, resolve the name and check reachability.</a:t>
-            </a:r>
-          </a:p>
-          <a:p>
-            <a:r>
-              <a:t>4. If it's blocked, read the flow logs / Reachability Analyzer and fix the SG or route — then retest.</a:t>
-            </a:r>
-          </a:p>
-          <a:p/>
-          <a:p>
-            <a:r>
-              <a:t>WHAT TO EMPHASISE:</a:t>
-            </a:r>
-          </a:p>
-          <a:p>
-            <a:r>
-              <a:t>• PRIVATE zone — show it's associated with the VPC; the name resolves only inside, not on the internet.</a:t>
-            </a:r>
-          </a:p>
-          <a:p>
-            <a:r>
-              <a:t>• Resolve the NAME, not the IP — prove DNS is doing its job.</a:t>
-            </a:r>
-          </a:p>
-          <a:p>
-            <a:r>
-              <a:t>• Model the fix loop live: deliberately hit (or narrate) a REJECT, read it, fix the SG/route, retest —</a:t>
-            </a:r>
-          </a:p>
-          <a:p>
-            <a:r>
-              <a:t>this is exactly the PC 2.6 discipline they're assessed on.</a:t>
-            </a:r>
-          </a:p>
-          <a:p>
-            <a:r>
-              <a:t>• Narrate evidence capture — the DNS config and the test result both go in the log, Region visible.</a:t>
-            </a:r>
-          </a:p>
-          <a:p>
-            <a:r>
-              <a:t>PREP: lab open with the Topic-7 network already built (or a prepared account), Solution Design C8</a:t>
-            </a:r>
-          </a:p>
-          <a:p>
-            <a:r>
-              <a:t>handy for the hostname, Reachability Analyzer/flow logs ready to show. ~10 min live.</a:t>
-            </a:r>
-          </a:p>
-        </p:txBody>
-      </p:sp>
-      <p:sp>
-        <p:nvSpPr>
-          <p:cNvPr id="4" name="Slide Number Placeholder 3"/>
-          <p:cNvSpPr>
-            <a:spLocks noGrp="1"/>
-          </p:cNvSpPr>
-          <p:nvPr>
-            <p:ph type="sldNum" idx="5" sz="quarter"/>
-          </p:nvPr>
-        </p:nvSpPr>
-        <p:spPr/>
-      </p:sp>
-    </p:spTree>
-  </p:cSld>
-  <p:clrMapOvr>
-    <a:masterClrMapping/>
-  </p:clrMapOvr>
-</p:notes>
-</file>
-
-<file path=ppt/notesSlides/notesSlide15.xml><?xml version="1.0" encoding="utf-8"?>
-<p:notes xmlns:a="http://schemas.openxmlformats.org/drawingml/2006/main" xmlns:p="http://schemas.openxmlformats.org/presentationml/2006/main" xmlns:r="http://schemas.openxmlformats.org/officeDocument/2006/relationships">
-  <p:cSld>
-    <p:spTree>
-      <p:nvGrpSpPr>
-        <p:cNvPr id="1" name=""/>
-        <p:cNvGrpSpPr/>
-        <p:nvPr/>
-      </p:nvGrpSpPr>
-      <p:grpSpPr>
-        <a:xfrm>
-          <a:off x="0" y="0"/>
-          <a:ext cx="0" cy="0"/>
-          <a:chOff x="0" y="0"/>
-          <a:chExt cx="0" cy="0"/>
-        </a:xfrm>
-      </p:grpSpPr>
-      <p:sp>
-        <p:nvSpPr>
-          <p:cNvPr id="2" name="Slide Image Placeholder 1"/>
-          <p:cNvSpPr>
-            <a:spLocks noGrp="1"/>
-          </p:cNvSpPr>
-          <p:nvPr>
-            <p:ph type="sldImg" idx="2"/>
-          </p:nvPr>
-        </p:nvSpPr>
-        <p:spPr/>
-      </p:sp>
-      <p:sp>
-        <p:nvSpPr>
-          <p:cNvPr id="3" name="Notes Placeholder 2"/>
-          <p:cNvSpPr>
-            <a:spLocks noGrp="1"/>
-          </p:cNvSpPr>
-          <p:nvPr>
-            <p:ph type="body" idx="3" sz="quarter"/>
-          </p:nvPr>
-        </p:nvSpPr>
-        <p:spPr/>
-        <p:txBody>
-          <a:bodyPr/>
-          <a:lstStyle/>
-          <a:p>
-            <a:r>
-              <a:t>Facilitation — the closing C3 hands-on: finish the network tier with DNS, then test what exists.</a:t>
-            </a:r>
-          </a:p>
-          <a:p>
-            <a:r>
-              <a:t>Straight after the live demo.</a:t>
-            </a:r>
-          </a:p>
-          <a:p>
-            <a:r>
-              <a:t>Tell students, in these words: "In the lab, finish the network tier — create the internal DNS name,</a:t>
-            </a:r>
-          </a:p>
-          <a:p>
-            <a:r>
-              <a:t>then test the paths you can test so far and fix anything that's blocked. Capture evidence throughout."</a:t>
-            </a:r>
-          </a:p>
-          <a:p>
-            <a:r>
-              <a:t>The task, step by step (put on the board / read out):</a:t>
-            </a:r>
-          </a:p>
-          <a:p>
-            <a:r>
-              <a:t>1. Create the PRIVATE hosted zone + the record for the internal hostname (note the ACM cert; confirm</a:t>
-            </a:r>
-          </a:p>
-          <a:p>
-            <a:r>
-              <a:t>the exact name is the C8 decision).</a:t>
-            </a:r>
-          </a:p>
-          <a:p>
-            <a:r>
-              <a:t>2. Run reachability tests for what exists so far (the network paths; full app → db waits for Topic 8).</a:t>
-            </a:r>
-          </a:p>
-          <a:p>
-            <a:r>
-              <a:t>3. If a test is blocked, read the flow logs / Reachability Analyzer, fix the SG or route, and retest.</a:t>
-            </a:r>
-          </a:p>
-          <a:p>
-            <a:r>
-              <a:t>Must produce (the AT2 evidence): the DNS config screenshot AND a test result — plus a note of any fix</a:t>
-            </a:r>
-          </a:p>
-          <a:p>
-            <a:r>
-              <a:t>made (what was blocked, what you changed).</a:t>
-            </a:r>
-          </a:p>
-          <a:p>
-            <a:r>
-              <a:t>Timing: ~15 min. Where they get stuck: expecting to test app → db when there's no compute yet — scope</a:t>
-            </a:r>
-          </a:p>
-          <a:p>
-            <a:r>
-              <a:t>them to the paths that exist; and forgetting to associate the private zone with the VPC (name won't</a:t>
-            </a:r>
-          </a:p>
-          <a:p>
-            <a:r>
-              <a:t>resolve).</a:t>
-            </a:r>
-          </a:p>
-          <a:p>
-            <a:r>
-              <a:t>Share-back: ask a student who hit a REJECT to narrate their fix loop — the fix, not just the pass, is</a:t>
-            </a:r>
-          </a:p>
-          <a:p>
-            <a:r>
-              <a:t>the assessable skill.</a:t>
-            </a:r>
-          </a:p>
-          <a:p>
-            <a:r>
-              <a:t>No-leakage note: practice on the Accounting design (internal name); AT2 assesses the same skill on the</a:t>
-            </a:r>
-          </a:p>
-          <a:p>
-            <a:r>
-              <a:t>LMS — comparable, not identical.</a:t>
+              <a:t>Activity = practice run sheet task 7. Two predictable stumbles: trying to add rules before all</a:t>
+            </a:r>
+          </a:p>
+          <a:p>
+            <a:r>
+              <a:t>three groups exist, and typing an address range where the run sheet says a group.</a:t>
+            </a:r>
+          </a:p>
+          <a:p>
+            <a:r>
+              <a:t>Share-back: show the database group's inbound rule and confirm its source is the application group.</a:t>
             </a:r>
           </a:p>
         </p:txBody>
@@ -1533,67 +603,12 @@
           <a:lstStyle/>
           <a:p>
             <a:r>
-              <a:t>Primer — vendor-neutral fundamentals BEFORE any AWS. Don't assume a networking baseline; some</a:t>
-            </a:r>
-          </a:p>
-          <a:p>
-            <a:r>
-              <a:t>students meet IP/CIDR for the first time here. Use the IP/CIDR image.</a:t>
-            </a:r>
-          </a:p>
-          <a:p>
-            <a:r>
-              <a:t>• Network = machines connected to share resources; it can be split into smaller pieces (subnets).</a:t>
-            </a:r>
-          </a:p>
-          <a:p>
-            <a:r>
-              <a:t>• IP address = a unique numeric label for a machine (e.g. 10.0.0.17) — like a street address.</a:t>
-            </a:r>
-          </a:p>
-          <a:p>
-            <a:r>
-              <a:t>• CIDR (the bolded line, the hard bit): 10.0.0.0/16 describes a RANGE; the /number says how many</a:t>
-            </a:r>
-          </a:p>
-          <a:p>
-            <a:r>
-              <a:t>bits are fixed. Small /number = big range; big /number = small range. Give the /16-vs-/28 feel</a:t>
-            </a:r>
-          </a:p>
-          <a:p>
-            <a:r>
-              <a:t>rather than the binary maths — that's enough for building to a supplied design.</a:t>
-            </a:r>
-          </a:p>
-          <a:p>
-            <a:r>
-              <a:t>• Routers/gateways move traffic between networks — sets up the VPC gateways two slides on.</a:t>
-            </a:r>
-          </a:p>
-          <a:p>
-            <a:r>
-              <a:t>Misconception to pre-empt: "the /16 is 16 addresses." No — the slash counts FIXED bits, not</a:t>
-            </a:r>
-          </a:p>
-          <a:p>
-            <a:r>
-              <a:t>addresses; /16 is a large block, /28 a tiny one.</a:t>
-            </a:r>
-          </a:p>
-          <a:p>
-            <a:r>
-              <a:t>Question to pose: "Which is the bigger network — a /16 or a /24?" (/16 — fewer fixed bits, more room).</a:t>
-            </a:r>
-          </a:p>
-          <a:p>
-            <a:r>
-              <a:t>UoC/AT2 tie: ICTCLD401 KE 5 (virtual networks) — the vocabulary the VPC build rests on.</a:t>
-            </a:r>
-          </a:p>
-          <a:p>
-            <a:r>
-              <a:t>[Primer slide — reuses ACF M05 S5–S9; keep it brisk, it's foundation for the AWS slides.]</a:t>
+              <a:t>Activity = practice run sheet task 8. Tell them up front they will be refused, so nobody spends</a:t>
+            </a:r>
+          </a:p>
+          <a:p>
+            <a:r>
+              <a:t>the session hunting a fault. Both captures must show the completed form *and* the error.</a:t>
             </a:r>
           </a:p>
         </p:txBody>
@@ -1663,905 +678,12 @@
           <a:lstStyle/>
           <a:p>
             <a:r>
-              <a:t>The AWS-context teach after the primer — this is the core C1 concept. Teach it deliberately.</a:t>
-            </a:r>
-          </a:p>
-          <a:p>
-            <a:r>
-              <a:t>• A VPC is a logically isolated slice of AWS that YOU define — your own private virtual network.</a:t>
-            </a:r>
-          </a:p>
-          <a:p>
-            <a:r>
-              <a:t>• It belongs to ONE Region and can span the AZs in it; you size it with a CIDR block (largest /16,</a:t>
-            </a:r>
-          </a:p>
-          <a:p>
-            <a:r>
-              <a:t>smallest /28). Stress: you can't change the CIDR later — sizing is a decision, not a default.</a:t>
-            </a:r>
-          </a:p>
-          <a:p>
-            <a:r>
-              <a:t>• The bolded line: you divide the VPC into subnets, each in one AZ, classified public or private.</a:t>
-            </a:r>
-          </a:p>
-          <a:p>
-            <a:r>
-              <a:t>"Public/private" is about whether there's a path to the internet, not about secrecy — flag it now</a:t>
-            </a:r>
-          </a:p>
-          <a:p>
-            <a:r>
-              <a:t>because it drives the next activity.</a:t>
-            </a:r>
-          </a:p>
-          <a:p>
-            <a:r>
-              <a:t>Misconception to pre-empt: "a VPC lives in an AZ." No — a VPC is Region-scoped and spans AZs; a</a:t>
-            </a:r>
-          </a:p>
-          <a:p>
-            <a:r>
-              <a:t>SUBNET lives in one AZ. This is the Topic 1 Region/AZ hierarchy made concrete.</a:t>
-            </a:r>
-          </a:p>
-          <a:p>
-            <a:r>
-              <a:t>Question to pose: "Our design's VPC is 10.0.0.0/16 — why give it that much room when Ledgerline is</a:t>
-            </a:r>
-          </a:p>
-          <a:p>
-            <a:r>
-              <a:t>small?" (headroom to add subnets/tiers later without rebuilding).</a:t>
-            </a:r>
-          </a:p>
-          <a:p>
-            <a:r>
-              <a:t>UoC/AT2 tie: ICTCLD401 PC 2.2 (create a virtual multi-tier network) + KE 5 → AT2 §4.2. This is the</a:t>
-            </a:r>
-          </a:p>
-          <a:p>
-            <a:r>
-              <a:t>VPC students build to the supplied design.</a:t>
-            </a:r>
-          </a:p>
-        </p:txBody>
-      </p:sp>
-      <p:sp>
-        <p:nvSpPr>
-          <p:cNvPr id="4" name="Slide Number Placeholder 3"/>
-          <p:cNvSpPr>
-            <a:spLocks noGrp="1"/>
-          </p:cNvSpPr>
-          <p:nvPr>
-            <p:ph type="sldNum" idx="5" sz="quarter"/>
-          </p:nvPr>
-        </p:nvSpPr>
-        <p:spPr/>
-      </p:sp>
-    </p:spTree>
-  </p:cSld>
-  <p:clrMapOvr>
-    <a:masterClrMapping/>
-  </p:clrMapOvr>
-</p:notes>
-</file>
-
-<file path=ppt/notesSlides/notesSlide4.xml><?xml version="1.0" encoding="utf-8"?>
-<p:notes xmlns:a="http://schemas.openxmlformats.org/drawingml/2006/main" xmlns:p="http://schemas.openxmlformats.org/presentationml/2006/main" xmlns:r="http://schemas.openxmlformats.org/officeDocument/2006/relationships">
-  <p:cSld>
-    <p:spTree>
-      <p:nvGrpSpPr>
-        <p:cNvPr id="1" name=""/>
-        <p:cNvGrpSpPr/>
-        <p:nvPr/>
-      </p:nvGrpSpPr>
-      <p:grpSpPr>
-        <a:xfrm>
-          <a:off x="0" y="0"/>
-          <a:ext cx="0" cy="0"/>
-          <a:chOff x="0" y="0"/>
-          <a:chExt cx="0" cy="0"/>
-        </a:xfrm>
-      </p:grpSpPr>
-      <p:sp>
-        <p:nvSpPr>
-          <p:cNvPr id="2" name="Slide Image Placeholder 1"/>
-          <p:cNvSpPr>
-            <a:spLocks noGrp="1"/>
-          </p:cNvSpPr>
-          <p:nvPr>
-            <p:ph type="sldImg" idx="2"/>
-          </p:nvPr>
-        </p:nvSpPr>
-        <p:spPr/>
-      </p:sp>
-      <p:sp>
-        <p:nvSpPr>
-          <p:cNvPr id="3" name="Notes Placeholder 2"/>
-          <p:cNvSpPr>
-            <a:spLocks noGrp="1"/>
-          </p:cNvSpPr>
-          <p:nvPr>
-            <p:ph type="body" idx="3" sz="quarter"/>
-          </p:nvPr>
-        </p:nvSpPr>
-        <p:spPr/>
-        <p:txBody>
-          <a:bodyPr/>
-          <a:lstStyle/>
-          <a:p>
-            <a:r>
-              <a:t>Teach how traffic actually reaches (or doesn't reach) a subnet — the mechanism behind public vs</a:t>
-            </a:r>
-          </a:p>
-          <a:p>
-            <a:r>
-              <a:t>private. Use the VPC-anatomy diagram; walk it, don't read.</a:t>
-            </a:r>
-          </a:p>
-          <a:p>
-            <a:r>
-              <a:t>• Route table = rules that direct a subnet's traffic; every table has a built-in LOCAL route so</a:t>
-            </a:r>
-          </a:p>
-          <a:p>
-            <a:r>
-              <a:t>anything inside the VPC can talk without extra config.</a:t>
-            </a:r>
-          </a:p>
-          <a:p>
-            <a:r>
-              <a:t>• Public subnet = a 0.0.0.0/0 route to an Internet Gateway → direct internet path.</a:t>
-            </a:r>
-          </a:p>
-          <a:p>
-            <a:r>
-              <a:t>• Private subnet = no such route → no direct internet path. "Public/private is decided by the ROUTE</a:t>
-            </a:r>
-          </a:p>
-          <a:p>
-            <a:r>
-              <a:t>TABLE" is the sentence to land.</a:t>
-            </a:r>
-          </a:p>
-          <a:p>
-            <a:r>
-              <a:t>• The bolded line — NAT gateway: lets private resources reach OUT (e.g. patching) WITHOUT being</a:t>
-            </a:r>
-          </a:p>
-          <a:p>
-            <a:r>
-              <a:t>reachable from the internet. Outbound-only. This is exactly the design's egress-only model.</a:t>
-            </a:r>
-          </a:p>
-          <a:p>
-            <a:r>
-              <a:t>Misconception to pre-empt: "a NAT gateway lets the internet into the private subnet." No — it's</a:t>
-            </a:r>
-          </a:p>
-          <a:p>
-            <a:r>
-              <a:t>one-way OUT; nothing inbound. Students routinely invert this.</a:t>
-            </a:r>
-          </a:p>
-          <a:p>
-            <a:r>
-              <a:t>Question to pose: "The database subnet must never be reachable from the internet but still needs OS</a:t>
-            </a:r>
-          </a:p>
-          <a:p>
-            <a:r>
-              <a:t>patches — how?" (private subnet, no IGW route, patches via the NAT gateway).</a:t>
-            </a:r>
-          </a:p>
-          <a:p>
-            <a:r>
-              <a:t>UoC/AT2 tie: ICTCLD401 PC 2.2 / KE 5 (traffic routing) → AT2 §4.2 (subnets + routing).</a:t>
-            </a:r>
-          </a:p>
-        </p:txBody>
-      </p:sp>
-      <p:sp>
-        <p:nvSpPr>
-          <p:cNvPr id="4" name="Slide Number Placeholder 3"/>
-          <p:cNvSpPr>
-            <a:spLocks noGrp="1"/>
-          </p:cNvSpPr>
-          <p:nvPr>
-            <p:ph type="sldNum" idx="5" sz="quarter"/>
-          </p:nvPr>
-        </p:nvSpPr>
-        <p:spPr/>
-      </p:sp>
-    </p:spTree>
-  </p:cSld>
-  <p:clrMapOvr>
-    <a:masterClrMapping/>
-  </p:clrMapOvr>
-</p:notes>
-</file>
-
-<file path=ppt/notesSlides/notesSlide5.xml><?xml version="1.0" encoding="utf-8"?>
-<p:notes xmlns:a="http://schemas.openxmlformats.org/drawingml/2006/main" xmlns:p="http://schemas.openxmlformats.org/presentationml/2006/main" xmlns:r="http://schemas.openxmlformats.org/officeDocument/2006/relationships">
-  <p:cSld>
-    <p:spTree>
-      <p:nvGrpSpPr>
-        <p:cNvPr id="1" name=""/>
-        <p:cNvGrpSpPr/>
-        <p:nvPr/>
-      </p:nvGrpSpPr>
-      <p:grpSpPr>
-        <a:xfrm>
-          <a:off x="0" y="0"/>
-          <a:ext cx="0" cy="0"/>
-          <a:chOff x="0" y="0"/>
-          <a:chExt cx="0" cy="0"/>
-        </a:xfrm>
-      </p:grpSpPr>
-      <p:sp>
-        <p:nvSpPr>
-          <p:cNvPr id="2" name="Slide Image Placeholder 1"/>
-          <p:cNvSpPr>
-            <a:spLocks noGrp="1"/>
-          </p:cNvSpPr>
-          <p:nvPr>
-            <p:ph type="sldImg" idx="2"/>
-          </p:nvPr>
-        </p:nvSpPr>
-        <p:spPr/>
-      </p:sp>
-      <p:sp>
-        <p:nvSpPr>
-          <p:cNvPr id="3" name="Notes Placeholder 2"/>
-          <p:cNvSpPr>
-            <a:spLocks noGrp="1"/>
-          </p:cNvSpPr>
-          <p:nvPr>
-            <p:ph type="body" idx="3" sz="quarter"/>
-          </p:nvPr>
-        </p:nvSpPr>
-        <p:spPr/>
-        <p:txBody>
-          <a:bodyPr/>
-          <a:lstStyle/>
-          <a:p>
-            <a:r>
-              <a:t>Facilitation — a quick sorting task that forces the public/private decision they'll make for real</a:t>
-            </a:r>
-          </a:p>
-          <a:p>
-            <a:r>
-              <a:t>in the lab. Whole-room or pairs, fast.</a:t>
-            </a:r>
-          </a:p>
-          <a:p>
-            <a:r>
-              <a:t>Tell students: "For each resource, decide the subnet it belongs in — public or private — and be</a:t>
-            </a:r>
-          </a:p>
-          <a:p>
-            <a:r>
-              <a:t>ready to say WHY in one line."</a:t>
-            </a:r>
-          </a:p>
-          <a:p>
-            <a:r>
-              <a:t>The four (put up): the database · a batch-processing job · the web/app server · a NAT gateway.</a:t>
-            </a:r>
-          </a:p>
-          <a:p>
-            <a:r>
-              <a:t>Expected landing: database → private; batch job → private; web/app server → private (behind a load</a:t>
-            </a:r>
-          </a:p>
-          <a:p>
-            <a:r>
-              <a:t>balancer); NAT gateway → public. The rule of thumb (bolded): anything that shouldn't be reachable</a:t>
-            </a:r>
-          </a:p>
-          <a:p>
-            <a:r>
-              <a:t>from the internet goes private; only internet-facing entry points and the NAT gateway go public.</a:t>
-            </a:r>
-          </a:p>
-          <a:p>
-            <a:r>
-              <a:t>Must produce: four placements, each with a one-line reason tied to "is it reachable from the net?"</a:t>
-            </a:r>
-          </a:p>
-          <a:p>
-            <a:r>
-              <a:t>Timing: ~10 min then share. Where they get stuck: they put the web/app server in a public subnet</a:t>
-            </a:r>
-          </a:p>
-          <a:p>
-            <a:r>
-              <a:t>because "users reach it" — push them to AWS's pattern (app tier private, behind a public ALB); the</a:t>
-            </a:r>
-          </a:p>
-          <a:p>
-            <a:r>
-              <a:t>LOAD BALANCER is the public entry point, not the server.</a:t>
-            </a:r>
-          </a:p>
-          <a:p>
-            <a:r>
-              <a:t>Share-back prompt: "Who put the app server public — what changes if it sits behind an ALB instead?"</a:t>
-            </a:r>
-          </a:p>
-          <a:p>
-            <a:r>
-              <a:t>No-leakage note: reasoning practice on the Accounting design; AT2 assesses the same call on the LMS.</a:t>
-            </a:r>
-          </a:p>
-        </p:txBody>
-      </p:sp>
-      <p:sp>
-        <p:nvSpPr>
-          <p:cNvPr id="4" name="Slide Number Placeholder 3"/>
-          <p:cNvSpPr>
-            <a:spLocks noGrp="1"/>
-          </p:cNvSpPr>
-          <p:nvPr>
-            <p:ph type="sldNum" idx="5" sz="quarter"/>
-          </p:nvPr>
-        </p:nvSpPr>
-        <p:spPr/>
-      </p:sp>
-    </p:spTree>
-  </p:cSld>
-  <p:clrMapOvr>
-    <a:masterClrMapping/>
-  </p:clrMapOvr>
-</p:notes>
-</file>
-
-<file path=ppt/notesSlides/notesSlide6.xml><?xml version="1.0" encoding="utf-8"?>
-<p:notes xmlns:a="http://schemas.openxmlformats.org/drawingml/2006/main" xmlns:p="http://schemas.openxmlformats.org/presentationml/2006/main" xmlns:r="http://schemas.openxmlformats.org/officeDocument/2006/relationships">
-  <p:cSld>
-    <p:spTree>
-      <p:nvGrpSpPr>
-        <p:cNvPr id="1" name=""/>
-        <p:cNvGrpSpPr/>
-        <p:nvPr/>
-      </p:nvGrpSpPr>
-      <p:grpSpPr>
-        <a:xfrm>
-          <a:off x="0" y="0"/>
-          <a:ext cx="0" cy="0"/>
-          <a:chOff x="0" y="0"/>
-          <a:chExt cx="0" cy="0"/>
-        </a:xfrm>
-      </p:grpSpPr>
-      <p:sp>
-        <p:nvSpPr>
-          <p:cNvPr id="2" name="Slide Image Placeholder 1"/>
-          <p:cNvSpPr>
-            <a:spLocks noGrp="1"/>
-          </p:cNvSpPr>
-          <p:nvPr>
-            <p:ph type="sldImg" idx="2"/>
-          </p:nvPr>
-        </p:nvSpPr>
-        <p:spPr/>
-      </p:sp>
-      <p:sp>
-        <p:nvSpPr>
-          <p:cNvPr id="3" name="Notes Placeholder 2"/>
-          <p:cNvSpPr>
-            <a:spLocks noGrp="1"/>
-          </p:cNvSpPr>
-          <p:nvPr>
-            <p:ph type="body" idx="3" sz="quarter"/>
-          </p:nvPr>
-        </p:nvSpPr>
-        <p:spPr/>
-        <p:txBody>
-          <a:bodyPr/>
-          <a:lstStyle/>
-          <a:p>
-            <a:r>
-              <a:t>Pivot from concept to the actual thing they build — the supplied design's network topology. Get</a:t>
-            </a:r>
-          </a:p>
-          <a:p>
-            <a:r>
-              <a:t>them into the Solution Design on the intranet; this is the spec they build to.</a:t>
-            </a:r>
-          </a:p>
-          <a:p>
-            <a:r>
-              <a:t>• The bolded line: open the Solution Design (§4.4) and study its network topology — you build to</a:t>
-            </a:r>
-          </a:p>
-          <a:p>
-            <a:r>
-              <a:t>THAT, you don't invent it. Model reading a supplied design before touching the console.</a:t>
-            </a:r>
-          </a:p>
-          <a:p>
-            <a:r>
-              <a:t>• Walk the specifics: VPC 10.0.0.0/16 (room to expand), DNS resolution + flow logs on; subnets in</a:t>
-            </a:r>
-          </a:p>
-          <a:p>
-            <a:r>
-              <a:t>the first AZ — public-egress-a (NAT only), private-app-a (app + internal ALB), private-data-a</a:t>
-            </a:r>
-          </a:p>
-          <a:p>
-            <a:r>
-              <a:t>(database).</a:t>
-            </a:r>
-          </a:p>
-          <a:p>
-            <a:r>
-              <a:t>• Egress-only: the Internet Gateway is for outbound patching via NAT; NO inbound path from the</a:t>
-            </a:r>
-          </a:p>
-          <a:p>
-            <a:r>
-              <a:t>internet. Staff reach the service over the campus Site-to-Site VPN; route tables set per tier.</a:t>
-            </a:r>
-          </a:p>
-          <a:p>
-            <a:r>
-              <a:t>Misconception to pre-empt: "public-egress means the public can get in." No — it's the subnet that</a:t>
-            </a:r>
-          </a:p>
-          <a:p>
-            <a:r>
-              <a:t>holds the NAT for OUTbound only; the name describes egress, not inbound access.</a:t>
-            </a:r>
-          </a:p>
-          <a:p>
-            <a:r>
-              <a:t>Question to pose: "Where does a member of YAT staff actually connect from, if there's no inbound</a:t>
-            </a:r>
-          </a:p>
-          <a:p>
-            <a:r>
-              <a:t>internet path?" (over the campus Site-to-Site VPN — a given in the design, not built here).</a:t>
-            </a:r>
-          </a:p>
-          <a:p>
-            <a:r>
-              <a:t>UoC/AT2 tie: PC 2.2 → AT2 §4.2; this is the concrete topology their build + evidence must match.</a:t>
-            </a:r>
-          </a:p>
-        </p:txBody>
-      </p:sp>
-      <p:sp>
-        <p:nvSpPr>
-          <p:cNvPr id="4" name="Slide Number Placeholder 3"/>
-          <p:cNvSpPr>
-            <a:spLocks noGrp="1"/>
-          </p:cNvSpPr>
-          <p:nvPr>
-            <p:ph type="sldNum" idx="5" sz="quarter"/>
-          </p:nvPr>
-        </p:nvSpPr>
-        <p:spPr/>
-      </p:sp>
-    </p:spTree>
-  </p:cSld>
-  <p:clrMapOvr>
-    <a:masterClrMapping/>
-  </p:clrMapOvr>
-</p:notes>
-</file>
-
-<file path=ppt/notesSlides/notesSlide7.xml><?xml version="1.0" encoding="utf-8"?>
-<p:notes xmlns:a="http://schemas.openxmlformats.org/drawingml/2006/main" xmlns:p="http://schemas.openxmlformats.org/presentationml/2006/main" xmlns:r="http://schemas.openxmlformats.org/officeDocument/2006/relationships">
-  <p:cSld>
-    <p:spTree>
-      <p:nvGrpSpPr>
-        <p:cNvPr id="1" name=""/>
-        <p:cNvGrpSpPr/>
-        <p:nvPr/>
-      </p:nvGrpSpPr>
-      <p:grpSpPr>
-        <a:xfrm>
-          <a:off x="0" y="0"/>
-          <a:ext cx="0" cy="0"/>
-          <a:chOff x="0" y="0"/>
-          <a:chExt cx="0" cy="0"/>
-        </a:xfrm>
-      </p:grpSpPr>
-      <p:sp>
-        <p:nvSpPr>
-          <p:cNvPr id="2" name="Slide Image Placeholder 1"/>
-          <p:cNvSpPr>
-            <a:spLocks noGrp="1"/>
-          </p:cNvSpPr>
-          <p:nvPr>
-            <p:ph type="sldImg" idx="2"/>
-          </p:nvPr>
-        </p:nvSpPr>
-        <p:spPr/>
-      </p:sp>
-      <p:sp>
-        <p:nvSpPr>
-          <p:cNvPr id="3" name="Notes Placeholder 2"/>
-          <p:cNvSpPr>
-            <a:spLocks noGrp="1"/>
-          </p:cNvSpPr>
-          <p:nvPr>
-            <p:ph type="body" idx="3" sz="quarter"/>
-          </p:nvPr>
-        </p:nvSpPr>
-        <p:spPr/>
-        <p:txBody>
-          <a:bodyPr/>
-          <a:lstStyle/>
-          <a:p>
-            <a:r>
-              <a:t>Primer for C2 — what a firewall / stateful packet filter IS, before AWS security groups. Bespoke</a:t>
-            </a:r>
-          </a:p>
-          <a:p>
-            <a:r>
-              <a:t>primer (ACA M07 S23 analogy); some students have never met the concept.</a:t>
-            </a:r>
-          </a:p>
-          <a:p>
-            <a:r>
-              <a:t>• A firewall filters traffic by rule — it decides what's allowed through.</a:t>
-            </a:r>
-          </a:p>
-          <a:p>
-            <a:r>
-              <a:t>• The bolded analogy: a security group is like an apartment door — it lets in only the right key,</a:t>
-            </a:r>
-          </a:p>
-          <a:p>
-            <a:r>
-              <a:t>protecting ONE resource (not the whole building). Contrast with a building's front gate (that's</a:t>
-            </a:r>
-          </a:p>
-          <a:p>
-            <a:r>
-              <a:t>more like a network ACL — out of scope here, don't go there).</a:t>
-            </a:r>
-          </a:p>
-          <a:p>
-            <a:r>
-              <a:t>• Traffic is identified by address + PORT: 443 = HTTPS, 1433 = SQL Server, 3389 = RDP. Give them</a:t>
-            </a:r>
-          </a:p>
-          <a:p>
-            <a:r>
-              <a:t>these three because the design's rules use exactly them.</a:t>
-            </a:r>
-          </a:p>
-          <a:p>
-            <a:r>
-              <a:t>• Least privilege: open only the ports the job needs, only to who needs them — the whole ethic of</a:t>
-            </a:r>
-          </a:p>
-          <a:p>
-            <a:r>
-              <a:t>the next two slides.</a:t>
-            </a:r>
-          </a:p>
-          <a:p>
-            <a:r>
-              <a:t>Misconception to pre-empt: "a firewall blocks bad traffic." More precisely, it DENIES everything by</a:t>
-            </a:r>
-          </a:p>
-          <a:p>
-            <a:r>
-              <a:t>default and you ALLOW what's needed — it's a whitelist, not a bad-traffic detector.</a:t>
-            </a:r>
-          </a:p>
-          <a:p>
-            <a:r>
-              <a:t>Question to pose: "The database speaks SQL Server on 1433 — who should be allowed to reach that</a:t>
-            </a:r>
-          </a:p>
-          <a:p>
-            <a:r>
-              <a:t>port?" (only the app tier — nobody else; sets up the chain).</a:t>
-            </a:r>
-          </a:p>
-          <a:p>
-            <a:r>
-              <a:t>UoC/AT2 tie: ICTCLD401 KE 9 (limiting network traffic within virtual networks) → AT2 §4.2.</a:t>
-            </a:r>
-          </a:p>
-        </p:txBody>
-      </p:sp>
-      <p:sp>
-        <p:nvSpPr>
-          <p:cNvPr id="4" name="Slide Number Placeholder 3"/>
-          <p:cNvSpPr>
-            <a:spLocks noGrp="1"/>
-          </p:cNvSpPr>
-          <p:nvPr>
-            <p:ph type="sldNum" idx="5" sz="quarter"/>
-          </p:nvPr>
-        </p:nvSpPr>
-        <p:spPr/>
-      </p:sp>
-    </p:spTree>
-  </p:cSld>
-  <p:clrMapOvr>
-    <a:masterClrMapping/>
-  </p:clrMapOvr>
-</p:notes>
-</file>
-
-<file path=ppt/notesSlides/notesSlide8.xml><?xml version="1.0" encoding="utf-8"?>
-<p:notes xmlns:a="http://schemas.openxmlformats.org/drawingml/2006/main" xmlns:p="http://schemas.openxmlformats.org/presentationml/2006/main" xmlns:r="http://schemas.openxmlformats.org/officeDocument/2006/relationships">
-  <p:cSld>
-    <p:spTree>
-      <p:nvGrpSpPr>
-        <p:cNvPr id="1" name=""/>
-        <p:cNvGrpSpPr/>
-        <p:nvPr/>
-      </p:nvGrpSpPr>
-      <p:grpSpPr>
-        <a:xfrm>
-          <a:off x="0" y="0"/>
-          <a:ext cx="0" cy="0"/>
-          <a:chOff x="0" y="0"/>
-          <a:chExt cx="0" cy="0"/>
-        </a:xfrm>
-      </p:grpSpPr>
-      <p:sp>
-        <p:nvSpPr>
-          <p:cNvPr id="2" name="Slide Image Placeholder 1"/>
-          <p:cNvSpPr>
-            <a:spLocks noGrp="1"/>
-          </p:cNvSpPr>
-          <p:nvPr>
-            <p:ph type="sldImg" idx="2"/>
-          </p:nvPr>
-        </p:nvSpPr>
-        <p:spPr/>
-      </p:sp>
-      <p:sp>
-        <p:nvSpPr>
-          <p:cNvPr id="3" name="Notes Placeholder 2"/>
-          <p:cNvSpPr>
-            <a:spLocks noGrp="1"/>
-          </p:cNvSpPr>
-          <p:nvPr>
-            <p:ph type="body" idx="3" sz="quarter"/>
-          </p:nvPr>
-        </p:nvSpPr>
-        <p:spPr/>
-        <p:txBody>
-          <a:bodyPr/>
-          <a:lstStyle/>
-          <a:p>
-            <a:r>
-              <a:t>The AWS-context teach for C2 — the properties that make security groups behave the way they do.</a:t>
-            </a:r>
-          </a:p>
-          <a:p>
-            <a:r>
-              <a:t>Teach the three behaviours precisely; students lose marks on these in AT2.</a:t>
-            </a:r>
-          </a:p>
-          <a:p>
-            <a:r>
-              <a:t>• A security group is a virtual firewall attached to a resource (an instance or interface) — per</a:t>
-            </a:r>
-          </a:p>
-          <a:p>
-            <a:r>
-              <a:t>resource, not per subnet.</a:t>
-            </a:r>
-          </a:p>
-          <a:p>
-            <a:r>
-              <a:t>• STATEFUL: allow traffic in and the return traffic is automatically allowed out — you don't write</a:t>
-            </a:r>
-          </a:p>
-          <a:p>
-            <a:r>
-              <a:t>a matching outbound rule. This is the one they forget.</a:t>
-            </a:r>
-          </a:p>
-          <a:p>
-            <a:r>
-              <a:t>• ALLOW-rules only, no deny; a brand-new SG blocks ALL inbound until you add rules (deny-by-default).</a:t>
-            </a:r>
-          </a:p>
-          <a:p>
-            <a:r>
-              <a:t>• The bolded line — the big idea for this design: you can name ANOTHER security group as the source.</a:t>
-            </a:r>
-          </a:p>
-          <a:p>
-            <a:r>
-              <a:t>That's how tiers chain (allow 443 only FROM the load balancer's SG), instead of hard-coding IPs.</a:t>
-            </a:r>
-          </a:p>
-          <a:p>
-            <a:r>
-              <a:t>Misconception to pre-empt: "you must open the return port too." No — stateful means the reply is</a:t>
-            </a:r>
-          </a:p>
-          <a:p>
-            <a:r>
-              <a:t>automatic. Also "source must be an IP range" — no, it can be another SG.</a:t>
-            </a:r>
-          </a:p>
-          <a:p>
-            <a:r>
-              <a:t>Question to pose: "If the app server's IP changes, does a rule that allows FROM sg-app break?" (No —</a:t>
-            </a:r>
-          </a:p>
-          <a:p>
-            <a:r>
-              <a:t>SG-as-source follows the membership, not the address; that's why we chain by SG).</a:t>
-            </a:r>
-          </a:p>
-          <a:p>
-            <a:r>
-              <a:t>UoC/AT2 tie: KE 9 → AT2 §4.2 (the sg-alb → sg-app → sg-db chain). The table next shows the design's SGs.</a:t>
-            </a:r>
-          </a:p>
-        </p:txBody>
-      </p:sp>
-      <p:sp>
-        <p:nvSpPr>
-          <p:cNvPr id="4" name="Slide Number Placeholder 3"/>
-          <p:cNvSpPr>
-            <a:spLocks noGrp="1"/>
-          </p:cNvSpPr>
-          <p:nvPr>
-            <p:ph type="sldNum" idx="5" sz="quarter"/>
-          </p:nvPr>
-        </p:nvSpPr>
-        <p:spPr/>
-      </p:sp>
-    </p:spTree>
-  </p:cSld>
-  <p:clrMapOvr>
-    <a:masterClrMapping/>
-  </p:clrMapOvr>
-</p:notes>
-</file>
-
-<file path=ppt/notesSlides/notesSlide9.xml><?xml version="1.0" encoding="utf-8"?>
-<p:notes xmlns:a="http://schemas.openxmlformats.org/drawingml/2006/main" xmlns:p="http://schemas.openxmlformats.org/presentationml/2006/main" xmlns:r="http://schemas.openxmlformats.org/officeDocument/2006/relationships">
-  <p:cSld>
-    <p:spTree>
-      <p:nvGrpSpPr>
-        <p:cNvPr id="1" name=""/>
-        <p:cNvGrpSpPr/>
-        <p:nvPr/>
-      </p:nvGrpSpPr>
-      <p:grpSpPr>
-        <a:xfrm>
-          <a:off x="0" y="0"/>
-          <a:ext cx="0" cy="0"/>
-          <a:chOff x="0" y="0"/>
-          <a:chExt cx="0" cy="0"/>
-        </a:xfrm>
-      </p:grpSpPr>
-      <p:sp>
-        <p:nvSpPr>
-          <p:cNvPr id="2" name="Slide Image Placeholder 1"/>
-          <p:cNvSpPr>
-            <a:spLocks noGrp="1"/>
-          </p:cNvSpPr>
-          <p:nvPr>
-            <p:ph type="sldImg" idx="2"/>
-          </p:nvPr>
-        </p:nvSpPr>
-        <p:spPr/>
-      </p:sp>
-      <p:sp>
-        <p:nvSpPr>
-          <p:cNvPr id="3" name="Notes Placeholder 2"/>
-          <p:cNvSpPr>
-            <a:spLocks noGrp="1"/>
-          </p:cNvSpPr>
-          <p:nvPr>
-            <p:ph type="body" idx="3" sz="quarter"/>
-          </p:nvPr>
-        </p:nvSpPr>
-        <p:spPr/>
-        <p:txBody>
-          <a:bodyPr/>
-          <a:lstStyle/>
-          <a:p>
-            <a:r>
-              <a:t>DEMONSTRATE step for C1+C2 — this is a RECORDED AWS demo; screen it, then have them build (activity</a:t>
-            </a:r>
-          </a:p>
-          <a:p>
-            <a:r>
-              <a:t>next). teach → DEMONSTRATE → practice.</a:t>
-            </a:r>
-          </a:p>
-          <a:p/>
-          <a:p>
-            <a:r>
-              <a:t>WHERE TO FIND THE RECORDED DEMO: AWS Academy Cloud Architecting → Module 07 (Creating a Networking</a:t>
-            </a:r>
-          </a:p>
-          <a:p>
-            <a:r>
-              <a:t>Environment) → slide 30, "Demo: Creating an Amazon VPC in the Console" (VPC + security groups +</a:t>
-            </a:r>
-          </a:p>
-          <a:p>
-            <a:r>
-              <a:t>Elastic IP), inside the ACA M07 instructor deck (original-materials/AWS-Instructor Presentations/…).</a:t>
-            </a:r>
-          </a:p>
-          <a:p>
-            <a:r>
-              <a:t>Instructor-facing — screen it in class, DON'T distribute to students. Preview it and cue it to this slide.</a:t>
-            </a:r>
-          </a:p>
-          <a:p/>
-          <a:p>
-            <a:r>
-              <a:t>WHAT TO DEMONSTRATE (follow the recorded demo, then relate each step to OUR design):</a:t>
-            </a:r>
-          </a:p>
-          <a:p>
-            <a:r>
-              <a:t>1. Create a public and a private subnet, each with its own route table.</a:t>
-            </a:r>
-          </a:p>
-          <a:p>
-            <a:r>
-              <a:t>2. Create an Internet Gateway, attach it to the VPC, configure the internet route.</a:t>
-            </a:r>
-          </a:p>
-          <a:p>
-            <a:r>
-              <a:t>3. Create a NAT gateway, assign an Elastic IP, add the private-subnet route.</a:t>
-            </a:r>
-          </a:p>
-          <a:p>
-            <a:r>
-              <a:t>4. Create a web-server security group and a database security group.</a:t>
-            </a:r>
-          </a:p>
-          <a:p/>
-          <a:p>
-            <a:r>
-              <a:t>WHAT TO EMPHASISE:</a:t>
-            </a:r>
-          </a:p>
-          <a:p>
-            <a:r>
-              <a:t>• Public vs private is decided by the ROUTE TABLE (IGW route or not) — point at it as it's built.</a:t>
-            </a:r>
-          </a:p>
-          <a:p>
-            <a:r>
-              <a:t>• NAT gateway is OUTBOUND only — say it as you add the Elastic IP; ties back to the egress-only design.</a:t>
-            </a:r>
-          </a:p>
-          <a:p>
-            <a:r>
-              <a:t>• SG-as-source when you build the DB SG — allow from the web SG, not an IP; the payoff of the SG teach.</a:t>
-            </a:r>
-          </a:p>
-          <a:p>
-            <a:r>
-              <a:t>• Narrate evidence capture — Region visible in every shot; students must screenshot for AT2, model it.</a:t>
-            </a:r>
-          </a:p>
-          <a:p>
-            <a:r>
-              <a:t>Note: the demo builds a generic VPC; OUR design is 10.0.0.0/16 with three named subnets — flag the deltas.</a:t>
-            </a:r>
-          </a:p>
-          <a:p>
-            <a:r>
-              <a:t>PREP: clean lab open, Solution Design §4.4 handy (names/CIDRs), demo queued. ~10–12 min to screen + narrate.</a:t>
+              <a:t>Activity = practice run sheet task 9. A read, not a build — say so, or they will hunt for a create</a:t>
+            </a:r>
+          </a:p>
+          <a:p>
+            <a:r>
+              <a:t>button they do not have. The name matters: the launch template task asks for it verbatim.</a:t>
             </a:r>
           </a:p>
         </p:txBody>
@@ -5664,7 +3786,7 @@
                 </a:solidFill>
                 <a:latin typeface="Roboto"/>
               </a:rPr>
-              <a:t>Network &amp; security base</a:t>
+              <a:t>Controlling access</a:t>
             </a:r>
           </a:p>
           <a:p>
@@ -5680,7 +3802,7 @@
                 </a:solidFill>
                 <a:latin typeface="Roboto Light"/>
               </a:rPr>
-              <a:t>Build the network tier — the VPC your workload lives in, the rules around it, and how it's found by name</a:t>
+              <a:t/>
             </a:r>
           </a:p>
         </p:txBody>
@@ -5877,7 +3999,7 @@
                 </a:solidFill>
                 <a:latin typeface="Roboto"/>
               </a:rPr>
-              <a:t>Controlling traffic</a:t>
+              <a:t>Who operates the platform</a:t>
             </a:r>
           </a:p>
           <a:p>
@@ -5893,7 +4015,7 @@
                 </a:solidFill>
                 <a:latin typeface="Roboto Light"/>
               </a:rPr>
-              <a:t>who may talk to what</a:t>
+              <a:t>identity, and its boundary</a:t>
             </a:r>
           </a:p>
         </p:txBody>
@@ -6075,7 +4197,7 @@
                 </a:solidFill>
                 <a:latin typeface="Roboto"/>
               </a:rPr>
-              <a:t>What a firewall does</a:t>
+              <a:t>The four identity components</a:t>
             </a:r>
           </a:p>
           <a:p>
@@ -6091,7 +4213,7 @@
                 </a:solidFill>
                 <a:latin typeface="Roboto Light"/>
               </a:rPr>
-              <a:t>AWS · ACA M07 S23</a:t>
+              <a:t>people, and permissions</a:t>
             </a:r>
           </a:p>
         </p:txBody>
@@ -6148,8 +4270,8 @@
         </p:nvSpPr>
         <p:spPr>
           <a:xfrm>
-            <a:off x="658368" y="1691640"/>
-            <a:ext cx="10881360" cy="4480560"/>
+            <a:off x="658368" y="1737360"/>
+            <a:ext cx="5486400" cy="4297680"/>
           </a:xfrm>
           <a:prstGeom prst="rect">
             <a:avLst/>
@@ -6157,7 +4279,7 @@
           <a:noFill/>
         </p:spPr>
         <p:txBody>
-          <a:bodyPr wrap="square" anchor="ctr" lIns="0" rIns="0" tIns="0" bIns="0">
+          <a:bodyPr wrap="square" anchor="t" lIns="0" rIns="0" tIns="0" bIns="0">
             <a:spAutoFit/>
           </a:bodyPr>
           <a:lstStyle/>
@@ -6174,7 +4296,7 @@
               </a:spcAft>
             </a:pPr>
             <a:r>
-              <a:rPr sz="2400" b="1" i="0">
+              <a:rPr sz="1700" b="1" i="0">
                 <a:solidFill>
                   <a:srgbClr val="EDAB0C"/>
                 </a:solidFill>
@@ -6183,13 +4305,13 @@
               <a:t>■  </a:t>
             </a:r>
             <a:r>
-              <a:rPr sz="2400" b="0" i="0">
+              <a:rPr sz="1700" b="0" i="0">
                 <a:solidFill>
                   <a:srgbClr val="2A2929"/>
                 </a:solidFill>
                 <a:latin typeface="Roboto"/>
               </a:rPr>
-              <a:t>A firewall filters network traffic by rule — it decides what's allowed through.</a:t>
+              <a:t>User — one identity per person or application that signs in.</a:t>
             </a:r>
           </a:p>
           <a:p>
@@ -6205,7 +4327,7 @@
               </a:spcAft>
             </a:pPr>
             <a:r>
-              <a:rPr sz="2400" b="1" i="0">
+              <a:rPr sz="1700" b="1" i="0">
                 <a:solidFill>
                   <a:srgbClr val="EDAB0C"/>
                 </a:solidFill>
@@ -6214,13 +4336,13 @@
               <a:t>■  </a:t>
             </a:r>
             <a:r>
-              <a:rPr sz="2400" b="0" i="0">
+              <a:rPr sz="1700" b="0" i="0">
                 <a:solidFill>
                   <a:srgbClr val="2A2929"/>
                 </a:solidFill>
                 <a:latin typeface="Roboto"/>
               </a:rPr>
-              <a:t>Think of a security group like an apartment door: it only lets in the tenant with the right key — it protects one resource.</a:t>
+              <a:t>Group — a collection of users who need the same permissions, so you set them once.</a:t>
             </a:r>
           </a:p>
           <a:p>
@@ -6236,7 +4358,7 @@
               </a:spcAft>
             </a:pPr>
             <a:r>
-              <a:rPr sz="2400" b="1" i="0">
+              <a:rPr sz="1700" b="1" i="0">
                 <a:solidFill>
                   <a:srgbClr val="EDAB0C"/>
                 </a:solidFill>
@@ -6245,13 +4367,13 @@
               <a:t>■  </a:t>
             </a:r>
             <a:r>
-              <a:rPr sz="2400" b="0" i="0">
+              <a:rPr sz="1700" b="0" i="0">
                 <a:solidFill>
                   <a:srgbClr val="2A2929"/>
                 </a:solidFill>
                 <a:latin typeface="Roboto"/>
               </a:rPr>
-              <a:t>Traffic is identified by address + port: 443 = HTTPS, 1433 = SQL Server, 3389 = RDP.</a:t>
+              <a:t>Role — permissions with no permanent credentials, assumed temporarily by a person or a service.</a:t>
             </a:r>
           </a:p>
           <a:p>
@@ -6267,7 +4389,7 @@
               </a:spcAft>
             </a:pPr>
             <a:r>
-              <a:rPr sz="2400" b="1" i="0">
+              <a:rPr sz="1700" b="1" i="0">
                 <a:solidFill>
                   <a:srgbClr val="EDAB0C"/>
                 </a:solidFill>
@@ -6276,20 +4398,44 @@
               <a:t>■  </a:t>
             </a:r>
             <a:r>
-              <a:rPr sz="2400" b="0" i="0">
+              <a:rPr sz="1700" b="0" i="0">
                 <a:solidFill>
                   <a:srgbClr val="2A2929"/>
                 </a:solidFill>
                 <a:latin typeface="Roboto"/>
               </a:rPr>
-              <a:t>Least privilege — open only the ports the job needs, only to who needs them.</a:t>
-            </a:r>
-          </a:p>
-        </p:txBody>
-      </p:sp>
-      <p:sp>
-        <p:nvSpPr>
-          <p:cNvPr id="5" name="Rectangle 4"/>
+              <a:t>Policy — the document that says what is allowed. Everything is denied until a policy grants it.</a:t>
+            </a:r>
+          </a:p>
+        </p:txBody>
+      </p:sp>
+      <p:pic>
+        <p:nvPicPr>
+          <p:cNvPr id="5" name="Picture 4" descr="06-iam-components.png"/>
+          <p:cNvPicPr>
+            <a:picLocks noChangeAspect="1"/>
+          </p:cNvPicPr>
+          <p:nvPr/>
+        </p:nvPicPr>
+        <p:blipFill>
+          <a:blip r:embed="rId2"/>
+          <a:stretch>
+            <a:fillRect/>
+          </a:stretch>
+        </p:blipFill>
+        <p:spPr>
+          <a:xfrm>
+            <a:off x="6400800" y="2554558"/>
+            <a:ext cx="5120640" cy="2480404"/>
+          </a:xfrm>
+          <a:prstGeom prst="rect">
+            <a:avLst/>
+          </a:prstGeom>
+        </p:spPr>
+      </p:pic>
+      <p:sp>
+        <p:nvSpPr>
+          <p:cNvPr id="6" name="Rectangle 5"/>
           <p:cNvSpPr/>
           <p:nvPr/>
         </p:nvSpPr>
@@ -6333,7 +4479,7 @@
       </p:sp>
       <p:sp>
         <p:nvSpPr>
-          <p:cNvPr id="6" name="TextBox 5"/>
+          <p:cNvPr id="7" name="TextBox 6"/>
           <p:cNvSpPr txBox="1"/>
           <p:nvPr/>
         </p:nvSpPr>
@@ -6376,7 +4522,7 @@
       </p:sp>
       <p:sp>
         <p:nvSpPr>
-          <p:cNvPr id="7" name="TextBox 6"/>
+          <p:cNvPr id="8" name="TextBox 7"/>
           <p:cNvSpPr txBox="1"/>
           <p:nvPr/>
         </p:nvSpPr>
@@ -6464,7 +4610,7 @@
                 </a:solidFill>
                 <a:latin typeface="Roboto"/>
               </a:rPr>
-              <a:t>Security groups</a:t>
+              <a:t>Securing access</a:t>
             </a:r>
           </a:p>
           <a:p>
@@ -6480,7 +4626,7 @@
                 </a:solidFill>
                 <a:latin typeface="Roboto Light"/>
               </a:rPr>
-              <a:t>AWS · ACF M05 S33–S35 · ACA M07 S24</a:t>
+              <a:t>set once, granted narrowly</a:t>
             </a:r>
           </a:p>
         </p:txBody>
@@ -6578,7 +4724,7 @@
                 </a:solidFill>
                 <a:latin typeface="Roboto"/>
               </a:rPr>
-              <a:t>A security group is a virtual firewall attached to a resource (an instance or interface).</a:t>
+              <a:t>Attach policies to groups and put users in them, rather than attaching policies to individuals.</a:t>
             </a:r>
           </a:p>
           <a:p>
@@ -6609,7 +4755,7 @@
                 </a:solidFill>
                 <a:latin typeface="Roboto"/>
               </a:rPr>
-              <a:t>Stateful — if you allow traffic in, the return traffic is automatically allowed out.</a:t>
+              <a:t>Grant only what the job needs — you widen a permission when a task proves it necessary, not in advance.</a:t>
             </a:r>
           </a:p>
           <a:p>
@@ -6640,7 +4786,7 @@
                 </a:solidFill>
                 <a:latin typeface="Roboto"/>
               </a:rPr>
-              <a:t>Allow-rules only (no deny). A new SG blocks all inbound until you add rules.</a:t>
+              <a:t>Protect the account's founding identity and use it only when nothing else will do.</a:t>
             </a:r>
           </a:p>
           <a:p>
@@ -6671,7 +4817,7 @@
                 </a:solidFill>
                 <a:latin typeface="Roboto"/>
               </a:rPr>
-              <a:t>You can name another security group as the source — that's how you chain tiers (e.g. allow 443 only from the load balancer's SG).</a:t>
+              <a:t>Use roles for services, never long-lived keys.</a:t>
             </a:r>
           </a:p>
         </p:txBody>
@@ -6853,7 +4999,7 @@
                 </a:solidFill>
                 <a:latin typeface="Roboto"/>
               </a:rPr>
-              <a:t>The design's security groups</a:t>
+              <a:t>Why the operators cannot change identity</a:t>
             </a:r>
           </a:p>
           <a:p>
@@ -6869,7 +5015,7 @@
                 </a:solidFill>
                 <a:latin typeface="Roboto Light"/>
               </a:rPr>
-              <a:t>least-privilege, chained tier-to-tier</a:t>
+              <a:t>the boundary is the point</a:t>
             </a:r>
           </a:p>
         </p:txBody>
@@ -6918,315 +5064,16 @@
           </a:p>
         </p:txBody>
       </p:sp>
-      <p:graphicFrame>
-        <p:nvGraphicFramePr>
-          <p:cNvPr id="4" name="Table 3"/>
-          <p:cNvGraphicFramePr>
-            <a:graphicFrameLocks noGrp="1"/>
-          </p:cNvGraphicFramePr>
-          <p:nvPr/>
-        </p:nvGraphicFramePr>
-        <p:xfrm>
-          <a:off x="658368" y="1828800"/>
-          <a:ext cx="10881360" cy="1828800"/>
-        </p:xfrm>
-        <a:graphic>
-          <a:graphicData uri="http://schemas.openxmlformats.org/drawingml/2006/table">
-            <a:tbl>
-              <a:tblPr>
-                <a:tableStyleId>{5C22544A-7EE6-4342-B048-85BDC9FD1C3A}</a:tableStyleId>
-              </a:tblPr>
-              <a:tblGrid>
-                <a:gridCol w="3627120"/>
-                <a:gridCol w="3627120"/>
-                <a:gridCol w="3627120"/>
-              </a:tblGrid>
-              <a:tr h="457200">
-                <a:tc>
-                  <a:txBody>
-                    <a:bodyPr/>
-                    <a:lstStyle/>
-                    <a:p>
-                      <a:r>
-                        <a:rPr sz="1400" b="1" i="0">
-                          <a:solidFill>
-                            <a:srgbClr val="FFFFFF"/>
-                          </a:solidFill>
-                          <a:latin typeface="Roboto"/>
-                        </a:rPr>
-                        <a:t>Security group</a:t>
-                      </a:r>
-                    </a:p>
-                  </a:txBody>
-                  <a:tcPr marL="76200" marR="76200">
-                    <a:solidFill>
-                      <a:srgbClr val="27B5CE"/>
-                    </a:solidFill>
-                  </a:tcPr>
-                </a:tc>
-                <a:tc>
-                  <a:txBody>
-                    <a:bodyPr/>
-                    <a:lstStyle/>
-                    <a:p>
-                      <a:r>
-                        <a:rPr sz="1400" b="1" i="0">
-                          <a:solidFill>
-                            <a:srgbClr val="FFFFFF"/>
-                          </a:solidFill>
-                          <a:latin typeface="Roboto"/>
-                        </a:rPr>
-                        <a:t>Inbound (allow)</a:t>
-                      </a:r>
-                    </a:p>
-                  </a:txBody>
-                  <a:tcPr marL="76200" marR="76200">
-                    <a:solidFill>
-                      <a:srgbClr val="27B5CE"/>
-                    </a:solidFill>
-                  </a:tcPr>
-                </a:tc>
-                <a:tc>
-                  <a:txBody>
-                    <a:bodyPr/>
-                    <a:lstStyle/>
-                    <a:p>
-                      <a:r>
-                        <a:rPr sz="1400" b="1" i="0">
-                          <a:solidFill>
-                            <a:srgbClr val="FFFFFF"/>
-                          </a:solidFill>
-                          <a:latin typeface="Roboto"/>
-                        </a:rPr>
-                        <a:t>Outbound (allow)</a:t>
-                      </a:r>
-                    </a:p>
-                  </a:txBody>
-                  <a:tcPr marL="76200" marR="76200">
-                    <a:solidFill>
-                      <a:srgbClr val="27B5CE"/>
-                    </a:solidFill>
-                  </a:tcPr>
-                </a:tc>
-              </a:tr>
-              <a:tr h="457200">
-                <a:tc>
-                  <a:txBody>
-                    <a:bodyPr/>
-                    <a:lstStyle/>
-                    <a:p>
-                      <a:r>
-                        <a:rPr sz="1300" b="0" i="0">
-                          <a:solidFill>
-                            <a:srgbClr val="2A2929"/>
-                          </a:solidFill>
-                          <a:latin typeface="Roboto"/>
-                        </a:rPr>
-                        <a:t>sg-alb</a:t>
-                      </a:r>
-                    </a:p>
-                  </a:txBody>
-                  <a:tcPr marL="76200" marR="76200" marT="50800" marB="50800">
-                    <a:solidFill>
-                      <a:srgbClr val="FFFFFF"/>
-                    </a:solidFill>
-                  </a:tcPr>
-                </a:tc>
-                <a:tc>
-                  <a:txBody>
-                    <a:bodyPr/>
-                    <a:lstStyle/>
-                    <a:p>
-                      <a:r>
-                        <a:rPr sz="1300" b="0" i="0">
-                          <a:solidFill>
-                            <a:srgbClr val="2A2929"/>
-                          </a:solidFill>
-                          <a:latin typeface="Roboto"/>
-                        </a:rPr>
-                        <a:t>HTTPS 443 from staff CIDR / VPN</a:t>
-                      </a:r>
-                    </a:p>
-                  </a:txBody>
-                  <a:tcPr marL="76200" marR="76200" marT="50800" marB="50800">
-                    <a:solidFill>
-                      <a:srgbClr val="FFFFFF"/>
-                    </a:solidFill>
-                  </a:tcPr>
-                </a:tc>
-                <a:tc>
-                  <a:txBody>
-                    <a:bodyPr/>
-                    <a:lstStyle/>
-                    <a:p>
-                      <a:r>
-                        <a:rPr sz="1300" b="0" i="0">
-                          <a:solidFill>
-                            <a:srgbClr val="2A2929"/>
-                          </a:solidFill>
-                          <a:latin typeface="Roboto"/>
-                        </a:rPr>
-                        <a:t>to sg-app</a:t>
-                      </a:r>
-                    </a:p>
-                  </a:txBody>
-                  <a:tcPr marL="76200" marR="76200" marT="50800" marB="50800">
-                    <a:solidFill>
-                      <a:srgbClr val="FFFFFF"/>
-                    </a:solidFill>
-                  </a:tcPr>
-                </a:tc>
-              </a:tr>
-              <a:tr h="457200">
-                <a:tc>
-                  <a:txBody>
-                    <a:bodyPr/>
-                    <a:lstStyle/>
-                    <a:p>
-                      <a:r>
-                        <a:rPr sz="1300" b="0" i="0">
-                          <a:solidFill>
-                            <a:srgbClr val="2A2929"/>
-                          </a:solidFill>
-                          <a:latin typeface="Roboto"/>
-                        </a:rPr>
-                        <a:t>sg-app</a:t>
-                      </a:r>
-                    </a:p>
-                  </a:txBody>
-                  <a:tcPr marL="76200" marR="76200" marT="50800" marB="50800">
-                    <a:solidFill>
-                      <a:srgbClr val="F9F9F9"/>
-                    </a:solidFill>
-                  </a:tcPr>
-                </a:tc>
-                <a:tc>
-                  <a:txBody>
-                    <a:bodyPr/>
-                    <a:lstStyle/>
-                    <a:p>
-                      <a:r>
-                        <a:rPr sz="1300" b="0" i="0">
-                          <a:solidFill>
-                            <a:srgbClr val="2A2929"/>
-                          </a:solidFill>
-                          <a:latin typeface="Roboto"/>
-                        </a:rPr>
-                        <a:t>from sg-alb · RDP 3389 from MTS bastion</a:t>
-                      </a:r>
-                    </a:p>
-                  </a:txBody>
-                  <a:tcPr marL="76200" marR="76200" marT="50800" marB="50800">
-                    <a:solidFill>
-                      <a:srgbClr val="F9F9F9"/>
-                    </a:solidFill>
-                  </a:tcPr>
-                </a:tc>
-                <a:tc>
-                  <a:txBody>
-                    <a:bodyPr/>
-                    <a:lstStyle/>
-                    <a:p>
-                      <a:r>
-                        <a:rPr sz="1300" b="0" i="0">
-                          <a:solidFill>
-                            <a:srgbClr val="2A2929"/>
-                          </a:solidFill>
-                          <a:latin typeface="Roboto"/>
-                        </a:rPr>
-                        <a:t>SQL 1433 to sg-db · HTTPS via NAT · LDAPS to AD</a:t>
-                      </a:r>
-                    </a:p>
-                  </a:txBody>
-                  <a:tcPr marL="76200" marR="76200" marT="50800" marB="50800">
-                    <a:solidFill>
-                      <a:srgbClr val="F9F9F9"/>
-                    </a:solidFill>
-                  </a:tcPr>
-                </a:tc>
-              </a:tr>
-              <a:tr h="457200">
-                <a:tc>
-                  <a:txBody>
-                    <a:bodyPr/>
-                    <a:lstStyle/>
-                    <a:p>
-                      <a:r>
-                        <a:rPr sz="1300" b="0" i="0">
-                          <a:solidFill>
-                            <a:srgbClr val="2A2929"/>
-                          </a:solidFill>
-                          <a:latin typeface="Roboto"/>
-                        </a:rPr>
-                        <a:t>sg-db</a:t>
-                      </a:r>
-                    </a:p>
-                  </a:txBody>
-                  <a:tcPr marL="76200" marR="76200" marT="50800" marB="50800">
-                    <a:solidFill>
-                      <a:srgbClr val="FFFFFF"/>
-                    </a:solidFill>
-                  </a:tcPr>
-                </a:tc>
-                <a:tc>
-                  <a:txBody>
-                    <a:bodyPr/>
-                    <a:lstStyle/>
-                    <a:p>
-                      <a:r>
-                        <a:rPr sz="1300" b="0" i="0">
-                          <a:solidFill>
-                            <a:srgbClr val="2A2929"/>
-                          </a:solidFill>
-                          <a:latin typeface="Roboto"/>
-                        </a:rPr>
-                        <a:t>SQL 1433 from sg-app</a:t>
-                      </a:r>
-                    </a:p>
-                  </a:txBody>
-                  <a:tcPr marL="76200" marR="76200" marT="50800" marB="50800">
-                    <a:solidFill>
-                      <a:srgbClr val="FFFFFF"/>
-                    </a:solidFill>
-                  </a:tcPr>
-                </a:tc>
-                <a:tc>
-                  <a:txBody>
-                    <a:bodyPr/>
-                    <a:lstStyle/>
-                    <a:p>
-                      <a:r>
-                        <a:rPr sz="1300" b="0" i="0">
-                          <a:solidFill>
-                            <a:srgbClr val="2A2929"/>
-                          </a:solidFill>
-                          <a:latin typeface="Roboto"/>
-                        </a:rPr>
-                        <a:t>(none needed)</a:t>
-                      </a:r>
-                    </a:p>
-                  </a:txBody>
-                  <a:tcPr marL="76200" marR="76200" marT="50800" marB="50800">
-                    <a:solidFill>
-                      <a:srgbClr val="FFFFFF"/>
-                    </a:solidFill>
-                  </a:tcPr>
-                </a:tc>
-              </a:tr>
-            </a:tbl>
-          </a:graphicData>
-        </a:graphic>
-      </p:graphicFrame>
-      <p:sp>
-        <p:nvSpPr>
-          <p:cNvPr id="5" name="TextBox 4"/>
+      <p:sp>
+        <p:nvSpPr>
+          <p:cNvPr id="4" name="TextBox 3"/>
           <p:cNvSpPr txBox="1"/>
           <p:nvPr/>
         </p:nvSpPr>
         <p:spPr>
           <a:xfrm>
-            <a:off x="658368" y="5943600"/>
-            <a:ext cx="10881360" cy="457200"/>
+            <a:off x="658368" y="1691640"/>
+            <a:ext cx="10881360" cy="4480560"/>
           </a:xfrm>
           <a:prstGeom prst="rect">
             <a:avLst/>
@@ -7234,26 +5081,108 @@
           <a:noFill/>
         </p:spPr>
         <p:txBody>
-          <a:bodyPr wrap="square" anchor="t" lIns="0" rIns="0" tIns="0" bIns="0">
+          <a:bodyPr wrap="square" anchor="ctr" lIns="0" rIns="0" tIns="0" bIns="0">
             <a:spAutoFit/>
           </a:bodyPr>
           <a:lstStyle/>
           <a:p>
-            <a:r>
-              <a:rPr sz="1500" b="0" i="1">
-                <a:solidFill>
-                  <a:srgbClr val="484848"/>
-                </a:solidFill>
-                <a:latin typeface="Roboto Light"/>
-              </a:rPr>
-              <a:t>Source = another security group, not an IP range — the tiers chain. The targets (ALB, EC2, RDS) are launched in Topic 8; here you build the rule shells.</a:t>
-            </a:r>
-          </a:p>
-        </p:txBody>
-      </p:sp>
-      <p:sp>
-        <p:nvSpPr>
-          <p:cNvPr id="6" name="Rectangle 5"/>
+            <a:pPr marL="0" indent="0">
+              <a:lnSpc>
+                <a:spcPct val="105000"/>
+              </a:lnSpc>
+              <a:spcBef>
+                <a:spcPts val="0"/>
+              </a:spcBef>
+              <a:spcAft>
+                <a:spcPts val="1000"/>
+              </a:spcAft>
+            </a:pPr>
+            <a:r>
+              <a:rPr sz="2400" b="1" i="0">
+                <a:solidFill>
+                  <a:srgbClr val="EDAB0C"/>
+                </a:solidFill>
+                <a:latin typeface="Roboto"/>
+              </a:rPr>
+              <a:t>■  </a:t>
+            </a:r>
+            <a:r>
+              <a:rPr sz="2400" b="0" i="0">
+                <a:solidFill>
+                  <a:srgbClr val="2A2929"/>
+                </a:solidFill>
+                <a:latin typeface="Roboto"/>
+              </a:rPr>
+              <a:t>The group that runs the platform gets read access to everything and no ability to change permissions — including its own.</a:t>
+            </a:r>
+          </a:p>
+          <a:p>
+            <a:pPr marL="0" indent="0">
+              <a:lnSpc>
+                <a:spcPct val="105000"/>
+              </a:lnSpc>
+              <a:spcBef>
+                <a:spcPts val="0"/>
+              </a:spcBef>
+              <a:spcAft>
+                <a:spcPts val="1000"/>
+              </a:spcAft>
+            </a:pPr>
+            <a:r>
+              <a:rPr sz="2400" b="1" i="0">
+                <a:solidFill>
+                  <a:srgbClr val="EDAB0C"/>
+                </a:solidFill>
+                <a:latin typeface="Roboto"/>
+              </a:rPr>
+              <a:t>■  </a:t>
+            </a:r>
+            <a:r>
+              <a:rPr sz="2400" b="0" i="0">
+                <a:solidFill>
+                  <a:srgbClr val="2A2929"/>
+                </a:solidFill>
+                <a:latin typeface="Roboto"/>
+              </a:rPr>
+              <a:t>A group that can rewrite its own permissions has no boundary at all; it can grant itself anything.</a:t>
+            </a:r>
+          </a:p>
+          <a:p>
+            <a:pPr marL="0" indent="0">
+              <a:lnSpc>
+                <a:spcPct val="105000"/>
+              </a:lnSpc>
+              <a:spcBef>
+                <a:spcPts val="0"/>
+              </a:spcBef>
+              <a:spcAft>
+                <a:spcPts val="1000"/>
+              </a:spcAft>
+            </a:pPr>
+            <a:r>
+              <a:rPr sz="2400" b="1" i="0">
+                <a:solidFill>
+                  <a:srgbClr val="EDAB0C"/>
+                </a:solidFill>
+                <a:latin typeface="Roboto"/>
+              </a:rPr>
+              <a:t>■  </a:t>
+            </a:r>
+            <a:r>
+              <a:rPr sz="2400" b="0" i="0">
+                <a:solidFill>
+                  <a:srgbClr val="2A2929"/>
+                </a:solidFill>
+                <a:latin typeface="Roboto"/>
+              </a:rPr>
+              <a:t>So operations sit with the team that runs the system, and identity stays with whoever governs the account. That separation is the control.</a:t>
+            </a:r>
+          </a:p>
+        </p:txBody>
+      </p:sp>
+      <p:sp>
+        <p:nvSpPr>
+          <p:cNvPr id="5" name="Rectangle 4"/>
           <p:cNvSpPr/>
           <p:nvPr/>
         </p:nvSpPr>
@@ -7297,7 +5226,7 @@
       </p:sp>
       <p:sp>
         <p:nvSpPr>
-          <p:cNvPr id="7" name="TextBox 6"/>
+          <p:cNvPr id="6" name="TextBox 5"/>
           <p:cNvSpPr txBox="1"/>
           <p:nvPr/>
         </p:nvSpPr>
@@ -7340,7 +5269,7 @@
       </p:sp>
       <p:sp>
         <p:nvSpPr>
-          <p:cNvPr id="8" name="TextBox 7"/>
+          <p:cNvPr id="7" name="TextBox 6"/>
           <p:cNvSpPr txBox="1"/>
           <p:nvPr/>
         </p:nvSpPr>
@@ -7401,60 +5330,66 @@
       <p:grpSpPr/>
       <p:sp>
         <p:nvSpPr>
-          <p:cNvPr id="2" name="Rectangle 1"/>
+          <p:cNvPr id="2" name="TextBox 1"/>
+          <p:cNvSpPr txBox="1"/>
+          <p:nvPr/>
+        </p:nvSpPr>
+        <p:spPr>
+          <a:xfrm>
+            <a:off x="640080" y="457200"/>
+            <a:ext cx="10881360" cy="960120"/>
+          </a:xfrm>
+          <a:prstGeom prst="rect">
+            <a:avLst/>
+          </a:prstGeom>
+          <a:noFill/>
+        </p:spPr>
+        <p:txBody>
+          <a:bodyPr wrap="square" anchor="t" lIns="0" rIns="0" tIns="0" bIns="0">
+            <a:spAutoFit/>
+          </a:bodyPr>
+          <a:lstStyle/>
+          <a:p>
+            <a:r>
+              <a:rPr sz="2800" b="1" i="0">
+                <a:solidFill>
+                  <a:srgbClr val="2A2929"/>
+                </a:solidFill>
+                <a:latin typeface="Roboto"/>
+              </a:rPr>
+              <a:t>When the environment refuses you</a:t>
+            </a:r>
+          </a:p>
+          <a:p>
+            <a:pPr>
+              <a:spcBef>
+                <a:spcPts val="200"/>
+              </a:spcBef>
+            </a:pPr>
+            <a:r>
+              <a:rPr sz="1800" b="0" i="1">
+                <a:solidFill>
+                  <a:srgbClr val="D68E10"/>
+                </a:solidFill>
+                <a:latin typeface="Roboto Light"/>
+              </a:rPr>
+              <a:t>the refusal is the capture</a:t>
+            </a:r>
+          </a:p>
+        </p:txBody>
+      </p:sp>
+      <p:sp>
+        <p:nvSpPr>
+          <p:cNvPr id="3" name="Rectangle 2"/>
           <p:cNvSpPr/>
           <p:nvPr/>
         </p:nvSpPr>
         <p:spPr>
           <a:xfrm>
-            <a:off x="0" y="0"/>
-            <a:ext cx="12191695" cy="1234440"/>
-          </a:xfrm>
-          <a:prstGeom prst="rect">
-            <a:avLst/>
-          </a:prstGeom>
-          <a:solidFill>
-            <a:srgbClr val="2A2929"/>
-          </a:solidFill>
-          <a:ln>
-            <a:noFill/>
-          </a:ln>
-          <a:effectLst/>
-        </p:spPr>
-        <p:style>
-          <a:lnRef idx="1">
-            <a:schemeClr val="accent1"/>
-          </a:lnRef>
-          <a:fillRef idx="3">
-            <a:schemeClr val="accent1"/>
-          </a:fillRef>
-          <a:effectRef idx="2">
-            <a:schemeClr val="accent1"/>
-          </a:effectRef>
-          <a:fontRef idx="minor">
-            <a:schemeClr val="lt1"/>
-          </a:fontRef>
-        </p:style>
-        <p:txBody>
-          <a:bodyPr rtlCol="0" anchor="ctr"/>
-          <a:lstStyle/>
-          <a:p>
-            <a:pPr algn="ctr"/>
-          </a:p>
-        </p:txBody>
-      </p:sp>
-      <p:sp>
-        <p:nvSpPr>
-          <p:cNvPr id="3" name="Rounded Rectangle 2"/>
-          <p:cNvSpPr/>
-          <p:nvPr/>
-        </p:nvSpPr>
-        <p:spPr>
-          <a:xfrm>
-            <a:off x="640080" y="384048"/>
-            <a:ext cx="2331720" cy="457200"/>
-          </a:xfrm>
-          <a:prstGeom prst="roundRect">
+            <a:off x="658368" y="1371600"/>
+            <a:ext cx="1463040" cy="50800"/>
+          </a:xfrm>
+          <a:prstGeom prst="rect">
             <a:avLst/>
           </a:prstGeom>
           <a:solidFill>
@@ -7484,15 +5419,6 @@
           <a:lstStyle/>
           <a:p>
             <a:pPr algn="ctr"/>
-            <a:r>
-              <a:rPr sz="1300" b="1" i="0">
-                <a:solidFill>
-                  <a:srgbClr val="2A2929"/>
-                </a:solidFill>
-                <a:latin typeface="Roboto"/>
-              </a:rPr>
-              <a:t>RECORDED DEMO</a:t>
-            </a:r>
           </a:p>
         </p:txBody>
       </p:sp>
@@ -7504,8 +5430,8 @@
         </p:nvSpPr>
         <p:spPr>
           <a:xfrm>
-            <a:off x="3200400" y="310896"/>
-            <a:ext cx="8321040" cy="685800"/>
+            <a:off x="658368" y="1691640"/>
+            <a:ext cx="10881360" cy="4480560"/>
           </a:xfrm>
           <a:prstGeom prst="rect">
             <a:avLst/>
@@ -7514,40 +5440,6 @@
         </p:spPr>
         <p:txBody>
           <a:bodyPr wrap="square" anchor="ctr" lIns="0" rIns="0" tIns="0" bIns="0">
-            <a:spAutoFit/>
-          </a:bodyPr>
-          <a:lstStyle/>
-          <a:p>
-            <a:r>
-              <a:rPr sz="2500" b="1" i="0">
-                <a:solidFill>
-                  <a:srgbClr val="FFFFFF"/>
-                </a:solidFill>
-                <a:latin typeface="Roboto"/>
-              </a:rPr>
-              <a:t>Build a VPC and its security groups</a:t>
-            </a:r>
-          </a:p>
-        </p:txBody>
-      </p:sp>
-      <p:sp>
-        <p:nvSpPr>
-          <p:cNvPr id="5" name="TextBox 4"/>
-          <p:cNvSpPr txBox="1"/>
-          <p:nvPr/>
-        </p:nvSpPr>
-        <p:spPr>
-          <a:xfrm>
-            <a:off x="658368" y="1554480"/>
-            <a:ext cx="10881360" cy="4297680"/>
-          </a:xfrm>
-          <a:prstGeom prst="rect">
-            <a:avLst/>
-          </a:prstGeom>
-          <a:noFill/>
-        </p:spPr>
-        <p:txBody>
-          <a:bodyPr wrap="square" anchor="t" lIns="0" rIns="0" tIns="0" bIns="0">
             <a:spAutoFit/>
           </a:bodyPr>
           <a:lstStyle/>
@@ -7564,7 +5456,7 @@
               </a:spcAft>
             </a:pPr>
             <a:r>
-              <a:rPr sz="1700" b="1" i="0">
+              <a:rPr sz="2400" b="1" i="0">
                 <a:solidFill>
                   <a:srgbClr val="EDAB0C"/>
                 </a:solidFill>
@@ -7573,13 +5465,13 @@
               <a:t>■  </a:t>
             </a:r>
             <a:r>
-              <a:rPr sz="1700" b="0" i="0">
+              <a:rPr sz="2400" b="0" i="0">
                 <a:solidFill>
                   <a:srgbClr val="2A2929"/>
                 </a:solidFill>
                 <a:latin typeface="Roboto"/>
               </a:rPr>
-              <a:t>Create a public and a private subnet, each with its own route table.</a:t>
+              <a:t>Some environments will not permit identities to be created at all. Yours is one of them.</a:t>
             </a:r>
           </a:p>
           <a:p>
@@ -7595,7 +5487,7 @@
               </a:spcAft>
             </a:pPr>
             <a:r>
-              <a:rPr sz="1700" b="1" i="0">
+              <a:rPr sz="2400" b="1" i="0">
                 <a:solidFill>
                   <a:srgbClr val="EDAB0C"/>
                 </a:solidFill>
@@ -7604,13 +5496,13 @@
               <a:t>■  </a:t>
             </a:r>
             <a:r>
-              <a:rPr sz="1700" b="0" i="0">
+              <a:rPr sz="2400" b="0" i="0">
                 <a:solidFill>
                   <a:srgbClr val="2A2929"/>
                 </a:solidFill>
                 <a:latin typeface="Roboto"/>
               </a:rPr>
-              <a:t>Create an Internet Gateway, attach it to the VPC, and configure the internet route.</a:t>
+              <a:t>You will complete the form correctly and be refused. That refusal is the evidence.</a:t>
             </a:r>
           </a:p>
           <a:p>
@@ -7626,7 +5518,7 @@
               </a:spcAft>
             </a:pPr>
             <a:r>
-              <a:rPr sz="1700" b="1" i="0">
+              <a:rPr sz="2400" b="1" i="0">
                 <a:solidFill>
                   <a:srgbClr val="EDAB0C"/>
                 </a:solidFill>
@@ -7635,131 +5527,20 @@
               <a:t>■  </a:t>
             </a:r>
             <a:r>
-              <a:rPr sz="1700" b="0" i="0">
+              <a:rPr sz="2400" b="0" i="0">
                 <a:solidFill>
                   <a:srgbClr val="2A2929"/>
                 </a:solidFill>
                 <a:latin typeface="Roboto"/>
               </a:rPr>
-              <a:t>Create a NAT gateway, assign an Elastic IP, and add the private-subnet route.</a:t>
-            </a:r>
-          </a:p>
-          <a:p>
-            <a:pPr marL="0" indent="0">
-              <a:lnSpc>
-                <a:spcPct val="105000"/>
-              </a:lnSpc>
-              <a:spcBef>
-                <a:spcPts val="0"/>
-              </a:spcBef>
-              <a:spcAft>
-                <a:spcPts val="1000"/>
-              </a:spcAft>
-            </a:pPr>
-            <a:r>
-              <a:rPr sz="1700" b="1" i="0">
-                <a:solidFill>
-                  <a:srgbClr val="EDAB0C"/>
-                </a:solidFill>
-                <a:latin typeface="Roboto"/>
-              </a:rPr>
-              <a:t>■  </a:t>
-            </a:r>
-            <a:r>
-              <a:rPr sz="1700" b="0" i="0">
-                <a:solidFill>
-                  <a:srgbClr val="2A2929"/>
-                </a:solidFill>
-                <a:latin typeface="Roboto"/>
-              </a:rPr>
-              <a:t>Create a web-server security group and a database security group.</a:t>
-            </a:r>
-          </a:p>
-        </p:txBody>
-      </p:sp>
-      <p:sp>
-        <p:nvSpPr>
-          <p:cNvPr id="6" name="Rounded Rectangle 5"/>
-          <p:cNvSpPr/>
-          <p:nvPr/>
-        </p:nvSpPr>
-        <p:spPr>
-          <a:xfrm>
-            <a:off x="640080" y="5897880"/>
-            <a:ext cx="7863840" cy="457200"/>
-          </a:xfrm>
-          <a:prstGeom prst="roundRect">
-            <a:avLst/>
-          </a:prstGeom>
-          <a:solidFill>
-            <a:srgbClr val="F9F9F9"/>
-          </a:solidFill>
-          <a:ln w="12700">
-            <a:solidFill>
-              <a:srgbClr val="CCCCCC"/>
-            </a:solidFill>
-          </a:ln>
-          <a:effectLst/>
-        </p:spPr>
-        <p:style>
-          <a:lnRef idx="1">
-            <a:schemeClr val="accent1"/>
-          </a:lnRef>
-          <a:fillRef idx="3">
-            <a:schemeClr val="accent1"/>
-          </a:fillRef>
-          <a:effectRef idx="2">
-            <a:schemeClr val="accent1"/>
-          </a:effectRef>
-          <a:fontRef idx="minor">
-            <a:schemeClr val="lt1"/>
-          </a:fontRef>
-        </p:style>
-        <p:txBody>
-          <a:bodyPr rtlCol="0" anchor="ctr"/>
-          <a:lstStyle/>
-          <a:p>
-            <a:pPr algn="ctr"/>
-          </a:p>
-        </p:txBody>
-      </p:sp>
-      <p:sp>
-        <p:nvSpPr>
-          <p:cNvPr id="7" name="TextBox 6"/>
-          <p:cNvSpPr txBox="1"/>
-          <p:nvPr/>
-        </p:nvSpPr>
-        <p:spPr>
-          <a:xfrm>
-            <a:off x="822960" y="5943600"/>
-            <a:ext cx="7498080" cy="365760"/>
-          </a:xfrm>
-          <a:prstGeom prst="rect">
-            <a:avLst/>
-          </a:prstGeom>
-          <a:noFill/>
-        </p:spPr>
-        <p:txBody>
-          <a:bodyPr wrap="square" anchor="ctr" lIns="0" rIns="0" tIns="0" bIns="0">
-            <a:spAutoFit/>
-          </a:bodyPr>
-          <a:lstStyle/>
-          <a:p>
-            <a:r>
-              <a:rPr sz="1400" b="1" i="0">
-                <a:solidFill>
-                  <a:srgbClr val="2A2929"/>
-                </a:solidFill>
-                <a:latin typeface="Roboto"/>
-              </a:rPr>
-              <a:t>▶  Play the AWS recorded demo (ACA M07 · Creating a VPC (S30)) — you do this next</a:t>
-            </a:r>
-          </a:p>
-        </p:txBody>
-      </p:sp>
-      <p:sp>
-        <p:nvSpPr>
-          <p:cNvPr id="8" name="Rectangle 7"/>
+              <a:t>Filling the form correctly is the part worth practising — and a constraint you name and evidence is a professional result, not a failure.</a:t>
+            </a:r>
+          </a:p>
+        </p:txBody>
+      </p:sp>
+      <p:sp>
+        <p:nvSpPr>
+          <p:cNvPr id="5" name="Rectangle 4"/>
           <p:cNvSpPr/>
           <p:nvPr/>
         </p:nvSpPr>
@@ -7803,7 +5584,7 @@
       </p:sp>
       <p:sp>
         <p:nvSpPr>
-          <p:cNvPr id="9" name="TextBox 8"/>
+          <p:cNvPr id="6" name="TextBox 5"/>
           <p:cNvSpPr txBox="1"/>
           <p:nvPr/>
         </p:nvSpPr>
@@ -7846,7 +5627,7 @@
       </p:sp>
       <p:sp>
         <p:nvSpPr>
-          <p:cNvPr id="10" name="TextBox 9"/>
+          <p:cNvPr id="7" name="TextBox 6"/>
           <p:cNvSpPr txBox="1"/>
           <p:nvPr/>
         </p:nvSpPr>
@@ -8031,7 +5812,7 @@
                 </a:solidFill>
                 <a:latin typeface="Roboto"/>
               </a:rPr>
-              <a:t>Build the network fabric</a:t>
+              <a:t>Configure the access model</a:t>
             </a:r>
           </a:p>
         </p:txBody>
@@ -8085,100 +5866,7 @@
                 </a:solidFill>
                 <a:latin typeface="Roboto"/>
               </a:rPr>
-              <a:t>In the AWS Academy lab, per the supplied Accounting design, build the network tier:</a:t>
-            </a:r>
-          </a:p>
-          <a:p>
-            <a:pPr marL="365760" indent="0">
-              <a:lnSpc>
-                <a:spcPct val="105000"/>
-              </a:lnSpc>
-              <a:spcBef>
-                <a:spcPts val="0"/>
-              </a:spcBef>
-              <a:spcAft>
-                <a:spcPts val="500"/>
-              </a:spcAft>
-            </a:pPr>
-            <a:r>
-              <a:rPr sz="1400" b="0" i="0">
-                <a:solidFill>
-                  <a:srgbClr val="7A7A7A"/>
-                </a:solidFill>
-                <a:latin typeface="Roboto"/>
-              </a:rPr>
-              <a:t>–  </a:t>
-            </a:r>
-            <a:r>
-              <a:rPr sz="1400" b="0" i="0">
-                <a:solidFill>
-                  <a:srgbClr val="2A2929"/>
-                </a:solidFill>
-                <a:latin typeface="Roboto"/>
-              </a:rPr>
-              <a:t>VPC 10.0.0.0/16; the three subnets (public-egress / private-app / private-data)</a:t>
-            </a:r>
-          </a:p>
-          <a:p>
-            <a:pPr marL="365760" indent="0">
-              <a:lnSpc>
-                <a:spcPct val="105000"/>
-              </a:lnSpc>
-              <a:spcBef>
-                <a:spcPts val="0"/>
-              </a:spcBef>
-              <a:spcAft>
-                <a:spcPts val="500"/>
-              </a:spcAft>
-            </a:pPr>
-            <a:r>
-              <a:rPr sz="1400" b="0" i="0">
-                <a:solidFill>
-                  <a:srgbClr val="7A7A7A"/>
-                </a:solidFill>
-                <a:latin typeface="Roboto"/>
-              </a:rPr>
-              <a:t>–  </a:t>
-            </a:r>
-            <a:r>
-              <a:rPr sz="1400" b="0" i="0">
-                <a:solidFill>
-                  <a:srgbClr val="2A2929"/>
-                </a:solidFill>
-                <a:latin typeface="Roboto"/>
-              </a:rPr>
-              <a:t>Internet Gateway + NAT gateway + per-tier route tables (egress-only)</a:t>
-            </a:r>
-          </a:p>
-          <a:p>
-            <a:pPr marL="365760" indent="0">
-              <a:lnSpc>
-                <a:spcPct val="105000"/>
-              </a:lnSpc>
-              <a:spcBef>
-                <a:spcPts val="0"/>
-              </a:spcBef>
-              <a:spcAft>
-                <a:spcPts val="500"/>
-              </a:spcAft>
-            </a:pPr>
-            <a:r>
-              <a:rPr sz="1400" b="0" i="0">
-                <a:solidFill>
-                  <a:srgbClr val="7A7A7A"/>
-                </a:solidFill>
-                <a:latin typeface="Roboto"/>
-              </a:rPr>
-              <a:t>–  </a:t>
-            </a:r>
-            <a:r>
-              <a:rPr sz="1400" b="0" i="0">
-                <a:solidFill>
-                  <a:srgbClr val="2A2929"/>
-                </a:solidFill>
-                <a:latin typeface="Roboto"/>
-              </a:rPr>
-              <a:t>the sg-alb → sg-app → sg-db security-group chain</a:t>
+              <a:t>Run sheet — task 8.</a:t>
             </a:r>
           </a:p>
           <a:p>
@@ -8209,7 +5897,7 @@
                 </a:solidFill>
                 <a:latin typeface="Roboto"/>
               </a:rPr>
-              <a:t>Capture named evidence as you go — VPC, subnets, route tables, SG rules — Region visible.</a:t>
+              <a:t>Complete the group form and the user form with the values your run sheet gives, submit each, and capture the completed form together with the error it returns.</a:t>
             </a:r>
           </a:p>
         </p:txBody>
@@ -8289,7 +5977,7 @@
                 </a:solidFill>
                 <a:latin typeface="Roboto"/>
               </a:rPr>
-              <a:t>⏱  ~25 min</a:t>
+              <a:t>⏱  ~20 min</a:t>
             </a:r>
           </a:p>
         </p:txBody>
@@ -8430,7 +6118,7 @@
     <p:bg>
       <p:bgPr>
         <a:solidFill>
-          <a:srgbClr val="FFFFFF"/>
+          <a:srgbClr val="F9F9F9"/>
         </a:solidFill>
         <a:effectLst/>
       </p:bgPr>
@@ -8444,20 +6132,70 @@
       <p:grpSpPr/>
       <p:sp>
         <p:nvSpPr>
-          <p:cNvPr id="2" name="Rectangle 1"/>
+          <p:cNvPr id="2" name="TextBox 1"/>
+          <p:cNvSpPr txBox="1"/>
+          <p:nvPr/>
+        </p:nvSpPr>
+        <p:spPr>
+          <a:xfrm>
+            <a:off x="640080" y="548640"/>
+            <a:ext cx="10881360" cy="1097280"/>
+          </a:xfrm>
+          <a:prstGeom prst="rect">
+            <a:avLst/>
+          </a:prstGeom>
+          <a:noFill/>
+        </p:spPr>
+        <p:txBody>
+          <a:bodyPr wrap="square" anchor="t" lIns="0" rIns="0" tIns="0" bIns="0">
+            <a:spAutoFit/>
+          </a:bodyPr>
+          <a:lstStyle/>
+          <a:p>
+            <a:r>
+              <a:rPr sz="3200" b="1" i="0">
+                <a:solidFill>
+                  <a:srgbClr val="2A2929"/>
+                </a:solidFill>
+                <a:latin typeface="Roboto"/>
+              </a:rPr>
+              <a:t>Key takeaways</a:t>
+            </a:r>
+          </a:p>
+          <a:p>
+            <a:pPr>
+              <a:spcBef>
+                <a:spcPts val="200"/>
+              </a:spcBef>
+            </a:pPr>
+            <a:r>
+              <a:rPr sz="1800" b="1" i="0">
+                <a:solidFill>
+                  <a:srgbClr val="27B5CE"/>
+                </a:solidFill>
+                <a:latin typeface="Roboto"/>
+              </a:rPr>
+              <a:t>Section 2 · Identity</a:t>
+            </a:r>
+          </a:p>
+        </p:txBody>
+      </p:sp>
+      <p:sp>
+        <p:nvSpPr>
+          <p:cNvPr id="3" name="Rectangle 2"/>
           <p:cNvSpPr/>
           <p:nvPr/>
         </p:nvSpPr>
         <p:spPr>
           <a:xfrm>
-            <a:off x="0" y="0"/>
-            <a:ext cx="3931920" cy="6858000"/>
+            <a:off x="658368" y="1600200"/>
+            <a:ext cx="1463040" cy="50800"/>
           </a:xfrm>
           <a:prstGeom prst="rect">
             <a:avLst/>
           </a:prstGeom>
           <a:solidFill>
-            <a:srgbClr val="205F61"/>
+            <a:srgbClr val="27B5CE"/>
           </a:solidFill>
           <a:ln>
             <a:noFill/>
@@ -8488,101 +6226,47 @@
       </p:sp>
       <p:sp>
         <p:nvSpPr>
-          <p:cNvPr id="3" name="TextBox 2"/>
-          <p:cNvSpPr txBox="1"/>
-          <p:nvPr/>
-        </p:nvSpPr>
-        <p:spPr>
-          <a:xfrm>
-            <a:off x="365760" y="2103120"/>
-            <a:ext cx="3291840" cy="2194560"/>
-          </a:xfrm>
-          <a:prstGeom prst="rect">
-            <a:avLst/>
-          </a:prstGeom>
-          <a:noFill/>
-        </p:spPr>
-        <p:txBody>
-          <a:bodyPr wrap="square" anchor="t" lIns="0" rIns="0" tIns="0" bIns="0">
-            <a:spAutoFit/>
-          </a:bodyPr>
-          <a:lstStyle/>
-          <a:p>
-            <a:r>
-              <a:rPr sz="13000" b="1" i="0">
-                <a:solidFill>
-                  <a:srgbClr val="FFFFFF"/>
-                </a:solidFill>
-                <a:latin typeface="Roboto"/>
-              </a:rPr>
-              <a:t>03</a:t>
-            </a:r>
-          </a:p>
-        </p:txBody>
-      </p:sp>
-      <p:sp>
-        <p:nvSpPr>
-          <p:cNvPr id="4" name="TextBox 3"/>
-          <p:cNvSpPr txBox="1"/>
-          <p:nvPr/>
-        </p:nvSpPr>
-        <p:spPr>
-          <a:xfrm>
-            <a:off x="4480560" y="2468880"/>
-            <a:ext cx="7132320" cy="2194560"/>
-          </a:xfrm>
-          <a:prstGeom prst="rect">
-            <a:avLst/>
-          </a:prstGeom>
-          <a:noFill/>
-        </p:spPr>
-        <p:txBody>
-          <a:bodyPr wrap="square" anchor="t" lIns="0" rIns="0" tIns="0" bIns="0">
-            <a:spAutoFit/>
-          </a:bodyPr>
-          <a:lstStyle/>
-          <a:p>
-            <a:r>
-              <a:rPr sz="1600" b="1" i="0">
-                <a:solidFill>
-                  <a:srgbClr val="205F61"/>
-                </a:solidFill>
-                <a:latin typeface="Roboto"/>
-              </a:rPr>
-              <a:t>SECTION</a:t>
-            </a:r>
-          </a:p>
-          <a:p>
-            <a:pPr>
-              <a:spcBef>
-                <a:spcPts val="600"/>
-              </a:spcBef>
-            </a:pPr>
-            <a:r>
-              <a:rPr sz="3800" b="1" i="0">
-                <a:solidFill>
-                  <a:srgbClr val="2A2929"/>
-                </a:solidFill>
-                <a:latin typeface="Roboto"/>
-              </a:rPr>
-              <a:t>Found by name &amp; proven to work</a:t>
-            </a:r>
-          </a:p>
-          <a:p>
-            <a:pPr>
-              <a:spcBef>
-                <a:spcPts val="1000"/>
-              </a:spcBef>
-            </a:pPr>
-            <a:r>
-              <a:rPr sz="2000" b="0" i="1">
-                <a:solidFill>
-                  <a:srgbClr val="484848"/>
-                </a:solidFill>
-                <a:latin typeface="Roboto Light"/>
-              </a:rPr>
-              <a:t>DNS · connectivity testing</a:t>
-            </a:r>
+          <p:cNvPr id="4" name="Rectangle 3"/>
+          <p:cNvSpPr/>
+          <p:nvPr/>
+        </p:nvSpPr>
+        <p:spPr>
+          <a:xfrm>
+            <a:off x="640080" y="1965960"/>
+            <a:ext cx="10927080" cy="841248"/>
+          </a:xfrm>
+          <a:prstGeom prst="rect">
+            <a:avLst/>
+          </a:prstGeom>
+          <a:solidFill>
+            <a:srgbClr val="FFFFFF"/>
+          </a:solidFill>
+          <a:ln w="12700">
+            <a:solidFill>
+              <a:srgbClr val="CCCCCC"/>
+            </a:solidFill>
+          </a:ln>
+          <a:effectLst/>
+        </p:spPr>
+        <p:style>
+          <a:lnRef idx="1">
+            <a:schemeClr val="accent1"/>
+          </a:lnRef>
+          <a:fillRef idx="3">
+            <a:schemeClr val="accent1"/>
+          </a:fillRef>
+          <a:effectRef idx="2">
+            <a:schemeClr val="accent1"/>
+          </a:effectRef>
+          <a:fontRef idx="minor">
+            <a:schemeClr val="lt1"/>
+          </a:fontRef>
+        </p:style>
+        <p:txBody>
+          <a:bodyPr rtlCol="0" anchor="ctr"/>
+          <a:lstStyle/>
+          <a:p>
+            <a:pPr algn="ctr"/>
           </a:p>
         </p:txBody>
       </p:sp>
@@ -8594,14 +6278,14 @@
         </p:nvSpPr>
         <p:spPr>
           <a:xfrm>
-            <a:off x="0" y="6565392"/>
-            <a:ext cx="12191695" cy="38100"/>
+            <a:off x="640080" y="1965960"/>
+            <a:ext cx="109728" cy="841248"/>
           </a:xfrm>
           <a:prstGeom prst="rect">
             <a:avLst/>
           </a:prstGeom>
           <a:solidFill>
-            <a:srgbClr val="205F61"/>
+            <a:srgbClr val="27B5CE"/>
           </a:solidFill>
           <a:ln>
             <a:noFill/>
@@ -8638,6 +6322,347 @@
         </p:nvSpPr>
         <p:spPr>
           <a:xfrm>
+            <a:off x="960120" y="1965960"/>
+            <a:ext cx="10424160" cy="841248"/>
+          </a:xfrm>
+          <a:prstGeom prst="rect">
+            <a:avLst/>
+          </a:prstGeom>
+          <a:noFill/>
+        </p:spPr>
+        <p:txBody>
+          <a:bodyPr wrap="square" anchor="ctr" lIns="0" rIns="0" tIns="0" bIns="0">
+            <a:spAutoFit/>
+          </a:bodyPr>
+          <a:lstStyle/>
+          <a:p>
+            <a:pPr>
+              <a:lnSpc>
+                <a:spcPct val="100000"/>
+              </a:lnSpc>
+            </a:pPr>
+            <a:r>
+              <a:rPr sz="1700" b="0" i="0">
+                <a:solidFill>
+                  <a:srgbClr val="2A2929"/>
+                </a:solidFill>
+                <a:latin typeface="Roboto"/>
+              </a:rPr>
+              <a:t>Users and groups are people; roles and policies are permissions.</a:t>
+            </a:r>
+          </a:p>
+        </p:txBody>
+      </p:sp>
+      <p:sp>
+        <p:nvSpPr>
+          <p:cNvPr id="7" name="Rectangle 6"/>
+          <p:cNvSpPr/>
+          <p:nvPr/>
+        </p:nvSpPr>
+        <p:spPr>
+          <a:xfrm>
+            <a:off x="640080" y="2916936"/>
+            <a:ext cx="10927080" cy="841248"/>
+          </a:xfrm>
+          <a:prstGeom prst="rect">
+            <a:avLst/>
+          </a:prstGeom>
+          <a:solidFill>
+            <a:srgbClr val="FFFFFF"/>
+          </a:solidFill>
+          <a:ln w="12700">
+            <a:solidFill>
+              <a:srgbClr val="CCCCCC"/>
+            </a:solidFill>
+          </a:ln>
+          <a:effectLst/>
+        </p:spPr>
+        <p:style>
+          <a:lnRef idx="1">
+            <a:schemeClr val="accent1"/>
+          </a:lnRef>
+          <a:fillRef idx="3">
+            <a:schemeClr val="accent1"/>
+          </a:fillRef>
+          <a:effectRef idx="2">
+            <a:schemeClr val="accent1"/>
+          </a:effectRef>
+          <a:fontRef idx="minor">
+            <a:schemeClr val="lt1"/>
+          </a:fontRef>
+        </p:style>
+        <p:txBody>
+          <a:bodyPr rtlCol="0" anchor="ctr"/>
+          <a:lstStyle/>
+          <a:p>
+            <a:pPr algn="ctr"/>
+          </a:p>
+        </p:txBody>
+      </p:sp>
+      <p:sp>
+        <p:nvSpPr>
+          <p:cNvPr id="8" name="Rectangle 7"/>
+          <p:cNvSpPr/>
+          <p:nvPr/>
+        </p:nvSpPr>
+        <p:spPr>
+          <a:xfrm>
+            <a:off x="640080" y="2916936"/>
+            <a:ext cx="109728" cy="841248"/>
+          </a:xfrm>
+          <a:prstGeom prst="rect">
+            <a:avLst/>
+          </a:prstGeom>
+          <a:solidFill>
+            <a:srgbClr val="27B5CE"/>
+          </a:solidFill>
+          <a:ln>
+            <a:noFill/>
+          </a:ln>
+          <a:effectLst/>
+        </p:spPr>
+        <p:style>
+          <a:lnRef idx="1">
+            <a:schemeClr val="accent1"/>
+          </a:lnRef>
+          <a:fillRef idx="3">
+            <a:schemeClr val="accent1"/>
+          </a:fillRef>
+          <a:effectRef idx="2">
+            <a:schemeClr val="accent1"/>
+          </a:effectRef>
+          <a:fontRef idx="minor">
+            <a:schemeClr val="lt1"/>
+          </a:fontRef>
+        </p:style>
+        <p:txBody>
+          <a:bodyPr rtlCol="0" anchor="ctr"/>
+          <a:lstStyle/>
+          <a:p>
+            <a:pPr algn="ctr"/>
+          </a:p>
+        </p:txBody>
+      </p:sp>
+      <p:sp>
+        <p:nvSpPr>
+          <p:cNvPr id="9" name="TextBox 8"/>
+          <p:cNvSpPr txBox="1"/>
+          <p:nvPr/>
+        </p:nvSpPr>
+        <p:spPr>
+          <a:xfrm>
+            <a:off x="960120" y="2916936"/>
+            <a:ext cx="10424160" cy="841248"/>
+          </a:xfrm>
+          <a:prstGeom prst="rect">
+            <a:avLst/>
+          </a:prstGeom>
+          <a:noFill/>
+        </p:spPr>
+        <p:txBody>
+          <a:bodyPr wrap="square" anchor="ctr" lIns="0" rIns="0" tIns="0" bIns="0">
+            <a:spAutoFit/>
+          </a:bodyPr>
+          <a:lstStyle/>
+          <a:p>
+            <a:pPr>
+              <a:lnSpc>
+                <a:spcPct val="100000"/>
+              </a:lnSpc>
+            </a:pPr>
+            <a:r>
+              <a:rPr sz="1700" b="0" i="0">
+                <a:solidFill>
+                  <a:srgbClr val="2A2929"/>
+                </a:solidFill>
+                <a:latin typeface="Roboto"/>
+              </a:rPr>
+              <a:t>Policies go on groups; grant narrowly; protect the founding identity.</a:t>
+            </a:r>
+          </a:p>
+        </p:txBody>
+      </p:sp>
+      <p:sp>
+        <p:nvSpPr>
+          <p:cNvPr id="10" name="Rectangle 9"/>
+          <p:cNvSpPr/>
+          <p:nvPr/>
+        </p:nvSpPr>
+        <p:spPr>
+          <a:xfrm>
+            <a:off x="640080" y="3867912"/>
+            <a:ext cx="10927080" cy="841248"/>
+          </a:xfrm>
+          <a:prstGeom prst="rect">
+            <a:avLst/>
+          </a:prstGeom>
+          <a:solidFill>
+            <a:srgbClr val="FFFFFF"/>
+          </a:solidFill>
+          <a:ln w="12700">
+            <a:solidFill>
+              <a:srgbClr val="CCCCCC"/>
+            </a:solidFill>
+          </a:ln>
+          <a:effectLst/>
+        </p:spPr>
+        <p:style>
+          <a:lnRef idx="1">
+            <a:schemeClr val="accent1"/>
+          </a:lnRef>
+          <a:fillRef idx="3">
+            <a:schemeClr val="accent1"/>
+          </a:fillRef>
+          <a:effectRef idx="2">
+            <a:schemeClr val="accent1"/>
+          </a:effectRef>
+          <a:fontRef idx="minor">
+            <a:schemeClr val="lt1"/>
+          </a:fontRef>
+        </p:style>
+        <p:txBody>
+          <a:bodyPr rtlCol="0" anchor="ctr"/>
+          <a:lstStyle/>
+          <a:p>
+            <a:pPr algn="ctr"/>
+          </a:p>
+        </p:txBody>
+      </p:sp>
+      <p:sp>
+        <p:nvSpPr>
+          <p:cNvPr id="11" name="Rectangle 10"/>
+          <p:cNvSpPr/>
+          <p:nvPr/>
+        </p:nvSpPr>
+        <p:spPr>
+          <a:xfrm>
+            <a:off x="640080" y="3867912"/>
+            <a:ext cx="109728" cy="841248"/>
+          </a:xfrm>
+          <a:prstGeom prst="rect">
+            <a:avLst/>
+          </a:prstGeom>
+          <a:solidFill>
+            <a:srgbClr val="27B5CE"/>
+          </a:solidFill>
+          <a:ln>
+            <a:noFill/>
+          </a:ln>
+          <a:effectLst/>
+        </p:spPr>
+        <p:style>
+          <a:lnRef idx="1">
+            <a:schemeClr val="accent1"/>
+          </a:lnRef>
+          <a:fillRef idx="3">
+            <a:schemeClr val="accent1"/>
+          </a:fillRef>
+          <a:effectRef idx="2">
+            <a:schemeClr val="accent1"/>
+          </a:effectRef>
+          <a:fontRef idx="minor">
+            <a:schemeClr val="lt1"/>
+          </a:fontRef>
+        </p:style>
+        <p:txBody>
+          <a:bodyPr rtlCol="0" anchor="ctr"/>
+          <a:lstStyle/>
+          <a:p>
+            <a:pPr algn="ctr"/>
+          </a:p>
+        </p:txBody>
+      </p:sp>
+      <p:sp>
+        <p:nvSpPr>
+          <p:cNvPr id="12" name="TextBox 11"/>
+          <p:cNvSpPr txBox="1"/>
+          <p:nvPr/>
+        </p:nvSpPr>
+        <p:spPr>
+          <a:xfrm>
+            <a:off x="960120" y="3867912"/>
+            <a:ext cx="10424160" cy="841248"/>
+          </a:xfrm>
+          <a:prstGeom prst="rect">
+            <a:avLst/>
+          </a:prstGeom>
+          <a:noFill/>
+        </p:spPr>
+        <p:txBody>
+          <a:bodyPr wrap="square" anchor="ctr" lIns="0" rIns="0" tIns="0" bIns="0">
+            <a:spAutoFit/>
+          </a:bodyPr>
+          <a:lstStyle/>
+          <a:p>
+            <a:pPr>
+              <a:lnSpc>
+                <a:spcPct val="100000"/>
+              </a:lnSpc>
+            </a:pPr>
+            <a:r>
+              <a:rPr sz="1700" b="0" i="0">
+                <a:solidFill>
+                  <a:srgbClr val="2A2929"/>
+                </a:solidFill>
+                <a:latin typeface="Roboto"/>
+              </a:rPr>
+              <a:t>Whoever operates a platform should not be able to widen their own access.</a:t>
+            </a:r>
+          </a:p>
+        </p:txBody>
+      </p:sp>
+      <p:sp>
+        <p:nvSpPr>
+          <p:cNvPr id="13" name="Rectangle 12"/>
+          <p:cNvSpPr/>
+          <p:nvPr/>
+        </p:nvSpPr>
+        <p:spPr>
+          <a:xfrm>
+            <a:off x="0" y="6565392"/>
+            <a:ext cx="12191695" cy="38100"/>
+          </a:xfrm>
+          <a:prstGeom prst="rect">
+            <a:avLst/>
+          </a:prstGeom>
+          <a:solidFill>
+            <a:srgbClr val="27B5CE"/>
+          </a:solidFill>
+          <a:ln>
+            <a:noFill/>
+          </a:ln>
+          <a:effectLst/>
+        </p:spPr>
+        <p:style>
+          <a:lnRef idx="1">
+            <a:schemeClr val="accent1"/>
+          </a:lnRef>
+          <a:fillRef idx="3">
+            <a:schemeClr val="accent1"/>
+          </a:fillRef>
+          <a:effectRef idx="2">
+            <a:schemeClr val="accent1"/>
+          </a:effectRef>
+          <a:fontRef idx="minor">
+            <a:schemeClr val="lt1"/>
+          </a:fontRef>
+        </p:style>
+        <p:txBody>
+          <a:bodyPr rtlCol="0" anchor="ctr"/>
+          <a:lstStyle/>
+          <a:p>
+            <a:pPr algn="ctr"/>
+          </a:p>
+        </p:txBody>
+      </p:sp>
+      <p:sp>
+        <p:nvSpPr>
+          <p:cNvPr id="14" name="TextBox 13"/>
+          <p:cNvSpPr txBox="1"/>
+          <p:nvPr/>
+        </p:nvSpPr>
+        <p:spPr>
+          <a:xfrm>
             <a:off x="502920" y="6400800"/>
             <a:ext cx="5486400" cy="320040"/>
           </a:xfrm>
@@ -8675,7 +6700,7 @@
       </p:sp>
       <p:sp>
         <p:nvSpPr>
-          <p:cNvPr id="7" name="TextBox 6"/>
+          <p:cNvPr id="15" name="TextBox 14"/>
           <p:cNvSpPr txBox="1"/>
           <p:nvPr/>
         </p:nvSpPr>
@@ -8703,7 +6728,7 @@
                 </a:solidFill>
                 <a:latin typeface="Roboto"/>
               </a:rPr>
-              <a:t/>
+              <a:t>13</a:t>
             </a:r>
           </a:p>
         </p:txBody>
@@ -8736,64 +6761,14 @@
       <p:grpSpPr/>
       <p:sp>
         <p:nvSpPr>
-          <p:cNvPr id="2" name="TextBox 1"/>
-          <p:cNvSpPr txBox="1"/>
-          <p:nvPr/>
-        </p:nvSpPr>
-        <p:spPr>
-          <a:xfrm>
-            <a:off x="640080" y="457200"/>
-            <a:ext cx="10881360" cy="960120"/>
-          </a:xfrm>
-          <a:prstGeom prst="rect">
-            <a:avLst/>
-          </a:prstGeom>
-          <a:noFill/>
-        </p:spPr>
-        <p:txBody>
-          <a:bodyPr wrap="square" anchor="t" lIns="0" rIns="0" tIns="0" bIns="0">
-            <a:spAutoFit/>
-          </a:bodyPr>
-          <a:lstStyle/>
-          <a:p>
-            <a:r>
-              <a:rPr sz="2800" b="1" i="0">
-                <a:solidFill>
-                  <a:srgbClr val="2A2929"/>
-                </a:solidFill>
-                <a:latin typeface="Roboto"/>
-              </a:rPr>
-              <a:t>How DNS works — and Route 53</a:t>
-            </a:r>
-          </a:p>
-          <a:p>
-            <a:pPr>
-              <a:spcBef>
-                <a:spcPts val="200"/>
-              </a:spcBef>
-            </a:pPr>
-            <a:r>
-              <a:rPr sz="1800" b="0" i="1">
-                <a:solidFill>
-                  <a:srgbClr val="D68E10"/>
-                </a:solidFill>
-                <a:latin typeface="Roboto Light"/>
-              </a:rPr>
-              <a:t>AWS · ACF M05 S49–S50</a:t>
-            </a:r>
-          </a:p>
-        </p:txBody>
-      </p:sp>
-      <p:sp>
-        <p:nvSpPr>
-          <p:cNvPr id="3" name="Rectangle 2"/>
+          <p:cNvPr id="2" name="Rectangle 1"/>
           <p:cNvSpPr/>
           <p:nvPr/>
         </p:nvSpPr>
         <p:spPr>
           <a:xfrm>
-            <a:off x="658368" y="1371600"/>
-            <a:ext cx="1463040" cy="50800"/>
+            <a:off x="0" y="0"/>
+            <a:ext cx="3931920" cy="6858000"/>
           </a:xfrm>
           <a:prstGeom prst="rect">
             <a:avLst/>
@@ -8830,14 +6805,14 @@
       </p:sp>
       <p:sp>
         <p:nvSpPr>
-          <p:cNvPr id="4" name="TextBox 3"/>
+          <p:cNvPr id="3" name="TextBox 2"/>
           <p:cNvSpPr txBox="1"/>
           <p:nvPr/>
         </p:nvSpPr>
         <p:spPr>
           <a:xfrm>
-            <a:off x="658368" y="1737360"/>
-            <a:ext cx="5486400" cy="4297680"/>
+            <a:off x="365760" y="2103120"/>
+            <a:ext cx="3291840" cy="2194560"/>
           </a:xfrm>
           <a:prstGeom prst="rect">
             <a:avLst/>
@@ -8850,158 +6825,87 @@
           </a:bodyPr>
           <a:lstStyle/>
           <a:p>
-            <a:pPr marL="0" indent="0">
-              <a:lnSpc>
-                <a:spcPct val="105000"/>
-              </a:lnSpc>
+            <a:r>
+              <a:rPr sz="13000" b="1" i="0">
+                <a:solidFill>
+                  <a:srgbClr val="FFFFFF"/>
+                </a:solidFill>
+                <a:latin typeface="Roboto"/>
+              </a:rPr>
+              <a:t>03</a:t>
+            </a:r>
+          </a:p>
+        </p:txBody>
+      </p:sp>
+      <p:sp>
+        <p:nvSpPr>
+          <p:cNvPr id="4" name="TextBox 3"/>
+          <p:cNvSpPr txBox="1"/>
+          <p:nvPr/>
+        </p:nvSpPr>
+        <p:spPr>
+          <a:xfrm>
+            <a:off x="4480560" y="2468880"/>
+            <a:ext cx="7132320" cy="2194560"/>
+          </a:xfrm>
+          <a:prstGeom prst="rect">
+            <a:avLst/>
+          </a:prstGeom>
+          <a:noFill/>
+        </p:spPr>
+        <p:txBody>
+          <a:bodyPr wrap="square" anchor="t" lIns="0" rIns="0" tIns="0" bIns="0">
+            <a:spAutoFit/>
+          </a:bodyPr>
+          <a:lstStyle/>
+          <a:p>
+            <a:r>
+              <a:rPr sz="1600" b="1" i="0">
+                <a:solidFill>
+                  <a:srgbClr val="205F61"/>
+                </a:solidFill>
+                <a:latin typeface="Roboto"/>
+              </a:rPr>
+              <a:t>SECTION</a:t>
+            </a:r>
+          </a:p>
+          <a:p>
+            <a:pPr>
               <a:spcBef>
-                <a:spcPts val="0"/>
+                <a:spcPts val="600"/>
               </a:spcBef>
-              <a:spcAft>
+            </a:pPr>
+            <a:r>
+              <a:rPr sz="3800" b="1" i="0">
+                <a:solidFill>
+                  <a:srgbClr val="2A2929"/>
+                </a:solidFill>
+                <a:latin typeface="Roboto"/>
+              </a:rPr>
+              <a:t>Identity for a server</a:t>
+            </a:r>
+          </a:p>
+          <a:p>
+            <a:pPr>
+              <a:spcBef>
                 <a:spcPts val="1000"/>
-              </a:spcAft>
+              </a:spcBef>
             </a:pPr>
             <a:r>
-              <a:rPr sz="1700" b="1" i="0">
-                <a:solidFill>
-                  <a:srgbClr val="EDAB0C"/>
-                </a:solidFill>
-                <a:latin typeface="Roboto"/>
-              </a:rPr>
-              <a:t>■  </a:t>
-            </a:r>
-            <a:r>
-              <a:rPr sz="1700" b="0" i="0">
-                <a:solidFill>
-                  <a:srgbClr val="2A2929"/>
-                </a:solidFill>
-                <a:latin typeface="Roboto"/>
-              </a:rPr>
-              <a:t>DNS translates a name (ledgerline.yat.internal) into the IP address computers actually use.</a:t>
-            </a:r>
-          </a:p>
-          <a:p>
-            <a:pPr marL="0" indent="0">
-              <a:lnSpc>
-                <a:spcPct val="105000"/>
-              </a:lnSpc>
-              <a:spcBef>
-                <a:spcPts val="0"/>
-              </a:spcBef>
-              <a:spcAft>
-                <a:spcPts val="1000"/>
-              </a:spcAft>
-            </a:pPr>
-            <a:r>
-              <a:rPr sz="1700" b="1" i="0">
-                <a:solidFill>
-                  <a:srgbClr val="EDAB0C"/>
-                </a:solidFill>
-                <a:latin typeface="Roboto"/>
-              </a:rPr>
-              <a:t>■  </a:t>
-            </a:r>
-            <a:r>
-              <a:rPr sz="1700" b="0" i="0">
-                <a:solidFill>
-                  <a:srgbClr val="2A2929"/>
-                </a:solidFill>
-                <a:latin typeface="Roboto"/>
-              </a:rPr>
-              <a:t>A resolver asks the DNS hierarchy and gets the address back — we use names, not IPs, because addresses change.</a:t>
-            </a:r>
-          </a:p>
-          <a:p>
-            <a:pPr marL="0" indent="0">
-              <a:lnSpc>
-                <a:spcPct val="105000"/>
-              </a:lnSpc>
-              <a:spcBef>
-                <a:spcPts val="0"/>
-              </a:spcBef>
-              <a:spcAft>
-                <a:spcPts val="1000"/>
-              </a:spcAft>
-            </a:pPr>
-            <a:r>
-              <a:rPr sz="1700" b="1" i="0">
-                <a:solidFill>
-                  <a:srgbClr val="EDAB0C"/>
-                </a:solidFill>
-                <a:latin typeface="Roboto"/>
-              </a:rPr>
-              <a:t>■  </a:t>
-            </a:r>
-            <a:r>
-              <a:rPr sz="1700" b="0" i="0">
-                <a:solidFill>
-                  <a:srgbClr val="2A2929"/>
-                </a:solidFill>
-                <a:latin typeface="Roboto"/>
-              </a:rPr>
-              <a:t>Amazon Route 53 is AWS's highly available DNS service.</a:t>
-            </a:r>
-          </a:p>
-          <a:p>
-            <a:pPr marL="0" indent="0">
-              <a:lnSpc>
-                <a:spcPct val="105000"/>
-              </a:lnSpc>
-              <a:spcBef>
-                <a:spcPts val="0"/>
-              </a:spcBef>
-              <a:spcAft>
-                <a:spcPts val="1000"/>
-              </a:spcAft>
-            </a:pPr>
-            <a:r>
-              <a:rPr sz="1700" b="1" i="0">
-                <a:solidFill>
-                  <a:srgbClr val="EDAB0C"/>
-                </a:solidFill>
-                <a:latin typeface="Roboto"/>
-              </a:rPr>
-              <a:t>■  </a:t>
-            </a:r>
-            <a:r>
-              <a:rPr sz="1700" b="0" i="0">
-                <a:solidFill>
-                  <a:srgbClr val="2A2929"/>
-                </a:solidFill>
-                <a:latin typeface="Roboto"/>
-              </a:rPr>
-              <a:t>Public hosted zone = internet-facing names; private hosted zone = names that resolve only inside your VPC.</a:t>
-            </a:r>
-          </a:p>
-        </p:txBody>
-      </p:sp>
-      <p:pic>
-        <p:nvPicPr>
-          <p:cNvPr id="5" name="Picture 4" descr="07-route53-dns-flow.png"/>
-          <p:cNvPicPr>
-            <a:picLocks noChangeAspect="1"/>
-          </p:cNvPicPr>
-          <p:nvPr/>
-        </p:nvPicPr>
-        <p:blipFill>
-          <a:blip r:embed="rId2"/>
-          <a:stretch>
-            <a:fillRect/>
-          </a:stretch>
-        </p:blipFill>
-        <p:spPr>
-          <a:xfrm>
-            <a:off x="6400800" y="3138729"/>
-            <a:ext cx="5120640" cy="1312061"/>
-          </a:xfrm>
-          <a:prstGeom prst="rect">
-            <a:avLst/>
-          </a:prstGeom>
-        </p:spPr>
-      </p:pic>
-      <p:sp>
-        <p:nvSpPr>
-          <p:cNvPr id="6" name="Rectangle 5"/>
+              <a:rPr sz="2000" b="0" i="1">
+                <a:solidFill>
+                  <a:srgbClr val="484848"/>
+                </a:solidFill>
+                <a:latin typeface="Roboto Light"/>
+              </a:rPr>
+              <a:t>permission without a password</a:t>
+            </a:r>
+          </a:p>
+        </p:txBody>
+      </p:sp>
+      <p:sp>
+        <p:nvSpPr>
+          <p:cNvPr id="5" name="Rectangle 4"/>
           <p:cNvSpPr/>
           <p:nvPr/>
         </p:nvSpPr>
@@ -9045,7 +6949,7 @@
       </p:sp>
       <p:sp>
         <p:nvSpPr>
-          <p:cNvPr id="7" name="TextBox 6"/>
+          <p:cNvPr id="6" name="TextBox 5"/>
           <p:cNvSpPr txBox="1"/>
           <p:nvPr/>
         </p:nvSpPr>
@@ -9088,7 +6992,7 @@
       </p:sp>
       <p:sp>
         <p:nvSpPr>
-          <p:cNvPr id="8" name="TextBox 7"/>
+          <p:cNvPr id="7" name="TextBox 6"/>
           <p:cNvSpPr txBox="1"/>
           <p:nvPr/>
         </p:nvSpPr>
@@ -9116,7 +7020,7 @@
                 </a:solidFill>
                 <a:latin typeface="Roboto"/>
               </a:rPr>
-              <a:t>13</a:t>
+              <a:t/>
             </a:r>
           </a:p>
         </p:txBody>
@@ -9176,7 +7080,7 @@
                 </a:solidFill>
                 <a:latin typeface="Roboto"/>
               </a:rPr>
-              <a:t>The design's name &amp; certificate</a:t>
+              <a:t>How a server gets permission</a:t>
             </a:r>
           </a:p>
           <a:p>
@@ -9192,7 +7096,7 @@
                 </a:solidFill>
                 <a:latin typeface="Roboto Light"/>
               </a:rPr>
-              <a:t>the supplied design · decision C8</a:t>
+              <a:t>nothing stored on the box</a:t>
             </a:r>
           </a:p>
         </p:txBody>
@@ -9290,7 +7194,7 @@
                 </a:solidFill>
                 <a:latin typeface="Roboto"/>
               </a:rPr>
-              <a:t>Ledgerline gets an internal hostname in a private hosted zone — staff-only, over the VPN; no public internet name.</a:t>
+              <a:t>A server needs to reach other services — storage, logging — and it needs permission to do it.</a:t>
             </a:r>
           </a:p>
           <a:p>
@@ -9321,7 +7225,7 @@
                 </a:solidFill>
                 <a:latin typeface="Roboto"/>
               </a:rPr>
-              <a:t>An ACM TLS certificate secures HTTPS to that name.</a:t>
+              <a:t>It assumes a role: temporary credentials, issued automatically, rotated for you.</a:t>
             </a:r>
           </a:p>
           <a:p>
@@ -9352,7 +7256,38 @@
                 </a:solidFill>
                 <a:latin typeface="Roboto"/>
               </a:rPr>
-              <a:t>The exact hostname + certificate domain is implementer decision C8 — confirm it with YAT ICT.</a:t>
+              <a:t>Nothing is stored on the server. There is no key on disk to find, copy or leak.</a:t>
+            </a:r>
+          </a:p>
+          <a:p>
+            <a:pPr marL="0" indent="0">
+              <a:lnSpc>
+                <a:spcPct val="105000"/>
+              </a:lnSpc>
+              <a:spcBef>
+                <a:spcPts val="0"/>
+              </a:spcBef>
+              <a:spcAft>
+                <a:spcPts val="1000"/>
+              </a:spcAft>
+            </a:pPr>
+            <a:r>
+              <a:rPr sz="2400" b="1" i="0">
+                <a:solidFill>
+                  <a:srgbClr val="EDAB0C"/>
+                </a:solidFill>
+                <a:latin typeface="Roboto"/>
+              </a:rPr>
+              <a:t>■  </a:t>
+            </a:r>
+            <a:r>
+              <a:rPr sz="2400" b="0" i="0">
+                <a:solidFill>
+                  <a:srgbClr val="2A2929"/>
+                </a:solidFill>
+                <a:latin typeface="Roboto"/>
+              </a:rPr>
+              <a:t>You attach the role when you define the server, not afterwards by hand.</a:t>
             </a:r>
           </a:p>
         </p:txBody>
@@ -9534,7 +7469,7 @@
                 </a:solidFill>
                 <a:latin typeface="Roboto"/>
               </a:rPr>
-              <a:t>Prove it works — test connectivity</a:t>
+              <a:t>Reading a role you did not write</a:t>
             </a:r>
           </a:p>
           <a:p>
@@ -9550,7 +7485,7 @@
                 </a:solidFill>
                 <a:latin typeface="Roboto Light"/>
               </a:rPr>
-              <a:t>AWS · ACA M07 S45, S41</a:t>
+              <a:t>inherit it, then read it</a:t>
             </a:r>
           </a:p>
         </p:txBody>
@@ -9648,7 +7583,7 @@
                 </a:solidFill>
                 <a:latin typeface="Roboto"/>
               </a:rPr>
-              <a:t>After building, confirm reachability: external access in (reach the service over the VPN) and access between tiers (app → db).</a:t>
+              <a:t>Open a role and read its attached policies to see what it actually permits.</a:t>
             </a:r>
           </a:p>
           <a:p>
@@ -9679,7 +7614,7 @@
                 </a:solidFill>
                 <a:latin typeface="Roboto"/>
               </a:rPr>
-              <a:t>Reachability Analyzer traces the path and names the blocking component when something can't connect.</a:t>
+              <a:t>This is a routine professional move: you inherit roles far more often than you author them, and you are accountable for what they allow.</a:t>
             </a:r>
           </a:p>
           <a:p>
@@ -9710,38 +7645,7 @@
                 </a:solidFill>
                 <a:latin typeface="Roboto"/>
               </a:rPr>
-              <a:t>VPC flow logs show ACCEPT / REJECT — a REJECT is usually a security-group rule or a missing route.</a:t>
-            </a:r>
-          </a:p>
-          <a:p>
-            <a:pPr marL="0" indent="0">
-              <a:lnSpc>
-                <a:spcPct val="105000"/>
-              </a:lnSpc>
-              <a:spcBef>
-                <a:spcPts val="0"/>
-              </a:spcBef>
-              <a:spcAft>
-                <a:spcPts val="1000"/>
-              </a:spcAft>
-            </a:pPr>
-            <a:r>
-              <a:rPr sz="2400" b="1" i="0">
-                <a:solidFill>
-                  <a:srgbClr val="EDAB0C"/>
-                </a:solidFill>
-                <a:latin typeface="Roboto"/>
-              </a:rPr>
-              <a:t>■  </a:t>
-            </a:r>
-            <a:r>
-              <a:rPr sz="2400" b="0" i="0">
-                <a:solidFill>
-                  <a:srgbClr val="2A2929"/>
-                </a:solidFill>
-                <a:latin typeface="Roboto"/>
-              </a:rPr>
-              <a:t>Fix it and retest; capture the test as evidence. (Full app → db testing completes in Topic 8, once compute exists.)</a:t>
+              <a:t>Your environment supplies the role your servers will use. Read it, and write its name down — the next task asks for it.</a:t>
             </a:r>
           </a:p>
         </p:txBody>
@@ -9923,7 +7827,7 @@
                 </a:solidFill>
                 <a:latin typeface="Roboto"/>
               </a:rPr>
-              <a:t>Continuing the build</a:t>
+              <a:t>Nothing is allowed yet</a:t>
             </a:r>
           </a:p>
           <a:p>
@@ -9939,7 +7843,7 @@
                 </a:solidFill>
                 <a:latin typeface="Roboto Light"/>
               </a:rPr>
-              <a:t>foundation done — now the network</a:t>
+              <a:t>from plumbing to permission</a:t>
             </a:r>
           </a:p>
         </p:txBody>
@@ -10037,7 +7941,7 @@
                 </a:solidFill>
                 <a:latin typeface="Roboto"/>
               </a:rPr>
-              <a:t>Topic 6 set the foundation: the account, identity, and the shared-responsibility line.</a:t>
+              <a:t>The network is built, and by default nothing in it may talk to anything else.</a:t>
             </a:r>
           </a:p>
           <a:p>
@@ -10068,7 +7972,7 @@
                 </a:solidFill>
                 <a:latin typeface="Roboto"/>
               </a:rPr>
-              <a:t>Now you build the network the workload sits inside.</a:t>
+              <a:t>Today you write the rules that let each tier reach exactly the tier next to it — and no further.</a:t>
             </a:r>
           </a:p>
           <a:p>
@@ -10099,69 +8003,7 @@
                 </a:solidFill>
                 <a:latin typeface="Roboto"/>
               </a:rPr>
-              <a:t>Three parts: the virtual network (VPC + subnets), traffic control (security groups), and name resolution (DNS).</a:t>
-            </a:r>
-          </a:p>
-          <a:p>
-            <a:pPr marL="0" indent="0">
-              <a:lnSpc>
-                <a:spcPct val="105000"/>
-              </a:lnSpc>
-              <a:spcBef>
-                <a:spcPts val="0"/>
-              </a:spcBef>
-              <a:spcAft>
-                <a:spcPts val="1000"/>
-              </a:spcAft>
-            </a:pPr>
-            <a:r>
-              <a:rPr sz="2400" b="1" i="0">
-                <a:solidFill>
-                  <a:srgbClr val="EDAB0C"/>
-                </a:solidFill>
-                <a:latin typeface="Roboto"/>
-              </a:rPr>
-              <a:t>■  </a:t>
-            </a:r>
-            <a:r>
-              <a:rPr sz="2400" b="0" i="0">
-                <a:solidFill>
-                  <a:srgbClr val="2A2929"/>
-                </a:solidFill>
-                <a:latin typeface="Roboto"/>
-              </a:rPr>
-              <a:t>Still working to the supplied design — and still capturing evidence as you go.</a:t>
-            </a:r>
-          </a:p>
-          <a:p>
-            <a:pPr marL="0" indent="0">
-              <a:lnSpc>
-                <a:spcPct val="105000"/>
-              </a:lnSpc>
-              <a:spcBef>
-                <a:spcPts val="0"/>
-              </a:spcBef>
-              <a:spcAft>
-                <a:spcPts val="1000"/>
-              </a:spcAft>
-            </a:pPr>
-            <a:r>
-              <a:rPr sz="2400" b="1" i="0">
-                <a:solidFill>
-                  <a:srgbClr val="EDAB0C"/>
-                </a:solidFill>
-                <a:latin typeface="Roboto"/>
-              </a:rPr>
-              <a:t>■  </a:t>
-            </a:r>
-            <a:r>
-              <a:rPr sz="2400" b="0" i="0">
-                <a:solidFill>
-                  <a:srgbClr val="2A2929"/>
-                </a:solidFill>
-                <a:latin typeface="Roboto"/>
-              </a:rPr>
-              <a:t>For every AWS build task: watch the demo, then do it yourself.</a:t>
+              <a:t>Then the identities: who operates this platform after you hand it over, and how a server gets permission to do its job without holding a password.</a:t>
             </a:r>
           </a:p>
         </p:txBody>
@@ -10329,6 +8171,50 @@
             <a:avLst/>
           </a:prstGeom>
           <a:solidFill>
+            <a:srgbClr val="205F61"/>
+          </a:solidFill>
+          <a:ln>
+            <a:noFill/>
+          </a:ln>
+          <a:effectLst/>
+        </p:spPr>
+        <p:style>
+          <a:lnRef idx="1">
+            <a:schemeClr val="accent1"/>
+          </a:lnRef>
+          <a:fillRef idx="3">
+            <a:schemeClr val="accent1"/>
+          </a:fillRef>
+          <a:effectRef idx="2">
+            <a:schemeClr val="accent1"/>
+          </a:effectRef>
+          <a:fontRef idx="minor">
+            <a:schemeClr val="lt1"/>
+          </a:fontRef>
+        </p:style>
+        <p:txBody>
+          <a:bodyPr rtlCol="0" anchor="ctr"/>
+          <a:lstStyle/>
+          <a:p>
+            <a:pPr algn="ctr"/>
+          </a:p>
+        </p:txBody>
+      </p:sp>
+      <p:sp>
+        <p:nvSpPr>
+          <p:cNvPr id="3" name="Rounded Rectangle 2"/>
+          <p:cNvSpPr/>
+          <p:nvPr/>
+        </p:nvSpPr>
+        <p:spPr>
+          <a:xfrm>
+            <a:off x="640080" y="384048"/>
+            <a:ext cx="1691640" cy="457200"/>
+          </a:xfrm>
+          <a:prstGeom prst="roundRect">
+            <a:avLst/>
+          </a:prstGeom>
+          <a:solidFill>
             <a:srgbClr val="2A2929"/>
           </a:solidFill>
           <a:ln>
@@ -10355,58 +8241,14 @@
           <a:lstStyle/>
           <a:p>
             <a:pPr algn="ctr"/>
-          </a:p>
-        </p:txBody>
-      </p:sp>
-      <p:sp>
-        <p:nvSpPr>
-          <p:cNvPr id="3" name="Rounded Rectangle 2"/>
-          <p:cNvSpPr/>
-          <p:nvPr/>
-        </p:nvSpPr>
-        <p:spPr>
-          <a:xfrm>
-            <a:off x="640080" y="384048"/>
-            <a:ext cx="2240280" cy="457200"/>
-          </a:xfrm>
-          <a:prstGeom prst="roundRect">
-            <a:avLst/>
-          </a:prstGeom>
-          <a:solidFill>
-            <a:srgbClr val="205F61"/>
-          </a:solidFill>
-          <a:ln>
-            <a:noFill/>
-          </a:ln>
-          <a:effectLst/>
-        </p:spPr>
-        <p:style>
-          <a:lnRef idx="1">
-            <a:schemeClr val="accent1"/>
-          </a:lnRef>
-          <a:fillRef idx="3">
-            <a:schemeClr val="accent1"/>
-          </a:fillRef>
-          <a:effectRef idx="2">
-            <a:schemeClr val="accent1"/>
-          </a:effectRef>
-          <a:fontRef idx="minor">
-            <a:schemeClr val="lt1"/>
-          </a:fontRef>
-        </p:style>
-        <p:txBody>
-          <a:bodyPr rtlCol="0" anchor="ctr"/>
-          <a:lstStyle/>
-          <a:p>
-            <a:pPr algn="ctr"/>
-            <a:r>
-              <a:rPr sz="1300" b="1" i="0">
-                <a:solidFill>
-                  <a:srgbClr val="2A2929"/>
-                </a:solidFill>
-                <a:latin typeface="Roboto"/>
-              </a:rPr>
-              <a:t>DEMONSTRATION</a:t>
+            <a:r>
+              <a:rPr sz="1400" b="1" i="0">
+                <a:solidFill>
+                  <a:srgbClr val="FBB900"/>
+                </a:solidFill>
+                <a:latin typeface="Roboto"/>
+              </a:rPr>
+              <a:t>ACTIVITY</a:t>
             </a:r>
           </a:p>
         </p:txBody>
@@ -10419,8 +8261,8 @@
         </p:nvSpPr>
         <p:spPr>
           <a:xfrm>
-            <a:off x="3200400" y="310896"/>
-            <a:ext cx="8321040" cy="685800"/>
+            <a:off x="2560320" y="310896"/>
+            <a:ext cx="8961120" cy="685800"/>
           </a:xfrm>
           <a:prstGeom prst="rect">
             <a:avLst/>
@@ -10434,13 +8276,13 @@
           <a:lstStyle/>
           <a:p>
             <a:r>
-              <a:rPr sz="2500" b="1" i="0">
+              <a:rPr sz="2600" b="1" i="0">
                 <a:solidFill>
                   <a:srgbClr val="FFFFFF"/>
                 </a:solidFill>
                 <a:latin typeface="Roboto"/>
               </a:rPr>
-              <a:t>Create a DNS record &amp; test reachability</a:t>
+              <a:t>Review the role your servers will use</a:t>
             </a:r>
           </a:p>
         </p:txBody>
@@ -10494,7 +8336,7 @@
                 </a:solidFill>
                 <a:latin typeface="Roboto"/>
               </a:rPr>
-              <a:t>In Route 53, create / confirm the private hosted zone for the internal domain.</a:t>
+              <a:t>Run sheet — task 9.</a:t>
             </a:r>
           </a:p>
           <a:p>
@@ -10525,69 +8367,7 @@
                 </a:solidFill>
                 <a:latin typeface="Roboto"/>
               </a:rPr>
-              <a:t>Add the record for the Ledgerline name (and note the ACM certificate).</a:t>
-            </a:r>
-          </a:p>
-          <a:p>
-            <a:pPr marL="0" indent="0">
-              <a:lnSpc>
-                <a:spcPct val="105000"/>
-              </a:lnSpc>
-              <a:spcBef>
-                <a:spcPts val="0"/>
-              </a:spcBef>
-              <a:spcAft>
-                <a:spcPts val="1000"/>
-              </a:spcAft>
-            </a:pPr>
-            <a:r>
-              <a:rPr sz="1700" b="1" i="0">
-                <a:solidFill>
-                  <a:srgbClr val="EDAB0C"/>
-                </a:solidFill>
-                <a:latin typeface="Roboto"/>
-              </a:rPr>
-              <a:t>■  </a:t>
-            </a:r>
-            <a:r>
-              <a:rPr sz="1700" b="0" i="0">
-                <a:solidFill>
-                  <a:srgbClr val="2A2929"/>
-                </a:solidFill>
-                <a:latin typeface="Roboto"/>
-              </a:rPr>
-              <a:t>From a test point, resolve the name and check reachability.</a:t>
-            </a:r>
-          </a:p>
-          <a:p>
-            <a:pPr marL="0" indent="0">
-              <a:lnSpc>
-                <a:spcPct val="105000"/>
-              </a:lnSpc>
-              <a:spcBef>
-                <a:spcPts val="0"/>
-              </a:spcBef>
-              <a:spcAft>
-                <a:spcPts val="1000"/>
-              </a:spcAft>
-            </a:pPr>
-            <a:r>
-              <a:rPr sz="1700" b="1" i="0">
-                <a:solidFill>
-                  <a:srgbClr val="EDAB0C"/>
-                </a:solidFill>
-                <a:latin typeface="Roboto"/>
-              </a:rPr>
-              <a:t>■  </a:t>
-            </a:r>
-            <a:r>
-              <a:rPr sz="1700" b="0" i="0">
-                <a:solidFill>
-                  <a:srgbClr val="2A2929"/>
-                </a:solidFill>
-                <a:latin typeface="Roboto"/>
-              </a:rPr>
-              <a:t>If it's blocked, read the flow logs / Reachability Analyzer and fix the SG or route.</a:t>
+              <a:t>Open the role your run sheet names, read which services its policies grant access to, capture it, and note the name exactly as shown.</a:t>
             </a:r>
           </a:p>
         </p:txBody>
@@ -10601,7 +8381,7 @@
         <p:spPr>
           <a:xfrm>
             <a:off x="640080" y="5897880"/>
-            <a:ext cx="6583680" cy="457200"/>
+            <a:ext cx="4023360" cy="457200"/>
           </a:xfrm>
           <a:prstGeom prst="roundRect">
             <a:avLst/>
@@ -10647,7 +8427,7 @@
         <p:spPr>
           <a:xfrm>
             <a:off x="822960" y="5943600"/>
-            <a:ext cx="6217920" cy="365760"/>
+            <a:ext cx="3657600" cy="365760"/>
           </a:xfrm>
           <a:prstGeom prst="rect">
             <a:avLst/>
@@ -10661,13 +8441,13 @@
           <a:lstStyle/>
           <a:p>
             <a:r>
-              <a:rPr sz="1400" b="1" i="0">
+              <a:rPr sz="1500" b="1" i="0">
                 <a:solidFill>
                   <a:srgbClr val="2A2929"/>
                 </a:solidFill>
                 <a:latin typeface="Roboto"/>
               </a:rPr>
-              <a:t>▶  Instructor demonstrates live (no recorded demo) — you do this next</a:t>
+              <a:t>⏱  ~10 min</a:t>
             </a:r>
           </a:p>
         </p:txBody>
@@ -10803,512 +8583,6 @@
 </file>
 
 <file path=ppt/slides/slide21.xml><?xml version="1.0" encoding="utf-8"?>
-<p:sld xmlns:a="http://schemas.openxmlformats.org/drawingml/2006/main" xmlns:p="http://schemas.openxmlformats.org/presentationml/2006/main" xmlns:r="http://schemas.openxmlformats.org/officeDocument/2006/relationships">
-  <p:cSld>
-    <p:bg>
-      <p:bgPr>
-        <a:solidFill>
-          <a:srgbClr val="FFFFFF"/>
-        </a:solidFill>
-        <a:effectLst/>
-      </p:bgPr>
-    </p:bg>
-    <p:spTree>
-      <p:nvGrpSpPr>
-        <p:cNvPr id="1" name=""/>
-        <p:cNvGrpSpPr/>
-        <p:nvPr/>
-      </p:nvGrpSpPr>
-      <p:grpSpPr/>
-      <p:sp>
-        <p:nvSpPr>
-          <p:cNvPr id="2" name="Rectangle 1"/>
-          <p:cNvSpPr/>
-          <p:nvPr/>
-        </p:nvSpPr>
-        <p:spPr>
-          <a:xfrm>
-            <a:off x="0" y="0"/>
-            <a:ext cx="12191695" cy="1234440"/>
-          </a:xfrm>
-          <a:prstGeom prst="rect">
-            <a:avLst/>
-          </a:prstGeom>
-          <a:solidFill>
-            <a:srgbClr val="205F61"/>
-          </a:solidFill>
-          <a:ln>
-            <a:noFill/>
-          </a:ln>
-          <a:effectLst/>
-        </p:spPr>
-        <p:style>
-          <a:lnRef idx="1">
-            <a:schemeClr val="accent1"/>
-          </a:lnRef>
-          <a:fillRef idx="3">
-            <a:schemeClr val="accent1"/>
-          </a:fillRef>
-          <a:effectRef idx="2">
-            <a:schemeClr val="accent1"/>
-          </a:effectRef>
-          <a:fontRef idx="minor">
-            <a:schemeClr val="lt1"/>
-          </a:fontRef>
-        </p:style>
-        <p:txBody>
-          <a:bodyPr rtlCol="0" anchor="ctr"/>
-          <a:lstStyle/>
-          <a:p>
-            <a:pPr algn="ctr"/>
-          </a:p>
-        </p:txBody>
-      </p:sp>
-      <p:sp>
-        <p:nvSpPr>
-          <p:cNvPr id="3" name="Rounded Rectangle 2"/>
-          <p:cNvSpPr/>
-          <p:nvPr/>
-        </p:nvSpPr>
-        <p:spPr>
-          <a:xfrm>
-            <a:off x="640080" y="384048"/>
-            <a:ext cx="1691640" cy="457200"/>
-          </a:xfrm>
-          <a:prstGeom prst="roundRect">
-            <a:avLst/>
-          </a:prstGeom>
-          <a:solidFill>
-            <a:srgbClr val="2A2929"/>
-          </a:solidFill>
-          <a:ln>
-            <a:noFill/>
-          </a:ln>
-          <a:effectLst/>
-        </p:spPr>
-        <p:style>
-          <a:lnRef idx="1">
-            <a:schemeClr val="accent1"/>
-          </a:lnRef>
-          <a:fillRef idx="3">
-            <a:schemeClr val="accent1"/>
-          </a:fillRef>
-          <a:effectRef idx="2">
-            <a:schemeClr val="accent1"/>
-          </a:effectRef>
-          <a:fontRef idx="minor">
-            <a:schemeClr val="lt1"/>
-          </a:fontRef>
-        </p:style>
-        <p:txBody>
-          <a:bodyPr rtlCol="0" anchor="ctr"/>
-          <a:lstStyle/>
-          <a:p>
-            <a:pPr algn="ctr"/>
-            <a:r>
-              <a:rPr sz="1400" b="1" i="0">
-                <a:solidFill>
-                  <a:srgbClr val="FBB900"/>
-                </a:solidFill>
-                <a:latin typeface="Roboto"/>
-              </a:rPr>
-              <a:t>ACTIVITY</a:t>
-            </a:r>
-          </a:p>
-        </p:txBody>
-      </p:sp>
-      <p:sp>
-        <p:nvSpPr>
-          <p:cNvPr id="4" name="TextBox 3"/>
-          <p:cNvSpPr txBox="1"/>
-          <p:nvPr/>
-        </p:nvSpPr>
-        <p:spPr>
-          <a:xfrm>
-            <a:off x="2560320" y="310896"/>
-            <a:ext cx="8961120" cy="685800"/>
-          </a:xfrm>
-          <a:prstGeom prst="rect">
-            <a:avLst/>
-          </a:prstGeom>
-          <a:noFill/>
-        </p:spPr>
-        <p:txBody>
-          <a:bodyPr wrap="square" anchor="ctr" lIns="0" rIns="0" tIns="0" bIns="0">
-            <a:spAutoFit/>
-          </a:bodyPr>
-          <a:lstStyle/>
-          <a:p>
-            <a:r>
-              <a:rPr sz="2600" b="1" i="0">
-                <a:solidFill>
-                  <a:srgbClr val="FFFFFF"/>
-                </a:solidFill>
-                <a:latin typeface="Roboto"/>
-              </a:rPr>
-              <a:t>Configure DNS + test connectivity</a:t>
-            </a:r>
-          </a:p>
-        </p:txBody>
-      </p:sp>
-      <p:sp>
-        <p:nvSpPr>
-          <p:cNvPr id="5" name="TextBox 4"/>
-          <p:cNvSpPr txBox="1"/>
-          <p:nvPr/>
-        </p:nvSpPr>
-        <p:spPr>
-          <a:xfrm>
-            <a:off x="658368" y="1554480"/>
-            <a:ext cx="10881360" cy="4297680"/>
-          </a:xfrm>
-          <a:prstGeom prst="rect">
-            <a:avLst/>
-          </a:prstGeom>
-          <a:noFill/>
-        </p:spPr>
-        <p:txBody>
-          <a:bodyPr wrap="square" anchor="t" lIns="0" rIns="0" tIns="0" bIns="0">
-            <a:spAutoFit/>
-          </a:bodyPr>
-          <a:lstStyle/>
-          <a:p>
-            <a:pPr marL="0" indent="0">
-              <a:lnSpc>
-                <a:spcPct val="105000"/>
-              </a:lnSpc>
-              <a:spcBef>
-                <a:spcPts val="0"/>
-              </a:spcBef>
-              <a:spcAft>
-                <a:spcPts val="1000"/>
-              </a:spcAft>
-            </a:pPr>
-            <a:r>
-              <a:rPr sz="1700" b="1" i="0">
-                <a:solidFill>
-                  <a:srgbClr val="EDAB0C"/>
-                </a:solidFill>
-                <a:latin typeface="Roboto"/>
-              </a:rPr>
-              <a:t>■  </a:t>
-            </a:r>
-            <a:r>
-              <a:rPr sz="1700" b="0" i="0">
-                <a:solidFill>
-                  <a:srgbClr val="2A2929"/>
-                </a:solidFill>
-                <a:latin typeface="Roboto"/>
-              </a:rPr>
-              <a:t>In the lab, finish the network tier:</a:t>
-            </a:r>
-          </a:p>
-          <a:p>
-            <a:pPr marL="365760" indent="0">
-              <a:lnSpc>
-                <a:spcPct val="105000"/>
-              </a:lnSpc>
-              <a:spcBef>
-                <a:spcPts val="0"/>
-              </a:spcBef>
-              <a:spcAft>
-                <a:spcPts val="500"/>
-              </a:spcAft>
-            </a:pPr>
-            <a:r>
-              <a:rPr sz="1400" b="0" i="0">
-                <a:solidFill>
-                  <a:srgbClr val="7A7A7A"/>
-                </a:solidFill>
-                <a:latin typeface="Roboto"/>
-              </a:rPr>
-              <a:t>–  </a:t>
-            </a:r>
-            <a:r>
-              <a:rPr sz="1400" b="0" i="0">
-                <a:solidFill>
-                  <a:srgbClr val="2A2929"/>
-                </a:solidFill>
-                <a:latin typeface="Roboto"/>
-              </a:rPr>
-              <a:t>create the private hosted zone + record for the internal hostname (note the ACM cert)</a:t>
-            </a:r>
-          </a:p>
-          <a:p>
-            <a:pPr marL="365760" indent="0">
-              <a:lnSpc>
-                <a:spcPct val="105000"/>
-              </a:lnSpc>
-              <a:spcBef>
-                <a:spcPts val="0"/>
-              </a:spcBef>
-              <a:spcAft>
-                <a:spcPts val="500"/>
-              </a:spcAft>
-            </a:pPr>
-            <a:r>
-              <a:rPr sz="1400" b="0" i="0">
-                <a:solidFill>
-                  <a:srgbClr val="7A7A7A"/>
-                </a:solidFill>
-                <a:latin typeface="Roboto"/>
-              </a:rPr>
-              <a:t>–  </a:t>
-            </a:r>
-            <a:r>
-              <a:rPr sz="1400" b="0" i="0">
-                <a:solidFill>
-                  <a:srgbClr val="2A2929"/>
-                </a:solidFill>
-                <a:latin typeface="Roboto"/>
-              </a:rPr>
-              <a:t>run reachability tests for what exists so far; record the result and any fix you made</a:t>
-            </a:r>
-          </a:p>
-          <a:p>
-            <a:pPr marL="0" indent="0">
-              <a:lnSpc>
-                <a:spcPct val="105000"/>
-              </a:lnSpc>
-              <a:spcBef>
-                <a:spcPts val="0"/>
-              </a:spcBef>
-              <a:spcAft>
-                <a:spcPts val="1000"/>
-              </a:spcAft>
-            </a:pPr>
-            <a:r>
-              <a:rPr sz="1700" b="1" i="0">
-                <a:solidFill>
-                  <a:srgbClr val="EDAB0C"/>
-                </a:solidFill>
-                <a:latin typeface="Roboto"/>
-              </a:rPr>
-              <a:t>■  </a:t>
-            </a:r>
-            <a:r>
-              <a:rPr sz="1700" b="0" i="0">
-                <a:solidFill>
-                  <a:srgbClr val="2A2929"/>
-                </a:solidFill>
-                <a:latin typeface="Roboto"/>
-              </a:rPr>
-              <a:t>Capture the DNS config and the test result as evidence.</a:t>
-            </a:r>
-          </a:p>
-        </p:txBody>
-      </p:sp>
-      <p:sp>
-        <p:nvSpPr>
-          <p:cNvPr id="6" name="Rounded Rectangle 5"/>
-          <p:cNvSpPr/>
-          <p:nvPr/>
-        </p:nvSpPr>
-        <p:spPr>
-          <a:xfrm>
-            <a:off x="640080" y="5897880"/>
-            <a:ext cx="4023360" cy="457200"/>
-          </a:xfrm>
-          <a:prstGeom prst="roundRect">
-            <a:avLst/>
-          </a:prstGeom>
-          <a:solidFill>
-            <a:srgbClr val="F9F9F9"/>
-          </a:solidFill>
-          <a:ln w="12700">
-            <a:solidFill>
-              <a:srgbClr val="CCCCCC"/>
-            </a:solidFill>
-          </a:ln>
-          <a:effectLst/>
-        </p:spPr>
-        <p:style>
-          <a:lnRef idx="1">
-            <a:schemeClr val="accent1"/>
-          </a:lnRef>
-          <a:fillRef idx="3">
-            <a:schemeClr val="accent1"/>
-          </a:fillRef>
-          <a:effectRef idx="2">
-            <a:schemeClr val="accent1"/>
-          </a:effectRef>
-          <a:fontRef idx="minor">
-            <a:schemeClr val="lt1"/>
-          </a:fontRef>
-        </p:style>
-        <p:txBody>
-          <a:bodyPr rtlCol="0" anchor="ctr"/>
-          <a:lstStyle/>
-          <a:p>
-            <a:pPr algn="ctr"/>
-          </a:p>
-        </p:txBody>
-      </p:sp>
-      <p:sp>
-        <p:nvSpPr>
-          <p:cNvPr id="7" name="TextBox 6"/>
-          <p:cNvSpPr txBox="1"/>
-          <p:nvPr/>
-        </p:nvSpPr>
-        <p:spPr>
-          <a:xfrm>
-            <a:off x="822960" y="5943600"/>
-            <a:ext cx="3657600" cy="365760"/>
-          </a:xfrm>
-          <a:prstGeom prst="rect">
-            <a:avLst/>
-          </a:prstGeom>
-          <a:noFill/>
-        </p:spPr>
-        <p:txBody>
-          <a:bodyPr wrap="square" anchor="ctr" lIns="0" rIns="0" tIns="0" bIns="0">
-            <a:spAutoFit/>
-          </a:bodyPr>
-          <a:lstStyle/>
-          <a:p>
-            <a:r>
-              <a:rPr sz="1500" b="1" i="0">
-                <a:solidFill>
-                  <a:srgbClr val="2A2929"/>
-                </a:solidFill>
-                <a:latin typeface="Roboto"/>
-              </a:rPr>
-              <a:t>⏱  ~15 min</a:t>
-            </a:r>
-          </a:p>
-        </p:txBody>
-      </p:sp>
-      <p:sp>
-        <p:nvSpPr>
-          <p:cNvPr id="8" name="Rectangle 7"/>
-          <p:cNvSpPr/>
-          <p:nvPr/>
-        </p:nvSpPr>
-        <p:spPr>
-          <a:xfrm>
-            <a:off x="0" y="6565392"/>
-            <a:ext cx="12191695" cy="38100"/>
-          </a:xfrm>
-          <a:prstGeom prst="rect">
-            <a:avLst/>
-          </a:prstGeom>
-          <a:solidFill>
-            <a:srgbClr val="205F61"/>
-          </a:solidFill>
-          <a:ln>
-            <a:noFill/>
-          </a:ln>
-          <a:effectLst/>
-        </p:spPr>
-        <p:style>
-          <a:lnRef idx="1">
-            <a:schemeClr val="accent1"/>
-          </a:lnRef>
-          <a:fillRef idx="3">
-            <a:schemeClr val="accent1"/>
-          </a:fillRef>
-          <a:effectRef idx="2">
-            <a:schemeClr val="accent1"/>
-          </a:effectRef>
-          <a:fontRef idx="minor">
-            <a:schemeClr val="lt1"/>
-          </a:fontRef>
-        </p:style>
-        <p:txBody>
-          <a:bodyPr rtlCol="0" anchor="ctr"/>
-          <a:lstStyle/>
-          <a:p>
-            <a:pPr algn="ctr"/>
-          </a:p>
-        </p:txBody>
-      </p:sp>
-      <p:sp>
-        <p:nvSpPr>
-          <p:cNvPr id="9" name="TextBox 8"/>
-          <p:cNvSpPr txBox="1"/>
-          <p:nvPr/>
-        </p:nvSpPr>
-        <p:spPr>
-          <a:xfrm>
-            <a:off x="502920" y="6400800"/>
-            <a:ext cx="5486400" cy="320040"/>
-          </a:xfrm>
-          <a:prstGeom prst="rect">
-            <a:avLst/>
-          </a:prstGeom>
-          <a:noFill/>
-        </p:spPr>
-        <p:txBody>
-          <a:bodyPr wrap="square" anchor="t" lIns="0" rIns="0" tIns="0" bIns="0">
-            <a:spAutoFit/>
-          </a:bodyPr>
-          <a:lstStyle/>
-          <a:p>
-            <a:r>
-              <a:rPr sz="1100" b="1" i="0">
-                <a:solidFill>
-                  <a:srgbClr val="2A2929"/>
-                </a:solidFill>
-                <a:latin typeface="Roboto"/>
-              </a:rPr>
-              <a:t>Kangan </a:t>
-            </a:r>
-            <a:r>
-              <a:rPr sz="1100" b="1" i="0">
-                <a:solidFill>
-                  <a:srgbClr val="D68E10"/>
-                </a:solidFill>
-                <a:latin typeface="Roboto"/>
-              </a:rPr>
-              <a:t>Institute</a:t>
-            </a:r>
-          </a:p>
-        </p:txBody>
-      </p:sp>
-      <p:sp>
-        <p:nvSpPr>
-          <p:cNvPr id="10" name="TextBox 9"/>
-          <p:cNvSpPr txBox="1"/>
-          <p:nvPr/>
-        </p:nvSpPr>
-        <p:spPr>
-          <a:xfrm>
-            <a:off x="10515600" y="6400800"/>
-            <a:ext cx="1188720" cy="320040"/>
-          </a:xfrm>
-          <a:prstGeom prst="rect">
-            <a:avLst/>
-          </a:prstGeom>
-          <a:noFill/>
-        </p:spPr>
-        <p:txBody>
-          <a:bodyPr wrap="square" anchor="t" lIns="0" rIns="0" tIns="0" bIns="0">
-            <a:spAutoFit/>
-          </a:bodyPr>
-          <a:lstStyle/>
-          <a:p>
-            <a:pPr algn="r"/>
-            <a:r>
-              <a:rPr sz="1100" b="0" i="0">
-                <a:solidFill>
-                  <a:srgbClr val="7A7A7A"/>
-                </a:solidFill>
-                <a:latin typeface="Roboto"/>
-              </a:rPr>
-              <a:t>17</a:t>
-            </a:r>
-          </a:p>
-        </p:txBody>
-      </p:sp>
-    </p:spTree>
-  </p:cSld>
-  <p:clrMapOvr>
-    <a:masterClrMapping/>
-  </p:clrMapOvr>
-</p:sld>
-</file>
-
-<file path=ppt/slides/slide22.xml><?xml version="1.0" encoding="utf-8"?>
 <p:sld xmlns:a="http://schemas.openxmlformats.org/drawingml/2006/main" xmlns:p="http://schemas.openxmlformats.org/presentationml/2006/main" xmlns:r="http://schemas.openxmlformats.org/officeDocument/2006/relationships">
   <p:cSld>
     <p:bg>
@@ -11371,7 +8645,7 @@
                 </a:solidFill>
                 <a:latin typeface="Roboto"/>
               </a:rPr>
-              <a:t>Section 3 · Names &amp; connectivity</a:t>
+              <a:t>Section 3 · Identity for a server</a:t>
             </a:r>
           </a:p>
         </p:txBody>
@@ -11544,7 +8818,7 @@
                 </a:solidFill>
                 <a:latin typeface="Roboto"/>
               </a:rPr>
-              <a:t>DNS maps names → addresses; use a Route 53 private hosted zone for an internal name.</a:t>
+              <a:t>A server assumes a role; no credentials are stored on it.</a:t>
             </a:r>
           </a:p>
         </p:txBody>
@@ -11673,7 +8947,7 @@
                 </a:solidFill>
                 <a:latin typeface="Roboto"/>
               </a:rPr>
-              <a:t>Always test reachability and fix errors — flow logs + Reachability Analyzer show why traffic is blocked.</a:t>
+              <a:t>Roles are attached when the server is defined.</a:t>
             </a:r>
           </a:p>
         </p:txBody>
@@ -11802,7 +9076,7 @@
                 </a:solidFill>
                 <a:latin typeface="Roboto"/>
               </a:rPr>
-              <a:t>The network tier is now ready for the workload to move in.</a:t>
+              <a:t>Reading an inherited role's permissions is part of the job.</a:t>
             </a:r>
           </a:p>
         </p:txBody>
@@ -11924,7 +9198,7 @@
                 </a:solidFill>
                 <a:latin typeface="Roboto"/>
               </a:rPr>
-              <a:t>18</a:t>
+              <a:t>17</a:t>
             </a:r>
           </a:p>
         </p:txBody>
@@ -11937,894 +9211,7 @@
 </p:sld>
 </file>
 
-<file path=ppt/slides/slide23.xml><?xml version="1.0" encoding="utf-8"?>
-<p:sld xmlns:a="http://schemas.openxmlformats.org/drawingml/2006/main" xmlns:p="http://schemas.openxmlformats.org/presentationml/2006/main" xmlns:r="http://schemas.openxmlformats.org/officeDocument/2006/relationships">
-  <p:cSld>
-    <p:bg>
-      <p:bgPr>
-        <a:solidFill>
-          <a:srgbClr val="F9F9F9"/>
-        </a:solidFill>
-        <a:effectLst/>
-      </p:bgPr>
-    </p:bg>
-    <p:spTree>
-      <p:nvGrpSpPr>
-        <p:cNvPr id="1" name=""/>
-        <p:cNvGrpSpPr/>
-        <p:nvPr/>
-      </p:nvGrpSpPr>
-      <p:grpSpPr/>
-      <p:sp>
-        <p:nvSpPr>
-          <p:cNvPr id="2" name="TextBox 1"/>
-          <p:cNvSpPr txBox="1"/>
-          <p:nvPr/>
-        </p:nvSpPr>
-        <p:spPr>
-          <a:xfrm>
-            <a:off x="640080" y="548640"/>
-            <a:ext cx="10881360" cy="1097280"/>
-          </a:xfrm>
-          <a:prstGeom prst="rect">
-            <a:avLst/>
-          </a:prstGeom>
-          <a:noFill/>
-        </p:spPr>
-        <p:txBody>
-          <a:bodyPr wrap="square" anchor="t" lIns="0" rIns="0" tIns="0" bIns="0">
-            <a:spAutoFit/>
-          </a:bodyPr>
-          <a:lstStyle/>
-          <a:p>
-            <a:r>
-              <a:rPr sz="3200" b="1" i="0">
-                <a:solidFill>
-                  <a:srgbClr val="2A2929"/>
-                </a:solidFill>
-                <a:latin typeface="Roboto"/>
-              </a:rPr>
-              <a:t>Key takeaways</a:t>
-            </a:r>
-          </a:p>
-          <a:p>
-            <a:pPr>
-              <a:spcBef>
-                <a:spcPts val="200"/>
-              </a:spcBef>
-            </a:pPr>
-            <a:r>
-              <a:rPr sz="1800" b="1" i="0">
-                <a:solidFill>
-                  <a:srgbClr val="205F61"/>
-                </a:solidFill>
-                <a:latin typeface="Roboto"/>
-              </a:rPr>
-              <a:t>Topic 7 · Key takeaways</a:t>
-            </a:r>
-          </a:p>
-        </p:txBody>
-      </p:sp>
-      <p:sp>
-        <p:nvSpPr>
-          <p:cNvPr id="3" name="Rectangle 2"/>
-          <p:cNvSpPr/>
-          <p:nvPr/>
-        </p:nvSpPr>
-        <p:spPr>
-          <a:xfrm>
-            <a:off x="658368" y="1600200"/>
-            <a:ext cx="1463040" cy="50800"/>
-          </a:xfrm>
-          <a:prstGeom prst="rect">
-            <a:avLst/>
-          </a:prstGeom>
-          <a:solidFill>
-            <a:srgbClr val="205F61"/>
-          </a:solidFill>
-          <a:ln>
-            <a:noFill/>
-          </a:ln>
-          <a:effectLst/>
-        </p:spPr>
-        <p:style>
-          <a:lnRef idx="1">
-            <a:schemeClr val="accent1"/>
-          </a:lnRef>
-          <a:fillRef idx="3">
-            <a:schemeClr val="accent1"/>
-          </a:fillRef>
-          <a:effectRef idx="2">
-            <a:schemeClr val="accent1"/>
-          </a:effectRef>
-          <a:fontRef idx="minor">
-            <a:schemeClr val="lt1"/>
-          </a:fontRef>
-        </p:style>
-        <p:txBody>
-          <a:bodyPr rtlCol="0" anchor="ctr"/>
-          <a:lstStyle/>
-          <a:p>
-            <a:pPr algn="ctr"/>
-          </a:p>
-        </p:txBody>
-      </p:sp>
-      <p:sp>
-        <p:nvSpPr>
-          <p:cNvPr id="4" name="Rectangle 3"/>
-          <p:cNvSpPr/>
-          <p:nvPr/>
-        </p:nvSpPr>
-        <p:spPr>
-          <a:xfrm>
-            <a:off x="640080" y="1965960"/>
-            <a:ext cx="10927080" cy="841248"/>
-          </a:xfrm>
-          <a:prstGeom prst="rect">
-            <a:avLst/>
-          </a:prstGeom>
-          <a:solidFill>
-            <a:srgbClr val="FFFFFF"/>
-          </a:solidFill>
-          <a:ln w="12700">
-            <a:solidFill>
-              <a:srgbClr val="CCCCCC"/>
-            </a:solidFill>
-          </a:ln>
-          <a:effectLst/>
-        </p:spPr>
-        <p:style>
-          <a:lnRef idx="1">
-            <a:schemeClr val="accent1"/>
-          </a:lnRef>
-          <a:fillRef idx="3">
-            <a:schemeClr val="accent1"/>
-          </a:fillRef>
-          <a:effectRef idx="2">
-            <a:schemeClr val="accent1"/>
-          </a:effectRef>
-          <a:fontRef idx="minor">
-            <a:schemeClr val="lt1"/>
-          </a:fontRef>
-        </p:style>
-        <p:txBody>
-          <a:bodyPr rtlCol="0" anchor="ctr"/>
-          <a:lstStyle/>
-          <a:p>
-            <a:pPr algn="ctr"/>
-          </a:p>
-        </p:txBody>
-      </p:sp>
-      <p:sp>
-        <p:nvSpPr>
-          <p:cNvPr id="5" name="Rectangle 4"/>
-          <p:cNvSpPr/>
-          <p:nvPr/>
-        </p:nvSpPr>
-        <p:spPr>
-          <a:xfrm>
-            <a:off x="640080" y="1965960"/>
-            <a:ext cx="109728" cy="841248"/>
-          </a:xfrm>
-          <a:prstGeom prst="rect">
-            <a:avLst/>
-          </a:prstGeom>
-          <a:solidFill>
-            <a:srgbClr val="205F61"/>
-          </a:solidFill>
-          <a:ln>
-            <a:noFill/>
-          </a:ln>
-          <a:effectLst/>
-        </p:spPr>
-        <p:style>
-          <a:lnRef idx="1">
-            <a:schemeClr val="accent1"/>
-          </a:lnRef>
-          <a:fillRef idx="3">
-            <a:schemeClr val="accent1"/>
-          </a:fillRef>
-          <a:effectRef idx="2">
-            <a:schemeClr val="accent1"/>
-          </a:effectRef>
-          <a:fontRef idx="minor">
-            <a:schemeClr val="lt1"/>
-          </a:fontRef>
-        </p:style>
-        <p:txBody>
-          <a:bodyPr rtlCol="0" anchor="ctr"/>
-          <a:lstStyle/>
-          <a:p>
-            <a:pPr algn="ctr"/>
-          </a:p>
-        </p:txBody>
-      </p:sp>
-      <p:sp>
-        <p:nvSpPr>
-          <p:cNvPr id="6" name="TextBox 5"/>
-          <p:cNvSpPr txBox="1"/>
-          <p:nvPr/>
-        </p:nvSpPr>
-        <p:spPr>
-          <a:xfrm>
-            <a:off x="960120" y="1965960"/>
-            <a:ext cx="10424160" cy="841248"/>
-          </a:xfrm>
-          <a:prstGeom prst="rect">
-            <a:avLst/>
-          </a:prstGeom>
-          <a:noFill/>
-        </p:spPr>
-        <p:txBody>
-          <a:bodyPr wrap="square" anchor="ctr" lIns="0" rIns="0" tIns="0" bIns="0">
-            <a:spAutoFit/>
-          </a:bodyPr>
-          <a:lstStyle/>
-          <a:p>
-            <a:pPr>
-              <a:lnSpc>
-                <a:spcPct val="100000"/>
-              </a:lnSpc>
-            </a:pPr>
-            <a:r>
-              <a:rPr sz="1700" b="0" i="0">
-                <a:solidFill>
-                  <a:srgbClr val="2A2929"/>
-                </a:solidFill>
-                <a:latin typeface="Roboto"/>
-              </a:rPr>
-              <a:t>A VPC is your isolated network, split into tiered subnets across an AZ.</a:t>
-            </a:r>
-          </a:p>
-        </p:txBody>
-      </p:sp>
-      <p:sp>
-        <p:nvSpPr>
-          <p:cNvPr id="7" name="Rectangle 6"/>
-          <p:cNvSpPr/>
-          <p:nvPr/>
-        </p:nvSpPr>
-        <p:spPr>
-          <a:xfrm>
-            <a:off x="640080" y="2916936"/>
-            <a:ext cx="10927080" cy="841248"/>
-          </a:xfrm>
-          <a:prstGeom prst="rect">
-            <a:avLst/>
-          </a:prstGeom>
-          <a:solidFill>
-            <a:srgbClr val="FFFFFF"/>
-          </a:solidFill>
-          <a:ln w="12700">
-            <a:solidFill>
-              <a:srgbClr val="CCCCCC"/>
-            </a:solidFill>
-          </a:ln>
-          <a:effectLst/>
-        </p:spPr>
-        <p:style>
-          <a:lnRef idx="1">
-            <a:schemeClr val="accent1"/>
-          </a:lnRef>
-          <a:fillRef idx="3">
-            <a:schemeClr val="accent1"/>
-          </a:fillRef>
-          <a:effectRef idx="2">
-            <a:schemeClr val="accent1"/>
-          </a:effectRef>
-          <a:fontRef idx="minor">
-            <a:schemeClr val="lt1"/>
-          </a:fontRef>
-        </p:style>
-        <p:txBody>
-          <a:bodyPr rtlCol="0" anchor="ctr"/>
-          <a:lstStyle/>
-          <a:p>
-            <a:pPr algn="ctr"/>
-          </a:p>
-        </p:txBody>
-      </p:sp>
-      <p:sp>
-        <p:nvSpPr>
-          <p:cNvPr id="8" name="Rectangle 7"/>
-          <p:cNvSpPr/>
-          <p:nvPr/>
-        </p:nvSpPr>
-        <p:spPr>
-          <a:xfrm>
-            <a:off x="640080" y="2916936"/>
-            <a:ext cx="109728" cy="841248"/>
-          </a:xfrm>
-          <a:prstGeom prst="rect">
-            <a:avLst/>
-          </a:prstGeom>
-          <a:solidFill>
-            <a:srgbClr val="205F61"/>
-          </a:solidFill>
-          <a:ln>
-            <a:noFill/>
-          </a:ln>
-          <a:effectLst/>
-        </p:spPr>
-        <p:style>
-          <a:lnRef idx="1">
-            <a:schemeClr val="accent1"/>
-          </a:lnRef>
-          <a:fillRef idx="3">
-            <a:schemeClr val="accent1"/>
-          </a:fillRef>
-          <a:effectRef idx="2">
-            <a:schemeClr val="accent1"/>
-          </a:effectRef>
-          <a:fontRef idx="minor">
-            <a:schemeClr val="lt1"/>
-          </a:fontRef>
-        </p:style>
-        <p:txBody>
-          <a:bodyPr rtlCol="0" anchor="ctr"/>
-          <a:lstStyle/>
-          <a:p>
-            <a:pPr algn="ctr"/>
-          </a:p>
-        </p:txBody>
-      </p:sp>
-      <p:sp>
-        <p:nvSpPr>
-          <p:cNvPr id="9" name="TextBox 8"/>
-          <p:cNvSpPr txBox="1"/>
-          <p:nvPr/>
-        </p:nvSpPr>
-        <p:spPr>
-          <a:xfrm>
-            <a:off x="960120" y="2916936"/>
-            <a:ext cx="10424160" cy="841248"/>
-          </a:xfrm>
-          <a:prstGeom prst="rect">
-            <a:avLst/>
-          </a:prstGeom>
-          <a:noFill/>
-        </p:spPr>
-        <p:txBody>
-          <a:bodyPr wrap="square" anchor="ctr" lIns="0" rIns="0" tIns="0" bIns="0">
-            <a:spAutoFit/>
-          </a:bodyPr>
-          <a:lstStyle/>
-          <a:p>
-            <a:pPr>
-              <a:lnSpc>
-                <a:spcPct val="100000"/>
-              </a:lnSpc>
-            </a:pPr>
-            <a:r>
-              <a:rPr sz="1700" b="0" i="0">
-                <a:solidFill>
-                  <a:srgbClr val="2A2929"/>
-                </a:solidFill>
-                <a:latin typeface="Roboto"/>
-              </a:rPr>
-              <a:t>Routing + IGW/NAT control internet reach — this design is egress-only.</a:t>
-            </a:r>
-          </a:p>
-        </p:txBody>
-      </p:sp>
-      <p:sp>
-        <p:nvSpPr>
-          <p:cNvPr id="10" name="Rectangle 9"/>
-          <p:cNvSpPr/>
-          <p:nvPr/>
-        </p:nvSpPr>
-        <p:spPr>
-          <a:xfrm>
-            <a:off x="640080" y="3867912"/>
-            <a:ext cx="10927080" cy="841248"/>
-          </a:xfrm>
-          <a:prstGeom prst="rect">
-            <a:avLst/>
-          </a:prstGeom>
-          <a:solidFill>
-            <a:srgbClr val="FFFFFF"/>
-          </a:solidFill>
-          <a:ln w="12700">
-            <a:solidFill>
-              <a:srgbClr val="CCCCCC"/>
-            </a:solidFill>
-          </a:ln>
-          <a:effectLst/>
-        </p:spPr>
-        <p:style>
-          <a:lnRef idx="1">
-            <a:schemeClr val="accent1"/>
-          </a:lnRef>
-          <a:fillRef idx="3">
-            <a:schemeClr val="accent1"/>
-          </a:fillRef>
-          <a:effectRef idx="2">
-            <a:schemeClr val="accent1"/>
-          </a:effectRef>
-          <a:fontRef idx="minor">
-            <a:schemeClr val="lt1"/>
-          </a:fontRef>
-        </p:style>
-        <p:txBody>
-          <a:bodyPr rtlCol="0" anchor="ctr"/>
-          <a:lstStyle/>
-          <a:p>
-            <a:pPr algn="ctr"/>
-          </a:p>
-        </p:txBody>
-      </p:sp>
-      <p:sp>
-        <p:nvSpPr>
-          <p:cNvPr id="11" name="Rectangle 10"/>
-          <p:cNvSpPr/>
-          <p:nvPr/>
-        </p:nvSpPr>
-        <p:spPr>
-          <a:xfrm>
-            <a:off x="640080" y="3867912"/>
-            <a:ext cx="109728" cy="841248"/>
-          </a:xfrm>
-          <a:prstGeom prst="rect">
-            <a:avLst/>
-          </a:prstGeom>
-          <a:solidFill>
-            <a:srgbClr val="205F61"/>
-          </a:solidFill>
-          <a:ln>
-            <a:noFill/>
-          </a:ln>
-          <a:effectLst/>
-        </p:spPr>
-        <p:style>
-          <a:lnRef idx="1">
-            <a:schemeClr val="accent1"/>
-          </a:lnRef>
-          <a:fillRef idx="3">
-            <a:schemeClr val="accent1"/>
-          </a:fillRef>
-          <a:effectRef idx="2">
-            <a:schemeClr val="accent1"/>
-          </a:effectRef>
-          <a:fontRef idx="minor">
-            <a:schemeClr val="lt1"/>
-          </a:fontRef>
-        </p:style>
-        <p:txBody>
-          <a:bodyPr rtlCol="0" anchor="ctr"/>
-          <a:lstStyle/>
-          <a:p>
-            <a:pPr algn="ctr"/>
-          </a:p>
-        </p:txBody>
-      </p:sp>
-      <p:sp>
-        <p:nvSpPr>
-          <p:cNvPr id="12" name="TextBox 11"/>
-          <p:cNvSpPr txBox="1"/>
-          <p:nvPr/>
-        </p:nvSpPr>
-        <p:spPr>
-          <a:xfrm>
-            <a:off x="960120" y="3867912"/>
-            <a:ext cx="10424160" cy="841248"/>
-          </a:xfrm>
-          <a:prstGeom prst="rect">
-            <a:avLst/>
-          </a:prstGeom>
-          <a:noFill/>
-        </p:spPr>
-        <p:txBody>
-          <a:bodyPr wrap="square" anchor="ctr" lIns="0" rIns="0" tIns="0" bIns="0">
-            <a:spAutoFit/>
-          </a:bodyPr>
-          <a:lstStyle/>
-          <a:p>
-            <a:pPr>
-              <a:lnSpc>
-                <a:spcPct val="100000"/>
-              </a:lnSpc>
-            </a:pPr>
-            <a:r>
-              <a:rPr sz="1700" b="0" i="0">
-                <a:solidFill>
-                  <a:srgbClr val="2A2929"/>
-                </a:solidFill>
-                <a:latin typeface="Roboto"/>
-              </a:rPr>
-              <a:t>Security groups are stateful, least-privilege firewalls, chained tier-to-tier.</a:t>
-            </a:r>
-          </a:p>
-        </p:txBody>
-      </p:sp>
-      <p:sp>
-        <p:nvSpPr>
-          <p:cNvPr id="13" name="Rectangle 12"/>
-          <p:cNvSpPr/>
-          <p:nvPr/>
-        </p:nvSpPr>
-        <p:spPr>
-          <a:xfrm>
-            <a:off x="640080" y="4818888"/>
-            <a:ext cx="10927080" cy="841248"/>
-          </a:xfrm>
-          <a:prstGeom prst="rect">
-            <a:avLst/>
-          </a:prstGeom>
-          <a:solidFill>
-            <a:srgbClr val="FFFFFF"/>
-          </a:solidFill>
-          <a:ln w="12700">
-            <a:solidFill>
-              <a:srgbClr val="CCCCCC"/>
-            </a:solidFill>
-          </a:ln>
-          <a:effectLst/>
-        </p:spPr>
-        <p:style>
-          <a:lnRef idx="1">
-            <a:schemeClr val="accent1"/>
-          </a:lnRef>
-          <a:fillRef idx="3">
-            <a:schemeClr val="accent1"/>
-          </a:fillRef>
-          <a:effectRef idx="2">
-            <a:schemeClr val="accent1"/>
-          </a:effectRef>
-          <a:fontRef idx="minor">
-            <a:schemeClr val="lt1"/>
-          </a:fontRef>
-        </p:style>
-        <p:txBody>
-          <a:bodyPr rtlCol="0" anchor="ctr"/>
-          <a:lstStyle/>
-          <a:p>
-            <a:pPr algn="ctr"/>
-          </a:p>
-        </p:txBody>
-      </p:sp>
-      <p:sp>
-        <p:nvSpPr>
-          <p:cNvPr id="14" name="Rectangle 13"/>
-          <p:cNvSpPr/>
-          <p:nvPr/>
-        </p:nvSpPr>
-        <p:spPr>
-          <a:xfrm>
-            <a:off x="640080" y="4818888"/>
-            <a:ext cx="109728" cy="841248"/>
-          </a:xfrm>
-          <a:prstGeom prst="rect">
-            <a:avLst/>
-          </a:prstGeom>
-          <a:solidFill>
-            <a:srgbClr val="205F61"/>
-          </a:solidFill>
-          <a:ln>
-            <a:noFill/>
-          </a:ln>
-          <a:effectLst/>
-        </p:spPr>
-        <p:style>
-          <a:lnRef idx="1">
-            <a:schemeClr val="accent1"/>
-          </a:lnRef>
-          <a:fillRef idx="3">
-            <a:schemeClr val="accent1"/>
-          </a:fillRef>
-          <a:effectRef idx="2">
-            <a:schemeClr val="accent1"/>
-          </a:effectRef>
-          <a:fontRef idx="minor">
-            <a:schemeClr val="lt1"/>
-          </a:fontRef>
-        </p:style>
-        <p:txBody>
-          <a:bodyPr rtlCol="0" anchor="ctr"/>
-          <a:lstStyle/>
-          <a:p>
-            <a:pPr algn="ctr"/>
-          </a:p>
-        </p:txBody>
-      </p:sp>
-      <p:sp>
-        <p:nvSpPr>
-          <p:cNvPr id="15" name="TextBox 14"/>
-          <p:cNvSpPr txBox="1"/>
-          <p:nvPr/>
-        </p:nvSpPr>
-        <p:spPr>
-          <a:xfrm>
-            <a:off x="960120" y="4818888"/>
-            <a:ext cx="10424160" cy="841248"/>
-          </a:xfrm>
-          <a:prstGeom prst="rect">
-            <a:avLst/>
-          </a:prstGeom>
-          <a:noFill/>
-        </p:spPr>
-        <p:txBody>
-          <a:bodyPr wrap="square" anchor="ctr" lIns="0" rIns="0" tIns="0" bIns="0">
-            <a:spAutoFit/>
-          </a:bodyPr>
-          <a:lstStyle/>
-          <a:p>
-            <a:pPr>
-              <a:lnSpc>
-                <a:spcPct val="100000"/>
-              </a:lnSpc>
-            </a:pPr>
-            <a:r>
-              <a:rPr sz="1700" b="0" i="0">
-                <a:solidFill>
-                  <a:srgbClr val="2A2929"/>
-                </a:solidFill>
-                <a:latin typeface="Roboto"/>
-              </a:rPr>
-              <a:t>DNS makes resources findable by name — a private hosted zone here.</a:t>
-            </a:r>
-          </a:p>
-        </p:txBody>
-      </p:sp>
-      <p:sp>
-        <p:nvSpPr>
-          <p:cNvPr id="16" name="Rectangle 15"/>
-          <p:cNvSpPr/>
-          <p:nvPr/>
-        </p:nvSpPr>
-        <p:spPr>
-          <a:xfrm>
-            <a:off x="640080" y="5769864"/>
-            <a:ext cx="10927080" cy="841248"/>
-          </a:xfrm>
-          <a:prstGeom prst="rect">
-            <a:avLst/>
-          </a:prstGeom>
-          <a:solidFill>
-            <a:srgbClr val="FFFFFF"/>
-          </a:solidFill>
-          <a:ln w="12700">
-            <a:solidFill>
-              <a:srgbClr val="CCCCCC"/>
-            </a:solidFill>
-          </a:ln>
-          <a:effectLst/>
-        </p:spPr>
-        <p:style>
-          <a:lnRef idx="1">
-            <a:schemeClr val="accent1"/>
-          </a:lnRef>
-          <a:fillRef idx="3">
-            <a:schemeClr val="accent1"/>
-          </a:fillRef>
-          <a:effectRef idx="2">
-            <a:schemeClr val="accent1"/>
-          </a:effectRef>
-          <a:fontRef idx="minor">
-            <a:schemeClr val="lt1"/>
-          </a:fontRef>
-        </p:style>
-        <p:txBody>
-          <a:bodyPr rtlCol="0" anchor="ctr"/>
-          <a:lstStyle/>
-          <a:p>
-            <a:pPr algn="ctr"/>
-          </a:p>
-        </p:txBody>
-      </p:sp>
-      <p:sp>
-        <p:nvSpPr>
-          <p:cNvPr id="17" name="Rectangle 16"/>
-          <p:cNvSpPr/>
-          <p:nvPr/>
-        </p:nvSpPr>
-        <p:spPr>
-          <a:xfrm>
-            <a:off x="640080" y="5769864"/>
-            <a:ext cx="109728" cy="841248"/>
-          </a:xfrm>
-          <a:prstGeom prst="rect">
-            <a:avLst/>
-          </a:prstGeom>
-          <a:solidFill>
-            <a:srgbClr val="205F61"/>
-          </a:solidFill>
-          <a:ln>
-            <a:noFill/>
-          </a:ln>
-          <a:effectLst/>
-        </p:spPr>
-        <p:style>
-          <a:lnRef idx="1">
-            <a:schemeClr val="accent1"/>
-          </a:lnRef>
-          <a:fillRef idx="3">
-            <a:schemeClr val="accent1"/>
-          </a:fillRef>
-          <a:effectRef idx="2">
-            <a:schemeClr val="accent1"/>
-          </a:effectRef>
-          <a:fontRef idx="minor">
-            <a:schemeClr val="lt1"/>
-          </a:fontRef>
-        </p:style>
-        <p:txBody>
-          <a:bodyPr rtlCol="0" anchor="ctr"/>
-          <a:lstStyle/>
-          <a:p>
-            <a:pPr algn="ctr"/>
-          </a:p>
-        </p:txBody>
-      </p:sp>
-      <p:sp>
-        <p:nvSpPr>
-          <p:cNvPr id="18" name="TextBox 17"/>
-          <p:cNvSpPr txBox="1"/>
-          <p:nvPr/>
-        </p:nvSpPr>
-        <p:spPr>
-          <a:xfrm>
-            <a:off x="960120" y="5769864"/>
-            <a:ext cx="10424160" cy="841248"/>
-          </a:xfrm>
-          <a:prstGeom prst="rect">
-            <a:avLst/>
-          </a:prstGeom>
-          <a:noFill/>
-        </p:spPr>
-        <p:txBody>
-          <a:bodyPr wrap="square" anchor="ctr" lIns="0" rIns="0" tIns="0" bIns="0">
-            <a:spAutoFit/>
-          </a:bodyPr>
-          <a:lstStyle/>
-          <a:p>
-            <a:pPr>
-              <a:lnSpc>
-                <a:spcPct val="100000"/>
-              </a:lnSpc>
-            </a:pPr>
-            <a:r>
-              <a:rPr sz="1700" b="0" i="0">
-                <a:solidFill>
-                  <a:srgbClr val="2A2929"/>
-                </a:solidFill>
-                <a:latin typeface="Roboto"/>
-              </a:rPr>
-              <a:t>Build to the supplied design, test it, and evidence everything.</a:t>
-            </a:r>
-          </a:p>
-        </p:txBody>
-      </p:sp>
-      <p:sp>
-        <p:nvSpPr>
-          <p:cNvPr id="19" name="Rectangle 18"/>
-          <p:cNvSpPr/>
-          <p:nvPr/>
-        </p:nvSpPr>
-        <p:spPr>
-          <a:xfrm>
-            <a:off x="0" y="6565392"/>
-            <a:ext cx="12191695" cy="38100"/>
-          </a:xfrm>
-          <a:prstGeom prst="rect">
-            <a:avLst/>
-          </a:prstGeom>
-          <a:solidFill>
-            <a:srgbClr val="205F61"/>
-          </a:solidFill>
-          <a:ln>
-            <a:noFill/>
-          </a:ln>
-          <a:effectLst/>
-        </p:spPr>
-        <p:style>
-          <a:lnRef idx="1">
-            <a:schemeClr val="accent1"/>
-          </a:lnRef>
-          <a:fillRef idx="3">
-            <a:schemeClr val="accent1"/>
-          </a:fillRef>
-          <a:effectRef idx="2">
-            <a:schemeClr val="accent1"/>
-          </a:effectRef>
-          <a:fontRef idx="minor">
-            <a:schemeClr val="lt1"/>
-          </a:fontRef>
-        </p:style>
-        <p:txBody>
-          <a:bodyPr rtlCol="0" anchor="ctr"/>
-          <a:lstStyle/>
-          <a:p>
-            <a:pPr algn="ctr"/>
-          </a:p>
-        </p:txBody>
-      </p:sp>
-      <p:sp>
-        <p:nvSpPr>
-          <p:cNvPr id="20" name="TextBox 19"/>
-          <p:cNvSpPr txBox="1"/>
-          <p:nvPr/>
-        </p:nvSpPr>
-        <p:spPr>
-          <a:xfrm>
-            <a:off x="502920" y="6400800"/>
-            <a:ext cx="5486400" cy="320040"/>
-          </a:xfrm>
-          <a:prstGeom prst="rect">
-            <a:avLst/>
-          </a:prstGeom>
-          <a:noFill/>
-        </p:spPr>
-        <p:txBody>
-          <a:bodyPr wrap="square" anchor="t" lIns="0" rIns="0" tIns="0" bIns="0">
-            <a:spAutoFit/>
-          </a:bodyPr>
-          <a:lstStyle/>
-          <a:p>
-            <a:r>
-              <a:rPr sz="1100" b="1" i="0">
-                <a:solidFill>
-                  <a:srgbClr val="2A2929"/>
-                </a:solidFill>
-                <a:latin typeface="Roboto"/>
-              </a:rPr>
-              <a:t>Kangan </a:t>
-            </a:r>
-            <a:r>
-              <a:rPr sz="1100" b="1" i="0">
-                <a:solidFill>
-                  <a:srgbClr val="D68E10"/>
-                </a:solidFill>
-                <a:latin typeface="Roboto"/>
-              </a:rPr>
-              <a:t>Institute</a:t>
-            </a:r>
-          </a:p>
-        </p:txBody>
-      </p:sp>
-      <p:sp>
-        <p:nvSpPr>
-          <p:cNvPr id="21" name="TextBox 20"/>
-          <p:cNvSpPr txBox="1"/>
-          <p:nvPr/>
-        </p:nvSpPr>
-        <p:spPr>
-          <a:xfrm>
-            <a:off x="10515600" y="6400800"/>
-            <a:ext cx="1188720" cy="320040"/>
-          </a:xfrm>
-          <a:prstGeom prst="rect">
-            <a:avLst/>
-          </a:prstGeom>
-          <a:noFill/>
-        </p:spPr>
-        <p:txBody>
-          <a:bodyPr wrap="square" anchor="t" lIns="0" rIns="0" tIns="0" bIns="0">
-            <a:spAutoFit/>
-          </a:bodyPr>
-          <a:lstStyle/>
-          <a:p>
-            <a:pPr algn="r"/>
-            <a:r>
-              <a:rPr sz="1100" b="0" i="0">
-                <a:solidFill>
-                  <a:srgbClr val="7A7A7A"/>
-                </a:solidFill>
-                <a:latin typeface="Roboto"/>
-              </a:rPr>
-              <a:t>19</a:t>
-            </a:r>
-          </a:p>
-        </p:txBody>
-      </p:sp>
-    </p:spTree>
-  </p:cSld>
-  <p:clrMapOvr>
-    <a:masterClrMapping/>
-  </p:clrMapOvr>
-</p:sld>
-</file>
-
-<file path=ppt/slides/slide24.xml><?xml version="1.0" encoding="utf-8"?>
+<file path=ppt/slides/slide22.xml><?xml version="1.0" encoding="utf-8"?>
 <p:sld xmlns:a="http://schemas.openxmlformats.org/drawingml/2006/main" xmlns:p="http://schemas.openxmlformats.org/presentationml/2006/main" xmlns:r="http://schemas.openxmlformats.org/officeDocument/2006/relationships">
   <p:cSld>
     <p:bg>
@@ -12915,7 +9302,7 @@
                 </a:solidFill>
                 <a:latin typeface="Roboto"/>
               </a:rPr>
-              <a:t>Next: Topic 8 — the workload tier</a:t>
+              <a:t>Next — the application tier</a:t>
             </a:r>
           </a:p>
           <a:p>
@@ -12934,7 +9321,7 @@
                 </a:solidFill>
                 <a:latin typeface="Roboto Light"/>
               </a:rPr>
-              <a:t>EC2 + EBS, the load balancer + Auto Scaling group, RDS and S3 — the workload that moves into the network you just built.</a:t>
+              <a:t>The network is built and the rules are written. Nothing is running in it yet.</a:t>
             </a:r>
           </a:p>
           <a:p>
@@ -12953,7 +9340,7 @@
                 </a:solidFill>
                 <a:latin typeface="Roboto Light"/>
               </a:rPr>
-              <a:t>Bring your evidence log.</a:t>
+              <a:t>Next: defining a server once, putting a load balancer in front, and letting the platform manage how many there are.</a:t>
             </a:r>
           </a:p>
         </p:txBody>
@@ -13107,7 +9494,7 @@
                 </a:solidFill>
                 <a:latin typeface="Roboto"/>
               </a:rPr>
-              <a:t>Virtual network &amp; subnets</a:t>
+              <a:t>Rules between tiers</a:t>
             </a:r>
           </a:p>
           <a:p>
@@ -13123,7 +9510,7 @@
                 </a:solidFill>
                 <a:latin typeface="Roboto Light"/>
               </a:rPr>
-              <a:t>the fabric your workload lives in</a:t>
+              <a:t>who may talk to what</a:t>
             </a:r>
           </a:p>
         </p:txBody>
@@ -13305,7 +9692,7 @@
                 </a:solidFill>
                 <a:latin typeface="Roboto"/>
               </a:rPr>
-              <a:t>Networking, the essentials</a:t>
+              <a:t>What a firewall does</a:t>
             </a:r>
           </a:p>
           <a:p>
@@ -13321,7 +9708,7 @@
                 </a:solidFill>
                 <a:latin typeface="Roboto Light"/>
               </a:rPr>
-              <a:t>AWS · ACF M05 S5–S9</a:t>
+              <a:t>address plus port</a:t>
             </a:r>
           </a:p>
         </p:txBody>
@@ -13378,8 +9765,8 @@
         </p:nvSpPr>
         <p:spPr>
           <a:xfrm>
-            <a:off x="658368" y="1737360"/>
-            <a:ext cx="5486400" cy="4297680"/>
+            <a:off x="658368" y="1691640"/>
+            <a:ext cx="10881360" cy="4480560"/>
           </a:xfrm>
           <a:prstGeom prst="rect">
             <a:avLst/>
@@ -13387,7 +9774,7 @@
           <a:noFill/>
         </p:spPr>
         <p:txBody>
-          <a:bodyPr wrap="square" anchor="t" lIns="0" rIns="0" tIns="0" bIns="0">
+          <a:bodyPr wrap="square" anchor="ctr" lIns="0" rIns="0" tIns="0" bIns="0">
             <a:spAutoFit/>
           </a:bodyPr>
           <a:lstStyle/>
@@ -13404,7 +9791,7 @@
               </a:spcAft>
             </a:pPr>
             <a:r>
-              <a:rPr sz="1700" b="1" i="0">
+              <a:rPr sz="2400" b="1" i="0">
                 <a:solidFill>
                   <a:srgbClr val="EDAB0C"/>
                 </a:solidFill>
@@ -13413,13 +9800,13 @@
               <a:t>■  </a:t>
             </a:r>
             <a:r>
-              <a:rPr sz="1700" b="0" i="0">
+              <a:rPr sz="2400" b="0" i="0">
                 <a:solidFill>
                   <a:srgbClr val="2A2929"/>
                 </a:solidFill>
                 <a:latin typeface="Roboto"/>
               </a:rPr>
-              <a:t>A network connects machines so they can share resources; it can be split into smaller pieces called subnets.</a:t>
+              <a:t>A firewall filters traffic by rule and decides what is allowed through.</a:t>
             </a:r>
           </a:p>
           <a:p>
@@ -13435,7 +9822,7 @@
               </a:spcAft>
             </a:pPr>
             <a:r>
-              <a:rPr sz="1700" b="1" i="0">
+              <a:rPr sz="2400" b="1" i="0">
                 <a:solidFill>
                   <a:srgbClr val="EDAB0C"/>
                 </a:solidFill>
@@ -13444,13 +9831,13 @@
               <a:t>■  </a:t>
             </a:r>
             <a:r>
-              <a:rPr sz="1700" b="0" i="0">
+              <a:rPr sz="2400" b="0" i="0">
                 <a:solidFill>
                   <a:srgbClr val="2A2929"/>
                 </a:solidFill>
                 <a:latin typeface="Roboto"/>
               </a:rPr>
-              <a:t>Every machine has an IP address — a unique numeric label (e.g. 10.0.0.17).</a:t>
+              <a:t>Traffic is identified by address and by port — the number that says which service is being asked for.</a:t>
             </a:r>
           </a:p>
           <a:p>
@@ -13466,7 +9853,7 @@
               </a:spcAft>
             </a:pPr>
             <a:r>
-              <a:rPr sz="1700" b="1" i="0">
+              <a:rPr sz="2400" b="1" i="0">
                 <a:solidFill>
                   <a:srgbClr val="EDAB0C"/>
                 </a:solidFill>
@@ -13475,75 +9862,20 @@
               <a:t>■  </a:t>
             </a:r>
             <a:r>
-              <a:rPr sz="1700" b="0" i="0">
+              <a:rPr sz="2400" b="0" i="0">
                 <a:solidFill>
                   <a:srgbClr val="2A2929"/>
                 </a:solidFill>
                 <a:latin typeface="Roboto"/>
               </a:rPr>
-              <a:t>A CIDR block describes a range of addresses: 10.0.0.0/16 — the /number says how many bits are fixed.</a:t>
-            </a:r>
-          </a:p>
-          <a:p>
-            <a:pPr marL="0" indent="0">
-              <a:lnSpc>
-                <a:spcPct val="105000"/>
-              </a:lnSpc>
-              <a:spcBef>
-                <a:spcPts val="0"/>
-              </a:spcBef>
-              <a:spcAft>
-                <a:spcPts val="1000"/>
-              </a:spcAft>
-            </a:pPr>
-            <a:r>
-              <a:rPr sz="1700" b="1" i="0">
-                <a:solidFill>
-                  <a:srgbClr val="EDAB0C"/>
-                </a:solidFill>
-                <a:latin typeface="Roboto"/>
-              </a:rPr>
-              <a:t>■  </a:t>
-            </a:r>
-            <a:r>
-              <a:rPr sz="1700" b="0" i="0">
-                <a:solidFill>
-                  <a:srgbClr val="2A2929"/>
-                </a:solidFill>
-                <a:latin typeface="Roboto"/>
-              </a:rPr>
-              <a:t>Traffic moves between networks through routers / gateways.</a:t>
-            </a:r>
-          </a:p>
-        </p:txBody>
-      </p:sp>
-      <p:pic>
-        <p:nvPicPr>
-          <p:cNvPr id="5" name="Picture 4" descr="07-ip-cidr.png"/>
-          <p:cNvPicPr>
-            <a:picLocks noChangeAspect="1"/>
-          </p:cNvPicPr>
-          <p:nvPr/>
-        </p:nvPicPr>
-        <p:blipFill>
-          <a:blip r:embed="rId2"/>
-          <a:stretch>
-            <a:fillRect/>
-          </a:stretch>
-        </p:blipFill>
-        <p:spPr>
-          <a:xfrm>
-            <a:off x="6400800" y="2862619"/>
-            <a:ext cx="5120640" cy="1864282"/>
-          </a:xfrm>
-          <a:prstGeom prst="rect">
-            <a:avLst/>
-          </a:prstGeom>
-        </p:spPr>
-      </p:pic>
-      <p:sp>
-        <p:nvSpPr>
-          <p:cNvPr id="6" name="Rectangle 5"/>
+              <a:t>Least privilege: open only the ports the job needs, and only to whoever needs them.</a:t>
+            </a:r>
+          </a:p>
+        </p:txBody>
+      </p:sp>
+      <p:sp>
+        <p:nvSpPr>
+          <p:cNvPr id="5" name="Rectangle 4"/>
           <p:cNvSpPr/>
           <p:nvPr/>
         </p:nvSpPr>
@@ -13587,7 +9919,7 @@
       </p:sp>
       <p:sp>
         <p:nvSpPr>
-          <p:cNvPr id="7" name="TextBox 6"/>
+          <p:cNvPr id="6" name="TextBox 5"/>
           <p:cNvSpPr txBox="1"/>
           <p:nvPr/>
         </p:nvSpPr>
@@ -13630,7 +9962,7 @@
       </p:sp>
       <p:sp>
         <p:nvSpPr>
-          <p:cNvPr id="8" name="TextBox 7"/>
+          <p:cNvPr id="7" name="TextBox 6"/>
           <p:cNvSpPr txBox="1"/>
           <p:nvPr/>
         </p:nvSpPr>
@@ -13718,7 +10050,7 @@
                 </a:solidFill>
                 <a:latin typeface="Roboto"/>
               </a:rPr>
-              <a:t>The VPC — your private network in AWS</a:t>
+              <a:t>Security groups</a:t>
             </a:r>
           </a:p>
           <a:p>
@@ -13734,7 +10066,7 @@
                 </a:solidFill>
                 <a:latin typeface="Roboto Light"/>
               </a:rPr>
-              <a:t>AWS · ACF M05 S11 · ACA M07 S10</a:t>
+              <a:t>stateful, allow-only, deny by default</a:t>
             </a:r>
           </a:p>
         </p:txBody>
@@ -13832,7 +10164,7 @@
                 </a:solidFill>
                 <a:latin typeface="Roboto"/>
               </a:rPr>
-              <a:t>A VPC is a logically isolated section of AWS that you define — your own virtual network.</a:t>
+              <a:t>A security group is a virtual firewall attached to a resource, not to a subnet.</a:t>
             </a:r>
           </a:p>
           <a:p>
@@ -13863,7 +10195,7 @@
                 </a:solidFill>
                 <a:latin typeface="Roboto"/>
               </a:rPr>
-              <a:t>It belongs to one Region and can span Availability Zones; you size it with a CIDR block (largest /16, smallest /28; you can't change it later).</a:t>
+              <a:t>It is stateful — allow traffic in and the reply is automatically allowed back out. You do not write a matching outbound rule.</a:t>
             </a:r>
           </a:p>
           <a:p>
@@ -13894,7 +10226,7 @@
                 </a:solidFill>
                 <a:latin typeface="Roboto"/>
               </a:rPr>
-              <a:t>You divide the VPC into subnets — each in one AZ, classified public or private.</a:t>
+              <a:t>It holds allow-rules only. There is no deny rule, because a new group already denies everything inbound until you add one.</a:t>
             </a:r>
           </a:p>
         </p:txBody>
@@ -14076,7 +10408,7 @@
                 </a:solidFill>
                 <a:latin typeface="Roboto"/>
               </a:rPr>
-              <a:t>Routing: gateways &amp; route tables</a:t>
+              <a:t>Chaining the tiers</a:t>
             </a:r>
           </a:p>
           <a:p>
@@ -14092,7 +10424,7 @@
                 </a:solidFill>
                 <a:latin typeface="Roboto Light"/>
               </a:rPr>
-              <a:t>AWS · ACA M07 S12–S16</a:t>
+              <a:t>source = a group, not an address</a:t>
             </a:r>
           </a:p>
         </p:txBody>
@@ -14149,8 +10481,8 @@
         </p:nvSpPr>
         <p:spPr>
           <a:xfrm>
-            <a:off x="658368" y="1737360"/>
-            <a:ext cx="5486400" cy="4297680"/>
+            <a:off x="658368" y="1691640"/>
+            <a:ext cx="10881360" cy="4480560"/>
           </a:xfrm>
           <a:prstGeom prst="rect">
             <a:avLst/>
@@ -14158,7 +10490,7 @@
           <a:noFill/>
         </p:spPr>
         <p:txBody>
-          <a:bodyPr wrap="square" anchor="t" lIns="0" rIns="0" tIns="0" bIns="0">
+          <a:bodyPr wrap="square" anchor="ctr" lIns="0" rIns="0" tIns="0" bIns="0">
             <a:spAutoFit/>
           </a:bodyPr>
           <a:lstStyle/>
@@ -14175,7 +10507,7 @@
               </a:spcAft>
             </a:pPr>
             <a:r>
-              <a:rPr sz="1700" b="1" i="0">
+              <a:rPr sz="2400" b="1" i="0">
                 <a:solidFill>
                   <a:srgbClr val="EDAB0C"/>
                 </a:solidFill>
@@ -14184,13 +10516,13 @@
               <a:t>■  </a:t>
             </a:r>
             <a:r>
-              <a:rPr sz="1700" b="0" i="0">
+              <a:rPr sz="2400" b="0" i="0">
                 <a:solidFill>
                   <a:srgbClr val="2A2929"/>
                 </a:solidFill>
                 <a:latin typeface="Roboto"/>
               </a:rPr>
-              <a:t>A route table holds rules that direct a subnet's traffic; every table has a built-in local route for inside-the-VPC traffic.</a:t>
+              <a:t>You can name another security group as the source of a rule, instead of an address range.</a:t>
             </a:r>
           </a:p>
           <a:p>
@@ -14206,7 +10538,7 @@
               </a:spcAft>
             </a:pPr>
             <a:r>
-              <a:rPr sz="1700" b="1" i="0">
+              <a:rPr sz="2400" b="1" i="0">
                 <a:solidFill>
                   <a:srgbClr val="EDAB0C"/>
                 </a:solidFill>
@@ -14215,13 +10547,13 @@
               <a:t>■  </a:t>
             </a:r>
             <a:r>
-              <a:rPr sz="1700" b="0" i="0">
+              <a:rPr sz="2400" b="0" i="0">
                 <a:solidFill>
                   <a:srgbClr val="2A2929"/>
                 </a:solidFill>
                 <a:latin typeface="Roboto"/>
               </a:rPr>
-              <a:t>Public subnet → an Internet Gateway (a 0.0.0.0/0 route to the IGW) gives direct internet access.</a:t>
+              <a:t>The rule then follows membership: however many servers the platform launches, and whatever addresses they get, the rule still fits.</a:t>
             </a:r>
           </a:p>
           <a:p>
@@ -14237,7 +10569,7 @@
               </a:spcAft>
             </a:pPr>
             <a:r>
-              <a:rPr sz="1700" b="1" i="0">
+              <a:rPr sz="2400" b="1" i="0">
                 <a:solidFill>
                   <a:srgbClr val="EDAB0C"/>
                 </a:solidFill>
@@ -14246,13 +10578,13 @@
               <a:t>■  </a:t>
             </a:r>
             <a:r>
-              <a:rPr sz="1700" b="0" i="0">
+              <a:rPr sz="2400" b="0" i="0">
                 <a:solidFill>
                   <a:srgbClr val="2A2929"/>
                 </a:solidFill>
                 <a:latin typeface="Roboto"/>
               </a:rPr>
-              <a:t>Private subnet → no direct internet path.</a:t>
+              <a:t>That is what makes a chain — the entry point accepts the public, the application tier accepts only the entry point, the database accepts only the application tier.</a:t>
             </a:r>
           </a:p>
           <a:p>
@@ -14268,7 +10600,7 @@
               </a:spcAft>
             </a:pPr>
             <a:r>
-              <a:rPr sz="1700" b="1" i="0">
+              <a:rPr sz="2400" b="1" i="0">
                 <a:solidFill>
                   <a:srgbClr val="EDAB0C"/>
                 </a:solidFill>
@@ -14277,44 +10609,20 @@
               <a:t>■  </a:t>
             </a:r>
             <a:r>
-              <a:rPr sz="1700" b="0" i="0">
+              <a:rPr sz="2400" b="0" i="0">
                 <a:solidFill>
                   <a:srgbClr val="2A2929"/>
                 </a:solidFill>
                 <a:latin typeface="Roboto"/>
               </a:rPr>
-              <a:t>A NAT gateway lets private resources reach OUT (e.g. patching) without being reachable from the internet.</a:t>
-            </a:r>
-          </a:p>
-        </p:txBody>
-      </p:sp>
-      <p:pic>
-        <p:nvPicPr>
-          <p:cNvPr id="5" name="Picture 4" descr="vpc-anatomy.png"/>
-          <p:cNvPicPr>
-            <a:picLocks noChangeAspect="1"/>
-          </p:cNvPicPr>
-          <p:nvPr/>
-        </p:nvPicPr>
-        <p:blipFill>
-          <a:blip r:embed="rId2"/>
-          <a:stretch>
-            <a:fillRect/>
-          </a:stretch>
-        </p:blipFill>
-        <p:spPr>
-          <a:xfrm>
-            <a:off x="6400800" y="2057400"/>
-            <a:ext cx="5120640" cy="3474720"/>
-          </a:xfrm>
-          <a:prstGeom prst="rect">
-            <a:avLst/>
-          </a:prstGeom>
-        </p:spPr>
-      </p:pic>
-      <p:sp>
-        <p:nvSpPr>
-          <p:cNvPr id="6" name="Rectangle 5"/>
+              <a:t>Create the groups empty first. Each names another as a source, which you cannot do until it exists.</a:t>
+            </a:r>
+          </a:p>
+        </p:txBody>
+      </p:sp>
+      <p:sp>
+        <p:nvSpPr>
+          <p:cNvPr id="5" name="Rectangle 4"/>
           <p:cNvSpPr/>
           <p:nvPr/>
         </p:nvSpPr>
@@ -14358,7 +10666,7 @@
       </p:sp>
       <p:sp>
         <p:nvSpPr>
-          <p:cNvPr id="7" name="TextBox 6"/>
+          <p:cNvPr id="6" name="TextBox 5"/>
           <p:cNvSpPr txBox="1"/>
           <p:nvPr/>
         </p:nvSpPr>
@@ -14401,7 +10709,7 @@
       </p:sp>
       <p:sp>
         <p:nvSpPr>
-          <p:cNvPr id="8" name="TextBox 7"/>
+          <p:cNvPr id="7" name="TextBox 6"/>
           <p:cNvSpPr txBox="1"/>
           <p:nvPr/>
         </p:nvSpPr>
@@ -14462,14 +10770,64 @@
       <p:grpSpPr/>
       <p:sp>
         <p:nvSpPr>
-          <p:cNvPr id="2" name="Rectangle 1"/>
+          <p:cNvPr id="2" name="TextBox 1"/>
+          <p:cNvSpPr txBox="1"/>
+          <p:nvPr/>
+        </p:nvSpPr>
+        <p:spPr>
+          <a:xfrm>
+            <a:off x="640080" y="457200"/>
+            <a:ext cx="10881360" cy="960120"/>
+          </a:xfrm>
+          <a:prstGeom prst="rect">
+            <a:avLst/>
+          </a:prstGeom>
+          <a:noFill/>
+        </p:spPr>
+        <p:txBody>
+          <a:bodyPr wrap="square" anchor="t" lIns="0" rIns="0" tIns="0" bIns="0">
+            <a:spAutoFit/>
+          </a:bodyPr>
+          <a:lstStyle/>
+          <a:p>
+            <a:r>
+              <a:rPr sz="2800" b="1" i="0">
+                <a:solidFill>
+                  <a:srgbClr val="2A2929"/>
+                </a:solidFill>
+                <a:latin typeface="Roboto"/>
+              </a:rPr>
+              <a:t>Naming things the platform will accept</a:t>
+            </a:r>
+          </a:p>
+          <a:p>
+            <a:pPr>
+              <a:spcBef>
+                <a:spcPts val="200"/>
+              </a:spcBef>
+            </a:pPr>
+            <a:r>
+              <a:rPr sz="1800" b="0" i="1">
+                <a:solidFill>
+                  <a:srgbClr val="D68E10"/>
+                </a:solidFill>
+                <a:latin typeface="Roboto Light"/>
+              </a:rPr>
+              <a:t>read the constraint first</a:t>
+            </a:r>
+          </a:p>
+        </p:txBody>
+      </p:sp>
+      <p:sp>
+        <p:nvSpPr>
+          <p:cNvPr id="3" name="Rectangle 2"/>
           <p:cNvSpPr/>
           <p:nvPr/>
         </p:nvSpPr>
         <p:spPr>
           <a:xfrm>
-            <a:off x="0" y="0"/>
-            <a:ext cx="12191695" cy="1234440"/>
+            <a:off x="658368" y="1371600"/>
+            <a:ext cx="1463040" cy="50800"/>
           </a:xfrm>
           <a:prstGeom prst="rect">
             <a:avLst/>
@@ -14506,67 +10864,14 @@
       </p:sp>
       <p:sp>
         <p:nvSpPr>
-          <p:cNvPr id="3" name="Rounded Rectangle 2"/>
-          <p:cNvSpPr/>
-          <p:nvPr/>
-        </p:nvSpPr>
-        <p:spPr>
-          <a:xfrm>
-            <a:off x="640080" y="384048"/>
-            <a:ext cx="1691640" cy="457200"/>
-          </a:xfrm>
-          <a:prstGeom prst="roundRect">
-            <a:avLst/>
-          </a:prstGeom>
-          <a:solidFill>
-            <a:srgbClr val="2A2929"/>
-          </a:solidFill>
-          <a:ln>
-            <a:noFill/>
-          </a:ln>
-          <a:effectLst/>
-        </p:spPr>
-        <p:style>
-          <a:lnRef idx="1">
-            <a:schemeClr val="accent1"/>
-          </a:lnRef>
-          <a:fillRef idx="3">
-            <a:schemeClr val="accent1"/>
-          </a:fillRef>
-          <a:effectRef idx="2">
-            <a:schemeClr val="accent1"/>
-          </a:effectRef>
-          <a:fontRef idx="minor">
-            <a:schemeClr val="lt1"/>
-          </a:fontRef>
-        </p:style>
-        <p:txBody>
-          <a:bodyPr rtlCol="0" anchor="ctr"/>
-          <a:lstStyle/>
-          <a:p>
-            <a:pPr algn="ctr"/>
-            <a:r>
-              <a:rPr sz="1400" b="1" i="0">
-                <a:solidFill>
-                  <a:srgbClr val="FBB900"/>
-                </a:solidFill>
-                <a:latin typeface="Roboto"/>
-              </a:rPr>
-              <a:t>ACTIVITY</a:t>
-            </a:r>
-          </a:p>
-        </p:txBody>
-      </p:sp>
-      <p:sp>
-        <p:nvSpPr>
           <p:cNvPr id="4" name="TextBox 3"/>
           <p:cNvSpPr txBox="1"/>
           <p:nvPr/>
         </p:nvSpPr>
         <p:spPr>
           <a:xfrm>
-            <a:off x="2560320" y="310896"/>
-            <a:ext cx="8961120" cy="685800"/>
+            <a:off x="658368" y="1691640"/>
+            <a:ext cx="10881360" cy="4480560"/>
           </a:xfrm>
           <a:prstGeom prst="rect">
             <a:avLst/>
@@ -14575,40 +10880,6 @@
         </p:spPr>
         <p:txBody>
           <a:bodyPr wrap="square" anchor="ctr" lIns="0" rIns="0" tIns="0" bIns="0">
-            <a:spAutoFit/>
-          </a:bodyPr>
-          <a:lstStyle/>
-          <a:p>
-            <a:r>
-              <a:rPr sz="2600" b="1" i="0">
-                <a:solidFill>
-                  <a:srgbClr val="FFFFFF"/>
-                </a:solidFill>
-                <a:latin typeface="Roboto"/>
-              </a:rPr>
-              <a:t>Public or private?</a:t>
-            </a:r>
-          </a:p>
-        </p:txBody>
-      </p:sp>
-      <p:sp>
-        <p:nvSpPr>
-          <p:cNvPr id="5" name="TextBox 4"/>
-          <p:cNvSpPr txBox="1"/>
-          <p:nvPr/>
-        </p:nvSpPr>
-        <p:spPr>
-          <a:xfrm>
-            <a:off x="658368" y="1554480"/>
-            <a:ext cx="10881360" cy="4297680"/>
-          </a:xfrm>
-          <a:prstGeom prst="rect">
-            <a:avLst/>
-          </a:prstGeom>
-          <a:noFill/>
-        </p:spPr>
-        <p:txBody>
-          <a:bodyPr wrap="square" anchor="t" lIns="0" rIns="0" tIns="0" bIns="0">
             <a:spAutoFit/>
           </a:bodyPr>
           <a:lstStyle/>
@@ -14625,7 +10896,7 @@
               </a:spcAft>
             </a:pPr>
             <a:r>
-              <a:rPr sz="1700" b="1" i="0">
+              <a:rPr sz="2400" b="1" i="0">
                 <a:solidFill>
                   <a:srgbClr val="EDAB0C"/>
                 </a:solidFill>
@@ -14634,44 +10905,13 @@
               <a:t>■  </a:t>
             </a:r>
             <a:r>
-              <a:rPr sz="1700" b="0" i="0">
+              <a:rPr sz="2400" b="0" i="0">
                 <a:solidFill>
                   <a:srgbClr val="2A2929"/>
                 </a:solidFill>
                 <a:latin typeface="Roboto"/>
               </a:rPr>
-              <a:t>For each resource, decide which subnet it belongs in — public or private:</a:t>
-            </a:r>
-          </a:p>
-          <a:p>
-            <a:pPr marL="365760" indent="0">
-              <a:lnSpc>
-                <a:spcPct val="105000"/>
-              </a:lnSpc>
-              <a:spcBef>
-                <a:spcPts val="0"/>
-              </a:spcBef>
-              <a:spcAft>
-                <a:spcPts val="500"/>
-              </a:spcAft>
-            </a:pPr>
-            <a:r>
-              <a:rPr sz="1400" b="0" i="0">
-                <a:solidFill>
-                  <a:srgbClr val="7A7A7A"/>
-                </a:solidFill>
-                <a:latin typeface="Roboto"/>
-              </a:rPr>
-              <a:t>–  </a:t>
-            </a:r>
-            <a:r>
-              <a:rPr sz="1400" b="0" i="0">
-                <a:solidFill>
-                  <a:srgbClr val="2A2929"/>
-                </a:solidFill>
-                <a:latin typeface="Roboto"/>
-              </a:rPr>
-              <a:t>the database · a batch-processing job · the web/app server · a NAT gateway</a:t>
+              <a:t>Providers reserve some prefixes for the identifiers they generate themselves.</a:t>
             </a:r>
           </a:p>
           <a:p>
@@ -14687,7 +10927,7 @@
               </a:spcAft>
             </a:pPr>
             <a:r>
-              <a:rPr sz="1700" b="1" i="0">
+              <a:rPr sz="2400" b="1" i="0">
                 <a:solidFill>
                   <a:srgbClr val="EDAB0C"/>
                 </a:solidFill>
@@ -14696,13 +10936,13 @@
               <a:t>■  </a:t>
             </a:r>
             <a:r>
-              <a:rPr sz="1700" b="0" i="0">
+              <a:rPr sz="2400" b="0" i="0">
                 <a:solidFill>
                   <a:srgbClr val="2A2929"/>
                 </a:solidFill>
                 <a:latin typeface="Roboto"/>
               </a:rPr>
-              <a:t>Rule of thumb: anything that shouldn't be reachable from the internet goes private; only internet-facing entry points and the NAT gateway go public.</a:t>
+              <a:t>A name that collides with a reserved prefix is rejected outright, with an error that reads as though your rule is wrong when only the name is.</a:t>
             </a:r>
           </a:p>
           <a:p>
@@ -14718,7 +10958,7 @@
               </a:spcAft>
             </a:pPr>
             <a:r>
-              <a:rPr sz="1700" b="1" i="0">
+              <a:rPr sz="2400" b="1" i="0">
                 <a:solidFill>
                   <a:srgbClr val="EDAB0C"/>
                 </a:solidFill>
@@ -14727,100 +10967,20 @@
               <a:t>■  </a:t>
             </a:r>
             <a:r>
-              <a:rPr sz="1700" b="0" i="0">
+              <a:rPr sz="2400" b="0" i="0">
                 <a:solidFill>
                   <a:srgbClr val="2A2929"/>
                 </a:solidFill>
                 <a:latin typeface="Roboto"/>
               </a:rPr>
-              <a:t>(AWS recommends even web/app tiers sit private, behind a load balancer.)</a:t>
-            </a:r>
-          </a:p>
-        </p:txBody>
-      </p:sp>
-      <p:sp>
-        <p:nvSpPr>
-          <p:cNvPr id="6" name="Rounded Rectangle 5"/>
-          <p:cNvSpPr/>
-          <p:nvPr/>
-        </p:nvSpPr>
-        <p:spPr>
-          <a:xfrm>
-            <a:off x="640080" y="5897880"/>
-            <a:ext cx="4023360" cy="457200"/>
-          </a:xfrm>
-          <a:prstGeom prst="roundRect">
-            <a:avLst/>
-          </a:prstGeom>
-          <a:solidFill>
-            <a:srgbClr val="F9F9F9"/>
-          </a:solidFill>
-          <a:ln w="12700">
-            <a:solidFill>
-              <a:srgbClr val="CCCCCC"/>
-            </a:solidFill>
-          </a:ln>
-          <a:effectLst/>
-        </p:spPr>
-        <p:style>
-          <a:lnRef idx="1">
-            <a:schemeClr val="accent1"/>
-          </a:lnRef>
-          <a:fillRef idx="3">
-            <a:schemeClr val="accent1"/>
-          </a:fillRef>
-          <a:effectRef idx="2">
-            <a:schemeClr val="accent1"/>
-          </a:effectRef>
-          <a:fontRef idx="minor">
-            <a:schemeClr val="lt1"/>
-          </a:fontRef>
-        </p:style>
-        <p:txBody>
-          <a:bodyPr rtlCol="0" anchor="ctr"/>
-          <a:lstStyle/>
-          <a:p>
-            <a:pPr algn="ctr"/>
-          </a:p>
-        </p:txBody>
-      </p:sp>
-      <p:sp>
-        <p:nvSpPr>
-          <p:cNvPr id="7" name="TextBox 6"/>
-          <p:cNvSpPr txBox="1"/>
-          <p:nvPr/>
-        </p:nvSpPr>
-        <p:spPr>
-          <a:xfrm>
-            <a:off x="822960" y="5943600"/>
-            <a:ext cx="3657600" cy="365760"/>
-          </a:xfrm>
-          <a:prstGeom prst="rect">
-            <a:avLst/>
-          </a:prstGeom>
-          <a:noFill/>
-        </p:spPr>
-        <p:txBody>
-          <a:bodyPr wrap="square" anchor="ctr" lIns="0" rIns="0" tIns="0" bIns="0">
-            <a:spAutoFit/>
-          </a:bodyPr>
-          <a:lstStyle/>
-          <a:p>
-            <a:r>
-              <a:rPr sz="1500" b="1" i="0">
-                <a:solidFill>
-                  <a:srgbClr val="2A2929"/>
-                </a:solidFill>
-                <a:latin typeface="Roboto"/>
-              </a:rPr>
-              <a:t>⏱  ~10 min</a:t>
-            </a:r>
-          </a:p>
-        </p:txBody>
-      </p:sp>
-      <p:sp>
-        <p:nvSpPr>
-          <p:cNvPr id="8" name="Rectangle 7"/>
+              <a:t>Read the constraint in your run sheet before you type the names.</a:t>
+            </a:r>
+          </a:p>
+        </p:txBody>
+      </p:sp>
+      <p:sp>
+        <p:nvSpPr>
+          <p:cNvPr id="5" name="Rectangle 4"/>
           <p:cNvSpPr/>
           <p:nvPr/>
         </p:nvSpPr>
@@ -14864,7 +11024,7 @@
       </p:sp>
       <p:sp>
         <p:nvSpPr>
-          <p:cNvPr id="9" name="TextBox 8"/>
+          <p:cNvPr id="6" name="TextBox 5"/>
           <p:cNvSpPr txBox="1"/>
           <p:nvPr/>
         </p:nvSpPr>
@@ -14907,7 +11067,7 @@
       </p:sp>
       <p:sp>
         <p:nvSpPr>
-          <p:cNvPr id="10" name="TextBox 9"/>
+          <p:cNvPr id="7" name="TextBox 6"/>
           <p:cNvSpPr txBox="1"/>
           <p:nvPr/>
         </p:nvSpPr>
@@ -14968,64 +11128,14 @@
       <p:grpSpPr/>
       <p:sp>
         <p:nvSpPr>
-          <p:cNvPr id="2" name="TextBox 1"/>
-          <p:cNvSpPr txBox="1"/>
-          <p:nvPr/>
-        </p:nvSpPr>
-        <p:spPr>
-          <a:xfrm>
-            <a:off x="640080" y="457200"/>
-            <a:ext cx="10881360" cy="960120"/>
-          </a:xfrm>
-          <a:prstGeom prst="rect">
-            <a:avLst/>
-          </a:prstGeom>
-          <a:noFill/>
-        </p:spPr>
-        <p:txBody>
-          <a:bodyPr wrap="square" anchor="t" lIns="0" rIns="0" tIns="0" bIns="0">
-            <a:spAutoFit/>
-          </a:bodyPr>
-          <a:lstStyle/>
-          <a:p>
-            <a:r>
-              <a:rPr sz="2800" b="1" i="0">
-                <a:solidFill>
-                  <a:srgbClr val="2A2929"/>
-                </a:solidFill>
-                <a:latin typeface="Roboto"/>
-              </a:rPr>
-              <a:t>The network you'll build</a:t>
-            </a:r>
-          </a:p>
-          <a:p>
-            <a:pPr>
-              <a:spcBef>
-                <a:spcPts val="200"/>
-              </a:spcBef>
-            </a:pPr>
-            <a:r>
-              <a:rPr sz="1800" b="0" i="1">
-                <a:solidFill>
-                  <a:srgbClr val="D68E10"/>
-                </a:solidFill>
-                <a:latin typeface="Roboto Light"/>
-              </a:rPr>
-              <a:t>work from the Solution Design</a:t>
-            </a:r>
-          </a:p>
-        </p:txBody>
-      </p:sp>
-      <p:sp>
-        <p:nvSpPr>
-          <p:cNvPr id="3" name="Rectangle 2"/>
+          <p:cNvPr id="2" name="Rectangle 1"/>
           <p:cNvSpPr/>
           <p:nvPr/>
         </p:nvSpPr>
         <p:spPr>
           <a:xfrm>
-            <a:off x="658368" y="1371600"/>
-            <a:ext cx="1463040" cy="50800"/>
+            <a:off x="0" y="0"/>
+            <a:ext cx="12191695" cy="1234440"/>
           </a:xfrm>
           <a:prstGeom prst="rect">
             <a:avLst/>
@@ -15062,14 +11172,67 @@
       </p:sp>
       <p:sp>
         <p:nvSpPr>
+          <p:cNvPr id="3" name="Rounded Rectangle 2"/>
+          <p:cNvSpPr/>
+          <p:nvPr/>
+        </p:nvSpPr>
+        <p:spPr>
+          <a:xfrm>
+            <a:off x="640080" y="384048"/>
+            <a:ext cx="1691640" cy="457200"/>
+          </a:xfrm>
+          <a:prstGeom prst="roundRect">
+            <a:avLst/>
+          </a:prstGeom>
+          <a:solidFill>
+            <a:srgbClr val="2A2929"/>
+          </a:solidFill>
+          <a:ln>
+            <a:noFill/>
+          </a:ln>
+          <a:effectLst/>
+        </p:spPr>
+        <p:style>
+          <a:lnRef idx="1">
+            <a:schemeClr val="accent1"/>
+          </a:lnRef>
+          <a:fillRef idx="3">
+            <a:schemeClr val="accent1"/>
+          </a:fillRef>
+          <a:effectRef idx="2">
+            <a:schemeClr val="accent1"/>
+          </a:effectRef>
+          <a:fontRef idx="minor">
+            <a:schemeClr val="lt1"/>
+          </a:fontRef>
+        </p:style>
+        <p:txBody>
+          <a:bodyPr rtlCol="0" anchor="ctr"/>
+          <a:lstStyle/>
+          <a:p>
+            <a:pPr algn="ctr"/>
+            <a:r>
+              <a:rPr sz="1400" b="1" i="0">
+                <a:solidFill>
+                  <a:srgbClr val="FBB900"/>
+                </a:solidFill>
+                <a:latin typeface="Roboto"/>
+              </a:rPr>
+              <a:t>ACTIVITY</a:t>
+            </a:r>
+          </a:p>
+        </p:txBody>
+      </p:sp>
+      <p:sp>
+        <p:nvSpPr>
           <p:cNvPr id="4" name="TextBox 3"/>
           <p:cNvSpPr txBox="1"/>
           <p:nvPr/>
         </p:nvSpPr>
         <p:spPr>
           <a:xfrm>
-            <a:off x="658368" y="1691640"/>
-            <a:ext cx="10881360" cy="4480560"/>
+            <a:off x="2560320" y="310896"/>
+            <a:ext cx="8961120" cy="685800"/>
           </a:xfrm>
           <a:prstGeom prst="rect">
             <a:avLst/>
@@ -15078,6 +11241,40 @@
         </p:spPr>
         <p:txBody>
           <a:bodyPr wrap="square" anchor="ctr" lIns="0" rIns="0" tIns="0" bIns="0">
+            <a:spAutoFit/>
+          </a:bodyPr>
+          <a:lstStyle/>
+          <a:p>
+            <a:r>
+              <a:rPr sz="2600" b="1" i="0">
+                <a:solidFill>
+                  <a:srgbClr val="FFFFFF"/>
+                </a:solidFill>
+                <a:latin typeface="Roboto"/>
+              </a:rPr>
+              <a:t>Build the security-group chain</a:t>
+            </a:r>
+          </a:p>
+        </p:txBody>
+      </p:sp>
+      <p:sp>
+        <p:nvSpPr>
+          <p:cNvPr id="5" name="TextBox 4"/>
+          <p:cNvSpPr txBox="1"/>
+          <p:nvPr/>
+        </p:nvSpPr>
+        <p:spPr>
+          <a:xfrm>
+            <a:off x="658368" y="1554480"/>
+            <a:ext cx="10881360" cy="4297680"/>
+          </a:xfrm>
+          <a:prstGeom prst="rect">
+            <a:avLst/>
+          </a:prstGeom>
+          <a:noFill/>
+        </p:spPr>
+        <p:txBody>
+          <a:bodyPr wrap="square" anchor="t" lIns="0" rIns="0" tIns="0" bIns="0">
             <a:spAutoFit/>
           </a:bodyPr>
           <a:lstStyle/>
@@ -15094,7 +11291,7 @@
               </a:spcAft>
             </a:pPr>
             <a:r>
-              <a:rPr sz="2400" b="1" i="0">
+              <a:rPr sz="1700" b="1" i="0">
                 <a:solidFill>
                   <a:srgbClr val="EDAB0C"/>
                 </a:solidFill>
@@ -15103,13 +11300,13 @@
               <a:t>■  </a:t>
             </a:r>
             <a:r>
-              <a:rPr sz="2400" b="0" i="0">
+              <a:rPr sz="1700" b="0" i="0">
                 <a:solidFill>
                   <a:srgbClr val="2A2929"/>
                 </a:solidFill>
                 <a:latin typeface="Roboto"/>
               </a:rPr>
-              <a:t>Open the Solution Design for this engagement (on the intranet) and study its network topology (§4.4) — you build to that.</a:t>
+              <a:t>Run sheet — task 7.</a:t>
             </a:r>
           </a:p>
           <a:p>
@@ -15125,7 +11322,7 @@
               </a:spcAft>
             </a:pPr>
             <a:r>
-              <a:rPr sz="2400" b="1" i="0">
+              <a:rPr sz="1700" b="1" i="0">
                 <a:solidFill>
                   <a:srgbClr val="EDAB0C"/>
                 </a:solidFill>
@@ -15134,113 +11331,100 @@
               <a:t>■  </a:t>
             </a:r>
             <a:r>
-              <a:rPr sz="2400" b="0" i="0">
+              <a:rPr sz="1700" b="0" i="0">
                 <a:solidFill>
                   <a:srgbClr val="2A2929"/>
                 </a:solidFill>
                 <a:latin typeface="Roboto"/>
               </a:rPr>
-              <a:t>VPC 10.0.0.0/16 (room to expand); DNS resolution + flow logs on.</a:t>
-            </a:r>
-          </a:p>
-          <a:p>
-            <a:pPr marL="0" indent="0">
-              <a:lnSpc>
-                <a:spcPct val="105000"/>
-              </a:lnSpc>
-              <a:spcBef>
-                <a:spcPts val="0"/>
-              </a:spcBef>
-              <a:spcAft>
-                <a:spcPts val="1000"/>
-              </a:spcAft>
-            </a:pPr>
-            <a:r>
-              <a:rPr sz="2400" b="1" i="0">
-                <a:solidFill>
-                  <a:srgbClr val="EDAB0C"/>
-                </a:solidFill>
-                <a:latin typeface="Roboto"/>
-              </a:rPr>
-              <a:t>■  </a:t>
-            </a:r>
-            <a:r>
-              <a:rPr sz="2400" b="0" i="0">
+              <a:t>Create the three groups as empty shells, then add each inbound rule, naming the upstream group as the source rather than an address range.</a:t>
+            </a:r>
+          </a:p>
+        </p:txBody>
+      </p:sp>
+      <p:sp>
+        <p:nvSpPr>
+          <p:cNvPr id="6" name="Rounded Rectangle 5"/>
+          <p:cNvSpPr/>
+          <p:nvPr/>
+        </p:nvSpPr>
+        <p:spPr>
+          <a:xfrm>
+            <a:off x="640080" y="5897880"/>
+            <a:ext cx="4023360" cy="457200"/>
+          </a:xfrm>
+          <a:prstGeom prst="roundRect">
+            <a:avLst/>
+          </a:prstGeom>
+          <a:solidFill>
+            <a:srgbClr val="F9F9F9"/>
+          </a:solidFill>
+          <a:ln w="12700">
+            <a:solidFill>
+              <a:srgbClr val="CCCCCC"/>
+            </a:solidFill>
+          </a:ln>
+          <a:effectLst/>
+        </p:spPr>
+        <p:style>
+          <a:lnRef idx="1">
+            <a:schemeClr val="accent1"/>
+          </a:lnRef>
+          <a:fillRef idx="3">
+            <a:schemeClr val="accent1"/>
+          </a:fillRef>
+          <a:effectRef idx="2">
+            <a:schemeClr val="accent1"/>
+          </a:effectRef>
+          <a:fontRef idx="minor">
+            <a:schemeClr val="lt1"/>
+          </a:fontRef>
+        </p:style>
+        <p:txBody>
+          <a:bodyPr rtlCol="0" anchor="ctr"/>
+          <a:lstStyle/>
+          <a:p>
+            <a:pPr algn="ctr"/>
+          </a:p>
+        </p:txBody>
+      </p:sp>
+      <p:sp>
+        <p:nvSpPr>
+          <p:cNvPr id="7" name="TextBox 6"/>
+          <p:cNvSpPr txBox="1"/>
+          <p:nvPr/>
+        </p:nvSpPr>
+        <p:spPr>
+          <a:xfrm>
+            <a:off x="822960" y="5943600"/>
+            <a:ext cx="3657600" cy="365760"/>
+          </a:xfrm>
+          <a:prstGeom prst="rect">
+            <a:avLst/>
+          </a:prstGeom>
+          <a:noFill/>
+        </p:spPr>
+        <p:txBody>
+          <a:bodyPr wrap="square" anchor="ctr" lIns="0" rIns="0" tIns="0" bIns="0">
+            <a:spAutoFit/>
+          </a:bodyPr>
+          <a:lstStyle/>
+          <a:p>
+            <a:r>
+              <a:rPr sz="1500" b="1" i="0">
                 <a:solidFill>
                   <a:srgbClr val="2A2929"/>
                 </a:solidFill>
                 <a:latin typeface="Roboto"/>
               </a:rPr>
-              <a:t>Subnets in the first Availability Zone: public-egress-a (NAT only) · private-app-a (app + internal ALB) · private-data-a (database).</a:t>
-            </a:r>
-          </a:p>
-          <a:p>
-            <a:pPr marL="0" indent="0">
-              <a:lnSpc>
-                <a:spcPct val="105000"/>
-              </a:lnSpc>
-              <a:spcBef>
-                <a:spcPts val="0"/>
-              </a:spcBef>
-              <a:spcAft>
-                <a:spcPts val="1000"/>
-              </a:spcAft>
-            </a:pPr>
-            <a:r>
-              <a:rPr sz="2400" b="1" i="0">
-                <a:solidFill>
-                  <a:srgbClr val="EDAB0C"/>
-                </a:solidFill>
-                <a:latin typeface="Roboto"/>
-              </a:rPr>
-              <a:t>■  </a:t>
-            </a:r>
-            <a:r>
-              <a:rPr sz="2400" b="0" i="0">
-                <a:solidFill>
-                  <a:srgbClr val="2A2929"/>
-                </a:solidFill>
-                <a:latin typeface="Roboto"/>
-              </a:rPr>
-              <a:t>Internet Gateway is egress-only — patching via NAT; no inbound path from the internet.</a:t>
-            </a:r>
-          </a:p>
-          <a:p>
-            <a:pPr marL="0" indent="0">
-              <a:lnSpc>
-                <a:spcPct val="105000"/>
-              </a:lnSpc>
-              <a:spcBef>
-                <a:spcPts val="0"/>
-              </a:spcBef>
-              <a:spcAft>
-                <a:spcPts val="1000"/>
-              </a:spcAft>
-            </a:pPr>
-            <a:r>
-              <a:rPr sz="2400" b="1" i="0">
-                <a:solidFill>
-                  <a:srgbClr val="EDAB0C"/>
-                </a:solidFill>
-                <a:latin typeface="Roboto"/>
-              </a:rPr>
-              <a:t>■  </a:t>
-            </a:r>
-            <a:r>
-              <a:rPr sz="2400" b="0" i="0">
-                <a:solidFill>
-                  <a:srgbClr val="2A2929"/>
-                </a:solidFill>
-                <a:latin typeface="Roboto"/>
-              </a:rPr>
-              <a:t>Staff reach the service over the campus Site-to-Site VPN; route tables set per tier.</a:t>
-            </a:r>
-          </a:p>
-        </p:txBody>
-      </p:sp>
-      <p:sp>
-        <p:nvSpPr>
-          <p:cNvPr id="5" name="Rectangle 4"/>
+              <a:t>⏱  ~20 min</a:t>
+            </a:r>
+          </a:p>
+        </p:txBody>
+      </p:sp>
+      <p:sp>
+        <p:nvSpPr>
+          <p:cNvPr id="8" name="Rectangle 7"/>
           <p:cNvSpPr/>
           <p:nvPr/>
         </p:nvSpPr>
@@ -15284,7 +11468,7 @@
       </p:sp>
       <p:sp>
         <p:nvSpPr>
-          <p:cNvPr id="6" name="TextBox 5"/>
+          <p:cNvPr id="9" name="TextBox 8"/>
           <p:cNvSpPr txBox="1"/>
           <p:nvPr/>
         </p:nvSpPr>
@@ -15327,7 +11511,7 @@
       </p:sp>
       <p:sp>
         <p:nvSpPr>
-          <p:cNvPr id="7" name="TextBox 6"/>
+          <p:cNvPr id="10" name="TextBox 9"/>
           <p:cNvSpPr txBox="1"/>
           <p:nvPr/>
         </p:nvSpPr>
@@ -15431,7 +11615,7 @@
                 </a:solidFill>
                 <a:latin typeface="Roboto"/>
               </a:rPr>
-              <a:t>Section 1 · The virtual network</a:t>
+              <a:t>Section 1 · Rules between tiers</a:t>
             </a:r>
           </a:p>
         </p:txBody>
@@ -15604,7 +11788,7 @@
                 </a:solidFill>
                 <a:latin typeface="Roboto"/>
               </a:rPr>
-              <a:t>A VPC is your logically isolated network in one Region, sized by a CIDR block.</a:t>
+              <a:t>A security group protects one resource, is stateful, and denies by default.</a:t>
             </a:r>
           </a:p>
         </p:txBody>
@@ -15733,7 +11917,7 @@
                 </a:solidFill>
                 <a:latin typeface="Roboto"/>
               </a:rPr>
-              <a:t>Subnets split the VPC by tier and Availability Zone — public or private.</a:t>
+              <a:t>Naming another group as the source makes the rule follow the servers.</a:t>
             </a:r>
           </a:p>
         </p:txBody>
@@ -15862,7 +12046,7 @@
                 </a:solidFill>
                 <a:latin typeface="Roboto"/>
               </a:rPr>
-              <a:t>Route tables + IGW/NAT decide what reaches the internet — this design is egress-only.</a:t>
+              <a:t>Create the shells first; the chain cannot be written in one pass.</a:t>
             </a:r>
           </a:p>
         </p:txBody>
@@ -15875,54 +12059,8 @@
         </p:nvSpPr>
         <p:spPr>
           <a:xfrm>
-            <a:off x="640080" y="4818888"/>
-            <a:ext cx="10927080" cy="841248"/>
-          </a:xfrm>
-          <a:prstGeom prst="rect">
-            <a:avLst/>
-          </a:prstGeom>
-          <a:solidFill>
-            <a:srgbClr val="FFFFFF"/>
-          </a:solidFill>
-          <a:ln w="12700">
-            <a:solidFill>
-              <a:srgbClr val="CCCCCC"/>
-            </a:solidFill>
-          </a:ln>
-          <a:effectLst/>
-        </p:spPr>
-        <p:style>
-          <a:lnRef idx="1">
-            <a:schemeClr val="accent1"/>
-          </a:lnRef>
-          <a:fillRef idx="3">
-            <a:schemeClr val="accent1"/>
-          </a:fillRef>
-          <a:effectRef idx="2">
-            <a:schemeClr val="accent1"/>
-          </a:effectRef>
-          <a:fontRef idx="minor">
-            <a:schemeClr val="lt1"/>
-          </a:fontRef>
-        </p:style>
-        <p:txBody>
-          <a:bodyPr rtlCol="0" anchor="ctr"/>
-          <a:lstStyle/>
-          <a:p>
-            <a:pPr algn="ctr"/>
-          </a:p>
-        </p:txBody>
-      </p:sp>
-      <p:sp>
-        <p:nvSpPr>
-          <p:cNvPr id="14" name="Rectangle 13"/>
-          <p:cNvSpPr/>
-          <p:nvPr/>
-        </p:nvSpPr>
-        <p:spPr>
-          <a:xfrm>
-            <a:off x="640080" y="4818888"/>
-            <a:ext cx="109728" cy="841248"/>
+            <a:off x="0" y="6565392"/>
+            <a:ext cx="12191695" cy="38100"/>
           </a:xfrm>
           <a:prstGeom prst="rect">
             <a:avLst/>
@@ -15959,90 +12097,7 @@
       </p:sp>
       <p:sp>
         <p:nvSpPr>
-          <p:cNvPr id="15" name="TextBox 14"/>
-          <p:cNvSpPr txBox="1"/>
-          <p:nvPr/>
-        </p:nvSpPr>
-        <p:spPr>
-          <a:xfrm>
-            <a:off x="960120" y="4818888"/>
-            <a:ext cx="10424160" cy="841248"/>
-          </a:xfrm>
-          <a:prstGeom prst="rect">
-            <a:avLst/>
-          </a:prstGeom>
-          <a:noFill/>
-        </p:spPr>
-        <p:txBody>
-          <a:bodyPr wrap="square" anchor="ctr" lIns="0" rIns="0" tIns="0" bIns="0">
-            <a:spAutoFit/>
-          </a:bodyPr>
-          <a:lstStyle/>
-          <a:p>
-            <a:pPr>
-              <a:lnSpc>
-                <a:spcPct val="100000"/>
-              </a:lnSpc>
-            </a:pPr>
-            <a:r>
-              <a:rPr sz="1700" b="0" i="0">
-                <a:solidFill>
-                  <a:srgbClr val="2A2929"/>
-                </a:solidFill>
-                <a:latin typeface="Roboto"/>
-              </a:rPr>
-              <a:t>Build to the supplied topology; Region first (data residency).</a:t>
-            </a:r>
-          </a:p>
-        </p:txBody>
-      </p:sp>
-      <p:sp>
-        <p:nvSpPr>
-          <p:cNvPr id="16" name="Rectangle 15"/>
-          <p:cNvSpPr/>
-          <p:nvPr/>
-        </p:nvSpPr>
-        <p:spPr>
-          <a:xfrm>
-            <a:off x="0" y="6565392"/>
-            <a:ext cx="12191695" cy="38100"/>
-          </a:xfrm>
-          <a:prstGeom prst="rect">
-            <a:avLst/>
-          </a:prstGeom>
-          <a:solidFill>
-            <a:srgbClr val="92268F"/>
-          </a:solidFill>
-          <a:ln>
-            <a:noFill/>
-          </a:ln>
-          <a:effectLst/>
-        </p:spPr>
-        <p:style>
-          <a:lnRef idx="1">
-            <a:schemeClr val="accent1"/>
-          </a:lnRef>
-          <a:fillRef idx="3">
-            <a:schemeClr val="accent1"/>
-          </a:fillRef>
-          <a:effectRef idx="2">
-            <a:schemeClr val="accent1"/>
-          </a:effectRef>
-          <a:fontRef idx="minor">
-            <a:schemeClr val="lt1"/>
-          </a:fontRef>
-        </p:style>
-        <p:txBody>
-          <a:bodyPr rtlCol="0" anchor="ctr"/>
-          <a:lstStyle/>
-          <a:p>
-            <a:pPr algn="ctr"/>
-          </a:p>
-        </p:txBody>
-      </p:sp>
-      <p:sp>
-        <p:nvSpPr>
-          <p:cNvPr id="17" name="TextBox 16"/>
+          <p:cNvPr id="14" name="TextBox 13"/>
           <p:cNvSpPr txBox="1"/>
           <p:nvPr/>
         </p:nvSpPr>
@@ -16085,7 +12140,7 @@
       </p:sp>
       <p:sp>
         <p:nvSpPr>
-          <p:cNvPr id="18" name="TextBox 17"/>
+          <p:cNvPr id="15" name="TextBox 14"/>
           <p:cNvSpPr txBox="1"/>
           <p:nvPr/>
         </p:nvSpPr>
